--- a/PowerPoint/SWQSPowerpoint.pptx
+++ b/PowerPoint/SWQSPowerpoint.pptx
@@ -13,11 +13,12 @@
     <p:sldId id="261" r:id="rId7"/>
     <p:sldId id="262" r:id="rId8"/>
     <p:sldId id="263" r:id="rId9"/>
-    <p:sldId id="264" r:id="rId10"/>
-    <p:sldId id="265" r:id="rId11"/>
-    <p:sldId id="266" r:id="rId12"/>
-    <p:sldId id="267" r:id="rId13"/>
-    <p:sldId id="268" r:id="rId14"/>
+    <p:sldId id="269" r:id="rId10"/>
+    <p:sldId id="264" r:id="rId11"/>
+    <p:sldId id="265" r:id="rId12"/>
+    <p:sldId id="266" r:id="rId13"/>
+    <p:sldId id="267" r:id="rId14"/>
+    <p:sldId id="268" r:id="rId15"/>
   </p:sldIdLst>
   <p:sldSz cx="12192000" cy="6858000"/>
   <p:notesSz cx="6858000" cy="9144000"/>
@@ -123,12 +124,197 @@
 <p1510:revInfo xmlns:a="http://schemas.openxmlformats.org/drawingml/2006/main" xmlns:r="http://schemas.openxmlformats.org/officeDocument/2006/relationships" xmlns:p1510="http://schemas.microsoft.com/office/powerpoint/2015/10/main">
   <p1510:revLst>
     <p1510:client id="{99C1DE80-53CF-4A72-884A-7A8152EF750D}" v="3" dt="2026-08-11T02:48:55.040"/>
+    <p1510:client id="{DD54F4F6-CB6F-99C7-4943-F812185C5B62}" v="36" dt="2026-08-11T02:53:39.626"/>
   </p1510:revLst>
 </p1510:revInfo>
 </file>
 
 <file path=ppt/changesInfos/changesInfo1.xml><?xml version="1.0" encoding="utf-8"?>
 <pc:chgInfo xmlns:a="http://schemas.openxmlformats.org/drawingml/2006/main" xmlns:r="http://schemas.openxmlformats.org/officeDocument/2006/relationships" xmlns:ac="http://schemas.microsoft.com/office/drawing/2013/main/command" xmlns:pc="http://schemas.microsoft.com/office/powerpoint/2013/main/command">
+  <pc:docChgLst>
+    <pc:chgData name="Zef Ewart" userId="S::ewa0005@wantirnacollege.vic.edu.au::d55df615-e487-427e-b122-1eec8308b830" providerId="AD" clId="Web-{DD54F4F6-CB6F-99C7-4943-F812185C5B62}"/>
+    <pc:docChg chg="addSld modSld">
+      <pc:chgData name="Zef Ewart" userId="S::ewa0005@wantirnacollege.vic.edu.au::d55df615-e487-427e-b122-1eec8308b830" providerId="AD" clId="Web-{DD54F4F6-CB6F-99C7-4943-F812185C5B62}" dt="2026-08-11T02:53:39.626" v="35"/>
+      <pc:docMkLst>
+        <pc:docMk/>
+      </pc:docMkLst>
+      <pc:sldChg chg="addSp delSp modSp new">
+        <pc:chgData name="Zef Ewart" userId="S::ewa0005@wantirnacollege.vic.edu.au::d55df615-e487-427e-b122-1eec8308b830" providerId="AD" clId="Web-{DD54F4F6-CB6F-99C7-4943-F812185C5B62}" dt="2026-08-11T02:53:39.626" v="35"/>
+        <pc:sldMkLst>
+          <pc:docMk/>
+          <pc:sldMk cId="4147191571" sldId="269"/>
+        </pc:sldMkLst>
+        <pc:spChg chg="mod">
+          <ac:chgData name="Zef Ewart" userId="S::ewa0005@wantirnacollege.vic.edu.au::d55df615-e487-427e-b122-1eec8308b830" providerId="AD" clId="Web-{DD54F4F6-CB6F-99C7-4943-F812185C5B62}" dt="2026-08-11T02:52:31.719" v="10" actId="20577"/>
+          <ac:spMkLst>
+            <pc:docMk/>
+            <pc:sldMk cId="4147191571" sldId="269"/>
+            <ac:spMk id="2" creationId="{C51CC66A-35D8-5EA1-54BF-2D890D21BE12}"/>
+          </ac:spMkLst>
+        </pc:spChg>
+        <pc:spChg chg="del">
+          <ac:chgData name="Zef Ewart" userId="S::ewa0005@wantirnacollege.vic.edu.au::d55df615-e487-427e-b122-1eec8308b830" providerId="AD" clId="Web-{DD54F4F6-CB6F-99C7-4943-F812185C5B62}" dt="2026-08-11T02:52:36.625" v="11"/>
+          <ac:spMkLst>
+            <pc:docMk/>
+            <pc:sldMk cId="4147191571" sldId="269"/>
+            <ac:spMk id="3" creationId="{B6CF88D6-2783-E09C-7E6D-E36DE7DE1D14}"/>
+          </ac:spMkLst>
+        </pc:spChg>
+        <pc:picChg chg="add mod ord">
+          <ac:chgData name="Zef Ewart" userId="S::ewa0005@wantirnacollege.vic.edu.au::d55df615-e487-427e-b122-1eec8308b830" providerId="AD" clId="Web-{DD54F4F6-CB6F-99C7-4943-F812185C5B62}" dt="2026-08-11T02:52:36.625" v="11"/>
+          <ac:picMkLst>
+            <pc:docMk/>
+            <pc:sldMk cId="4147191571" sldId="269"/>
+            <ac:picMk id="4" creationId="{E5528123-F0F3-A2FE-2974-EC49315BA70C}"/>
+          </ac:picMkLst>
+        </pc:picChg>
+        <pc:inkChg chg="add del">
+          <ac:chgData name="Zef Ewart" userId="S::ewa0005@wantirnacollege.vic.edu.au::d55df615-e487-427e-b122-1eec8308b830" providerId="AD" clId="Web-{DD54F4F6-CB6F-99C7-4943-F812185C5B62}" dt="2026-08-11T02:52:53.610" v="13"/>
+          <ac:inkMkLst>
+            <pc:docMk/>
+            <pc:sldMk cId="4147191571" sldId="269"/>
+            <ac:inkMk id="5" creationId="{76FB5FCC-E466-60B7-704E-02911C47565E}"/>
+          </ac:inkMkLst>
+        </pc:inkChg>
+        <pc:inkChg chg="add del">
+          <ac:chgData name="Zef Ewart" userId="S::ewa0005@wantirnacollege.vic.edu.au::d55df615-e487-427e-b122-1eec8308b830" providerId="AD" clId="Web-{DD54F4F6-CB6F-99C7-4943-F812185C5B62}" dt="2026-08-11T02:52:57.875" v="15"/>
+          <ac:inkMkLst>
+            <pc:docMk/>
+            <pc:sldMk cId="4147191571" sldId="269"/>
+            <ac:inkMk id="6" creationId="{49ADFCBF-34F7-D1DF-D142-D259FDEE95C2}"/>
+          </ac:inkMkLst>
+        </pc:inkChg>
+        <pc:inkChg chg="add">
+          <ac:chgData name="Zef Ewart" userId="S::ewa0005@wantirnacollege.vic.edu.au::d55df615-e487-427e-b122-1eec8308b830" providerId="AD" clId="Web-{DD54F4F6-CB6F-99C7-4943-F812185C5B62}" dt="2026-08-11T02:53:00.547" v="16"/>
+          <ac:inkMkLst>
+            <pc:docMk/>
+            <pc:sldMk cId="4147191571" sldId="269"/>
+            <ac:inkMk id="7" creationId="{DD83214B-4B73-BB69-47D9-EBB9CEEC6318}"/>
+          </ac:inkMkLst>
+        </pc:inkChg>
+        <pc:inkChg chg="add">
+          <ac:chgData name="Zef Ewart" userId="S::ewa0005@wantirnacollege.vic.edu.au::d55df615-e487-427e-b122-1eec8308b830" providerId="AD" clId="Web-{DD54F4F6-CB6F-99C7-4943-F812185C5B62}" dt="2026-08-11T02:53:02.188" v="17"/>
+          <ac:inkMkLst>
+            <pc:docMk/>
+            <pc:sldMk cId="4147191571" sldId="269"/>
+            <ac:inkMk id="8" creationId="{17C31F12-4642-0EAE-AFA8-60450374609B}"/>
+          </ac:inkMkLst>
+        </pc:inkChg>
+        <pc:inkChg chg="add">
+          <ac:chgData name="Zef Ewart" userId="S::ewa0005@wantirnacollege.vic.edu.au::d55df615-e487-427e-b122-1eec8308b830" providerId="AD" clId="Web-{DD54F4F6-CB6F-99C7-4943-F812185C5B62}" dt="2026-08-11T02:53:02.938" v="18"/>
+          <ac:inkMkLst>
+            <pc:docMk/>
+            <pc:sldMk cId="4147191571" sldId="269"/>
+            <ac:inkMk id="9" creationId="{41E0F5C2-C844-DBF6-E2A5-65D22B8F2EED}"/>
+          </ac:inkMkLst>
+        </pc:inkChg>
+        <pc:inkChg chg="add">
+          <ac:chgData name="Zef Ewart" userId="S::ewa0005@wantirnacollege.vic.edu.au::d55df615-e487-427e-b122-1eec8308b830" providerId="AD" clId="Web-{DD54F4F6-CB6F-99C7-4943-F812185C5B62}" dt="2026-08-11T02:53:03.641" v="19"/>
+          <ac:inkMkLst>
+            <pc:docMk/>
+            <pc:sldMk cId="4147191571" sldId="269"/>
+            <ac:inkMk id="10" creationId="{A93EDBE8-AFA5-BF0E-BD4B-41CF51756760}"/>
+          </ac:inkMkLst>
+        </pc:inkChg>
+        <pc:inkChg chg="add">
+          <ac:chgData name="Zef Ewart" userId="S::ewa0005@wantirnacollege.vic.edu.au::d55df615-e487-427e-b122-1eec8308b830" providerId="AD" clId="Web-{DD54F4F6-CB6F-99C7-4943-F812185C5B62}" dt="2026-08-11T02:53:04.313" v="20"/>
+          <ac:inkMkLst>
+            <pc:docMk/>
+            <pc:sldMk cId="4147191571" sldId="269"/>
+            <ac:inkMk id="11" creationId="{67815F45-3C81-CDF9-F5C2-9F119495D6C8}"/>
+          </ac:inkMkLst>
+        </pc:inkChg>
+        <pc:inkChg chg="add del">
+          <ac:chgData name="Zef Ewart" userId="S::ewa0005@wantirnacollege.vic.edu.au::d55df615-e487-427e-b122-1eec8308b830" providerId="AD" clId="Web-{DD54F4F6-CB6F-99C7-4943-F812185C5B62}" dt="2026-08-11T02:53:09.329" v="24"/>
+          <ac:inkMkLst>
+            <pc:docMk/>
+            <pc:sldMk cId="4147191571" sldId="269"/>
+            <ac:inkMk id="12" creationId="{87807D8F-CCDB-E9F4-23E8-EE29614737E3}"/>
+          </ac:inkMkLst>
+        </pc:inkChg>
+        <pc:inkChg chg="add del">
+          <ac:chgData name="Zef Ewart" userId="S::ewa0005@wantirnacollege.vic.edu.au::d55df615-e487-427e-b122-1eec8308b830" providerId="AD" clId="Web-{DD54F4F6-CB6F-99C7-4943-F812185C5B62}" dt="2026-08-11T02:53:09.016" v="23"/>
+          <ac:inkMkLst>
+            <pc:docMk/>
+            <pc:sldMk cId="4147191571" sldId="269"/>
+            <ac:inkMk id="13" creationId="{50D10EEB-CABB-23E6-84EA-DB9F67120F74}"/>
+          </ac:inkMkLst>
+        </pc:inkChg>
+        <pc:inkChg chg="add">
+          <ac:chgData name="Zef Ewart" userId="S::ewa0005@wantirnacollege.vic.edu.au::d55df615-e487-427e-b122-1eec8308b830" providerId="AD" clId="Web-{DD54F4F6-CB6F-99C7-4943-F812185C5B62}" dt="2026-08-11T02:53:11.954" v="25"/>
+          <ac:inkMkLst>
+            <pc:docMk/>
+            <pc:sldMk cId="4147191571" sldId="269"/>
+            <ac:inkMk id="14" creationId="{6372F040-46A4-8E92-5915-180878C6314D}"/>
+          </ac:inkMkLst>
+        </pc:inkChg>
+        <pc:inkChg chg="add del">
+          <ac:chgData name="Zef Ewart" userId="S::ewa0005@wantirnacollege.vic.edu.au::d55df615-e487-427e-b122-1eec8308b830" providerId="AD" clId="Web-{DD54F4F6-CB6F-99C7-4943-F812185C5B62}" dt="2026-08-11T02:53:16.282" v="27"/>
+          <ac:inkMkLst>
+            <pc:docMk/>
+            <pc:sldMk cId="4147191571" sldId="269"/>
+            <ac:inkMk id="15" creationId="{9037BBAC-D3A3-5952-A22A-2691DFDD15F5}"/>
+          </ac:inkMkLst>
+        </pc:inkChg>
+        <pc:inkChg chg="add">
+          <ac:chgData name="Zef Ewart" userId="S::ewa0005@wantirnacollege.vic.edu.au::d55df615-e487-427e-b122-1eec8308b830" providerId="AD" clId="Web-{DD54F4F6-CB6F-99C7-4943-F812185C5B62}" dt="2026-08-11T02:53:18.735" v="28"/>
+          <ac:inkMkLst>
+            <pc:docMk/>
+            <pc:sldMk cId="4147191571" sldId="269"/>
+            <ac:inkMk id="16" creationId="{F3AEAA8B-E5C7-AA52-85A6-1DC79E95D83B}"/>
+          </ac:inkMkLst>
+        </pc:inkChg>
+        <pc:inkChg chg="add">
+          <ac:chgData name="Zef Ewart" userId="S::ewa0005@wantirnacollege.vic.edu.au::d55df615-e487-427e-b122-1eec8308b830" providerId="AD" clId="Web-{DD54F4F6-CB6F-99C7-4943-F812185C5B62}" dt="2026-08-11T02:53:20.814" v="29"/>
+          <ac:inkMkLst>
+            <pc:docMk/>
+            <pc:sldMk cId="4147191571" sldId="269"/>
+            <ac:inkMk id="17" creationId="{2C8F9C6B-8C15-5B4B-B82E-54982F902D27}"/>
+          </ac:inkMkLst>
+        </pc:inkChg>
+        <pc:inkChg chg="add">
+          <ac:chgData name="Zef Ewart" userId="S::ewa0005@wantirnacollege.vic.edu.au::d55df615-e487-427e-b122-1eec8308b830" providerId="AD" clId="Web-{DD54F4F6-CB6F-99C7-4943-F812185C5B62}" dt="2026-08-11T02:53:22.048" v="30"/>
+          <ac:inkMkLst>
+            <pc:docMk/>
+            <pc:sldMk cId="4147191571" sldId="269"/>
+            <ac:inkMk id="18" creationId="{90D55D5B-14F6-CAB4-5603-C0F69D161840}"/>
+          </ac:inkMkLst>
+        </pc:inkChg>
+        <pc:inkChg chg="add del">
+          <ac:chgData name="Zef Ewart" userId="S::ewa0005@wantirnacollege.vic.edu.au::d55df615-e487-427e-b122-1eec8308b830" providerId="AD" clId="Web-{DD54F4F6-CB6F-99C7-4943-F812185C5B62}" dt="2026-08-11T02:53:26.220" v="32"/>
+          <ac:inkMkLst>
+            <pc:docMk/>
+            <pc:sldMk cId="4147191571" sldId="269"/>
+            <ac:inkMk id="19" creationId="{57DD97A8-CDE6-15EF-931F-47ADF691ED6C}"/>
+          </ac:inkMkLst>
+        </pc:inkChg>
+        <pc:inkChg chg="add">
+          <ac:chgData name="Zef Ewart" userId="S::ewa0005@wantirnacollege.vic.edu.au::d55df615-e487-427e-b122-1eec8308b830" providerId="AD" clId="Web-{DD54F4F6-CB6F-99C7-4943-F812185C5B62}" dt="2026-08-11T02:53:28.423" v="33"/>
+          <ac:inkMkLst>
+            <pc:docMk/>
+            <pc:sldMk cId="4147191571" sldId="269"/>
+            <ac:inkMk id="20" creationId="{552FA346-3960-7D25-3979-3AA84BDD9F1E}"/>
+          </ac:inkMkLst>
+        </pc:inkChg>
+        <pc:inkChg chg="add">
+          <ac:chgData name="Zef Ewart" userId="S::ewa0005@wantirnacollege.vic.edu.au::d55df615-e487-427e-b122-1eec8308b830" providerId="AD" clId="Web-{DD54F4F6-CB6F-99C7-4943-F812185C5B62}" dt="2026-08-11T02:53:38.048" v="34"/>
+          <ac:inkMkLst>
+            <pc:docMk/>
+            <pc:sldMk cId="4147191571" sldId="269"/>
+            <ac:inkMk id="21" creationId="{B2C0A138-752B-7DC8-1547-03BFD5733C2D}"/>
+          </ac:inkMkLst>
+        </pc:inkChg>
+        <pc:inkChg chg="add">
+          <ac:chgData name="Zef Ewart" userId="S::ewa0005@wantirnacollege.vic.edu.au::d55df615-e487-427e-b122-1eec8308b830" providerId="AD" clId="Web-{DD54F4F6-CB6F-99C7-4943-F812185C5B62}" dt="2026-08-11T02:53:39.626" v="35"/>
+          <ac:inkMkLst>
+            <pc:docMk/>
+            <pc:sldMk cId="4147191571" sldId="269"/>
+            <ac:inkMk id="22" creationId="{E611C550-EA3F-9BAD-F9E5-873007153A83}"/>
+          </ac:inkMkLst>
+        </pc:inkChg>
+      </pc:sldChg>
+    </pc:docChg>
+  </pc:docChgLst>
   <pc:docChgLst>
     <pc:chgData name="Oscar Glaister" userId="e6f16566-ea0c-4df4-8ebb-5765e438d351" providerId="ADAL" clId="{252C8254-46BD-4598-B285-E6EC582ADBF0}"/>
     <pc:docChg chg="addSld modSld">
@@ -387,6 +573,316 @@
     </inkml:brush>
   </inkml:definitions>
   <inkml:trace contextRef="#ctx0" brushRef="#br0">24812 6985 4127 0 0,'-9'4'11328'0'0,"-7"2"-11136"0"0,-2 5-64 0 0,-1 4 0 0 0,6 0-64 0 0,11-3-64 0 0,9-3 32 0 0,13 1-32 0 0,8-1-32 0 0,7-2-192 0 0,3-2-192 0 0,4-2-288 0 0,-1-2-320 0 0,-2 4-544 0 0,-5 1-1216 0 0,-2 0 2784 0 0,-3 2 0 0 0,-6 1 0 0 0</inkml:trace>
+</inkml:ink>
+</file>
+
+<file path=ppt/ink/ink100.xml><?xml version="1.0" encoding="utf-8"?>
+<inkml:ink xmlns:inkml="http://www.w3.org/2003/InkML">
+  <inkml:definitions>
+    <inkml:context xml:id="ctx0">
+      <inkml:inkSource xml:id="inkSrc0">
+        <inkml:traceFormat>
+          <inkml:channel name="X" type="integer" min="-2.14748E9" max="2.14748E9" units="cm"/>
+          <inkml:channel name="Y" type="integer" min="-2.14748E9" max="2.14748E9" units="cm"/>
+          <inkml:channel name="F" type="integer" max="32767" units="dev"/>
+          <inkml:channel name="OA" type="integer" max="360" units="deg"/>
+          <inkml:channel name="OE" type="integer" max="90" units="deg"/>
+        </inkml:traceFormat>
+        <inkml:channelProperties>
+          <inkml:channelProperty channel="X" name="resolution" value="1000" units="1/cm"/>
+          <inkml:channelProperty channel="Y" name="resolution" value="1000" units="1/cm"/>
+          <inkml:channelProperty channel="F" name="resolution" value="0" units="1/dev"/>
+          <inkml:channelProperty channel="OA" name="resolution" value="1000" units="1/deg"/>
+          <inkml:channelProperty channel="OE" name="resolution" value="1000" units="1/deg"/>
+        </inkml:channelProperties>
+      </inkml:inkSource>
+      <inkml:timestamp xml:id="ts0" timeString="2026-08-11T02:53:51.274"/>
+    </inkml:context>
+    <inkml:brush xml:id="br0">
+      <inkml:brushProperty name="width" value="0.1" units="cm"/>
+      <inkml:brushProperty name="height" value="0.1" units="cm"/>
+    </inkml:brush>
+  </inkml:definitions>
+  <inkml:trace contextRef="#ctx0" brushRef="#br0">5322 17254 2783 0 0,'-14'4'4160'0'0,"-9"2"-4128"0"0,-5 0-32 0 0,-2 3 32 0 0,-1 1 0 0 0,0-3 32 0 0,6-5 192 0 0,2-5 128 0 0,1 0 416 0 0,4-6-288 0 0,5-4-128 0 0,5-6-320 0 0,3-4 0 0 0,3-2-64 0 0,7-2 32 0 0,1 0 0 0 0,6-1 0 0 0,4 0 64 0 0,4 5 32 0 0,4 6 64 0 0,2 7 192 0 0,1-1-128 0 0,1 7 320 0 0,-1 4-64 0 0,-3 6-320 0 0,-8 8 0 0 0,0 0-96 0 0,-4 3 0 0 0,-4 3-64 0 0,-3 2 0 0 0,-2 3-32 0 0,-2 1 0 0 0,-6-3 0 0 0,-2-2-64 0 0,-4 0-256 0 0,-5-3-2240 0 0,-4-4 2560 0 0,-3-6 0 0 0,2-3 0 0 0</inkml:trace>
+</inkml:ink>
+</file>
+
+<file path=ppt/ink/ink101.xml><?xml version="1.0" encoding="utf-8"?>
+<inkml:ink xmlns:inkml="http://www.w3.org/2003/InkML">
+  <inkml:definitions>
+    <inkml:context xml:id="ctx0">
+      <inkml:inkSource xml:id="inkSrc0">
+        <inkml:traceFormat>
+          <inkml:channel name="X" type="integer" min="-2.14748E9" max="2.14748E9" units="cm"/>
+          <inkml:channel name="Y" type="integer" min="-2.14748E9" max="2.14748E9" units="cm"/>
+          <inkml:channel name="F" type="integer" max="32767" units="dev"/>
+          <inkml:channel name="OA" type="integer" max="360" units="deg"/>
+          <inkml:channel name="OE" type="integer" max="90" units="deg"/>
+        </inkml:traceFormat>
+        <inkml:channelProperties>
+          <inkml:channelProperty channel="X" name="resolution" value="1000" units="1/cm"/>
+          <inkml:channelProperty channel="Y" name="resolution" value="1000" units="1/cm"/>
+          <inkml:channelProperty channel="F" name="resolution" value="0" units="1/dev"/>
+          <inkml:channelProperty channel="OA" name="resolution" value="1000" units="1/deg"/>
+          <inkml:channelProperty channel="OE" name="resolution" value="1000" units="1/deg"/>
+        </inkml:channelProperties>
+      </inkml:inkSource>
+      <inkml:timestamp xml:id="ts0" timeString="2026-08-11T02:53:51.275"/>
+    </inkml:context>
+    <inkml:brush xml:id="br0">
+      <inkml:brushProperty name="width" value="0.1" units="cm"/>
+      <inkml:brushProperty name="height" value="0.1" units="cm"/>
+    </inkml:brush>
+  </inkml:definitions>
+  <inkml:trace contextRef="#ctx0" brushRef="#br0">3943 17206 3935 0 0,'-5'-14'5536'0'0,"-1"-8"-5472"0"0,1-6-32 0 0,-5-7 0 0 0,1-2-32 0 0,1 1 32 0 0,2 1 128 0 0,3-2 64 0 0,1 1 64 0 0,1-2-32 0 0,1-1-32 0 0,0-1-32 0 0,0 1-64 0 0,1 2-32 0 0,-1 4-32 0 0,5 2-32 0 0,1 2-32 0 0,0 1 32 0 0,3 2-32 0 0,5 4-32 0 0,4 11 64 0 0,5 7 0 0 0,1 9 128 0 0,3 8 96 0 0,0 7 32 0 0,1 4 0 0 0,-1 7 0 0 0,1 8 32 0 0,-1 1-64 0 0,1 3-64 0 0,-1 0-32 0 0,-5-5-96 0 0,-1-2 0 0 0,-5-4-32 0 0,0-8-32 0 0,-3-2-192 0 0,-8-10-2912 0 0,-5-12 3104 0 0,-7-14 0 0 0,-2-6 0 0 0</inkml:trace>
+</inkml:ink>
+</file>
+
+<file path=ppt/ink/ink102.xml><?xml version="1.0" encoding="utf-8"?>
+<inkml:ink xmlns:inkml="http://www.w3.org/2003/InkML">
+  <inkml:definitions>
+    <inkml:context xml:id="ctx0">
+      <inkml:inkSource xml:id="inkSrc0">
+        <inkml:traceFormat>
+          <inkml:channel name="X" type="integer" min="-2.14748E9" max="2.14748E9" units="cm"/>
+          <inkml:channel name="Y" type="integer" min="-2.14748E9" max="2.14748E9" units="cm"/>
+          <inkml:channel name="F" type="integer" max="32767" units="dev"/>
+          <inkml:channel name="OA" type="integer" max="360" units="deg"/>
+          <inkml:channel name="OE" type="integer" max="90" units="deg"/>
+        </inkml:traceFormat>
+        <inkml:channelProperties>
+          <inkml:channelProperty channel="X" name="resolution" value="1000" units="1/cm"/>
+          <inkml:channelProperty channel="Y" name="resolution" value="1000" units="1/cm"/>
+          <inkml:channelProperty channel="F" name="resolution" value="0" units="1/dev"/>
+          <inkml:channelProperty channel="OA" name="resolution" value="1000" units="1/deg"/>
+          <inkml:channelProperty channel="OE" name="resolution" value="1000" units="1/deg"/>
+        </inkml:channelProperties>
+      </inkml:inkSource>
+      <inkml:timestamp xml:id="ts0" timeString="2026-08-11T02:53:51.276"/>
+    </inkml:context>
+    <inkml:brush xml:id="br0">
+      <inkml:brushProperty name="width" value="0.1" units="cm"/>
+      <inkml:brushProperty name="height" value="0.1" units="cm"/>
+    </inkml:brush>
+  </inkml:definitions>
+  <inkml:trace contextRef="#ctx0" brushRef="#br0">4815 16886 5535 0 0,'0'-14'6048'0'0,"0"-9"-6176"0"0,5-5 0 0 0,1-2 64 0 0,0-1 0 0 0,3 1 64 0 0,0 0 0 0 0,4 1 0 0 0,-1 1 32 0 0,-3-4 0 0 0,2-1-32 0 0,0 1 32 0 0,-3 0-32 0 0,2 2 0 0 0,4 11 0 0 0,4 8 32 0 0,3 10 32 0 0,4 11 64 0 0,1 12 32 0 0,1 11 128 0 0,0 6 64 0 0,1 4 64 0 0,-1 0 32 0 0,-4 1 0 0 0,-2 8-32 0 0,1-1-96 0 0,-5-1-128 0 0,1-3-64 0 0,-4-5-64 0 0,-8-11-1792 0 0,-15-14 1728 0 0,-5-10 0 0 0</inkml:trace>
+</inkml:ink>
+</file>
+
+<file path=ppt/ink/ink103.xml><?xml version="1.0" encoding="utf-8"?>
+<inkml:ink xmlns:inkml="http://www.w3.org/2003/InkML">
+  <inkml:definitions>
+    <inkml:context xml:id="ctx0">
+      <inkml:inkSource xml:id="inkSrc0">
+        <inkml:traceFormat>
+          <inkml:channel name="X" type="integer" min="-2.14748E9" max="2.14748E9" units="cm"/>
+          <inkml:channel name="Y" type="integer" min="-2.14748E9" max="2.14748E9" units="cm"/>
+          <inkml:channel name="F" type="integer" max="32767" units="dev"/>
+          <inkml:channel name="OA" type="integer" max="360" units="deg"/>
+          <inkml:channel name="OE" type="integer" max="90" units="deg"/>
+        </inkml:traceFormat>
+        <inkml:channelProperties>
+          <inkml:channelProperty channel="X" name="resolution" value="1000" units="1/cm"/>
+          <inkml:channelProperty channel="Y" name="resolution" value="1000" units="1/cm"/>
+          <inkml:channelProperty channel="F" name="resolution" value="0" units="1/dev"/>
+          <inkml:channelProperty channel="OA" name="resolution" value="1000" units="1/deg"/>
+          <inkml:channelProperty channel="OE" name="resolution" value="1000" units="1/deg"/>
+        </inkml:channelProperties>
+      </inkml:inkSource>
+      <inkml:timestamp xml:id="ts0" timeString="2026-08-11T02:53:51.277"/>
+    </inkml:context>
+    <inkml:brush xml:id="br0">
+      <inkml:brushProperty name="width" value="0.1" units="cm"/>
+      <inkml:brushProperty name="height" value="0.1" units="cm"/>
+    </inkml:brush>
+  </inkml:definitions>
+  <inkml:trace contextRef="#ctx0" brushRef="#br0">5665 18735 1663 0 0,'-5'9'5632'0'0,"-1"8"-5376"0"0,-4 5-64 0 0,-5-1-32 0 0,-1 1-32 0 0,-1 0-32 0 0,-7 2 0 0 0,-4 2-64 0 0,-2-1 32 0 0,0 2-64 0 0,0 0 32 0 0,0 0 0 0 0,-2 4-32 0 0,-2 2 32 0 0,-4 0 32 0 0,1-1 0 0 0,-4-2 64 0 0,2-6 32 0 0,-3-2-64 0 0,-2 0 32 0 0,-4 0 64 0 0,-2-4 32 0 0,3 1 0 0 0,0-4-64 0 0,3-4 0 0 0,5 0 0 0 0,5-1 0 0 0,3-3 32 0 0,7-6 32 0 0,3-5 256 0 0,1 0-128 0 0,3-5-256 0 0,0-1 0 0 0,-1-2 0 0 0,-2-1-96 0 0,-3-1 32 0 0,-2 1-32 0 0,0 2 32 0 0,-2 0-32 0 0,0 1 0 0 0,0-3 32 0 0,-5-3-32 0 0,-6-3 0 0 0,-1-4 32 0 0,2-2-32 0 0,-3 3 0 0 0,2 1 32 0 0,-2 0 0 0 0,-4-2 0 0 0,2-1 0 0 0,3-1 32 0 0,-1-1 32 0 0,2-1 32 0 0,-2 0-64 0 0,1 5 0 0 0,4 1 0 0 0,6-1-32 0 0,5 5 0 0 0,5-1-32 0 0,3 4 32 0 0,-2 3-32 0 0,3 0 32 0 0,-1-3-32 0 0,-2-4 0 0 0,-2-3 32 0 0,-3 1-32 0 0,3 1 0 0 0,0-2 0 0 0,-1-2 0 0 0,-2 3 32 0 0,4 1-32 0 0,-1-1 0 0 0,0 2 0 0 0,3 0 0 0 0,-1-1 32 0 0,-1-2-32 0 0,2-3 0 0 0,0 4 0 0 0,2 0 32 0 0,0 4-32 0 0,2-1 0 0 0,-1 4 0 0 0,1-2 0 0 0,4-1 32 0 0,-2 0-32 0 0,1 0 32 0 0,3-3-32 0 0,-3 2 0 0 0,1 0 0 0 0,2-3 0 0 0,1-1 0 0 0,3-3 0 0 0,2-6 0 0 0,0-6 32 0 0,1-3-32 0 0,0 1 0 0 0,1 3 0 0 0,-1 3 32 0 0,0 1-32 0 0,1-2 0 0 0,3 0 0 0 0,2 0 0 0 0,0-2 0 0 0,-1-1 0 0 0,-2 2 0 0 0,-1 2 32 0 0,4-3-32 0 0,0-4 0 0 0,5-5 0 0 0,-1-4 0 0 0,-1 1 0 0 0,2 5 0 0 0,-1 0 0 0 0,3-2 32 0 0,-1-3-32 0 0,2-2 0 0 0,-2 3 0 0 0,-2 4 0 0 0,1 5 0 0 0,4 0 0 0 0,3-4 0 0 0,4-3 32 0 0,2-3-32 0 0,-3 1 0 0 0,0 4 0 0 0,1 5 0 0 0,1 0 0 0 0,-4 1 0 0 0,5-3 0 0 0,2 2 32 0 0,2 2-32 0 0,5 2 0 0 0,1 3 32 0 0,5 1 0 0 0,-1 2 0 0 0,3 5 0 0 0,13 1-32 0 0,1 1 32 0 0,-4 3 0 0 0,-1 4 0 0 0,4 5 0 0 0,2 4 0 0 0,1 2 0 0 0,0 1 32 0 0,-1-3-32 0 0,-1-1 0 0 0,0-4-32 0 0,-1-1 32 0 0,-1 1-32 0 0,1-2 0 0 0,9 1 32 0 0,2 2-32 0 0,-4 7 0 0 0,-5 3 0 0 0,8 7 0 0 0,1 5 0 0 0,3 6 0 0 0,0 3 0 0 0,-7 3 0 0 0,3 6 0 0 0,-3-2 0 0 0,-9-3 0 0 0,6 9 0 0 0,2 2-32 0 0,-5 0 32 0 0,-7-2 0 0 0,2 1 0 0 0,-3 9-32 0 0,-5 5 32 0 0,-5 8 0 0 0,-4-2 0 0 0,-4 8-32 0 0,-1 11 32 0 0,-6 6-32 0 0,-2 8 32 0 0,-5 2-32 0 0,-4-1 32 0 0,-10 2-32 0 0,-3 3 32 0 0,-8 0 0 0 0,-5-3-32 0 0,-6-4 32 0 0,-7-4 0 0 0,-5-6 0 0 0,-4-4 0 0 0,-2 0 0 0 0,-3-4 0 0 0,-3-1-32 0 0,-3-3-160 0 0,-3 1-672 0 0,3 3-800 0 0,0-2-1856 0 0,0 1 3520 0 0,-2-3 0 0 0,9-11 0 0 0</inkml:trace>
+</inkml:ink>
+</file>
+
+<file path=ppt/ink/ink104.xml><?xml version="1.0" encoding="utf-8"?>
+<inkml:ink xmlns:inkml="http://www.w3.org/2003/InkML">
+  <inkml:definitions>
+    <inkml:context xml:id="ctx0">
+      <inkml:inkSource xml:id="inkSrc0">
+        <inkml:traceFormat>
+          <inkml:channel name="X" type="integer" min="-2.14748E9" max="2.14748E9" units="cm"/>
+          <inkml:channel name="Y" type="integer" min="-2.14748E9" max="2.14748E9" units="cm"/>
+          <inkml:channel name="F" type="integer" max="32767" units="dev"/>
+          <inkml:channel name="OA" type="integer" max="360" units="deg"/>
+          <inkml:channel name="OE" type="integer" max="90" units="deg"/>
+        </inkml:traceFormat>
+        <inkml:channelProperties>
+          <inkml:channelProperty channel="X" name="resolution" value="1000" units="1/cm"/>
+          <inkml:channelProperty channel="Y" name="resolution" value="1000" units="1/cm"/>
+          <inkml:channelProperty channel="F" name="resolution" value="0" units="1/dev"/>
+          <inkml:channelProperty channel="OA" name="resolution" value="1000" units="1/deg"/>
+          <inkml:channelProperty channel="OE" name="resolution" value="1000" units="1/deg"/>
+        </inkml:channelProperties>
+      </inkml:inkSource>
+      <inkml:timestamp xml:id="ts0" timeString="2026-08-11T02:53:51.278"/>
+    </inkml:context>
+    <inkml:brush xml:id="br0">
+      <inkml:brushProperty name="width" value="0.1" units="cm"/>
+      <inkml:brushProperty name="height" value="0.1" units="cm"/>
+    </inkml:brush>
+  </inkml:definitions>
+  <inkml:trace contextRef="#ctx0" brushRef="#br0">5477 18791 1055 0 0,'9'-5'2560'0'0,"8"-1"-1824"0"0,0-4-288 0 0,3-1-32 0 0,-3-3-64 0 0,1-3 128 0 0,-3-4-320 0 0,-4-2-64 0 0,1 2 0 0 0,-2 0-64 0 0,2 0 32 0 0,-1-2-32 0 0,2 3-32 0 0,4 6 32 0 0,-2-1-32 0 0,2 4 32 0 0,-2-2-32 0 0,0 1 64 0 0,3 4 320 0 0,-1-3-32 0 0,0 2 0 0 0,2 2 672 0 0,-2-3-384 0 0,0 1-320 0 0,2 1-160 0 0,3 3-96 0 0,2 2-32 0 0,1 1 0 0 0,1 2 128 0 0,-4-5-64 0 0,-1-1 32 0 0,1 1 64 0 0,0 1 0 0 0,2 1-64 0 0,-4-4-64 0 0,0 0-32 0 0,1 1 32 0 0,1 2 0 0 0,2 0 0 0 0,1 3-32 0 0,1-5 0 0 0,0 0 0 0 0,1 0-32 0 0,0 2 0 0 0,0 1 0 0 0,-4 6 0 0 0,-2 2 0 0 0,0 0 0 0 0,1 0 0 0 0,-3 3 0 0 0,0 0 0 0 0,1 0 0 0 0,1 1 0 0 0,3 1 0 0 0,1 2 0 0 0,1 0 0 0 0,0 2 0 0 0,1-2-32 0 0,0-2-128 0 0,5 1-416 0 0,1 0-736 0 0,0-4-2496 0 0,-1-1 3808 0 0,-7-3 0 0 0</inkml:trace>
+</inkml:ink>
+</file>
+
+<file path=ppt/ink/ink105.xml><?xml version="1.0" encoding="utf-8"?>
+<inkml:ink xmlns:inkml="http://www.w3.org/2003/InkML">
+  <inkml:definitions>
+    <inkml:context xml:id="ctx0">
+      <inkml:inkSource xml:id="inkSrc0">
+        <inkml:traceFormat>
+          <inkml:channel name="X" type="integer" min="-2.14748E9" max="2.14748E9" units="cm"/>
+          <inkml:channel name="Y" type="integer" min="-2.14748E9" max="2.14748E9" units="cm"/>
+          <inkml:channel name="F" type="integer" max="32767" units="dev"/>
+          <inkml:channel name="OA" type="integer" max="360" units="deg"/>
+          <inkml:channel name="OE" type="integer" max="90" units="deg"/>
+        </inkml:traceFormat>
+        <inkml:channelProperties>
+          <inkml:channelProperty channel="X" name="resolution" value="1000" units="1/cm"/>
+          <inkml:channelProperty channel="Y" name="resolution" value="1000" units="1/cm"/>
+          <inkml:channelProperty channel="F" name="resolution" value="0" units="1/dev"/>
+          <inkml:channelProperty channel="OA" name="resolution" value="1000" units="1/deg"/>
+          <inkml:channelProperty channel="OE" name="resolution" value="1000" units="1/deg"/>
+        </inkml:channelProperties>
+      </inkml:inkSource>
+      <inkml:timestamp xml:id="ts0" timeString="2026-08-11T02:53:51.279"/>
+    </inkml:context>
+    <inkml:brush xml:id="br0">
+      <inkml:brushProperty name="width" value="0.1" units="cm"/>
+      <inkml:brushProperty name="height" value="0.1" units="cm"/>
+    </inkml:brush>
+  </inkml:definitions>
+  <inkml:trace contextRef="#ctx0" brushRef="#br0">6773 18480 1791 0 0,'0'-9'5856'0'0,"0"-8"-5504"0"0,5 0-128 0 0,1-3-192 0 0,4 3 0 0 0,6-1-32 0 0,3 3 32 0 0,0-1 0 0 0,0 3-32 0 0,2 3 64 0 0,-2-1 0 0 0,-1 2 0 0 0,2-3 96 0 0,2 1-96 0 0,1-3 0 0 0,2 2-32 0 0,1 3 0 0 0,1-3 0 0 0,0 2-32 0 0,0-2 0 0 0,0 1 32 0 0,0 2-32 0 0,0-2 0 0 0,5 1 96 0 0,1-2 64 0 0,-1 0 0 0 0,0 3 0 0 0,-2 3-32 0 0,-1-2 0 0 0,3-1-32 0 0,2 3-32 0 0,3-3 32 0 0,0 0-64 0 0,-1 2 0 0 0,-8-3-32 0 0,-3 0 32 0 0,-1 3-32 0 0,-1-3 32 0 0,0 0 0 0 0,2-2 0 0 0,0 1 0 0 0,1-3-32 0 0,0 2 32 0 0,1-3-32 0 0,0 3 32 0 0,0 2-32 0 0,0 3 0 0 0,0 3 0 0 0,0 2 32 0 0,-5-3-32 0 0,-1-1 32 0 0,0 1 0 0 0,1-4 0 0 0,1 0 0 0 0,2 2 32 0 0,1-3-32 0 0,0 0 0 0 0,1-2 0 0 0,0 0-32 0 0,0 3 32 0 0,0 3-32 0 0,0-3 0 0 0,0 1 32 0 0,0 1-32 0 0,0-2 0 0 0,0-4 32 0 0,-1-1-32 0 0,-3-1 0 0 0,-3 1 0 0 0,-3-2 0 0 0,-1 3 0 0 0,-3-2 0 0 0,1 2 0 0 0,-2-1 32 0 0,2 1-32 0 0,-2-1 0 0 0,1 1 0 0 0,4-1 0 0 0,3 2 0 0 0,3 2 0 0 0,2 3 32 0 0,1 4-32 0 0,1 1 0 0 0,-4-3 0 0 0,-1-1 32 0 0,-1 0 0 0 0,2 2 64 0 0,0 2 64 0 0,2 0 0 0 0,-3-3-128 0 0,-2-2 32 0 0,1 2-32 0 0,1-4-32 0 0,-3-5 0 0 0,-9 0 0 0 0,-2 7 0 0 0,-2 10 0 0 0,-2 8 0 0 0,2 2 0 0 0,1 5 0 0 0,3-3 0 0 0,1 3 0 0 0,-3 1 0 0 0,3-2 0 0 0,-1 1 0 0 0,-6 2-32 0 0,-9-3 0 0 0,-8-4 32 0 0,-6 0 0 0 0,-5-2 0 0 0,2 2 0 0 0,0-1-32 0 0,0-4-32 0 0,-2-2-1120 0 0,-1-2-2816 0 0,-1-2 4000 0 0,5-2 0 0 0</inkml:trace>
+</inkml:ink>
+</file>
+
+<file path=ppt/ink/ink106.xml><?xml version="1.0" encoding="utf-8"?>
+<inkml:ink xmlns:inkml="http://www.w3.org/2003/InkML">
+  <inkml:definitions>
+    <inkml:context xml:id="ctx0">
+      <inkml:inkSource xml:id="inkSrc0">
+        <inkml:traceFormat>
+          <inkml:channel name="X" type="integer" min="-2.14748E9" max="2.14748E9" units="cm"/>
+          <inkml:channel name="Y" type="integer" min="-2.14748E9" max="2.14748E9" units="cm"/>
+          <inkml:channel name="F" type="integer" max="32767" units="dev"/>
+          <inkml:channel name="OA" type="integer" max="360" units="deg"/>
+          <inkml:channel name="OE" type="integer" max="90" units="deg"/>
+        </inkml:traceFormat>
+        <inkml:channelProperties>
+          <inkml:channelProperty channel="X" name="resolution" value="1000" units="1/cm"/>
+          <inkml:channelProperty channel="Y" name="resolution" value="1000" units="1/cm"/>
+          <inkml:channelProperty channel="F" name="resolution" value="0" units="1/dev"/>
+          <inkml:channelProperty channel="OA" name="resolution" value="1000" units="1/deg"/>
+          <inkml:channelProperty channel="OE" name="resolution" value="1000" units="1/deg"/>
+        </inkml:channelProperties>
+      </inkml:inkSource>
+      <inkml:timestamp xml:id="ts0" timeString="2026-08-11T02:53:51.280"/>
+    </inkml:context>
+    <inkml:brush xml:id="br0">
+      <inkml:brushProperty name="width" value="0.1" units="cm"/>
+      <inkml:brushProperty name="height" value="0.1" units="cm"/>
+    </inkml:brush>
+  </inkml:definitions>
+  <inkml:trace contextRef="#ctx0" brushRef="#br0">8762 17806 1599 0 0,'9'10'5024'0'0,"4"6"-4992"0"0,-2 6 128 0 0,-2 4 192 0 0,-2 2 64 0 0,-3 0-224 0 0,-2 1 32 0 0,-1-1 0 0 0,-1 0-64 0 0,0 0 128 0 0,-1-10-96 0 0,-4-12-160 0 0,-1-12 0 0 0,-5-5 256 0 0,-4 0 64 0 0,-5 1-224 0 0,-3 3-64 0 0,-3 2-64 0 0,0 7 0 0 0,-2 2 32 0 0,0 2-32 0 0,1 3 0 0 0,-1-3-32 0 0,1-4 0 0 0,0-2-64 0 0,0 0-512 0 0,0-1-800 0 0,0 0 1408 0 0,0 4 0 0 0,5 3 0 0 0</inkml:trace>
+</inkml:ink>
+</file>
+
+<file path=ppt/ink/ink107.xml><?xml version="1.0" encoding="utf-8"?>
+<inkml:ink xmlns:inkml="http://www.w3.org/2003/InkML">
+  <inkml:definitions>
+    <inkml:context xml:id="ctx0">
+      <inkml:inkSource xml:id="inkSrc0">
+        <inkml:traceFormat>
+          <inkml:channel name="X" type="integer" min="-2.14748E9" max="2.14748E9" units="cm"/>
+          <inkml:channel name="Y" type="integer" min="-2.14748E9" max="2.14748E9" units="cm"/>
+          <inkml:channel name="F" type="integer" max="32767" units="dev"/>
+          <inkml:channel name="OA" type="integer" max="360" units="deg"/>
+          <inkml:channel name="OE" type="integer" max="90" units="deg"/>
+        </inkml:traceFormat>
+        <inkml:channelProperties>
+          <inkml:channelProperty channel="X" name="resolution" value="1000" units="1/cm"/>
+          <inkml:channelProperty channel="Y" name="resolution" value="1000" units="1/cm"/>
+          <inkml:channelProperty channel="F" name="resolution" value="0" units="1/dev"/>
+          <inkml:channelProperty channel="OA" name="resolution" value="1000" units="1/deg"/>
+          <inkml:channelProperty channel="OE" name="resolution" value="1000" units="1/deg"/>
+        </inkml:channelProperties>
+      </inkml:inkSource>
+      <inkml:timestamp xml:id="ts0" timeString="2026-08-11T02:53:51.281"/>
+    </inkml:context>
+    <inkml:brush xml:id="br0">
+      <inkml:brushProperty name="width" value="0.1" units="cm"/>
+      <inkml:brushProperty name="height" value="0.1" units="cm"/>
+    </inkml:brush>
+  </inkml:definitions>
+  <inkml:trace contextRef="#ctx0" brushRef="#br0">6721 19463 2783 0 0,'-5'-9'4128'0'0,"-1"-8"-4096"0"0,0-5 0 0 0,2-4 0 0 0,0-1 0 0 0,7 3 96 0 0,2 1 128 0 0,5 1 64 0 0,5-2 96 0 0,5 0 32 0 0,3-1-32 0 0,3-1-32 0 0,1-1-96 0 0,1 1-64 0 0,0-1-96 0 0,-1 0-32 0 0,1-5-32 0 0,-1-1-32 0 0,0 1 32 0 0,0-4-64 0 0,0-1 96 0 0,4 3 0 0 0,2-3 64 0 0,4 0 64 0 0,5-2 0 0 0,9 0 64 0 0,5 3 64 0 0,2 3-96 0 0,-9 2 128 0 0,-8 7-128 0 0,-6 2-160 0 0,-5 1 0 0 0,-3 4-64 0 0,3-4-32 0 0,1-4 0 0 0,0-1 0 0 0,4-1-32 0 0,0-1-64 0 0,-1 0-128 0 0,-2 0-192 0 0,3 1-224 0 0,4-5-352 0 0,1-1-448 0 0,-2 5-1152 0 0,-4 2 2592 0 0,-2 2 0 0 0,-7 4 0 0 0</inkml:trace>
+</inkml:ink>
+</file>
+
+<file path=ppt/ink/ink108.xml><?xml version="1.0" encoding="utf-8"?>
+<inkml:ink xmlns:inkml="http://www.w3.org/2003/InkML">
+  <inkml:definitions>
+    <inkml:context xml:id="ctx0">
+      <inkml:inkSource xml:id="inkSrc0">
+        <inkml:traceFormat>
+          <inkml:channel name="X" type="integer" min="-2.14748E9" max="2.14748E9" units="cm"/>
+          <inkml:channel name="Y" type="integer" min="-2.14748E9" max="2.14748E9" units="cm"/>
+          <inkml:channel name="F" type="integer" max="32767" units="dev"/>
+          <inkml:channel name="OA" type="integer" max="360" units="deg"/>
+          <inkml:channel name="OE" type="integer" max="90" units="deg"/>
+        </inkml:traceFormat>
+        <inkml:channelProperties>
+          <inkml:channelProperty channel="X" name="resolution" value="1000" units="1/cm"/>
+          <inkml:channelProperty channel="Y" name="resolution" value="1000" units="1/cm"/>
+          <inkml:channelProperty channel="F" name="resolution" value="0" units="1/dev"/>
+          <inkml:channelProperty channel="OA" name="resolution" value="1000" units="1/deg"/>
+          <inkml:channelProperty channel="OE" name="resolution" value="1000" units="1/deg"/>
+        </inkml:channelProperties>
+      </inkml:inkSource>
+      <inkml:timestamp xml:id="ts0" timeString="2026-08-11T02:53:51.282"/>
+    </inkml:context>
+    <inkml:brush xml:id="br0">
+      <inkml:brushProperty name="width" value="0.1" units="cm"/>
+      <inkml:brushProperty name="height" value="0.1" units="cm"/>
+    </inkml:brush>
+  </inkml:definitions>
+  <inkml:trace contextRef="#ctx0" brushRef="#br0">3969 17652 991 0 0,'-4'-14'2848'0'0,"2"-8"-1024"0"0,7-6-544 0 0,7 2-1184 0 0,1 10-32 0 0,3 8-64 0 0,4 5 224 0 0,-2-1 64 0 0,0-1 192 0 0,-2-3-288 0 0,-4-5 416 0 0,-5-5-224 0 0,-7 1-128 0 0,-4 7-256 0 0,-6 10 0 0 0,-1 10 0 0 0,1 8 0 0 0,-2 1 0 0 0,1 1 32 0 0,-2-2-32 0 0,0 0 0 0 0,-1-3 32 0 0,-3-4 0 0 0,1 0 0 0 0,4-5 288 0 0,3-9-32 0 0,4-9 64 0 0,2-6-192 0 0,2-5-32 0 0,1-3 32 0 0,1-2-96 0 0,0 0 0 0 0,-1-1 64 0 0,1 10 352 0 0,-1 13-480 0 0,1 11 0 0 0,-1 10 32 0 0,-5 2 32 0 0,-1-6 448 0 0,0-10-288 0 0,2-9-32 0 0,0-8-128 0 0,2-6 64 0 0,1-4-64 0 0,5-2 32 0 0,2 9 0 0 0,0 11 32 0 0,-5 13-96 0 0,-4 9 64 0 0,0 7 0 0 0,-1 5-32 0 0,1 2 64 0 0,1 1-96 0 0,6-5 0 0 0,6-6 224 0 0,1-10 64 0 0,4-8-128 0 0,-1-7 0 0 0,-2-7 0 0 0,0-2-32 0 0,-1-3-64 0 0,2-1 64 0 0,-1-4-128 0 0,-3-1-32 0 0,-3-1-32 0 0,-7 4 0 0 0,-7 5 0 0 0,-4 11 32 0 0,2 10 0 0 0,1 10 0 0 0,-1 6 0 0 0,0 5 0 0 0,2 2 0 0 0,3 2 0 0 0,2 0 0 0 0,1 0 32 0 0,1-1-32 0 0,1-9 32 0 0,1-13-32 0 0,-1-12 32 0 0,5-5-4992 0 0,6 0 4960 0 0,1 1 0 0 0</inkml:trace>
+</inkml:ink>
+</file>
+
+<file path=ppt/ink/ink109.xml><?xml version="1.0" encoding="utf-8"?>
+<inkml:ink xmlns:inkml="http://www.w3.org/2003/InkML">
+  <inkml:definitions>
+    <inkml:context xml:id="ctx0">
+      <inkml:inkSource xml:id="inkSrc0">
+        <inkml:traceFormat>
+          <inkml:channel name="X" type="integer" min="-2.14748E9" max="2.14748E9" units="cm"/>
+          <inkml:channel name="Y" type="integer" min="-2.14748E9" max="2.14748E9" units="cm"/>
+          <inkml:channel name="F" type="integer" max="32767" units="dev"/>
+          <inkml:channel name="OA" type="integer" max="360" units="deg"/>
+          <inkml:channel name="OE" type="integer" max="90" units="deg"/>
+        </inkml:traceFormat>
+        <inkml:channelProperties>
+          <inkml:channelProperty channel="X" name="resolution" value="1000" units="1/cm"/>
+          <inkml:channelProperty channel="Y" name="resolution" value="1000" units="1/cm"/>
+          <inkml:channelProperty channel="F" name="resolution" value="0" units="1/dev"/>
+          <inkml:channelProperty channel="OA" name="resolution" value="1000" units="1/deg"/>
+          <inkml:channelProperty channel="OE" name="resolution" value="1000" units="1/deg"/>
+        </inkml:channelProperties>
+      </inkml:inkSource>
+      <inkml:timestamp xml:id="ts0" timeString="2026-08-11T02:53:51.283"/>
+    </inkml:context>
+    <inkml:brush xml:id="br0">
+      <inkml:brushProperty name="width" value="0.1" units="cm"/>
+      <inkml:brushProperty name="height" value="0.1" units="cm"/>
+    </inkml:brush>
+  </inkml:definitions>
+  <inkml:trace contextRef="#ctx0" brushRef="#br0">5107 17174 1983 0 0,'-4'-9'4640'0'0,"-7"-3"-352"0"0,-1 5-4288 0 0,2 8 32 0 0,7 9 0 0 0,3 7-32 0 0,3 5 32 0 0,5-1 64 0 0,0 0 96 0 0,5-3 0 0 0,4-4 224 0 0,3-6-224 0 0,4-3 288 0 0,2-3-128 0 0,-4-6-224 0 0,-1-7-32 0 0,-3-7-32 0 0,-6-3 0 0 0,-4-5-32 0 0,-9-5-32 0 0,-8-8 32 0 0,-7-1-32 0 0,-6 2-64 0 0,-3 7 64 0 0,-3 8 0 0 0,0 9 0 0 0,4 2 0 0 0,2 3 0 0 0,0 8 0 0 0,3 13 32 0 0,6 8-32 0 0,9 7 64 0 0,5 2-64 0 0,3 2 32 0 0,5-1 32 0 0,6-1 32 0 0,4 0-32 0 0,4-1 32 0 0,3-5 128 0 0,1-11-160 0 0,-4-12-32 0 0,-6-11 32 0 0,-5-8-32 0 0,-6-5-32 0 0,-7 1 0 0 0,-5 1 32 0 0,-5-2-32 0 0,0 0 0 0 0,-4 3 0 0 0,1 11 32 0 0,3 10-32 0 0,8 11 32 0 0,4 7 0 0 0,7 6-32 0 0,2 3 32 0 0,4-3-32 0 0,-1-1 32 0 0,-2-9 96 0 0,-3-11-128 0 0,-8-11 32 0 0,-4-9-32 0 0,-5-1 0 0 0,-1-3 0 0 0,-4 4 0 0 0,-4 3 0 0 0,-4 5 0 0 0,3 8 32 0 0,4 9 320 0 0,9 7-224 0 0,10 2 0 0 0,5-7-768 0 0,-5-10-992 0 0,-2-9 1632 0 0,-6-12 0 0 0,-2-3 0 0 0</inkml:trace>
 </inkml:ink>
 </file>
 
@@ -3332,6 +3828,68 @@
     </inkml:brush>
   </inkml:definitions>
   <inkml:trace contextRef="#ctx0" brushRef="#br0">27479 13541 4639 0 0,'0'14'8416'0'0,"0"8"-7776"0"0,-5 6 32 0 0,-1 2 0 0 0,1 0 0 0 0,0 1 0 0 0,2-2-96 0 0,-4-1 288 0 0,0 0-672 0 0,1-1-64 0 0,1 0-32 0 0,2-1-96 0 0,-3-4 0 0 0,-1-2 0 0 0,1 1-32 0 0,2 1 0 0 0,5-4 32 0 0,4-8 32 0 0,-1-12-32 0 0,5-13 0 0 0,1-10 0 0 0,2-4 0 0 0,5-6-32 0 0,3-7 32 0 0,3-5-32 0 0,2 1-64 0 0,1 0-128 0 0,6 2-224 0 0,1 5-256 0 0,0 4-224 0 0,3 4-352 0 0,0 3-736 0 0,3 5 2016 0 0,-1 8 0 0 0,-6 5 0 0 0</inkml:trace>
+</inkml:ink>
+</file>
+
+<file path=ppt/ink/ink98.xml><?xml version="1.0" encoding="utf-8"?>
+<inkml:ink xmlns:inkml="http://www.w3.org/2003/InkML">
+  <inkml:definitions>
+    <inkml:context xml:id="ctx0">
+      <inkml:inkSource xml:id="inkSrc0">
+        <inkml:traceFormat>
+          <inkml:channel name="X" type="integer" min="-2.14748E9" max="2.14748E9" units="cm"/>
+          <inkml:channel name="Y" type="integer" min="-2.14748E9" max="2.14748E9" units="cm"/>
+          <inkml:channel name="F" type="integer" max="32767" units="dev"/>
+          <inkml:channel name="OA" type="integer" max="360" units="deg"/>
+          <inkml:channel name="OE" type="integer" max="90" units="deg"/>
+        </inkml:traceFormat>
+        <inkml:channelProperties>
+          <inkml:channelProperty channel="X" name="resolution" value="1000" units="1/cm"/>
+          <inkml:channelProperty channel="Y" name="resolution" value="1000" units="1/cm"/>
+          <inkml:channelProperty channel="F" name="resolution" value="0" units="1/dev"/>
+          <inkml:channelProperty channel="OA" name="resolution" value="1000" units="1/deg"/>
+          <inkml:channelProperty channel="OE" name="resolution" value="1000" units="1/deg"/>
+        </inkml:channelProperties>
+      </inkml:inkSource>
+      <inkml:timestamp xml:id="ts0" timeString="2026-08-11T02:53:51.272"/>
+    </inkml:context>
+    <inkml:brush xml:id="br0">
+      <inkml:brushProperty name="width" value="0.1" units="cm"/>
+      <inkml:brushProperty name="height" value="0.1" units="cm"/>
+    </inkml:brush>
+  </inkml:definitions>
+  <inkml:trace contextRef="#ctx0" brushRef="#br0">4763 18230 2015 0 0,'4'13'8800'0'0,"2"10"-7872"0"0,5 1-832 0 0,-1 0-32 0 0,4-3 0 0 0,-1-2-32 0 0,2-3-32 0 0,-2 0 32 0 0,2-2-32 0 0,-2 0 0 0 0,1-2 32 0 0,3 2-32 0 0,4-2 0 0 0,-3 2 0 0 0,1-2 32 0 0,1 2-32 0 0,3-1 0 0 0,-4 1 0 0 0,0-1 32 0 0,2 1 0 0 0,-4 3 64 0 0,-3 3-32 0 0,-6 3 96 0 0,2-3-128 0 0,-2 1 32 0 0,-1 0-32 0 0,-3 2 32 0 0,-6-4-32 0 0,-3 0-32 0 0,-1 2 96 0 0,-3-4 0 0 0,-1 1 192 0 0,-3-4-192 0 0,1 2-32 0 0,-2-3 0 0 0,-4-4-32 0 0,2-7 32 0 0,-1-5-32 0 0,-2-1-32 0 0,-3 0 0 0 0,-2 0 0 0 0,-1 2 0 0 0,-2 0 32 0 0,0 1 0 0 0,5-4 0 0 0,1-1-32 0 0,4-4 0 0 0,0-1 32 0 0,4-2-32 0 0,-1-5 32 0 0,2-2 0 0 0,3-4-32 0 0,3-1 32 0 0,7-2 0 0 0,8 0-32 0 0,7-1 64 0 0,5 5 224 0 0,4 7-192 0 0,2 5-32 0 0,-8 9-32 0 0,-7 10-32 0 0,-6 8 0 0 0,-4 6 0 0 0,-7-1 32 0 0,-2 1-32 0 0,0 0 0 0 0,1 2 0 0 0,1 2 32 0 0,2 0 0 0 0,6-4 0 0 0,2-2 0 0 0,6-3 128 0 0,0-10-96 0 0,3-5-32 0 0,-1-9 0 0 0,-3-7 32 0 0,-3-5-32 0 0,-2-5-64 0 0,-3-3 32 0 0,-1 0-32 0 0,-1-2 0 0 0,-5 1 0 0 0,-11 18 32 0 0,3 16 0 0 0,2 11 0 0 0,4 7 0 0 0,7 0 32 0 0,4 0-32 0 0,1 1 0 0 0,5-4 0 0 0,0-2 32 0 0,3-3 0 0 0,4-4 64 0 0,-1-10-64 0 0,-3-8-32 0 0,-4-9 0 0 0,-4-6 32 0 0,-2-4-32 0 0,-6-3 0 0 0,-3 0 0 0 0,-1-1 0 0 0,2 1 0 0 0,1 9 0 0 0,1 12 0 0 0,2 13 0 0 0,5 4 32 0 0,2 6-32 0 0,0 4 0 0 0,-1 4 32 0 0,-2 2 32 0 0,4-3 288 0 0,0-11-192 0 0,0-11-128 0 0,-3-11-32 0 0,0-8 0 0 0,-3-5 0 0 0,0-4 0 0 0,-5 3 32 0 0,-2 1-32 0 0,-5 9 128 0 0,0 7-128 0 0</inkml:trace>
+</inkml:ink>
+</file>
+
+<file path=ppt/ink/ink99.xml><?xml version="1.0" encoding="utf-8"?>
+<inkml:ink xmlns:inkml="http://www.w3.org/2003/InkML">
+  <inkml:definitions>
+    <inkml:context xml:id="ctx0">
+      <inkml:inkSource xml:id="inkSrc0">
+        <inkml:traceFormat>
+          <inkml:channel name="X" type="integer" min="-2.14748E9" max="2.14748E9" units="cm"/>
+          <inkml:channel name="Y" type="integer" min="-2.14748E9" max="2.14748E9" units="cm"/>
+          <inkml:channel name="F" type="integer" max="32767" units="dev"/>
+          <inkml:channel name="OA" type="integer" max="360" units="deg"/>
+          <inkml:channel name="OE" type="integer" max="90" units="deg"/>
+        </inkml:traceFormat>
+        <inkml:channelProperties>
+          <inkml:channelProperty channel="X" name="resolution" value="1000" units="1/cm"/>
+          <inkml:channelProperty channel="Y" name="resolution" value="1000" units="1/cm"/>
+          <inkml:channelProperty channel="F" name="resolution" value="0" units="1/dev"/>
+          <inkml:channelProperty channel="OA" name="resolution" value="1000" units="1/deg"/>
+          <inkml:channelProperty channel="OE" name="resolution" value="1000" units="1/deg"/>
+        </inkml:channelProperties>
+      </inkml:inkSource>
+      <inkml:timestamp xml:id="ts0" timeString="2026-08-11T02:53:51.273"/>
+    </inkml:context>
+    <inkml:brush xml:id="br0">
+      <inkml:brushProperty name="width" value="0.1" units="cm"/>
+      <inkml:brushProperty name="height" value="0.1" units="cm"/>
+    </inkml:brush>
+  </inkml:definitions>
+  <inkml:trace contextRef="#ctx0" brushRef="#br0">4130 17651 1727 0 0,'-9'5'3136'0'0,"-8"1"-2592"0"0,-5 4 64 0 0,-4 1 64 0 0,-1-2 608 0 0,3-7-832 0 0,1-3-96 0 0,5-7 160 0 0,1-6-320 0 0,3-6-32 0 0,9 1-96 0 0,4 0 32 0 0,4-3 160 0 0,5-1 32 0 0,1-2-192 0 0,4-1 64 0 0,0 0-64 0 0,-3-1 32 0 0,2 4 0 0 0,-1 2 0 0 0,-3 0-32 0 0,2 3 0 0 0,4 0 32 0 0,4 8 416 0 0,4 11-320 0 0,-3 8-192 0 0,-3 9-32 0 0,-6 5 32 0 0,-3 3 0 0 0,-4 2 64 0 0,-2 1 0 0 0,-1-1 96 0 0,-1 1 224 0 0,0-1-32 0 0,0-1-32 0 0,1 0-96 0 0,-1 0 64 0 0,6-4 128 0 0,1-12-416 0 0,-1-11-32 0 0,0-11 0 0 0,-2-8-96 0 0,-1-5-320 0 0,-1-7-992 0 0,0-4-3904 0 0,-1 0 5312 0 0,0-3 0 0 0,0 5 0 0 0</inkml:trace>
 </inkml:ink>
 </file>
 
@@ -6592,7 +7150,7 @@
           <a:lstStyle/>
           <a:p>
             <a:r>
-              <a:rPr lang="en-AU" dirty="0"/>
+              <a:rPr lang="en-AU"/>
               <a:t>SWQS</a:t>
             </a:r>
           </a:p>
@@ -6637,6 +7195,96 @@
 </file>
 
 <file path=ppt/slides/slide10.xml><?xml version="1.0" encoding="utf-8"?>
+<p:sld xmlns:a="http://schemas.openxmlformats.org/drawingml/2006/main" xmlns:r="http://schemas.openxmlformats.org/officeDocument/2006/relationships" xmlns:p="http://schemas.openxmlformats.org/presentationml/2006/main">
+  <p:cSld>
+    <p:spTree>
+      <p:nvGrpSpPr>
+        <p:cNvPr id="1" name=""/>
+        <p:cNvGrpSpPr/>
+        <p:nvPr/>
+      </p:nvGrpSpPr>
+      <p:grpSpPr>
+        <a:xfrm>
+          <a:off x="0" y="0"/>
+          <a:ext cx="0" cy="0"/>
+          <a:chOff x="0" y="0"/>
+          <a:chExt cx="0" cy="0"/>
+        </a:xfrm>
+      </p:grpSpPr>
+      <p:sp>
+        <p:nvSpPr>
+          <p:cNvPr id="2" name="Title 1">
+            <a:extLst>
+              <a:ext uri="{FF2B5EF4-FFF2-40B4-BE49-F238E27FC236}">
+                <a16:creationId xmlns:a16="http://schemas.microsoft.com/office/drawing/2014/main" id="{1EC88F65-E257-50D0-F69C-69363F25BCCB}"/>
+              </a:ext>
+            </a:extLst>
+          </p:cNvPr>
+          <p:cNvSpPr>
+            <a:spLocks noGrp="1"/>
+          </p:cNvSpPr>
+          <p:nvPr>
+            <p:ph type="title"/>
+          </p:nvPr>
+        </p:nvSpPr>
+        <p:spPr/>
+        <p:txBody>
+          <a:bodyPr/>
+          <a:lstStyle/>
+          <a:p>
+            <a:r>
+              <a:rPr lang="en-US"/>
+              <a:t>Zef's Website Mockup</a:t>
+            </a:r>
+          </a:p>
+        </p:txBody>
+      </p:sp>
+      <p:pic>
+        <p:nvPicPr>
+          <p:cNvPr id="4" name="Content Placeholder 3">
+            <a:extLst>
+              <a:ext uri="{FF2B5EF4-FFF2-40B4-BE49-F238E27FC236}">
+                <a16:creationId xmlns:a16="http://schemas.microsoft.com/office/drawing/2014/main" id="{588E1B6B-A0D6-8247-31F9-647DEF5E7127}"/>
+              </a:ext>
+            </a:extLst>
+          </p:cNvPr>
+          <p:cNvPicPr>
+            <a:picLocks noGrp="1" noChangeAspect="1"/>
+          </p:cNvPicPr>
+          <p:nvPr>
+            <p:ph idx="1"/>
+          </p:nvPr>
+        </p:nvPicPr>
+        <p:blipFill>
+          <a:blip r:embed="rId2"/>
+          <a:stretch>
+            <a:fillRect/>
+          </a:stretch>
+        </p:blipFill>
+        <p:spPr>
+          <a:xfrm>
+            <a:off x="1309739" y="2187059"/>
+            <a:ext cx="9136320" cy="4559299"/>
+          </a:xfrm>
+          <a:prstGeom prst="rect">
+            <a:avLst/>
+          </a:prstGeom>
+        </p:spPr>
+      </p:pic>
+    </p:spTree>
+    <p:extLst>
+      <p:ext uri="{BB962C8B-B14F-4D97-AF65-F5344CB8AC3E}">
+        <p14:creationId xmlns:p14="http://schemas.microsoft.com/office/powerpoint/2010/main" val="1366860525"/>
+      </p:ext>
+    </p:extLst>
+  </p:cSld>
+  <p:clrMapOvr>
+    <a:masterClrMapping/>
+  </p:clrMapOvr>
+</p:sld>
+</file>
+
+<file path=ppt/slides/slide11.xml><?xml version="1.0" encoding="utf-8"?>
 <p:sld xmlns:a="http://schemas.openxmlformats.org/drawingml/2006/main" xmlns:r="http://schemas.openxmlformats.org/officeDocument/2006/relationships" xmlns:p="http://schemas.openxmlformats.org/presentationml/2006/main">
   <p:cSld>
     <p:spTree>
@@ -6726,7 +7374,7 @@
 </p:sld>
 </file>
 
-<file path=ppt/slides/slide11.xml><?xml version="1.0" encoding="utf-8"?>
+<file path=ppt/slides/slide12.xml><?xml version="1.0" encoding="utf-8"?>
 <p:sld xmlns:a="http://schemas.openxmlformats.org/drawingml/2006/main" xmlns:r="http://schemas.openxmlformats.org/officeDocument/2006/relationships" xmlns:p="http://schemas.openxmlformats.org/presentationml/2006/main">
   <p:cSld>
     <p:spTree>
@@ -6814,7 +7462,7 @@
 </p:sld>
 </file>
 
-<file path=ppt/slides/slide12.xml><?xml version="1.0" encoding="utf-8"?>
+<file path=ppt/slides/slide13.xml><?xml version="1.0" encoding="utf-8"?>
 <p:sld xmlns:a="http://schemas.openxmlformats.org/drawingml/2006/main" xmlns:r="http://schemas.openxmlformats.org/officeDocument/2006/relationships" xmlns:p="http://schemas.openxmlformats.org/presentationml/2006/main">
   <p:cSld>
     <p:spTree>
@@ -6942,7 +7590,7 @@
 </p:sld>
 </file>
 
-<file path=ppt/slides/slide13.xml><?xml version="1.0" encoding="utf-8"?>
+<file path=ppt/slides/slide14.xml><?xml version="1.0" encoding="utf-8"?>
 <p:sld xmlns:a="http://schemas.openxmlformats.org/drawingml/2006/main" xmlns:r="http://schemas.openxmlformats.org/officeDocument/2006/relationships" xmlns:p="http://schemas.openxmlformats.org/presentationml/2006/main">
   <p:cSld>
     <p:spTree>
@@ -7079,7 +7727,7 @@
           <a:p>
             <a:pPr algn="l"/>
             <a:r>
-              <a:rPr lang="en-US" sz="11500" dirty="0"/>
+              <a:rPr lang="en-US" sz="11500"/>
               <a:t>Analysis stage</a:t>
             </a:r>
           </a:p>
@@ -7171,7 +7819,7 @@
           <a:p>
             <a:pPr algn="ctr"/>
             <a:r>
-              <a:rPr lang="en-US" dirty="0"/>
+              <a:rPr lang="en-US"/>
               <a:t>Empathy map</a:t>
             </a:r>
           </a:p>
@@ -7227,10 +7875,10 @@
                         <a:buNone/>
                       </a:pPr>
                       <a:r>
-                        <a:rPr lang="en-AU" sz="1600" b="1" dirty="0"/>
+                        <a:rPr lang="en-AU" sz="1600" b="1"/>
                         <a:t>SAYS</a:t>
                       </a:r>
-                      <a:endParaRPr lang="en-AU" sz="1600" dirty="0"/>
+                      <a:endParaRPr lang="en-AU" sz="1600"/>
                     </a:p>
                   </a:txBody>
                   <a:tcPr anchor="ctr">
@@ -7258,10 +7906,10 @@
                         <a:buNone/>
                       </a:pPr>
                       <a:r>
-                        <a:rPr lang="en-AU" sz="1600" b="1" dirty="0"/>
+                        <a:rPr lang="en-AU" sz="1600" b="1"/>
                         <a:t>THINKS</a:t>
                       </a:r>
-                      <a:endParaRPr lang="en-AU" sz="1600" dirty="0"/>
+                      <a:endParaRPr lang="en-AU" sz="1600"/>
                     </a:p>
                   </a:txBody>
                   <a:tcPr anchor="ctr">
@@ -7296,7 +7944,7 @@
                         <a:buNone/>
                       </a:pPr>
                       <a:r>
-                        <a:rPr lang="en-AU" sz="1600" dirty="0"/>
+                        <a:rPr lang="en-AU" sz="1600"/>
                         <a:t>"Is this tap water actually safe?"</a:t>
                       </a:r>
                     </a:p>
@@ -7326,7 +7974,7 @@
                         <a:buNone/>
                       </a:pPr>
                       <a:r>
-                        <a:rPr lang="en-AU" sz="1600" dirty="0"/>
+                        <a:rPr lang="en-AU" sz="1600"/>
                         <a:t>"I don't want to ruin my trip by getting sick."</a:t>
                       </a:r>
                     </a:p>
@@ -7363,7 +8011,7 @@
                         <a:buNone/>
                       </a:pPr>
                       <a:r>
-                        <a:rPr lang="en-AU" sz="1600" dirty="0"/>
+                        <a:rPr lang="en-AU" sz="1600"/>
                         <a:t>"Should I buy bottled water instead?"</a:t>
                       </a:r>
                     </a:p>
@@ -7393,7 +8041,7 @@
                         <a:buNone/>
                       </a:pPr>
                       <a:r>
-                        <a:rPr lang="en-AU" sz="1600" dirty="0"/>
+                        <a:rPr lang="en-AU" sz="1600"/>
                         <a:t>"I wish there was an easy way to know if this water is clean."</a:t>
                       </a:r>
                     </a:p>
@@ -7430,7 +8078,7 @@
                         <a:buNone/>
                       </a:pPr>
                       <a:r>
-                        <a:rPr lang="en-AU" sz="1600" dirty="0"/>
+                        <a:rPr lang="en-AU" sz="1600"/>
                         <a:t>"The locals drink it, but can I?"</a:t>
                       </a:r>
                     </a:p>
@@ -7460,7 +8108,7 @@
                         <a:buNone/>
                       </a:pPr>
                       <a:r>
-                        <a:rPr lang="en-AU" sz="1600" dirty="0"/>
+                        <a:rPr lang="en-AU" sz="1600"/>
                         <a:t>"Can I trust what people are telling me?"</a:t>
                       </a:r>
                     </a:p>
@@ -7497,7 +8145,7 @@
                         <a:buNone/>
                       </a:pPr>
                       <a:r>
-                        <a:rPr lang="en-AU" sz="1600" dirty="0"/>
+                        <a:rPr lang="en-AU" sz="1600"/>
                         <a:t>"I don't want to waste money on bottled water if I don't have to."</a:t>
                       </a:r>
                     </a:p>
@@ -7527,7 +8175,7 @@
                         <a:buNone/>
                       </a:pPr>
                       <a:r>
-                        <a:rPr lang="en-AU" sz="1600" dirty="0"/>
+                        <a:rPr lang="en-AU" sz="1600"/>
                         <a:t>"What if the water looks clean but still has harmful bacteria?"</a:t>
                       </a:r>
                     </a:p>
@@ -7606,10 +8254,10 @@
                         <a:buNone/>
                       </a:pPr>
                       <a:r>
-                        <a:rPr lang="en-AU" sz="1600" b="1" dirty="0"/>
+                        <a:rPr lang="en-AU" sz="1600" b="1"/>
                         <a:t>DOES</a:t>
                       </a:r>
-                      <a:endParaRPr lang="en-AU" sz="1600" dirty="0"/>
+                      <a:endParaRPr lang="en-AU" sz="1600"/>
                     </a:p>
                   </a:txBody>
                   <a:tcPr anchor="ctr">
@@ -7637,10 +8285,10 @@
                         <a:buNone/>
                       </a:pPr>
                       <a:r>
-                        <a:rPr lang="en-AU" sz="1600" b="1" dirty="0"/>
+                        <a:rPr lang="en-AU" sz="1600" b="1"/>
                         <a:t>FEELS</a:t>
                       </a:r>
-                      <a:endParaRPr lang="en-AU" sz="1600" dirty="0"/>
+                      <a:endParaRPr lang="en-AU" sz="1600"/>
                     </a:p>
                   </a:txBody>
                   <a:tcPr anchor="ctr">
@@ -7675,7 +8323,7 @@
                         <a:buNone/>
                       </a:pPr>
                       <a:r>
-                        <a:rPr lang="en-AU" sz="1600" dirty="0"/>
+                        <a:rPr lang="en-AU" sz="1600"/>
                         <a:t>Buys bottled water whenever possible.</a:t>
                       </a:r>
                     </a:p>
@@ -7742,7 +8390,7 @@
                         <a:buNone/>
                       </a:pPr>
                       <a:r>
-                        <a:rPr lang="en-AU" sz="1600" dirty="0"/>
+                        <a:rPr lang="en-AU" sz="1600"/>
                         <a:t>Asks locals or hotel staff if the water is safe.</a:t>
                       </a:r>
                     </a:p>
@@ -7772,7 +8420,7 @@
                         <a:buNone/>
                       </a:pPr>
                       <a:r>
-                        <a:rPr lang="en-AU" sz="1600" dirty="0"/>
+                        <a:rPr lang="en-AU" sz="1600"/>
                         <a:t>Uncertain because there is no clear evidence.</a:t>
                       </a:r>
                     </a:p>
@@ -7809,7 +8457,7 @@
                         <a:buNone/>
                       </a:pPr>
                       <a:r>
-                        <a:rPr lang="en-AU" sz="1600" dirty="0"/>
+                        <a:rPr lang="en-AU" sz="1600"/>
                         <a:t>Boils water before drinking when possible.</a:t>
                       </a:r>
                     </a:p>
@@ -7973,7 +8621,7 @@
                         <a:buNone/>
                       </a:pPr>
                       <a:r>
-                        <a:rPr lang="en-AU" sz="1600" dirty="0"/>
+                        <a:rPr lang="en-AU" sz="1600"/>
                         <a:t>Worried about food poisoning or stomach illnesses.</a:t>
                       </a:r>
                     </a:p>
@@ -8179,7 +8827,7 @@
           <a:p>
             <a:pPr algn="ctr"/>
             <a:r>
-              <a:rPr lang="en-US" dirty="0"/>
+              <a:rPr lang="en-US"/>
               <a:t>Filter </a:t>
             </a:r>
           </a:p>
@@ -8214,13 +8862,13 @@
           <a:lstStyle/>
           <a:p>
             <a:r>
-              <a:rPr lang="en-US" sz="2800" b="1" dirty="0"/>
+              <a:rPr lang="en-US" sz="2800" b="1"/>
               <a:t>Our choices </a:t>
             </a:r>
           </a:p>
           <a:p>
             <a:r>
-              <a:rPr lang="en-US" sz="1600" b="1" dirty="0"/>
+              <a:rPr lang="en-US" sz="1600" b="1"/>
               <a:t>Creating a device that detects the cleanliness of bodies of water </a:t>
             </a:r>
           </a:p>
@@ -8230,7 +8878,7 @@
               <a:buChar char="-"/>
             </a:pPr>
             <a:r>
-              <a:rPr lang="en-AU" sz="1400" dirty="0"/>
+              <a:rPr lang="en-AU" sz="1400"/>
               <a:t>It directly addresses the concerns people have about water  safety.</a:t>
             </a:r>
           </a:p>
@@ -8240,7 +8888,7 @@
               <a:buChar char="-"/>
             </a:pPr>
             <a:r>
-              <a:rPr lang="en-AU" sz="1400" dirty="0"/>
+              <a:rPr lang="en-AU" sz="1400"/>
               <a:t>It helps reduce the risk of drinking contaminated water.</a:t>
             </a:r>
           </a:p>
@@ -8250,18 +8898,18 @@
               <a:buChar char="-"/>
             </a:pPr>
             <a:r>
-              <a:rPr lang="en-AU" sz="1400" dirty="0"/>
+              <a:rPr lang="en-AU" sz="1400"/>
               <a:t>The device can detect contamination that cannot be seen with the naked eye.</a:t>
             </a:r>
-            <a:endParaRPr lang="en-US" sz="1400" dirty="0"/>
+            <a:endParaRPr lang="en-US" sz="1400"/>
           </a:p>
           <a:p>
             <a:r>
-              <a:rPr lang="en-US" sz="1600" b="1" dirty="0"/>
+              <a:rPr lang="en-US" sz="1600" b="1"/>
               <a:t>Creating a portable </a:t>
             </a:r>
             <a:r>
-              <a:rPr lang="en-AU" sz="1600" b="1" dirty="0"/>
+              <a:rPr lang="en-AU" sz="1600" b="1"/>
               <a:t>submersible water quality surveyance probe.</a:t>
             </a:r>
           </a:p>
@@ -8271,7 +8919,7 @@
               <a:buChar char="-"/>
             </a:pPr>
             <a:r>
-              <a:rPr lang="en-AU" sz="1400" dirty="0"/>
+              <a:rPr lang="en-AU" sz="1400"/>
               <a:t>It allows people to test water quickly and accurately wherever they are.</a:t>
             </a:r>
           </a:p>
@@ -8281,7 +8929,7 @@
               <a:buChar char="-"/>
             </a:pPr>
             <a:r>
-              <a:rPr lang="en-AU" sz="1400" dirty="0"/>
+              <a:rPr lang="en-AU" sz="1400"/>
               <a:t>Because it is portable, it is ideal for travellers, campers, hikers, emergency workers, and people living in areas where water quality is uncertain.</a:t>
             </a:r>
           </a:p>
@@ -8291,7 +8939,7 @@
               <a:buChar char="-"/>
             </a:pPr>
             <a:r>
-              <a:rPr lang="en-AU" sz="1400" dirty="0"/>
+              <a:rPr lang="en-AU" sz="1400"/>
               <a:t>Overall, the probe improves health and safety, provides reliable information, and helps people make informed decisions about the water they use.</a:t>
             </a:r>
           </a:p>
@@ -8299,7 +8947,7 @@
             <a:pPr marL="0" indent="0">
               <a:buNone/>
             </a:pPr>
-            <a:endParaRPr lang="en-US" sz="1600" dirty="0"/>
+            <a:endParaRPr lang="en-US" sz="1600"/>
           </a:p>
         </p:txBody>
       </p:sp>
@@ -8362,7 +9010,7 @@
           <a:lstStyle/>
           <a:p>
             <a:r>
-              <a:rPr lang="en-US" b="0" i="0" kern="1200" dirty="0">
+              <a:rPr lang="en-US" b="0" i="0" kern="1200">
                 <a:solidFill>
                   <a:srgbClr val="EBEBEB"/>
                 </a:solidFill>
@@ -8447,7 +9095,7 @@
               <a:buSzPct val="80000"/>
             </a:pPr>
             <a:r>
-              <a:rPr lang="en-US" sz="1000" dirty="0">
+              <a:rPr lang="en-US" sz="1000">
                 <a:solidFill>
                   <a:srgbClr val="FFFFFF"/>
                 </a:solidFill>
@@ -8469,7 +9117,7 @@
               <a:buSzPct val="80000"/>
             </a:pPr>
             <a:r>
-              <a:rPr lang="en-US" sz="1000" dirty="0">
+              <a:rPr lang="en-US" sz="1000">
                 <a:solidFill>
                   <a:srgbClr val="FFFFFF"/>
                 </a:solidFill>
@@ -8491,7 +9139,7 @@
               <a:buSzPct val="80000"/>
             </a:pPr>
             <a:r>
-              <a:rPr lang="en-US" sz="1000" b="1" dirty="0">
+              <a:rPr lang="en-US" sz="1000" b="1">
                 <a:solidFill>
                   <a:srgbClr val="FFFFFF"/>
                 </a:solidFill>
@@ -8515,7 +9163,7 @@
               <a:buChar char=""/>
             </a:pPr>
             <a:r>
-              <a:rPr lang="en-US" sz="1000" dirty="0">
+              <a:rPr lang="en-US" sz="1000">
                 <a:solidFill>
                   <a:srgbClr val="FFFFFF"/>
                 </a:solidFill>
@@ -8539,7 +9187,7 @@
               <a:buChar char=""/>
             </a:pPr>
             <a:r>
-              <a:rPr lang="en-US" sz="1000" dirty="0">
+              <a:rPr lang="en-US" sz="1000">
                 <a:solidFill>
                   <a:srgbClr val="FFFFFF"/>
                 </a:solidFill>
@@ -8563,7 +9211,7 @@
               <a:buChar char=""/>
             </a:pPr>
             <a:r>
-              <a:rPr lang="en-US" sz="1000" dirty="0">
+              <a:rPr lang="en-US" sz="1000">
                 <a:solidFill>
                   <a:srgbClr val="FFFFFF"/>
                 </a:solidFill>
@@ -8587,7 +9235,7 @@
               <a:buChar char=""/>
             </a:pPr>
             <a:r>
-              <a:rPr lang="en-US" sz="1000" dirty="0">
+              <a:rPr lang="en-US" sz="1000">
                 <a:solidFill>
                   <a:srgbClr val="FFFFFF"/>
                 </a:solidFill>
@@ -8611,7 +9259,7 @@
               <a:buChar char=""/>
             </a:pPr>
             <a:r>
-              <a:rPr lang="en-US" sz="1000" dirty="0">
+              <a:rPr lang="en-US" sz="1000">
                 <a:solidFill>
                   <a:srgbClr val="FFFFFF"/>
                 </a:solidFill>
@@ -8635,7 +9283,7 @@
               <a:buChar char=""/>
             </a:pPr>
             <a:r>
-              <a:rPr lang="en-US" sz="1000" dirty="0">
+              <a:rPr lang="en-US" sz="1000">
                 <a:solidFill>
                   <a:srgbClr val="FFFFFF"/>
                 </a:solidFill>
@@ -8643,7 +9291,7 @@
               <a:t>Must record all data to a </a:t>
             </a:r>
             <a:r>
-              <a:rPr lang="en-US" sz="1000" dirty="0" err="1">
+              <a:rPr lang="en-US" sz="1000" err="1">
                 <a:solidFill>
                   <a:srgbClr val="FFFFFF"/>
                 </a:solidFill>
@@ -8651,7 +9299,7 @@
               <a:t>sd</a:t>
             </a:r>
             <a:r>
-              <a:rPr lang="en-US" sz="1000" dirty="0">
+              <a:rPr lang="en-US" sz="1000">
                 <a:solidFill>
                   <a:srgbClr val="FFFFFF"/>
                 </a:solidFill>
@@ -8675,7 +9323,7 @@
               <a:buChar char=""/>
             </a:pPr>
             <a:r>
-              <a:rPr lang="en-US" sz="1000" dirty="0">
+              <a:rPr lang="en-US" sz="1000">
                 <a:solidFill>
                   <a:srgbClr val="FFFFFF"/>
                 </a:solidFill>
@@ -8697,7 +9345,7 @@
               <a:buSzPct val="80000"/>
             </a:pPr>
             <a:r>
-              <a:rPr lang="en-US" sz="1000" b="1" dirty="0">
+              <a:rPr lang="en-US" sz="1000" b="1">
                 <a:solidFill>
                   <a:srgbClr val="FFFFFF"/>
                 </a:solidFill>
@@ -8721,7 +9369,7 @@
               <a:buChar char=""/>
             </a:pPr>
             <a:r>
-              <a:rPr lang="en-US" sz="1000" dirty="0">
+              <a:rPr lang="en-US" sz="1000">
                 <a:solidFill>
                   <a:srgbClr val="FFFFFF"/>
                 </a:solidFill>
@@ -8745,7 +9393,7 @@
               <a:buChar char=""/>
             </a:pPr>
             <a:r>
-              <a:rPr lang="en-US" sz="1000" dirty="0">
+              <a:rPr lang="en-US" sz="1000">
                 <a:solidFill>
                   <a:srgbClr val="FFFFFF"/>
                 </a:solidFill>
@@ -8769,7 +9417,7 @@
               <a:buChar char=""/>
             </a:pPr>
             <a:r>
-              <a:rPr lang="en-US" sz="1000" dirty="0">
+              <a:rPr lang="en-US" sz="1000">
                 <a:solidFill>
                   <a:srgbClr val="FFFFFF"/>
                 </a:solidFill>
@@ -8792,7 +9440,7 @@
               <a:buFont typeface="Wingdings 3" charset="2"/>
               <a:buChar char=""/>
             </a:pPr>
-            <a:endParaRPr lang="en-US" sz="900" dirty="0">
+            <a:endParaRPr lang="en-US" sz="900">
               <a:solidFill>
                 <a:srgbClr val="FFFFFF"/>
               </a:solidFill>
@@ -8973,8 +9621,8 @@
           </a:prstGeom>
         </p:spPr>
       </p:pic>
-      <mc:AlternateContent xmlns:mc="http://schemas.openxmlformats.org/markup-compatibility/2006" xmlns:p14="http://schemas.microsoft.com/office/powerpoint/2010/main">
-        <mc:Choice Requires="p14">
+      <mc:AlternateContent xmlns:mc="http://schemas.openxmlformats.org/markup-compatibility/2006">
+        <mc:Choice xmlns:p14="http://schemas.microsoft.com/office/powerpoint/2010/main" Requires="p14">
           <p:contentPart p14:bwMode="auto" r:id="rId3">
             <p14:nvContentPartPr>
               <p14:cNvPr id="3" name="Ink 2">
@@ -8993,7 +9641,7 @@
             </p14:xfrm>
           </p:contentPart>
         </mc:Choice>
-        <mc:Fallback xmlns="">
+        <mc:Fallback>
           <p:pic>
             <p:nvPicPr>
               <p:cNvPr id="3" name="Ink 2">
@@ -9024,8 +9672,8 @@
           </p:pic>
         </mc:Fallback>
       </mc:AlternateContent>
-      <mc:AlternateContent xmlns:mc="http://schemas.openxmlformats.org/markup-compatibility/2006" xmlns:p14="http://schemas.microsoft.com/office/powerpoint/2010/main">
-        <mc:Choice Requires="p14">
+      <mc:AlternateContent xmlns:mc="http://schemas.openxmlformats.org/markup-compatibility/2006">
+        <mc:Choice xmlns:p14="http://schemas.microsoft.com/office/powerpoint/2010/main" Requires="p14">
           <p:contentPart p14:bwMode="auto" r:id="rId5">
             <p14:nvContentPartPr>
               <p14:cNvPr id="5" name="Ink 4">
@@ -9044,7 +9692,7 @@
             </p14:xfrm>
           </p:contentPart>
         </mc:Choice>
-        <mc:Fallback xmlns="">
+        <mc:Fallback>
           <p:pic>
             <p:nvPicPr>
               <p:cNvPr id="5" name="Ink 4">
@@ -9075,8 +9723,8 @@
           </p:pic>
         </mc:Fallback>
       </mc:AlternateContent>
-      <mc:AlternateContent xmlns:mc="http://schemas.openxmlformats.org/markup-compatibility/2006" xmlns:p14="http://schemas.microsoft.com/office/powerpoint/2010/main">
-        <mc:Choice Requires="p14">
+      <mc:AlternateContent xmlns:mc="http://schemas.openxmlformats.org/markup-compatibility/2006">
+        <mc:Choice xmlns:p14="http://schemas.microsoft.com/office/powerpoint/2010/main" Requires="p14">
           <p:contentPart p14:bwMode="auto" r:id="rId7">
             <p14:nvContentPartPr>
               <p14:cNvPr id="6" name="Ink 5">
@@ -9095,7 +9743,7 @@
             </p14:xfrm>
           </p:contentPart>
         </mc:Choice>
-        <mc:Fallback xmlns="">
+        <mc:Fallback>
           <p:pic>
             <p:nvPicPr>
               <p:cNvPr id="6" name="Ink 5">
@@ -9126,8 +9774,8 @@
           </p:pic>
         </mc:Fallback>
       </mc:AlternateContent>
-      <mc:AlternateContent xmlns:mc="http://schemas.openxmlformats.org/markup-compatibility/2006" xmlns:p14="http://schemas.microsoft.com/office/powerpoint/2010/main">
-        <mc:Choice Requires="p14">
+      <mc:AlternateContent xmlns:mc="http://schemas.openxmlformats.org/markup-compatibility/2006">
+        <mc:Choice xmlns:p14="http://schemas.microsoft.com/office/powerpoint/2010/main" Requires="p14">
           <p:contentPart p14:bwMode="auto" r:id="rId9">
             <p14:nvContentPartPr>
               <p14:cNvPr id="8" name="Ink 7">
@@ -9146,7 +9794,7 @@
             </p14:xfrm>
           </p:contentPart>
         </mc:Choice>
-        <mc:Fallback xmlns="">
+        <mc:Fallback>
           <p:pic>
             <p:nvPicPr>
               <p:cNvPr id="8" name="Ink 7">
@@ -9177,8 +9825,8 @@
           </p:pic>
         </mc:Fallback>
       </mc:AlternateContent>
-      <mc:AlternateContent xmlns:mc="http://schemas.openxmlformats.org/markup-compatibility/2006" xmlns:p14="http://schemas.microsoft.com/office/powerpoint/2010/main">
-        <mc:Choice Requires="p14">
+      <mc:AlternateContent xmlns:mc="http://schemas.openxmlformats.org/markup-compatibility/2006">
+        <mc:Choice xmlns:p14="http://schemas.microsoft.com/office/powerpoint/2010/main" Requires="p14">
           <p:contentPart p14:bwMode="auto" r:id="rId11">
             <p14:nvContentPartPr>
               <p14:cNvPr id="9" name="Ink 8">
@@ -9197,7 +9845,7 @@
             </p14:xfrm>
           </p:contentPart>
         </mc:Choice>
-        <mc:Fallback xmlns="">
+        <mc:Fallback>
           <p:pic>
             <p:nvPicPr>
               <p:cNvPr id="9" name="Ink 8">
@@ -9228,8 +9876,8 @@
           </p:pic>
         </mc:Fallback>
       </mc:AlternateContent>
-      <mc:AlternateContent xmlns:mc="http://schemas.openxmlformats.org/markup-compatibility/2006" xmlns:p14="http://schemas.microsoft.com/office/powerpoint/2010/main">
-        <mc:Choice Requires="p14">
+      <mc:AlternateContent xmlns:mc="http://schemas.openxmlformats.org/markup-compatibility/2006">
+        <mc:Choice xmlns:p14="http://schemas.microsoft.com/office/powerpoint/2010/main" Requires="p14">
           <p:contentPart p14:bwMode="auto" r:id="rId13">
             <p14:nvContentPartPr>
               <p14:cNvPr id="10" name="Ink 9">
@@ -9248,7 +9896,7 @@
             </p14:xfrm>
           </p:contentPart>
         </mc:Choice>
-        <mc:Fallback xmlns="">
+        <mc:Fallback>
           <p:pic>
             <p:nvPicPr>
               <p:cNvPr id="10" name="Ink 9">
@@ -9279,8 +9927,8 @@
           </p:pic>
         </mc:Fallback>
       </mc:AlternateContent>
-      <mc:AlternateContent xmlns:mc="http://schemas.openxmlformats.org/markup-compatibility/2006" xmlns:p14="http://schemas.microsoft.com/office/powerpoint/2010/main">
-        <mc:Choice Requires="p14">
+      <mc:AlternateContent xmlns:mc="http://schemas.openxmlformats.org/markup-compatibility/2006">
+        <mc:Choice xmlns:p14="http://schemas.microsoft.com/office/powerpoint/2010/main" Requires="p14">
           <p:contentPart p14:bwMode="auto" r:id="rId15">
             <p14:nvContentPartPr>
               <p14:cNvPr id="11" name="Ink 10">
@@ -9299,7 +9947,7 @@
             </p14:xfrm>
           </p:contentPart>
         </mc:Choice>
-        <mc:Fallback xmlns="">
+        <mc:Fallback>
           <p:pic>
             <p:nvPicPr>
               <p:cNvPr id="11" name="Ink 10">
@@ -9330,8 +9978,8 @@
           </p:pic>
         </mc:Fallback>
       </mc:AlternateContent>
-      <mc:AlternateContent xmlns:mc="http://schemas.openxmlformats.org/markup-compatibility/2006" xmlns:p14="http://schemas.microsoft.com/office/powerpoint/2010/main">
-        <mc:Choice Requires="p14">
+      <mc:AlternateContent xmlns:mc="http://schemas.openxmlformats.org/markup-compatibility/2006">
+        <mc:Choice xmlns:p14="http://schemas.microsoft.com/office/powerpoint/2010/main" Requires="p14">
           <p:contentPart p14:bwMode="auto" r:id="rId17">
             <p14:nvContentPartPr>
               <p14:cNvPr id="12" name="Ink 11">
@@ -9350,7 +9998,7 @@
             </p14:xfrm>
           </p:contentPart>
         </mc:Choice>
-        <mc:Fallback xmlns="">
+        <mc:Fallback>
           <p:pic>
             <p:nvPicPr>
               <p:cNvPr id="12" name="Ink 11">
@@ -9381,8 +10029,8 @@
           </p:pic>
         </mc:Fallback>
       </mc:AlternateContent>
-      <mc:AlternateContent xmlns:mc="http://schemas.openxmlformats.org/markup-compatibility/2006" xmlns:p14="http://schemas.microsoft.com/office/powerpoint/2010/main">
-        <mc:Choice Requires="p14">
+      <mc:AlternateContent xmlns:mc="http://schemas.openxmlformats.org/markup-compatibility/2006">
+        <mc:Choice xmlns:p14="http://schemas.microsoft.com/office/powerpoint/2010/main" Requires="p14">
           <p:contentPart p14:bwMode="auto" r:id="rId19">
             <p14:nvContentPartPr>
               <p14:cNvPr id="13" name="Ink 12">
@@ -9401,7 +10049,7 @@
             </p14:xfrm>
           </p:contentPart>
         </mc:Choice>
-        <mc:Fallback xmlns="">
+        <mc:Fallback>
           <p:pic>
             <p:nvPicPr>
               <p:cNvPr id="13" name="Ink 12">
@@ -9432,8 +10080,8 @@
           </p:pic>
         </mc:Fallback>
       </mc:AlternateContent>
-      <mc:AlternateContent xmlns:mc="http://schemas.openxmlformats.org/markup-compatibility/2006" xmlns:p14="http://schemas.microsoft.com/office/powerpoint/2010/main">
-        <mc:Choice Requires="p14">
+      <mc:AlternateContent xmlns:mc="http://schemas.openxmlformats.org/markup-compatibility/2006">
+        <mc:Choice xmlns:p14="http://schemas.microsoft.com/office/powerpoint/2010/main" Requires="p14">
           <p:contentPart p14:bwMode="auto" r:id="rId21">
             <p14:nvContentPartPr>
               <p14:cNvPr id="14" name="Ink 13">
@@ -9452,7 +10100,7 @@
             </p14:xfrm>
           </p:contentPart>
         </mc:Choice>
-        <mc:Fallback xmlns="">
+        <mc:Fallback>
           <p:pic>
             <p:nvPicPr>
               <p:cNvPr id="14" name="Ink 13">
@@ -9483,8 +10131,8 @@
           </p:pic>
         </mc:Fallback>
       </mc:AlternateContent>
-      <mc:AlternateContent xmlns:mc="http://schemas.openxmlformats.org/markup-compatibility/2006" xmlns:p14="http://schemas.microsoft.com/office/powerpoint/2010/main">
-        <mc:Choice Requires="p14">
+      <mc:AlternateContent xmlns:mc="http://schemas.openxmlformats.org/markup-compatibility/2006">
+        <mc:Choice xmlns:p14="http://schemas.microsoft.com/office/powerpoint/2010/main" Requires="p14">
           <p:contentPart p14:bwMode="auto" r:id="rId23">
             <p14:nvContentPartPr>
               <p14:cNvPr id="15" name="Ink 14">
@@ -9503,7 +10151,7 @@
             </p14:xfrm>
           </p:contentPart>
         </mc:Choice>
-        <mc:Fallback xmlns="">
+        <mc:Fallback>
           <p:pic>
             <p:nvPicPr>
               <p:cNvPr id="15" name="Ink 14">
@@ -9534,8 +10182,8 @@
           </p:pic>
         </mc:Fallback>
       </mc:AlternateContent>
-      <mc:AlternateContent xmlns:mc="http://schemas.openxmlformats.org/markup-compatibility/2006" xmlns:p14="http://schemas.microsoft.com/office/powerpoint/2010/main">
-        <mc:Choice Requires="p14">
+      <mc:AlternateContent xmlns:mc="http://schemas.openxmlformats.org/markup-compatibility/2006">
+        <mc:Choice xmlns:p14="http://schemas.microsoft.com/office/powerpoint/2010/main" Requires="p14">
           <p:contentPart p14:bwMode="auto" r:id="rId25">
             <p14:nvContentPartPr>
               <p14:cNvPr id="16" name="Ink 15">
@@ -9554,7 +10202,7 @@
             </p14:xfrm>
           </p:contentPart>
         </mc:Choice>
-        <mc:Fallback xmlns="">
+        <mc:Fallback>
           <p:pic>
             <p:nvPicPr>
               <p:cNvPr id="16" name="Ink 15">
@@ -9585,8 +10233,8 @@
           </p:pic>
         </mc:Fallback>
       </mc:AlternateContent>
-      <mc:AlternateContent xmlns:mc="http://schemas.openxmlformats.org/markup-compatibility/2006" xmlns:p14="http://schemas.microsoft.com/office/powerpoint/2010/main">
-        <mc:Choice Requires="p14">
+      <mc:AlternateContent xmlns:mc="http://schemas.openxmlformats.org/markup-compatibility/2006">
+        <mc:Choice xmlns:p14="http://schemas.microsoft.com/office/powerpoint/2010/main" Requires="p14">
           <p:contentPart p14:bwMode="auto" r:id="rId27">
             <p14:nvContentPartPr>
               <p14:cNvPr id="17" name="Ink 16">
@@ -9605,7 +10253,7 @@
             </p14:xfrm>
           </p:contentPart>
         </mc:Choice>
-        <mc:Fallback xmlns="">
+        <mc:Fallback>
           <p:pic>
             <p:nvPicPr>
               <p:cNvPr id="17" name="Ink 16">
@@ -9636,8 +10284,8 @@
           </p:pic>
         </mc:Fallback>
       </mc:AlternateContent>
-      <mc:AlternateContent xmlns:mc="http://schemas.openxmlformats.org/markup-compatibility/2006" xmlns:p14="http://schemas.microsoft.com/office/powerpoint/2010/main">
-        <mc:Choice Requires="p14">
+      <mc:AlternateContent xmlns:mc="http://schemas.openxmlformats.org/markup-compatibility/2006">
+        <mc:Choice xmlns:p14="http://schemas.microsoft.com/office/powerpoint/2010/main" Requires="p14">
           <p:contentPart p14:bwMode="auto" r:id="rId29">
             <p14:nvContentPartPr>
               <p14:cNvPr id="18" name="Ink 17">
@@ -9656,7 +10304,7 @@
             </p14:xfrm>
           </p:contentPart>
         </mc:Choice>
-        <mc:Fallback xmlns="">
+        <mc:Fallback>
           <p:pic>
             <p:nvPicPr>
               <p:cNvPr id="18" name="Ink 17">
@@ -9687,8 +10335,8 @@
           </p:pic>
         </mc:Fallback>
       </mc:AlternateContent>
-      <mc:AlternateContent xmlns:mc="http://schemas.openxmlformats.org/markup-compatibility/2006" xmlns:p14="http://schemas.microsoft.com/office/powerpoint/2010/main">
-        <mc:Choice Requires="p14">
+      <mc:AlternateContent xmlns:mc="http://schemas.openxmlformats.org/markup-compatibility/2006">
+        <mc:Choice xmlns:p14="http://schemas.microsoft.com/office/powerpoint/2010/main" Requires="p14">
           <p:contentPart p14:bwMode="auto" r:id="rId31">
             <p14:nvContentPartPr>
               <p14:cNvPr id="19" name="Ink 18">
@@ -9707,7 +10355,7 @@
             </p14:xfrm>
           </p:contentPart>
         </mc:Choice>
-        <mc:Fallback xmlns="">
+        <mc:Fallback>
           <p:pic>
             <p:nvPicPr>
               <p:cNvPr id="19" name="Ink 18">
@@ -9738,8 +10386,8 @@
           </p:pic>
         </mc:Fallback>
       </mc:AlternateContent>
-      <mc:AlternateContent xmlns:mc="http://schemas.openxmlformats.org/markup-compatibility/2006" xmlns:p14="http://schemas.microsoft.com/office/powerpoint/2010/main">
-        <mc:Choice Requires="p14">
+      <mc:AlternateContent xmlns:mc="http://schemas.openxmlformats.org/markup-compatibility/2006">
+        <mc:Choice xmlns:p14="http://schemas.microsoft.com/office/powerpoint/2010/main" Requires="p14">
           <p:contentPart p14:bwMode="auto" r:id="rId33">
             <p14:nvContentPartPr>
               <p14:cNvPr id="20" name="Ink 19">
@@ -9758,7 +10406,7 @@
             </p14:xfrm>
           </p:contentPart>
         </mc:Choice>
-        <mc:Fallback xmlns="">
+        <mc:Fallback>
           <p:pic>
             <p:nvPicPr>
               <p:cNvPr id="20" name="Ink 19">
@@ -9789,8 +10437,8 @@
           </p:pic>
         </mc:Fallback>
       </mc:AlternateContent>
-      <mc:AlternateContent xmlns:mc="http://schemas.openxmlformats.org/markup-compatibility/2006" xmlns:p14="http://schemas.microsoft.com/office/powerpoint/2010/main">
-        <mc:Choice Requires="p14">
+      <mc:AlternateContent xmlns:mc="http://schemas.openxmlformats.org/markup-compatibility/2006">
+        <mc:Choice xmlns:p14="http://schemas.microsoft.com/office/powerpoint/2010/main" Requires="p14">
           <p:contentPart p14:bwMode="auto" r:id="rId35">
             <p14:nvContentPartPr>
               <p14:cNvPr id="21" name="Ink 20">
@@ -9809,7 +10457,7 @@
             </p14:xfrm>
           </p:contentPart>
         </mc:Choice>
-        <mc:Fallback xmlns="">
+        <mc:Fallback>
           <p:pic>
             <p:nvPicPr>
               <p:cNvPr id="21" name="Ink 20">
@@ -9840,8 +10488,8 @@
           </p:pic>
         </mc:Fallback>
       </mc:AlternateContent>
-      <mc:AlternateContent xmlns:mc="http://schemas.openxmlformats.org/markup-compatibility/2006" xmlns:p14="http://schemas.microsoft.com/office/powerpoint/2010/main">
-        <mc:Choice Requires="p14">
+      <mc:AlternateContent xmlns:mc="http://schemas.openxmlformats.org/markup-compatibility/2006">
+        <mc:Choice xmlns:p14="http://schemas.microsoft.com/office/powerpoint/2010/main" Requires="p14">
           <p:contentPart p14:bwMode="auto" r:id="rId37">
             <p14:nvContentPartPr>
               <p14:cNvPr id="22" name="Ink 21">
@@ -9860,7 +10508,7 @@
             </p14:xfrm>
           </p:contentPart>
         </mc:Choice>
-        <mc:Fallback xmlns="">
+        <mc:Fallback>
           <p:pic>
             <p:nvPicPr>
               <p:cNvPr id="22" name="Ink 21">
@@ -9891,8 +10539,8 @@
           </p:pic>
         </mc:Fallback>
       </mc:AlternateContent>
-      <mc:AlternateContent xmlns:mc="http://schemas.openxmlformats.org/markup-compatibility/2006" xmlns:p14="http://schemas.microsoft.com/office/powerpoint/2010/main">
-        <mc:Choice Requires="p14">
+      <mc:AlternateContent xmlns:mc="http://schemas.openxmlformats.org/markup-compatibility/2006">
+        <mc:Choice xmlns:p14="http://schemas.microsoft.com/office/powerpoint/2010/main" Requires="p14">
           <p:contentPart p14:bwMode="auto" r:id="rId39">
             <p14:nvContentPartPr>
               <p14:cNvPr id="23" name="Ink 22">
@@ -9911,7 +10559,7 @@
             </p14:xfrm>
           </p:contentPart>
         </mc:Choice>
-        <mc:Fallback xmlns="">
+        <mc:Fallback>
           <p:pic>
             <p:nvPicPr>
               <p:cNvPr id="23" name="Ink 22">
@@ -9942,8 +10590,8 @@
           </p:pic>
         </mc:Fallback>
       </mc:AlternateContent>
-      <mc:AlternateContent xmlns:mc="http://schemas.openxmlformats.org/markup-compatibility/2006" xmlns:p14="http://schemas.microsoft.com/office/powerpoint/2010/main">
-        <mc:Choice Requires="p14">
+      <mc:AlternateContent xmlns:mc="http://schemas.openxmlformats.org/markup-compatibility/2006">
+        <mc:Choice xmlns:p14="http://schemas.microsoft.com/office/powerpoint/2010/main" Requires="p14">
           <p:contentPart p14:bwMode="auto" r:id="rId41">
             <p14:nvContentPartPr>
               <p14:cNvPr id="24" name="Ink 23">
@@ -9962,7 +10610,7 @@
             </p14:xfrm>
           </p:contentPart>
         </mc:Choice>
-        <mc:Fallback xmlns="">
+        <mc:Fallback>
           <p:pic>
             <p:nvPicPr>
               <p:cNvPr id="24" name="Ink 23">
@@ -9993,8 +10641,8 @@
           </p:pic>
         </mc:Fallback>
       </mc:AlternateContent>
-      <mc:AlternateContent xmlns:mc="http://schemas.openxmlformats.org/markup-compatibility/2006" xmlns:p14="http://schemas.microsoft.com/office/powerpoint/2010/main">
-        <mc:Choice Requires="p14">
+      <mc:AlternateContent xmlns:mc="http://schemas.openxmlformats.org/markup-compatibility/2006">
+        <mc:Choice xmlns:p14="http://schemas.microsoft.com/office/powerpoint/2010/main" Requires="p14">
           <p:contentPart p14:bwMode="auto" r:id="rId43">
             <p14:nvContentPartPr>
               <p14:cNvPr id="25" name="Ink 24">
@@ -10013,7 +10661,7 @@
             </p14:xfrm>
           </p:contentPart>
         </mc:Choice>
-        <mc:Fallback xmlns="">
+        <mc:Fallback>
           <p:pic>
             <p:nvPicPr>
               <p:cNvPr id="25" name="Ink 24">
@@ -10044,8 +10692,8 @@
           </p:pic>
         </mc:Fallback>
       </mc:AlternateContent>
-      <mc:AlternateContent xmlns:mc="http://schemas.openxmlformats.org/markup-compatibility/2006" xmlns:p14="http://schemas.microsoft.com/office/powerpoint/2010/main">
-        <mc:Choice Requires="p14">
+      <mc:AlternateContent xmlns:mc="http://schemas.openxmlformats.org/markup-compatibility/2006">
+        <mc:Choice xmlns:p14="http://schemas.microsoft.com/office/powerpoint/2010/main" Requires="p14">
           <p:contentPart p14:bwMode="auto" r:id="rId45">
             <p14:nvContentPartPr>
               <p14:cNvPr id="26" name="Ink 25">
@@ -10064,7 +10712,7 @@
             </p14:xfrm>
           </p:contentPart>
         </mc:Choice>
-        <mc:Fallback xmlns="">
+        <mc:Fallback>
           <p:pic>
             <p:nvPicPr>
               <p:cNvPr id="26" name="Ink 25">
@@ -10095,8 +10743,8 @@
           </p:pic>
         </mc:Fallback>
       </mc:AlternateContent>
-      <mc:AlternateContent xmlns:mc="http://schemas.openxmlformats.org/markup-compatibility/2006" xmlns:p14="http://schemas.microsoft.com/office/powerpoint/2010/main">
-        <mc:Choice Requires="p14">
+      <mc:AlternateContent xmlns:mc="http://schemas.openxmlformats.org/markup-compatibility/2006">
+        <mc:Choice xmlns:p14="http://schemas.microsoft.com/office/powerpoint/2010/main" Requires="p14">
           <p:contentPart p14:bwMode="auto" r:id="rId47">
             <p14:nvContentPartPr>
               <p14:cNvPr id="27" name="Ink 26">
@@ -10115,7 +10763,7 @@
             </p14:xfrm>
           </p:contentPart>
         </mc:Choice>
-        <mc:Fallback xmlns="">
+        <mc:Fallback>
           <p:pic>
             <p:nvPicPr>
               <p:cNvPr id="27" name="Ink 26">
@@ -10146,8 +10794,8 @@
           </p:pic>
         </mc:Fallback>
       </mc:AlternateContent>
-      <mc:AlternateContent xmlns:mc="http://schemas.openxmlformats.org/markup-compatibility/2006" xmlns:p14="http://schemas.microsoft.com/office/powerpoint/2010/main">
-        <mc:Choice Requires="p14">
+      <mc:AlternateContent xmlns:mc="http://schemas.openxmlformats.org/markup-compatibility/2006">
+        <mc:Choice xmlns:p14="http://schemas.microsoft.com/office/powerpoint/2010/main" Requires="p14">
           <p:contentPart p14:bwMode="auto" r:id="rId49">
             <p14:nvContentPartPr>
               <p14:cNvPr id="28" name="Ink 27">
@@ -10166,7 +10814,7 @@
             </p14:xfrm>
           </p:contentPart>
         </mc:Choice>
-        <mc:Fallback xmlns="">
+        <mc:Fallback>
           <p:pic>
             <p:nvPicPr>
               <p:cNvPr id="28" name="Ink 27">
@@ -10197,8 +10845,8 @@
           </p:pic>
         </mc:Fallback>
       </mc:AlternateContent>
-      <mc:AlternateContent xmlns:mc="http://schemas.openxmlformats.org/markup-compatibility/2006" xmlns:p14="http://schemas.microsoft.com/office/powerpoint/2010/main">
-        <mc:Choice Requires="p14">
+      <mc:AlternateContent xmlns:mc="http://schemas.openxmlformats.org/markup-compatibility/2006">
+        <mc:Choice xmlns:p14="http://schemas.microsoft.com/office/powerpoint/2010/main" Requires="p14">
           <p:contentPart p14:bwMode="auto" r:id="rId51">
             <p14:nvContentPartPr>
               <p14:cNvPr id="29" name="Ink 28">
@@ -10217,7 +10865,7 @@
             </p14:xfrm>
           </p:contentPart>
         </mc:Choice>
-        <mc:Fallback xmlns="">
+        <mc:Fallback>
           <p:pic>
             <p:nvPicPr>
               <p:cNvPr id="29" name="Ink 28">
@@ -10248,8 +10896,8 @@
           </p:pic>
         </mc:Fallback>
       </mc:AlternateContent>
-      <mc:AlternateContent xmlns:mc="http://schemas.openxmlformats.org/markup-compatibility/2006" xmlns:p14="http://schemas.microsoft.com/office/powerpoint/2010/main">
-        <mc:Choice Requires="p14">
+      <mc:AlternateContent xmlns:mc="http://schemas.openxmlformats.org/markup-compatibility/2006">
+        <mc:Choice xmlns:p14="http://schemas.microsoft.com/office/powerpoint/2010/main" Requires="p14">
           <p:contentPart p14:bwMode="auto" r:id="rId53">
             <p14:nvContentPartPr>
               <p14:cNvPr id="30" name="Ink 29">
@@ -10268,7 +10916,7 @@
             </p14:xfrm>
           </p:contentPart>
         </mc:Choice>
-        <mc:Fallback xmlns="">
+        <mc:Fallback>
           <p:pic>
             <p:nvPicPr>
               <p:cNvPr id="30" name="Ink 29">
@@ -10299,8 +10947,8 @@
           </p:pic>
         </mc:Fallback>
       </mc:AlternateContent>
-      <mc:AlternateContent xmlns:mc="http://schemas.openxmlformats.org/markup-compatibility/2006" xmlns:p14="http://schemas.microsoft.com/office/powerpoint/2010/main">
-        <mc:Choice Requires="p14">
+      <mc:AlternateContent xmlns:mc="http://schemas.openxmlformats.org/markup-compatibility/2006">
+        <mc:Choice xmlns:p14="http://schemas.microsoft.com/office/powerpoint/2010/main" Requires="p14">
           <p:contentPart p14:bwMode="auto" r:id="rId55">
             <p14:nvContentPartPr>
               <p14:cNvPr id="31" name="Ink 30">
@@ -10319,7 +10967,7 @@
             </p14:xfrm>
           </p:contentPart>
         </mc:Choice>
-        <mc:Fallback xmlns="">
+        <mc:Fallback>
           <p:pic>
             <p:nvPicPr>
               <p:cNvPr id="31" name="Ink 30">
@@ -10350,8 +10998,8 @@
           </p:pic>
         </mc:Fallback>
       </mc:AlternateContent>
-      <mc:AlternateContent xmlns:mc="http://schemas.openxmlformats.org/markup-compatibility/2006" xmlns:p14="http://schemas.microsoft.com/office/powerpoint/2010/main">
-        <mc:Choice Requires="p14">
+      <mc:AlternateContent xmlns:mc="http://schemas.openxmlformats.org/markup-compatibility/2006">
+        <mc:Choice xmlns:p14="http://schemas.microsoft.com/office/powerpoint/2010/main" Requires="p14">
           <p:contentPart p14:bwMode="auto" r:id="rId57">
             <p14:nvContentPartPr>
               <p14:cNvPr id="32" name="Ink 31">
@@ -10370,7 +11018,7 @@
             </p14:xfrm>
           </p:contentPart>
         </mc:Choice>
-        <mc:Fallback xmlns="">
+        <mc:Fallback>
           <p:pic>
             <p:nvPicPr>
               <p:cNvPr id="32" name="Ink 31">
@@ -10401,8 +11049,8 @@
           </p:pic>
         </mc:Fallback>
       </mc:AlternateContent>
-      <mc:AlternateContent xmlns:mc="http://schemas.openxmlformats.org/markup-compatibility/2006" xmlns:p14="http://schemas.microsoft.com/office/powerpoint/2010/main">
-        <mc:Choice Requires="p14">
+      <mc:AlternateContent xmlns:mc="http://schemas.openxmlformats.org/markup-compatibility/2006">
+        <mc:Choice xmlns:p14="http://schemas.microsoft.com/office/powerpoint/2010/main" Requires="p14">
           <p:contentPart p14:bwMode="auto" r:id="rId59">
             <p14:nvContentPartPr>
               <p14:cNvPr id="33" name="Ink 32">
@@ -10421,7 +11069,7 @@
             </p14:xfrm>
           </p:contentPart>
         </mc:Choice>
-        <mc:Fallback xmlns="">
+        <mc:Fallback>
           <p:pic>
             <p:nvPicPr>
               <p:cNvPr id="33" name="Ink 32">
@@ -10452,8 +11100,8 @@
           </p:pic>
         </mc:Fallback>
       </mc:AlternateContent>
-      <mc:AlternateContent xmlns:mc="http://schemas.openxmlformats.org/markup-compatibility/2006" xmlns:p14="http://schemas.microsoft.com/office/powerpoint/2010/main">
-        <mc:Choice Requires="p14">
+      <mc:AlternateContent xmlns:mc="http://schemas.openxmlformats.org/markup-compatibility/2006">
+        <mc:Choice xmlns:p14="http://schemas.microsoft.com/office/powerpoint/2010/main" Requires="p14">
           <p:contentPart p14:bwMode="auto" r:id="rId61">
             <p14:nvContentPartPr>
               <p14:cNvPr id="34" name="Ink 33">
@@ -10472,7 +11120,7 @@
             </p14:xfrm>
           </p:contentPart>
         </mc:Choice>
-        <mc:Fallback xmlns="">
+        <mc:Fallback>
           <p:pic>
             <p:nvPicPr>
               <p:cNvPr id="34" name="Ink 33">
@@ -10503,8 +11151,8 @@
           </p:pic>
         </mc:Fallback>
       </mc:AlternateContent>
-      <mc:AlternateContent xmlns:mc="http://schemas.openxmlformats.org/markup-compatibility/2006" xmlns:p14="http://schemas.microsoft.com/office/powerpoint/2010/main">
-        <mc:Choice Requires="p14">
+      <mc:AlternateContent xmlns:mc="http://schemas.openxmlformats.org/markup-compatibility/2006">
+        <mc:Choice xmlns:p14="http://schemas.microsoft.com/office/powerpoint/2010/main" Requires="p14">
           <p:contentPart p14:bwMode="auto" r:id="rId63">
             <p14:nvContentPartPr>
               <p14:cNvPr id="35" name="Ink 34">
@@ -10523,7 +11171,7 @@
             </p14:xfrm>
           </p:contentPart>
         </mc:Choice>
-        <mc:Fallback xmlns="">
+        <mc:Fallback>
           <p:pic>
             <p:nvPicPr>
               <p:cNvPr id="35" name="Ink 34">
@@ -10554,8 +11202,8 @@
           </p:pic>
         </mc:Fallback>
       </mc:AlternateContent>
-      <mc:AlternateContent xmlns:mc="http://schemas.openxmlformats.org/markup-compatibility/2006" xmlns:p14="http://schemas.microsoft.com/office/powerpoint/2010/main">
-        <mc:Choice Requires="p14">
+      <mc:AlternateContent xmlns:mc="http://schemas.openxmlformats.org/markup-compatibility/2006">
+        <mc:Choice xmlns:p14="http://schemas.microsoft.com/office/powerpoint/2010/main" Requires="p14">
           <p:contentPart p14:bwMode="auto" r:id="rId65">
             <p14:nvContentPartPr>
               <p14:cNvPr id="36" name="Ink 35">
@@ -10574,7 +11222,7 @@
             </p14:xfrm>
           </p:contentPart>
         </mc:Choice>
-        <mc:Fallback xmlns="">
+        <mc:Fallback>
           <p:pic>
             <p:nvPicPr>
               <p:cNvPr id="36" name="Ink 35">
@@ -10605,8 +11253,8 @@
           </p:pic>
         </mc:Fallback>
       </mc:AlternateContent>
-      <mc:AlternateContent xmlns:mc="http://schemas.openxmlformats.org/markup-compatibility/2006" xmlns:p14="http://schemas.microsoft.com/office/powerpoint/2010/main">
-        <mc:Choice Requires="p14">
+      <mc:AlternateContent xmlns:mc="http://schemas.openxmlformats.org/markup-compatibility/2006">
+        <mc:Choice xmlns:p14="http://schemas.microsoft.com/office/powerpoint/2010/main" Requires="p14">
           <p:contentPart p14:bwMode="auto" r:id="rId67">
             <p14:nvContentPartPr>
               <p14:cNvPr id="37" name="Ink 36">
@@ -10625,7 +11273,7 @@
             </p14:xfrm>
           </p:contentPart>
         </mc:Choice>
-        <mc:Fallback xmlns="">
+        <mc:Fallback>
           <p:pic>
             <p:nvPicPr>
               <p:cNvPr id="37" name="Ink 36">
@@ -10656,8 +11304,8 @@
           </p:pic>
         </mc:Fallback>
       </mc:AlternateContent>
-      <mc:AlternateContent xmlns:mc="http://schemas.openxmlformats.org/markup-compatibility/2006" xmlns:p14="http://schemas.microsoft.com/office/powerpoint/2010/main">
-        <mc:Choice Requires="p14">
+      <mc:AlternateContent xmlns:mc="http://schemas.openxmlformats.org/markup-compatibility/2006">
+        <mc:Choice xmlns:p14="http://schemas.microsoft.com/office/powerpoint/2010/main" Requires="p14">
           <p:contentPart p14:bwMode="auto" r:id="rId69">
             <p14:nvContentPartPr>
               <p14:cNvPr id="38" name="Ink 37">
@@ -10676,7 +11324,7 @@
             </p14:xfrm>
           </p:contentPart>
         </mc:Choice>
-        <mc:Fallback xmlns="">
+        <mc:Fallback>
           <p:pic>
             <p:nvPicPr>
               <p:cNvPr id="38" name="Ink 37">
@@ -10707,8 +11355,8 @@
           </p:pic>
         </mc:Fallback>
       </mc:AlternateContent>
-      <mc:AlternateContent xmlns:mc="http://schemas.openxmlformats.org/markup-compatibility/2006" xmlns:p14="http://schemas.microsoft.com/office/powerpoint/2010/main">
-        <mc:Choice Requires="p14">
+      <mc:AlternateContent xmlns:mc="http://schemas.openxmlformats.org/markup-compatibility/2006">
+        <mc:Choice xmlns:p14="http://schemas.microsoft.com/office/powerpoint/2010/main" Requires="p14">
           <p:contentPart p14:bwMode="auto" r:id="rId71">
             <p14:nvContentPartPr>
               <p14:cNvPr id="39" name="Ink 38">
@@ -10727,7 +11375,7 @@
             </p14:xfrm>
           </p:contentPart>
         </mc:Choice>
-        <mc:Fallback xmlns="">
+        <mc:Fallback>
           <p:pic>
             <p:nvPicPr>
               <p:cNvPr id="39" name="Ink 38">
@@ -10758,8 +11406,8 @@
           </p:pic>
         </mc:Fallback>
       </mc:AlternateContent>
-      <mc:AlternateContent xmlns:mc="http://schemas.openxmlformats.org/markup-compatibility/2006" xmlns:p14="http://schemas.microsoft.com/office/powerpoint/2010/main">
-        <mc:Choice Requires="p14">
+      <mc:AlternateContent xmlns:mc="http://schemas.openxmlformats.org/markup-compatibility/2006">
+        <mc:Choice xmlns:p14="http://schemas.microsoft.com/office/powerpoint/2010/main" Requires="p14">
           <p:contentPart p14:bwMode="auto" r:id="rId73">
             <p14:nvContentPartPr>
               <p14:cNvPr id="40" name="Ink 39">
@@ -10778,7 +11426,7 @@
             </p14:xfrm>
           </p:contentPart>
         </mc:Choice>
-        <mc:Fallback xmlns="">
+        <mc:Fallback>
           <p:pic>
             <p:nvPicPr>
               <p:cNvPr id="40" name="Ink 39">
@@ -10809,8 +11457,8 @@
           </p:pic>
         </mc:Fallback>
       </mc:AlternateContent>
-      <mc:AlternateContent xmlns:mc="http://schemas.openxmlformats.org/markup-compatibility/2006" xmlns:p14="http://schemas.microsoft.com/office/powerpoint/2010/main">
-        <mc:Choice Requires="p14">
+      <mc:AlternateContent xmlns:mc="http://schemas.openxmlformats.org/markup-compatibility/2006">
+        <mc:Choice xmlns:p14="http://schemas.microsoft.com/office/powerpoint/2010/main" Requires="p14">
           <p:contentPart p14:bwMode="auto" r:id="rId75">
             <p14:nvContentPartPr>
               <p14:cNvPr id="41" name="Ink 40">
@@ -10829,7 +11477,7 @@
             </p14:xfrm>
           </p:contentPart>
         </mc:Choice>
-        <mc:Fallback xmlns="">
+        <mc:Fallback>
           <p:pic>
             <p:nvPicPr>
               <p:cNvPr id="41" name="Ink 40">
@@ -10860,8 +11508,8 @@
           </p:pic>
         </mc:Fallback>
       </mc:AlternateContent>
-      <mc:AlternateContent xmlns:mc="http://schemas.openxmlformats.org/markup-compatibility/2006" xmlns:p14="http://schemas.microsoft.com/office/powerpoint/2010/main">
-        <mc:Choice Requires="p14">
+      <mc:AlternateContent xmlns:mc="http://schemas.openxmlformats.org/markup-compatibility/2006">
+        <mc:Choice xmlns:p14="http://schemas.microsoft.com/office/powerpoint/2010/main" Requires="p14">
           <p:contentPart p14:bwMode="auto" r:id="rId77">
             <p14:nvContentPartPr>
               <p14:cNvPr id="42" name="Ink 41">
@@ -10880,7 +11528,7 @@
             </p14:xfrm>
           </p:contentPart>
         </mc:Choice>
-        <mc:Fallback xmlns="">
+        <mc:Fallback>
           <p:pic>
             <p:nvPicPr>
               <p:cNvPr id="42" name="Ink 41">
@@ -10911,8 +11559,8 @@
           </p:pic>
         </mc:Fallback>
       </mc:AlternateContent>
-      <mc:AlternateContent xmlns:mc="http://schemas.openxmlformats.org/markup-compatibility/2006" xmlns:p14="http://schemas.microsoft.com/office/powerpoint/2010/main">
-        <mc:Choice Requires="p14">
+      <mc:AlternateContent xmlns:mc="http://schemas.openxmlformats.org/markup-compatibility/2006">
+        <mc:Choice xmlns:p14="http://schemas.microsoft.com/office/powerpoint/2010/main" Requires="p14">
           <p:contentPart p14:bwMode="auto" r:id="rId79">
             <p14:nvContentPartPr>
               <p14:cNvPr id="43" name="Ink 42">
@@ -10931,7 +11579,7 @@
             </p14:xfrm>
           </p:contentPart>
         </mc:Choice>
-        <mc:Fallback xmlns="">
+        <mc:Fallback>
           <p:pic>
             <p:nvPicPr>
               <p:cNvPr id="43" name="Ink 42">
@@ -10962,8 +11610,8 @@
           </p:pic>
         </mc:Fallback>
       </mc:AlternateContent>
-      <mc:AlternateContent xmlns:mc="http://schemas.openxmlformats.org/markup-compatibility/2006" xmlns:p14="http://schemas.microsoft.com/office/powerpoint/2010/main">
-        <mc:Choice Requires="p14">
+      <mc:AlternateContent xmlns:mc="http://schemas.openxmlformats.org/markup-compatibility/2006">
+        <mc:Choice xmlns:p14="http://schemas.microsoft.com/office/powerpoint/2010/main" Requires="p14">
           <p:contentPart p14:bwMode="auto" r:id="rId81">
             <p14:nvContentPartPr>
               <p14:cNvPr id="44" name="Ink 43">
@@ -10982,7 +11630,7 @@
             </p14:xfrm>
           </p:contentPart>
         </mc:Choice>
-        <mc:Fallback xmlns="">
+        <mc:Fallback>
           <p:pic>
             <p:nvPicPr>
               <p:cNvPr id="44" name="Ink 43">
@@ -11013,8 +11661,8 @@
           </p:pic>
         </mc:Fallback>
       </mc:AlternateContent>
-      <mc:AlternateContent xmlns:mc="http://schemas.openxmlformats.org/markup-compatibility/2006" xmlns:p14="http://schemas.microsoft.com/office/powerpoint/2010/main">
-        <mc:Choice Requires="p14">
+      <mc:AlternateContent xmlns:mc="http://schemas.openxmlformats.org/markup-compatibility/2006">
+        <mc:Choice xmlns:p14="http://schemas.microsoft.com/office/powerpoint/2010/main" Requires="p14">
           <p:contentPart p14:bwMode="auto" r:id="rId83">
             <p14:nvContentPartPr>
               <p14:cNvPr id="45" name="Ink 44">
@@ -11033,7 +11681,7 @@
             </p14:xfrm>
           </p:contentPart>
         </mc:Choice>
-        <mc:Fallback xmlns="">
+        <mc:Fallback>
           <p:pic>
             <p:nvPicPr>
               <p:cNvPr id="45" name="Ink 44">
@@ -11064,8 +11712,8 @@
           </p:pic>
         </mc:Fallback>
       </mc:AlternateContent>
-      <mc:AlternateContent xmlns:mc="http://schemas.openxmlformats.org/markup-compatibility/2006" xmlns:p14="http://schemas.microsoft.com/office/powerpoint/2010/main">
-        <mc:Choice Requires="p14">
+      <mc:AlternateContent xmlns:mc="http://schemas.openxmlformats.org/markup-compatibility/2006">
+        <mc:Choice xmlns:p14="http://schemas.microsoft.com/office/powerpoint/2010/main" Requires="p14">
           <p:contentPart p14:bwMode="auto" r:id="rId85">
             <p14:nvContentPartPr>
               <p14:cNvPr id="46" name="Ink 45">
@@ -11084,7 +11732,7 @@
             </p14:xfrm>
           </p:contentPart>
         </mc:Choice>
-        <mc:Fallback xmlns="">
+        <mc:Fallback>
           <p:pic>
             <p:nvPicPr>
               <p:cNvPr id="46" name="Ink 45">
@@ -11115,8 +11763,8 @@
           </p:pic>
         </mc:Fallback>
       </mc:AlternateContent>
-      <mc:AlternateContent xmlns:mc="http://schemas.openxmlformats.org/markup-compatibility/2006" xmlns:p14="http://schemas.microsoft.com/office/powerpoint/2010/main">
-        <mc:Choice Requires="p14">
+      <mc:AlternateContent xmlns:mc="http://schemas.openxmlformats.org/markup-compatibility/2006">
+        <mc:Choice xmlns:p14="http://schemas.microsoft.com/office/powerpoint/2010/main" Requires="p14">
           <p:contentPart p14:bwMode="auto" r:id="rId87">
             <p14:nvContentPartPr>
               <p14:cNvPr id="47" name="Ink 46">
@@ -11135,7 +11783,7 @@
             </p14:xfrm>
           </p:contentPart>
         </mc:Choice>
-        <mc:Fallback xmlns="">
+        <mc:Fallback>
           <p:pic>
             <p:nvPicPr>
               <p:cNvPr id="47" name="Ink 46">
@@ -11166,8 +11814,8 @@
           </p:pic>
         </mc:Fallback>
       </mc:AlternateContent>
-      <mc:AlternateContent xmlns:mc="http://schemas.openxmlformats.org/markup-compatibility/2006" xmlns:p14="http://schemas.microsoft.com/office/powerpoint/2010/main">
-        <mc:Choice Requires="p14">
+      <mc:AlternateContent xmlns:mc="http://schemas.openxmlformats.org/markup-compatibility/2006">
+        <mc:Choice xmlns:p14="http://schemas.microsoft.com/office/powerpoint/2010/main" Requires="p14">
           <p:contentPart p14:bwMode="auto" r:id="rId89">
             <p14:nvContentPartPr>
               <p14:cNvPr id="48" name="Ink 47">
@@ -11186,7 +11834,7 @@
             </p14:xfrm>
           </p:contentPart>
         </mc:Choice>
-        <mc:Fallback xmlns="">
+        <mc:Fallback>
           <p:pic>
             <p:nvPicPr>
               <p:cNvPr id="48" name="Ink 47">
@@ -11217,8 +11865,8 @@
           </p:pic>
         </mc:Fallback>
       </mc:AlternateContent>
-      <mc:AlternateContent xmlns:mc="http://schemas.openxmlformats.org/markup-compatibility/2006" xmlns:p14="http://schemas.microsoft.com/office/powerpoint/2010/main">
-        <mc:Choice Requires="p14">
+      <mc:AlternateContent xmlns:mc="http://schemas.openxmlformats.org/markup-compatibility/2006">
+        <mc:Choice xmlns:p14="http://schemas.microsoft.com/office/powerpoint/2010/main" Requires="p14">
           <p:contentPart p14:bwMode="auto" r:id="rId91">
             <p14:nvContentPartPr>
               <p14:cNvPr id="49" name="Ink 48">
@@ -11237,7 +11885,7 @@
             </p14:xfrm>
           </p:contentPart>
         </mc:Choice>
-        <mc:Fallback xmlns="">
+        <mc:Fallback>
           <p:pic>
             <p:nvPicPr>
               <p:cNvPr id="49" name="Ink 48">
@@ -11268,8 +11916,8 @@
           </p:pic>
         </mc:Fallback>
       </mc:AlternateContent>
-      <mc:AlternateContent xmlns:mc="http://schemas.openxmlformats.org/markup-compatibility/2006" xmlns:p14="http://schemas.microsoft.com/office/powerpoint/2010/main">
-        <mc:Choice Requires="p14">
+      <mc:AlternateContent xmlns:mc="http://schemas.openxmlformats.org/markup-compatibility/2006">
+        <mc:Choice xmlns:p14="http://schemas.microsoft.com/office/powerpoint/2010/main" Requires="p14">
           <p:contentPart p14:bwMode="auto" r:id="rId93">
             <p14:nvContentPartPr>
               <p14:cNvPr id="50" name="Ink 49">
@@ -11288,7 +11936,7 @@
             </p14:xfrm>
           </p:contentPart>
         </mc:Choice>
-        <mc:Fallback xmlns="">
+        <mc:Fallback>
           <p:pic>
             <p:nvPicPr>
               <p:cNvPr id="50" name="Ink 49">
@@ -11319,8 +11967,8 @@
           </p:pic>
         </mc:Fallback>
       </mc:AlternateContent>
-      <mc:AlternateContent xmlns:mc="http://schemas.openxmlformats.org/markup-compatibility/2006" xmlns:p14="http://schemas.microsoft.com/office/powerpoint/2010/main">
-        <mc:Choice Requires="p14">
+      <mc:AlternateContent xmlns:mc="http://schemas.openxmlformats.org/markup-compatibility/2006">
+        <mc:Choice xmlns:p14="http://schemas.microsoft.com/office/powerpoint/2010/main" Requires="p14">
           <p:contentPart p14:bwMode="auto" r:id="rId95">
             <p14:nvContentPartPr>
               <p14:cNvPr id="51" name="Ink 50">
@@ -11339,7 +11987,7 @@
             </p14:xfrm>
           </p:contentPart>
         </mc:Choice>
-        <mc:Fallback xmlns="">
+        <mc:Fallback>
           <p:pic>
             <p:nvPicPr>
               <p:cNvPr id="51" name="Ink 50">
@@ -11370,8 +12018,8 @@
           </p:pic>
         </mc:Fallback>
       </mc:AlternateContent>
-      <mc:AlternateContent xmlns:mc="http://schemas.openxmlformats.org/markup-compatibility/2006" xmlns:p14="http://schemas.microsoft.com/office/powerpoint/2010/main">
-        <mc:Choice Requires="p14">
+      <mc:AlternateContent xmlns:mc="http://schemas.openxmlformats.org/markup-compatibility/2006">
+        <mc:Choice xmlns:p14="http://schemas.microsoft.com/office/powerpoint/2010/main" Requires="p14">
           <p:contentPart p14:bwMode="auto" r:id="rId97">
             <p14:nvContentPartPr>
               <p14:cNvPr id="52" name="Ink 51">
@@ -11390,7 +12038,7 @@
             </p14:xfrm>
           </p:contentPart>
         </mc:Choice>
-        <mc:Fallback xmlns="">
+        <mc:Fallback>
           <p:pic>
             <p:nvPicPr>
               <p:cNvPr id="52" name="Ink 51">
@@ -11421,8 +12069,8 @@
           </p:pic>
         </mc:Fallback>
       </mc:AlternateContent>
-      <mc:AlternateContent xmlns:mc="http://schemas.openxmlformats.org/markup-compatibility/2006" xmlns:p14="http://schemas.microsoft.com/office/powerpoint/2010/main">
-        <mc:Choice Requires="p14">
+      <mc:AlternateContent xmlns:mc="http://schemas.openxmlformats.org/markup-compatibility/2006">
+        <mc:Choice xmlns:p14="http://schemas.microsoft.com/office/powerpoint/2010/main" Requires="p14">
           <p:contentPart p14:bwMode="auto" r:id="rId99">
             <p14:nvContentPartPr>
               <p14:cNvPr id="53" name="Ink 52">
@@ -11441,7 +12089,7 @@
             </p14:xfrm>
           </p:contentPart>
         </mc:Choice>
-        <mc:Fallback xmlns="">
+        <mc:Fallback>
           <p:pic>
             <p:nvPicPr>
               <p:cNvPr id="53" name="Ink 52">
@@ -11472,8 +12120,8 @@
           </p:pic>
         </mc:Fallback>
       </mc:AlternateContent>
-      <mc:AlternateContent xmlns:mc="http://schemas.openxmlformats.org/markup-compatibility/2006" xmlns:p14="http://schemas.microsoft.com/office/powerpoint/2010/main">
-        <mc:Choice Requires="p14">
+      <mc:AlternateContent xmlns:mc="http://schemas.openxmlformats.org/markup-compatibility/2006">
+        <mc:Choice xmlns:p14="http://schemas.microsoft.com/office/powerpoint/2010/main" Requires="p14">
           <p:contentPart p14:bwMode="auto" r:id="rId101">
             <p14:nvContentPartPr>
               <p14:cNvPr id="54" name="Ink 53">
@@ -11492,7 +12140,7 @@
             </p14:xfrm>
           </p:contentPart>
         </mc:Choice>
-        <mc:Fallback xmlns="">
+        <mc:Fallback>
           <p:pic>
             <p:nvPicPr>
               <p:cNvPr id="54" name="Ink 53">
@@ -11523,8 +12171,8 @@
           </p:pic>
         </mc:Fallback>
       </mc:AlternateContent>
-      <mc:AlternateContent xmlns:mc="http://schemas.openxmlformats.org/markup-compatibility/2006" xmlns:p14="http://schemas.microsoft.com/office/powerpoint/2010/main">
-        <mc:Choice Requires="p14">
+      <mc:AlternateContent xmlns:mc="http://schemas.openxmlformats.org/markup-compatibility/2006">
+        <mc:Choice xmlns:p14="http://schemas.microsoft.com/office/powerpoint/2010/main" Requires="p14">
           <p:contentPart p14:bwMode="auto" r:id="rId103">
             <p14:nvContentPartPr>
               <p14:cNvPr id="55" name="Ink 54">
@@ -11543,7 +12191,7 @@
             </p14:xfrm>
           </p:contentPart>
         </mc:Choice>
-        <mc:Fallback xmlns="">
+        <mc:Fallback>
           <p:pic>
             <p:nvPicPr>
               <p:cNvPr id="55" name="Ink 54">
@@ -11574,8 +12222,8 @@
           </p:pic>
         </mc:Fallback>
       </mc:AlternateContent>
-      <mc:AlternateContent xmlns:mc="http://schemas.openxmlformats.org/markup-compatibility/2006" xmlns:p14="http://schemas.microsoft.com/office/powerpoint/2010/main">
-        <mc:Choice Requires="p14">
+      <mc:AlternateContent xmlns:mc="http://schemas.openxmlformats.org/markup-compatibility/2006">
+        <mc:Choice xmlns:p14="http://schemas.microsoft.com/office/powerpoint/2010/main" Requires="p14">
           <p:contentPart p14:bwMode="auto" r:id="rId105">
             <p14:nvContentPartPr>
               <p14:cNvPr id="56" name="Ink 55">
@@ -11594,7 +12242,7 @@
             </p14:xfrm>
           </p:contentPart>
         </mc:Choice>
-        <mc:Fallback xmlns="">
+        <mc:Fallback>
           <p:pic>
             <p:nvPicPr>
               <p:cNvPr id="56" name="Ink 55">
@@ -11625,8 +12273,8 @@
           </p:pic>
         </mc:Fallback>
       </mc:AlternateContent>
-      <mc:AlternateContent xmlns:mc="http://schemas.openxmlformats.org/markup-compatibility/2006" xmlns:p14="http://schemas.microsoft.com/office/powerpoint/2010/main">
-        <mc:Choice Requires="p14">
+      <mc:AlternateContent xmlns:mc="http://schemas.openxmlformats.org/markup-compatibility/2006">
+        <mc:Choice xmlns:p14="http://schemas.microsoft.com/office/powerpoint/2010/main" Requires="p14">
           <p:contentPart p14:bwMode="auto" r:id="rId107">
             <p14:nvContentPartPr>
               <p14:cNvPr id="57" name="Ink 56">
@@ -11645,7 +12293,7 @@
             </p14:xfrm>
           </p:contentPart>
         </mc:Choice>
-        <mc:Fallback xmlns="">
+        <mc:Fallback>
           <p:pic>
             <p:nvPicPr>
               <p:cNvPr id="57" name="Ink 56">
@@ -11676,8 +12324,8 @@
           </p:pic>
         </mc:Fallback>
       </mc:AlternateContent>
-      <mc:AlternateContent xmlns:mc="http://schemas.openxmlformats.org/markup-compatibility/2006" xmlns:p14="http://schemas.microsoft.com/office/powerpoint/2010/main">
-        <mc:Choice Requires="p14">
+      <mc:AlternateContent xmlns:mc="http://schemas.openxmlformats.org/markup-compatibility/2006">
+        <mc:Choice xmlns:p14="http://schemas.microsoft.com/office/powerpoint/2010/main" Requires="p14">
           <p:contentPart p14:bwMode="auto" r:id="rId109">
             <p14:nvContentPartPr>
               <p14:cNvPr id="58" name="Ink 57">
@@ -11696,7 +12344,7 @@
             </p14:xfrm>
           </p:contentPart>
         </mc:Choice>
-        <mc:Fallback xmlns="">
+        <mc:Fallback>
           <p:pic>
             <p:nvPicPr>
               <p:cNvPr id="58" name="Ink 57">
@@ -11727,8 +12375,8 @@
           </p:pic>
         </mc:Fallback>
       </mc:AlternateContent>
-      <mc:AlternateContent xmlns:mc="http://schemas.openxmlformats.org/markup-compatibility/2006" xmlns:p14="http://schemas.microsoft.com/office/powerpoint/2010/main">
-        <mc:Choice Requires="p14">
+      <mc:AlternateContent xmlns:mc="http://schemas.openxmlformats.org/markup-compatibility/2006">
+        <mc:Choice xmlns:p14="http://schemas.microsoft.com/office/powerpoint/2010/main" Requires="p14">
           <p:contentPart p14:bwMode="auto" r:id="rId111">
             <p14:nvContentPartPr>
               <p14:cNvPr id="59" name="Ink 58">
@@ -11747,7 +12395,7 @@
             </p14:xfrm>
           </p:contentPart>
         </mc:Choice>
-        <mc:Fallback xmlns="">
+        <mc:Fallback>
           <p:pic>
             <p:nvPicPr>
               <p:cNvPr id="59" name="Ink 58">
@@ -11778,8 +12426,8 @@
           </p:pic>
         </mc:Fallback>
       </mc:AlternateContent>
-      <mc:AlternateContent xmlns:mc="http://schemas.openxmlformats.org/markup-compatibility/2006" xmlns:p14="http://schemas.microsoft.com/office/powerpoint/2010/main">
-        <mc:Choice Requires="p14">
+      <mc:AlternateContent xmlns:mc="http://schemas.openxmlformats.org/markup-compatibility/2006">
+        <mc:Choice xmlns:p14="http://schemas.microsoft.com/office/powerpoint/2010/main" Requires="p14">
           <p:contentPart p14:bwMode="auto" r:id="rId113">
             <p14:nvContentPartPr>
               <p14:cNvPr id="60" name="Ink 59">
@@ -11798,7 +12446,7 @@
             </p14:xfrm>
           </p:contentPart>
         </mc:Choice>
-        <mc:Fallback xmlns="">
+        <mc:Fallback>
           <p:pic>
             <p:nvPicPr>
               <p:cNvPr id="60" name="Ink 59">
@@ -11829,8 +12477,8 @@
           </p:pic>
         </mc:Fallback>
       </mc:AlternateContent>
-      <mc:AlternateContent xmlns:mc="http://schemas.openxmlformats.org/markup-compatibility/2006" xmlns:p14="http://schemas.microsoft.com/office/powerpoint/2010/main">
-        <mc:Choice Requires="p14">
+      <mc:AlternateContent xmlns:mc="http://schemas.openxmlformats.org/markup-compatibility/2006">
+        <mc:Choice xmlns:p14="http://schemas.microsoft.com/office/powerpoint/2010/main" Requires="p14">
           <p:contentPart p14:bwMode="auto" r:id="rId115">
             <p14:nvContentPartPr>
               <p14:cNvPr id="61" name="Ink 60">
@@ -11849,7 +12497,7 @@
             </p14:xfrm>
           </p:contentPart>
         </mc:Choice>
-        <mc:Fallback xmlns="">
+        <mc:Fallback>
           <p:pic>
             <p:nvPicPr>
               <p:cNvPr id="61" name="Ink 60">
@@ -11880,8 +12528,8 @@
           </p:pic>
         </mc:Fallback>
       </mc:AlternateContent>
-      <mc:AlternateContent xmlns:mc="http://schemas.openxmlformats.org/markup-compatibility/2006" xmlns:p14="http://schemas.microsoft.com/office/powerpoint/2010/main">
-        <mc:Choice Requires="p14">
+      <mc:AlternateContent xmlns:mc="http://schemas.openxmlformats.org/markup-compatibility/2006">
+        <mc:Choice xmlns:p14="http://schemas.microsoft.com/office/powerpoint/2010/main" Requires="p14">
           <p:contentPart p14:bwMode="auto" r:id="rId117">
             <p14:nvContentPartPr>
               <p14:cNvPr id="62" name="Ink 61">
@@ -11900,7 +12548,7 @@
             </p14:xfrm>
           </p:contentPart>
         </mc:Choice>
-        <mc:Fallback xmlns="">
+        <mc:Fallback>
           <p:pic>
             <p:nvPicPr>
               <p:cNvPr id="62" name="Ink 61">
@@ -11931,8 +12579,8 @@
           </p:pic>
         </mc:Fallback>
       </mc:AlternateContent>
-      <mc:AlternateContent xmlns:mc="http://schemas.openxmlformats.org/markup-compatibility/2006" xmlns:p14="http://schemas.microsoft.com/office/powerpoint/2010/main">
-        <mc:Choice Requires="p14">
+      <mc:AlternateContent xmlns:mc="http://schemas.openxmlformats.org/markup-compatibility/2006">
+        <mc:Choice xmlns:p14="http://schemas.microsoft.com/office/powerpoint/2010/main" Requires="p14">
           <p:contentPart p14:bwMode="auto" r:id="rId119">
             <p14:nvContentPartPr>
               <p14:cNvPr id="63" name="Ink 62">
@@ -11951,7 +12599,7 @@
             </p14:xfrm>
           </p:contentPart>
         </mc:Choice>
-        <mc:Fallback xmlns="">
+        <mc:Fallback>
           <p:pic>
             <p:nvPicPr>
               <p:cNvPr id="63" name="Ink 62">
@@ -11982,8 +12630,8 @@
           </p:pic>
         </mc:Fallback>
       </mc:AlternateContent>
-      <mc:AlternateContent xmlns:mc="http://schemas.openxmlformats.org/markup-compatibility/2006" xmlns:p14="http://schemas.microsoft.com/office/powerpoint/2010/main">
-        <mc:Choice Requires="p14">
+      <mc:AlternateContent xmlns:mc="http://schemas.openxmlformats.org/markup-compatibility/2006">
+        <mc:Choice xmlns:p14="http://schemas.microsoft.com/office/powerpoint/2010/main" Requires="p14">
           <p:contentPart p14:bwMode="auto" r:id="rId121">
             <p14:nvContentPartPr>
               <p14:cNvPr id="64" name="Ink 63">
@@ -12002,7 +12650,7 @@
             </p14:xfrm>
           </p:contentPart>
         </mc:Choice>
-        <mc:Fallback xmlns="">
+        <mc:Fallback>
           <p:pic>
             <p:nvPicPr>
               <p:cNvPr id="64" name="Ink 63">
@@ -12033,8 +12681,8 @@
           </p:pic>
         </mc:Fallback>
       </mc:AlternateContent>
-      <mc:AlternateContent xmlns:mc="http://schemas.openxmlformats.org/markup-compatibility/2006" xmlns:p14="http://schemas.microsoft.com/office/powerpoint/2010/main">
-        <mc:Choice Requires="p14">
+      <mc:AlternateContent xmlns:mc="http://schemas.openxmlformats.org/markup-compatibility/2006">
+        <mc:Choice xmlns:p14="http://schemas.microsoft.com/office/powerpoint/2010/main" Requires="p14">
           <p:contentPart p14:bwMode="auto" r:id="rId123">
             <p14:nvContentPartPr>
               <p14:cNvPr id="65" name="Ink 64">
@@ -12053,7 +12701,7 @@
             </p14:xfrm>
           </p:contentPart>
         </mc:Choice>
-        <mc:Fallback xmlns="">
+        <mc:Fallback>
           <p:pic>
             <p:nvPicPr>
               <p:cNvPr id="65" name="Ink 64">
@@ -12084,8 +12732,8 @@
           </p:pic>
         </mc:Fallback>
       </mc:AlternateContent>
-      <mc:AlternateContent xmlns:mc="http://schemas.openxmlformats.org/markup-compatibility/2006" xmlns:p14="http://schemas.microsoft.com/office/powerpoint/2010/main">
-        <mc:Choice Requires="p14">
+      <mc:AlternateContent xmlns:mc="http://schemas.openxmlformats.org/markup-compatibility/2006">
+        <mc:Choice xmlns:p14="http://schemas.microsoft.com/office/powerpoint/2010/main" Requires="p14">
           <p:contentPart p14:bwMode="auto" r:id="rId125">
             <p14:nvContentPartPr>
               <p14:cNvPr id="66" name="Ink 65">
@@ -12104,7 +12752,7 @@
             </p14:xfrm>
           </p:contentPart>
         </mc:Choice>
-        <mc:Fallback xmlns="">
+        <mc:Fallback>
           <p:pic>
             <p:nvPicPr>
               <p:cNvPr id="66" name="Ink 65">
@@ -12135,8 +12783,8 @@
           </p:pic>
         </mc:Fallback>
       </mc:AlternateContent>
-      <mc:AlternateContent xmlns:mc="http://schemas.openxmlformats.org/markup-compatibility/2006" xmlns:p14="http://schemas.microsoft.com/office/powerpoint/2010/main">
-        <mc:Choice Requires="p14">
+      <mc:AlternateContent xmlns:mc="http://schemas.openxmlformats.org/markup-compatibility/2006">
+        <mc:Choice xmlns:p14="http://schemas.microsoft.com/office/powerpoint/2010/main" Requires="p14">
           <p:contentPart p14:bwMode="auto" r:id="rId127">
             <p14:nvContentPartPr>
               <p14:cNvPr id="67" name="Ink 66">
@@ -12155,7 +12803,7 @@
             </p14:xfrm>
           </p:contentPart>
         </mc:Choice>
-        <mc:Fallback xmlns="">
+        <mc:Fallback>
           <p:pic>
             <p:nvPicPr>
               <p:cNvPr id="67" name="Ink 66">
@@ -12186,8 +12834,8 @@
           </p:pic>
         </mc:Fallback>
       </mc:AlternateContent>
-      <mc:AlternateContent xmlns:mc="http://schemas.openxmlformats.org/markup-compatibility/2006" xmlns:p14="http://schemas.microsoft.com/office/powerpoint/2010/main">
-        <mc:Choice Requires="p14">
+      <mc:AlternateContent xmlns:mc="http://schemas.openxmlformats.org/markup-compatibility/2006">
+        <mc:Choice xmlns:p14="http://schemas.microsoft.com/office/powerpoint/2010/main" Requires="p14">
           <p:contentPart p14:bwMode="auto" r:id="rId129">
             <p14:nvContentPartPr>
               <p14:cNvPr id="68" name="Ink 67">
@@ -12206,7 +12854,7 @@
             </p14:xfrm>
           </p:contentPart>
         </mc:Choice>
-        <mc:Fallback xmlns="">
+        <mc:Fallback>
           <p:pic>
             <p:nvPicPr>
               <p:cNvPr id="68" name="Ink 67">
@@ -12237,8 +12885,8 @@
           </p:pic>
         </mc:Fallback>
       </mc:AlternateContent>
-      <mc:AlternateContent xmlns:mc="http://schemas.openxmlformats.org/markup-compatibility/2006" xmlns:p14="http://schemas.microsoft.com/office/powerpoint/2010/main">
-        <mc:Choice Requires="p14">
+      <mc:AlternateContent xmlns:mc="http://schemas.openxmlformats.org/markup-compatibility/2006">
+        <mc:Choice xmlns:p14="http://schemas.microsoft.com/office/powerpoint/2010/main" Requires="p14">
           <p:contentPart p14:bwMode="auto" r:id="rId131">
             <p14:nvContentPartPr>
               <p14:cNvPr id="69" name="Ink 68">
@@ -12257,7 +12905,7 @@
             </p14:xfrm>
           </p:contentPart>
         </mc:Choice>
-        <mc:Fallback xmlns="">
+        <mc:Fallback>
           <p:pic>
             <p:nvPicPr>
               <p:cNvPr id="69" name="Ink 68">
@@ -12288,8 +12936,8 @@
           </p:pic>
         </mc:Fallback>
       </mc:AlternateContent>
-      <mc:AlternateContent xmlns:mc="http://schemas.openxmlformats.org/markup-compatibility/2006" xmlns:p14="http://schemas.microsoft.com/office/powerpoint/2010/main">
-        <mc:Choice Requires="p14">
+      <mc:AlternateContent xmlns:mc="http://schemas.openxmlformats.org/markup-compatibility/2006">
+        <mc:Choice xmlns:p14="http://schemas.microsoft.com/office/powerpoint/2010/main" Requires="p14">
           <p:contentPart p14:bwMode="auto" r:id="rId133">
             <p14:nvContentPartPr>
               <p14:cNvPr id="70" name="Ink 69">
@@ -12308,7 +12956,7 @@
             </p14:xfrm>
           </p:contentPart>
         </mc:Choice>
-        <mc:Fallback xmlns="">
+        <mc:Fallback>
           <p:pic>
             <p:nvPicPr>
               <p:cNvPr id="70" name="Ink 69">
@@ -12339,8 +12987,8 @@
           </p:pic>
         </mc:Fallback>
       </mc:AlternateContent>
-      <mc:AlternateContent xmlns:mc="http://schemas.openxmlformats.org/markup-compatibility/2006" xmlns:p14="http://schemas.microsoft.com/office/powerpoint/2010/main">
-        <mc:Choice Requires="p14">
+      <mc:AlternateContent xmlns:mc="http://schemas.openxmlformats.org/markup-compatibility/2006">
+        <mc:Choice xmlns:p14="http://schemas.microsoft.com/office/powerpoint/2010/main" Requires="p14">
           <p:contentPart p14:bwMode="auto" r:id="rId135">
             <p14:nvContentPartPr>
               <p14:cNvPr id="71" name="Ink 70">
@@ -12359,7 +13007,7 @@
             </p14:xfrm>
           </p:contentPart>
         </mc:Choice>
-        <mc:Fallback xmlns="">
+        <mc:Fallback>
           <p:pic>
             <p:nvPicPr>
               <p:cNvPr id="71" name="Ink 70">
@@ -12390,8 +13038,8 @@
           </p:pic>
         </mc:Fallback>
       </mc:AlternateContent>
-      <mc:AlternateContent xmlns:mc="http://schemas.openxmlformats.org/markup-compatibility/2006" xmlns:p14="http://schemas.microsoft.com/office/powerpoint/2010/main">
-        <mc:Choice Requires="p14">
+      <mc:AlternateContent xmlns:mc="http://schemas.openxmlformats.org/markup-compatibility/2006">
+        <mc:Choice xmlns:p14="http://schemas.microsoft.com/office/powerpoint/2010/main" Requires="p14">
           <p:contentPart p14:bwMode="auto" r:id="rId137">
             <p14:nvContentPartPr>
               <p14:cNvPr id="72" name="Ink 71">
@@ -12410,7 +13058,7 @@
             </p14:xfrm>
           </p:contentPart>
         </mc:Choice>
-        <mc:Fallback xmlns="">
+        <mc:Fallback>
           <p:pic>
             <p:nvPicPr>
               <p:cNvPr id="72" name="Ink 71">
@@ -12441,8 +13089,8 @@
           </p:pic>
         </mc:Fallback>
       </mc:AlternateContent>
-      <mc:AlternateContent xmlns:mc="http://schemas.openxmlformats.org/markup-compatibility/2006" xmlns:p14="http://schemas.microsoft.com/office/powerpoint/2010/main">
-        <mc:Choice Requires="p14">
+      <mc:AlternateContent xmlns:mc="http://schemas.openxmlformats.org/markup-compatibility/2006">
+        <mc:Choice xmlns:p14="http://schemas.microsoft.com/office/powerpoint/2010/main" Requires="p14">
           <p:contentPart p14:bwMode="auto" r:id="rId139">
             <p14:nvContentPartPr>
               <p14:cNvPr id="73" name="Ink 72">
@@ -12461,7 +13109,7 @@
             </p14:xfrm>
           </p:contentPart>
         </mc:Choice>
-        <mc:Fallback xmlns="">
+        <mc:Fallback>
           <p:pic>
             <p:nvPicPr>
               <p:cNvPr id="73" name="Ink 72">
@@ -12492,8 +13140,8 @@
           </p:pic>
         </mc:Fallback>
       </mc:AlternateContent>
-      <mc:AlternateContent xmlns:mc="http://schemas.openxmlformats.org/markup-compatibility/2006" xmlns:p14="http://schemas.microsoft.com/office/powerpoint/2010/main">
-        <mc:Choice Requires="p14">
+      <mc:AlternateContent xmlns:mc="http://schemas.openxmlformats.org/markup-compatibility/2006">
+        <mc:Choice xmlns:p14="http://schemas.microsoft.com/office/powerpoint/2010/main" Requires="p14">
           <p:contentPart p14:bwMode="auto" r:id="rId141">
             <p14:nvContentPartPr>
               <p14:cNvPr id="74" name="Ink 73">
@@ -12512,7 +13160,7 @@
             </p14:xfrm>
           </p:contentPart>
         </mc:Choice>
-        <mc:Fallback xmlns="">
+        <mc:Fallback>
           <p:pic>
             <p:nvPicPr>
               <p:cNvPr id="74" name="Ink 73">
@@ -12543,8 +13191,8 @@
           </p:pic>
         </mc:Fallback>
       </mc:AlternateContent>
-      <mc:AlternateContent xmlns:mc="http://schemas.openxmlformats.org/markup-compatibility/2006" xmlns:p14="http://schemas.microsoft.com/office/powerpoint/2010/main">
-        <mc:Choice Requires="p14">
+      <mc:AlternateContent xmlns:mc="http://schemas.openxmlformats.org/markup-compatibility/2006">
+        <mc:Choice xmlns:p14="http://schemas.microsoft.com/office/powerpoint/2010/main" Requires="p14">
           <p:contentPart p14:bwMode="auto" r:id="rId143">
             <p14:nvContentPartPr>
               <p14:cNvPr id="75" name="Ink 74">
@@ -12563,7 +13211,7 @@
             </p14:xfrm>
           </p:contentPart>
         </mc:Choice>
-        <mc:Fallback xmlns="">
+        <mc:Fallback>
           <p:pic>
             <p:nvPicPr>
               <p:cNvPr id="75" name="Ink 74">
@@ -12594,8 +13242,8 @@
           </p:pic>
         </mc:Fallback>
       </mc:AlternateContent>
-      <mc:AlternateContent xmlns:mc="http://schemas.openxmlformats.org/markup-compatibility/2006" xmlns:p14="http://schemas.microsoft.com/office/powerpoint/2010/main">
-        <mc:Choice Requires="p14">
+      <mc:AlternateContent xmlns:mc="http://schemas.openxmlformats.org/markup-compatibility/2006">
+        <mc:Choice xmlns:p14="http://schemas.microsoft.com/office/powerpoint/2010/main" Requires="p14">
           <p:contentPart p14:bwMode="auto" r:id="rId145">
             <p14:nvContentPartPr>
               <p14:cNvPr id="76" name="Ink 75">
@@ -12614,7 +13262,7 @@
             </p14:xfrm>
           </p:contentPart>
         </mc:Choice>
-        <mc:Fallback xmlns="">
+        <mc:Fallback>
           <p:pic>
             <p:nvPicPr>
               <p:cNvPr id="76" name="Ink 75">
@@ -12645,8 +13293,8 @@
           </p:pic>
         </mc:Fallback>
       </mc:AlternateContent>
-      <mc:AlternateContent xmlns:mc="http://schemas.openxmlformats.org/markup-compatibility/2006" xmlns:p14="http://schemas.microsoft.com/office/powerpoint/2010/main">
-        <mc:Choice Requires="p14">
+      <mc:AlternateContent xmlns:mc="http://schemas.openxmlformats.org/markup-compatibility/2006">
+        <mc:Choice xmlns:p14="http://schemas.microsoft.com/office/powerpoint/2010/main" Requires="p14">
           <p:contentPart p14:bwMode="auto" r:id="rId147">
             <p14:nvContentPartPr>
               <p14:cNvPr id="77" name="Ink 76">
@@ -12665,7 +13313,7 @@
             </p14:xfrm>
           </p:contentPart>
         </mc:Choice>
-        <mc:Fallback xmlns="">
+        <mc:Fallback>
           <p:pic>
             <p:nvPicPr>
               <p:cNvPr id="77" name="Ink 76">
@@ -12696,8 +13344,8 @@
           </p:pic>
         </mc:Fallback>
       </mc:AlternateContent>
-      <mc:AlternateContent xmlns:mc="http://schemas.openxmlformats.org/markup-compatibility/2006" xmlns:p14="http://schemas.microsoft.com/office/powerpoint/2010/main">
-        <mc:Choice Requires="p14">
+      <mc:AlternateContent xmlns:mc="http://schemas.openxmlformats.org/markup-compatibility/2006">
+        <mc:Choice xmlns:p14="http://schemas.microsoft.com/office/powerpoint/2010/main" Requires="p14">
           <p:contentPart p14:bwMode="auto" r:id="rId149">
             <p14:nvContentPartPr>
               <p14:cNvPr id="78" name="Ink 77">
@@ -12716,7 +13364,7 @@
             </p14:xfrm>
           </p:contentPart>
         </mc:Choice>
-        <mc:Fallback xmlns="">
+        <mc:Fallback>
           <p:pic>
             <p:nvPicPr>
               <p:cNvPr id="78" name="Ink 77">
@@ -12747,8 +13395,8 @@
           </p:pic>
         </mc:Fallback>
       </mc:AlternateContent>
-      <mc:AlternateContent xmlns:mc="http://schemas.openxmlformats.org/markup-compatibility/2006" xmlns:p14="http://schemas.microsoft.com/office/powerpoint/2010/main">
-        <mc:Choice Requires="p14">
+      <mc:AlternateContent xmlns:mc="http://schemas.openxmlformats.org/markup-compatibility/2006">
+        <mc:Choice xmlns:p14="http://schemas.microsoft.com/office/powerpoint/2010/main" Requires="p14">
           <p:contentPart p14:bwMode="auto" r:id="rId151">
             <p14:nvContentPartPr>
               <p14:cNvPr id="79" name="Ink 78">
@@ -12767,7 +13415,7 @@
             </p14:xfrm>
           </p:contentPart>
         </mc:Choice>
-        <mc:Fallback xmlns="">
+        <mc:Fallback>
           <p:pic>
             <p:nvPicPr>
               <p:cNvPr id="79" name="Ink 78">
@@ -12798,8 +13446,8 @@
           </p:pic>
         </mc:Fallback>
       </mc:AlternateContent>
-      <mc:AlternateContent xmlns:mc="http://schemas.openxmlformats.org/markup-compatibility/2006" xmlns:p14="http://schemas.microsoft.com/office/powerpoint/2010/main">
-        <mc:Choice Requires="p14">
+      <mc:AlternateContent xmlns:mc="http://schemas.openxmlformats.org/markup-compatibility/2006">
+        <mc:Choice xmlns:p14="http://schemas.microsoft.com/office/powerpoint/2010/main" Requires="p14">
           <p:contentPart p14:bwMode="auto" r:id="rId153">
             <p14:nvContentPartPr>
               <p14:cNvPr id="80" name="Ink 79">
@@ -12818,7 +13466,7 @@
             </p14:xfrm>
           </p:contentPart>
         </mc:Choice>
-        <mc:Fallback xmlns="">
+        <mc:Fallback>
           <p:pic>
             <p:nvPicPr>
               <p:cNvPr id="80" name="Ink 79">
@@ -12849,8 +13497,8 @@
           </p:pic>
         </mc:Fallback>
       </mc:AlternateContent>
-      <mc:AlternateContent xmlns:mc="http://schemas.openxmlformats.org/markup-compatibility/2006" xmlns:p14="http://schemas.microsoft.com/office/powerpoint/2010/main">
-        <mc:Choice Requires="p14">
+      <mc:AlternateContent xmlns:mc="http://schemas.openxmlformats.org/markup-compatibility/2006">
+        <mc:Choice xmlns:p14="http://schemas.microsoft.com/office/powerpoint/2010/main" Requires="p14">
           <p:contentPart p14:bwMode="auto" r:id="rId155">
             <p14:nvContentPartPr>
               <p14:cNvPr id="81" name="Ink 80">
@@ -12869,7 +13517,7 @@
             </p14:xfrm>
           </p:contentPart>
         </mc:Choice>
-        <mc:Fallback xmlns="">
+        <mc:Fallback>
           <p:pic>
             <p:nvPicPr>
               <p:cNvPr id="81" name="Ink 80">
@@ -12900,8 +13548,8 @@
           </p:pic>
         </mc:Fallback>
       </mc:AlternateContent>
-      <mc:AlternateContent xmlns:mc="http://schemas.openxmlformats.org/markup-compatibility/2006" xmlns:p14="http://schemas.microsoft.com/office/powerpoint/2010/main">
-        <mc:Choice Requires="p14">
+      <mc:AlternateContent xmlns:mc="http://schemas.openxmlformats.org/markup-compatibility/2006">
+        <mc:Choice xmlns:p14="http://schemas.microsoft.com/office/powerpoint/2010/main" Requires="p14">
           <p:contentPart p14:bwMode="auto" r:id="rId157">
             <p14:nvContentPartPr>
               <p14:cNvPr id="82" name="Ink 81">
@@ -12920,7 +13568,7 @@
             </p14:xfrm>
           </p:contentPart>
         </mc:Choice>
-        <mc:Fallback xmlns="">
+        <mc:Fallback>
           <p:pic>
             <p:nvPicPr>
               <p:cNvPr id="82" name="Ink 81">
@@ -12951,8 +13599,8 @@
           </p:pic>
         </mc:Fallback>
       </mc:AlternateContent>
-      <mc:AlternateContent xmlns:mc="http://schemas.openxmlformats.org/markup-compatibility/2006" xmlns:p14="http://schemas.microsoft.com/office/powerpoint/2010/main">
-        <mc:Choice Requires="p14">
+      <mc:AlternateContent xmlns:mc="http://schemas.openxmlformats.org/markup-compatibility/2006">
+        <mc:Choice xmlns:p14="http://schemas.microsoft.com/office/powerpoint/2010/main" Requires="p14">
           <p:contentPart p14:bwMode="auto" r:id="rId159">
             <p14:nvContentPartPr>
               <p14:cNvPr id="83" name="Ink 82">
@@ -12971,7 +13619,7 @@
             </p14:xfrm>
           </p:contentPart>
         </mc:Choice>
-        <mc:Fallback xmlns="">
+        <mc:Fallback>
           <p:pic>
             <p:nvPicPr>
               <p:cNvPr id="83" name="Ink 82">
@@ -13002,8 +13650,8 @@
           </p:pic>
         </mc:Fallback>
       </mc:AlternateContent>
-      <mc:AlternateContent xmlns:mc="http://schemas.openxmlformats.org/markup-compatibility/2006" xmlns:p14="http://schemas.microsoft.com/office/powerpoint/2010/main">
-        <mc:Choice Requires="p14">
+      <mc:AlternateContent xmlns:mc="http://schemas.openxmlformats.org/markup-compatibility/2006">
+        <mc:Choice xmlns:p14="http://schemas.microsoft.com/office/powerpoint/2010/main" Requires="p14">
           <p:contentPart p14:bwMode="auto" r:id="rId161">
             <p14:nvContentPartPr>
               <p14:cNvPr id="84" name="Ink 83">
@@ -13022,7 +13670,7 @@
             </p14:xfrm>
           </p:contentPart>
         </mc:Choice>
-        <mc:Fallback xmlns="">
+        <mc:Fallback>
           <p:pic>
             <p:nvPicPr>
               <p:cNvPr id="84" name="Ink 83">
@@ -13053,8 +13701,8 @@
           </p:pic>
         </mc:Fallback>
       </mc:AlternateContent>
-      <mc:AlternateContent xmlns:mc="http://schemas.openxmlformats.org/markup-compatibility/2006" xmlns:p14="http://schemas.microsoft.com/office/powerpoint/2010/main">
-        <mc:Choice Requires="p14">
+      <mc:AlternateContent xmlns:mc="http://schemas.openxmlformats.org/markup-compatibility/2006">
+        <mc:Choice xmlns:p14="http://schemas.microsoft.com/office/powerpoint/2010/main" Requires="p14">
           <p:contentPart p14:bwMode="auto" r:id="rId163">
             <p14:nvContentPartPr>
               <p14:cNvPr id="85" name="Ink 84">
@@ -13073,7 +13721,7 @@
             </p14:xfrm>
           </p:contentPart>
         </mc:Choice>
-        <mc:Fallback xmlns="">
+        <mc:Fallback>
           <p:pic>
             <p:nvPicPr>
               <p:cNvPr id="85" name="Ink 84">
@@ -13104,8 +13752,8 @@
           </p:pic>
         </mc:Fallback>
       </mc:AlternateContent>
-      <mc:AlternateContent xmlns:mc="http://schemas.openxmlformats.org/markup-compatibility/2006" xmlns:p14="http://schemas.microsoft.com/office/powerpoint/2010/main">
-        <mc:Choice Requires="p14">
+      <mc:AlternateContent xmlns:mc="http://schemas.openxmlformats.org/markup-compatibility/2006">
+        <mc:Choice xmlns:p14="http://schemas.microsoft.com/office/powerpoint/2010/main" Requires="p14">
           <p:contentPart p14:bwMode="auto" r:id="rId165">
             <p14:nvContentPartPr>
               <p14:cNvPr id="86" name="Ink 85">
@@ -13124,7 +13772,7 @@
             </p14:xfrm>
           </p:contentPart>
         </mc:Choice>
-        <mc:Fallback xmlns="">
+        <mc:Fallback>
           <p:pic>
             <p:nvPicPr>
               <p:cNvPr id="86" name="Ink 85">
@@ -13155,8 +13803,8 @@
           </p:pic>
         </mc:Fallback>
       </mc:AlternateContent>
-      <mc:AlternateContent xmlns:mc="http://schemas.openxmlformats.org/markup-compatibility/2006" xmlns:p14="http://schemas.microsoft.com/office/powerpoint/2010/main">
-        <mc:Choice Requires="p14">
+      <mc:AlternateContent xmlns:mc="http://schemas.openxmlformats.org/markup-compatibility/2006">
+        <mc:Choice xmlns:p14="http://schemas.microsoft.com/office/powerpoint/2010/main" Requires="p14">
           <p:contentPart p14:bwMode="auto" r:id="rId167">
             <p14:nvContentPartPr>
               <p14:cNvPr id="87" name="Ink 86">
@@ -13175,7 +13823,7 @@
             </p14:xfrm>
           </p:contentPart>
         </mc:Choice>
-        <mc:Fallback xmlns="">
+        <mc:Fallback>
           <p:pic>
             <p:nvPicPr>
               <p:cNvPr id="87" name="Ink 86">
@@ -13206,8 +13854,8 @@
           </p:pic>
         </mc:Fallback>
       </mc:AlternateContent>
-      <mc:AlternateContent xmlns:mc="http://schemas.openxmlformats.org/markup-compatibility/2006" xmlns:p14="http://schemas.microsoft.com/office/powerpoint/2010/main">
-        <mc:Choice Requires="p14">
+      <mc:AlternateContent xmlns:mc="http://schemas.openxmlformats.org/markup-compatibility/2006">
+        <mc:Choice xmlns:p14="http://schemas.microsoft.com/office/powerpoint/2010/main" Requires="p14">
           <p:contentPart p14:bwMode="auto" r:id="rId169">
             <p14:nvContentPartPr>
               <p14:cNvPr id="88" name="Ink 87">
@@ -13226,7 +13874,7 @@
             </p14:xfrm>
           </p:contentPart>
         </mc:Choice>
-        <mc:Fallback xmlns="">
+        <mc:Fallback>
           <p:pic>
             <p:nvPicPr>
               <p:cNvPr id="88" name="Ink 87">
@@ -13257,8 +13905,8 @@
           </p:pic>
         </mc:Fallback>
       </mc:AlternateContent>
-      <mc:AlternateContent xmlns:mc="http://schemas.openxmlformats.org/markup-compatibility/2006" xmlns:p14="http://schemas.microsoft.com/office/powerpoint/2010/main">
-        <mc:Choice Requires="p14">
+      <mc:AlternateContent xmlns:mc="http://schemas.openxmlformats.org/markup-compatibility/2006">
+        <mc:Choice xmlns:p14="http://schemas.microsoft.com/office/powerpoint/2010/main" Requires="p14">
           <p:contentPart p14:bwMode="auto" r:id="rId171">
             <p14:nvContentPartPr>
               <p14:cNvPr id="89" name="Ink 88">
@@ -13277,7 +13925,7 @@
             </p14:xfrm>
           </p:contentPart>
         </mc:Choice>
-        <mc:Fallback xmlns="">
+        <mc:Fallback>
           <p:pic>
             <p:nvPicPr>
               <p:cNvPr id="89" name="Ink 88">
@@ -13308,8 +13956,8 @@
           </p:pic>
         </mc:Fallback>
       </mc:AlternateContent>
-      <mc:AlternateContent xmlns:mc="http://schemas.openxmlformats.org/markup-compatibility/2006" xmlns:p14="http://schemas.microsoft.com/office/powerpoint/2010/main">
-        <mc:Choice Requires="p14">
+      <mc:AlternateContent xmlns:mc="http://schemas.openxmlformats.org/markup-compatibility/2006">
+        <mc:Choice xmlns:p14="http://schemas.microsoft.com/office/powerpoint/2010/main" Requires="p14">
           <p:contentPart p14:bwMode="auto" r:id="rId173">
             <p14:nvContentPartPr>
               <p14:cNvPr id="90" name="Ink 89">
@@ -13328,7 +13976,7 @@
             </p14:xfrm>
           </p:contentPart>
         </mc:Choice>
-        <mc:Fallback xmlns="">
+        <mc:Fallback>
           <p:pic>
             <p:nvPicPr>
               <p:cNvPr id="90" name="Ink 89">
@@ -13359,8 +14007,8 @@
           </p:pic>
         </mc:Fallback>
       </mc:AlternateContent>
-      <mc:AlternateContent xmlns:mc="http://schemas.openxmlformats.org/markup-compatibility/2006" xmlns:p14="http://schemas.microsoft.com/office/powerpoint/2010/main">
-        <mc:Choice Requires="p14">
+      <mc:AlternateContent xmlns:mc="http://schemas.openxmlformats.org/markup-compatibility/2006">
+        <mc:Choice xmlns:p14="http://schemas.microsoft.com/office/powerpoint/2010/main" Requires="p14">
           <p:contentPart p14:bwMode="auto" r:id="rId175">
             <p14:nvContentPartPr>
               <p14:cNvPr id="91" name="Ink 90">
@@ -13379,7 +14027,7 @@
             </p14:xfrm>
           </p:contentPart>
         </mc:Choice>
-        <mc:Fallback xmlns="">
+        <mc:Fallback>
           <p:pic>
             <p:nvPicPr>
               <p:cNvPr id="91" name="Ink 90">
@@ -13410,8 +14058,8 @@
           </p:pic>
         </mc:Fallback>
       </mc:AlternateContent>
-      <mc:AlternateContent xmlns:mc="http://schemas.openxmlformats.org/markup-compatibility/2006" xmlns:p14="http://schemas.microsoft.com/office/powerpoint/2010/main">
-        <mc:Choice Requires="p14">
+      <mc:AlternateContent xmlns:mc="http://schemas.openxmlformats.org/markup-compatibility/2006">
+        <mc:Choice xmlns:p14="http://schemas.microsoft.com/office/powerpoint/2010/main" Requires="p14">
           <p:contentPart p14:bwMode="auto" r:id="rId177">
             <p14:nvContentPartPr>
               <p14:cNvPr id="92" name="Ink 91">
@@ -13430,7 +14078,7 @@
             </p14:xfrm>
           </p:contentPart>
         </mc:Choice>
-        <mc:Fallback xmlns="">
+        <mc:Fallback>
           <p:pic>
             <p:nvPicPr>
               <p:cNvPr id="92" name="Ink 91">
@@ -13461,8 +14109,8 @@
           </p:pic>
         </mc:Fallback>
       </mc:AlternateContent>
-      <mc:AlternateContent xmlns:mc="http://schemas.openxmlformats.org/markup-compatibility/2006" xmlns:p14="http://schemas.microsoft.com/office/powerpoint/2010/main">
-        <mc:Choice Requires="p14">
+      <mc:AlternateContent xmlns:mc="http://schemas.openxmlformats.org/markup-compatibility/2006">
+        <mc:Choice xmlns:p14="http://schemas.microsoft.com/office/powerpoint/2010/main" Requires="p14">
           <p:contentPart p14:bwMode="auto" r:id="rId179">
             <p14:nvContentPartPr>
               <p14:cNvPr id="93" name="Ink 92">
@@ -13481,7 +14129,7 @@
             </p14:xfrm>
           </p:contentPart>
         </mc:Choice>
-        <mc:Fallback xmlns="">
+        <mc:Fallback>
           <p:pic>
             <p:nvPicPr>
               <p:cNvPr id="93" name="Ink 92">
@@ -13512,8 +14160,8 @@
           </p:pic>
         </mc:Fallback>
       </mc:AlternateContent>
-      <mc:AlternateContent xmlns:mc="http://schemas.openxmlformats.org/markup-compatibility/2006" xmlns:p14="http://schemas.microsoft.com/office/powerpoint/2010/main">
-        <mc:Choice Requires="p14">
+      <mc:AlternateContent xmlns:mc="http://schemas.openxmlformats.org/markup-compatibility/2006">
+        <mc:Choice xmlns:p14="http://schemas.microsoft.com/office/powerpoint/2010/main" Requires="p14">
           <p:contentPart p14:bwMode="auto" r:id="rId181">
             <p14:nvContentPartPr>
               <p14:cNvPr id="94" name="Ink 93">
@@ -13532,7 +14180,7 @@
             </p14:xfrm>
           </p:contentPart>
         </mc:Choice>
-        <mc:Fallback xmlns="">
+        <mc:Fallback>
           <p:pic>
             <p:nvPicPr>
               <p:cNvPr id="94" name="Ink 93">
@@ -13563,8 +14211,8 @@
           </p:pic>
         </mc:Fallback>
       </mc:AlternateContent>
-      <mc:AlternateContent xmlns:mc="http://schemas.openxmlformats.org/markup-compatibility/2006" xmlns:p14="http://schemas.microsoft.com/office/powerpoint/2010/main">
-        <mc:Choice Requires="p14">
+      <mc:AlternateContent xmlns:mc="http://schemas.openxmlformats.org/markup-compatibility/2006">
+        <mc:Choice xmlns:p14="http://schemas.microsoft.com/office/powerpoint/2010/main" Requires="p14">
           <p:contentPart p14:bwMode="auto" r:id="rId183">
             <p14:nvContentPartPr>
               <p14:cNvPr id="95" name="Ink 94">
@@ -13583,7 +14231,7 @@
             </p14:xfrm>
           </p:contentPart>
         </mc:Choice>
-        <mc:Fallback xmlns="">
+        <mc:Fallback>
           <p:pic>
             <p:nvPicPr>
               <p:cNvPr id="95" name="Ink 94">
@@ -13614,8 +14262,8 @@
           </p:pic>
         </mc:Fallback>
       </mc:AlternateContent>
-      <mc:AlternateContent xmlns:mc="http://schemas.openxmlformats.org/markup-compatibility/2006" xmlns:p14="http://schemas.microsoft.com/office/powerpoint/2010/main">
-        <mc:Choice Requires="p14">
+      <mc:AlternateContent xmlns:mc="http://schemas.openxmlformats.org/markup-compatibility/2006">
+        <mc:Choice xmlns:p14="http://schemas.microsoft.com/office/powerpoint/2010/main" Requires="p14">
           <p:contentPart p14:bwMode="auto" r:id="rId185">
             <p14:nvContentPartPr>
               <p14:cNvPr id="96" name="Ink 95">
@@ -13634,7 +14282,7 @@
             </p14:xfrm>
           </p:contentPart>
         </mc:Choice>
-        <mc:Fallback xmlns="">
+        <mc:Fallback>
           <p:pic>
             <p:nvPicPr>
               <p:cNvPr id="96" name="Ink 95">
@@ -13665,8 +14313,8 @@
           </p:pic>
         </mc:Fallback>
       </mc:AlternateContent>
-      <mc:AlternateContent xmlns:mc="http://schemas.openxmlformats.org/markup-compatibility/2006" xmlns:p14="http://schemas.microsoft.com/office/powerpoint/2010/main">
-        <mc:Choice Requires="p14">
+      <mc:AlternateContent xmlns:mc="http://schemas.openxmlformats.org/markup-compatibility/2006">
+        <mc:Choice xmlns:p14="http://schemas.microsoft.com/office/powerpoint/2010/main" Requires="p14">
           <p:contentPart p14:bwMode="auto" r:id="rId187">
             <p14:nvContentPartPr>
               <p14:cNvPr id="97" name="Ink 96">
@@ -13685,7 +14333,7 @@
             </p14:xfrm>
           </p:contentPart>
         </mc:Choice>
-        <mc:Fallback xmlns="">
+        <mc:Fallback>
           <p:pic>
             <p:nvPicPr>
               <p:cNvPr id="97" name="Ink 96">
@@ -13716,8 +14364,8 @@
           </p:pic>
         </mc:Fallback>
       </mc:AlternateContent>
-      <mc:AlternateContent xmlns:mc="http://schemas.openxmlformats.org/markup-compatibility/2006" xmlns:p14="http://schemas.microsoft.com/office/powerpoint/2010/main">
-        <mc:Choice Requires="p14">
+      <mc:AlternateContent xmlns:mc="http://schemas.openxmlformats.org/markup-compatibility/2006">
+        <mc:Choice xmlns:p14="http://schemas.microsoft.com/office/powerpoint/2010/main" Requires="p14">
           <p:contentPart p14:bwMode="auto" r:id="rId189">
             <p14:nvContentPartPr>
               <p14:cNvPr id="98" name="Ink 97">
@@ -13736,7 +14384,7 @@
             </p14:xfrm>
           </p:contentPart>
         </mc:Choice>
-        <mc:Fallback xmlns="">
+        <mc:Fallback>
           <p:pic>
             <p:nvPicPr>
               <p:cNvPr id="98" name="Ink 97">
@@ -13767,8 +14415,8 @@
           </p:pic>
         </mc:Fallback>
       </mc:AlternateContent>
-      <mc:AlternateContent xmlns:mc="http://schemas.openxmlformats.org/markup-compatibility/2006" xmlns:p14="http://schemas.microsoft.com/office/powerpoint/2010/main">
-        <mc:Choice Requires="p14">
+      <mc:AlternateContent xmlns:mc="http://schemas.openxmlformats.org/markup-compatibility/2006">
+        <mc:Choice xmlns:p14="http://schemas.microsoft.com/office/powerpoint/2010/main" Requires="p14">
           <p:contentPart p14:bwMode="auto" r:id="rId191">
             <p14:nvContentPartPr>
               <p14:cNvPr id="99" name="Ink 98">
@@ -13787,7 +14435,7 @@
             </p14:xfrm>
           </p:contentPart>
         </mc:Choice>
-        <mc:Fallback xmlns="">
+        <mc:Fallback>
           <p:pic>
             <p:nvPicPr>
               <p:cNvPr id="99" name="Ink 98">
@@ -13818,8 +14466,8 @@
           </p:pic>
         </mc:Fallback>
       </mc:AlternateContent>
-      <mc:AlternateContent xmlns:mc="http://schemas.openxmlformats.org/markup-compatibility/2006" xmlns:p14="http://schemas.microsoft.com/office/powerpoint/2010/main">
-        <mc:Choice Requires="p14">
+      <mc:AlternateContent xmlns:mc="http://schemas.openxmlformats.org/markup-compatibility/2006">
+        <mc:Choice xmlns:p14="http://schemas.microsoft.com/office/powerpoint/2010/main" Requires="p14">
           <p:contentPart p14:bwMode="auto" r:id="rId193">
             <p14:nvContentPartPr>
               <p14:cNvPr id="100" name="Ink 99">
@@ -13838,7 +14486,7 @@
             </p14:xfrm>
           </p:contentPart>
         </mc:Choice>
-        <mc:Fallback xmlns="">
+        <mc:Fallback>
           <p:pic>
             <p:nvPicPr>
               <p:cNvPr id="100" name="Ink 99">
@@ -13869,8 +14517,8 @@
           </p:pic>
         </mc:Fallback>
       </mc:AlternateContent>
-      <mc:AlternateContent xmlns:mc="http://schemas.openxmlformats.org/markup-compatibility/2006" xmlns:p14="http://schemas.microsoft.com/office/powerpoint/2010/main">
-        <mc:Choice Requires="p14">
+      <mc:AlternateContent xmlns:mc="http://schemas.openxmlformats.org/markup-compatibility/2006">
+        <mc:Choice xmlns:p14="http://schemas.microsoft.com/office/powerpoint/2010/main" Requires="p14">
           <p:contentPart p14:bwMode="auto" r:id="rId195">
             <p14:nvContentPartPr>
               <p14:cNvPr id="101" name="Ink 100">
@@ -13889,7 +14537,7 @@
             </p14:xfrm>
           </p:contentPart>
         </mc:Choice>
-        <mc:Fallback xmlns="">
+        <mc:Fallback>
           <p:pic>
             <p:nvPicPr>
               <p:cNvPr id="101" name="Ink 100">
@@ -13955,7 +14603,7 @@
           <p:cNvPr id="2" name="Title 1">
             <a:extLst>
               <a:ext uri="{FF2B5EF4-FFF2-40B4-BE49-F238E27FC236}">
-                <a16:creationId xmlns:a16="http://schemas.microsoft.com/office/drawing/2014/main" id="{1EC88F65-E257-50D0-F69C-69363F25BCCB}"/>
+                <a16:creationId xmlns:a16="http://schemas.microsoft.com/office/drawing/2014/main" id="{C51CC66A-35D8-5EA1-54BF-2D890D21BE12}"/>
               </a:ext>
             </a:extLst>
           </p:cNvPr>
@@ -13973,7 +14621,7 @@
           <a:p>
             <a:r>
               <a:rPr lang="en-US"/>
-              <a:t>Zef's Website Mockup</a:t>
+              <a:t>Zef's 3D mockup</a:t>
             </a:r>
           </a:p>
         </p:txBody>
@@ -13983,7 +14631,7 @@
           <p:cNvPr id="4" name="Content Placeholder 3">
             <a:extLst>
               <a:ext uri="{FF2B5EF4-FFF2-40B4-BE49-F238E27FC236}">
-                <a16:creationId xmlns:a16="http://schemas.microsoft.com/office/drawing/2014/main" id="{588E1B6B-A0D6-8247-31F9-647DEF5E7127}"/>
+                <a16:creationId xmlns:a16="http://schemas.microsoft.com/office/drawing/2014/main" id="{E5528123-F0F3-A2FE-2974-EC49315BA70C}"/>
               </a:ext>
             </a:extLst>
           </p:cNvPr>
@@ -14002,18 +14650,630 @@
         </p:blipFill>
         <p:spPr>
           <a:xfrm>
-            <a:off x="1309739" y="2187059"/>
-            <a:ext cx="9136320" cy="4559299"/>
+            <a:off x="3159607" y="1825625"/>
+            <a:ext cx="5872785" cy="4351338"/>
           </a:xfrm>
           <a:prstGeom prst="rect">
             <a:avLst/>
           </a:prstGeom>
         </p:spPr>
       </p:pic>
+      <mc:AlternateContent xmlns:mc="http://schemas.openxmlformats.org/markup-compatibility/2006">
+        <mc:Choice xmlns:p14="http://schemas.microsoft.com/office/powerpoint/2010/main" Requires="p14">
+          <p:contentPart p14:bwMode="auto" r:id="rId3">
+            <p14:nvContentPartPr>
+              <p14:cNvPr id="7" name="Ink 6">
+                <a:extLst>
+                  <a:ext uri="{FF2B5EF4-FFF2-40B4-BE49-F238E27FC236}">
+                    <a16:creationId xmlns:a16="http://schemas.microsoft.com/office/drawing/2014/main" id="{DD83214B-4B73-BB69-47D9-EBB9CEEC6318}"/>
+                  </a:ext>
+                </a:extLst>
+              </p14:cNvPr>
+              <p14:cNvContentPartPr/>
+              <p14:nvPr/>
+            </p14:nvContentPartPr>
+            <p14:xfrm>
+              <a:off x="1409175" y="5671595"/>
+              <a:ext cx="143001" cy="219306"/>
+            </p14:xfrm>
+          </p:contentPart>
+        </mc:Choice>
+        <mc:Fallback>
+          <p:pic>
+            <p:nvPicPr>
+              <p:cNvPr id="7" name="Ink 6">
+                <a:extLst>
+                  <a:ext uri="{FF2B5EF4-FFF2-40B4-BE49-F238E27FC236}">
+                    <a16:creationId xmlns:a16="http://schemas.microsoft.com/office/drawing/2014/main" id="{DD83214B-4B73-BB69-47D9-EBB9CEEC6318}"/>
+                  </a:ext>
+                </a:extLst>
+              </p:cNvPr>
+              <p:cNvPicPr/>
+              <p:nvPr/>
+            </p:nvPicPr>
+            <p:blipFill>
+              <a:blip r:embed="rId4"/>
+              <a:stretch>
+                <a:fillRect/>
+              </a:stretch>
+            </p:blipFill>
+            <p:spPr>
+              <a:xfrm>
+                <a:off x="1391210" y="5653619"/>
+                <a:ext cx="178572" cy="254898"/>
+              </a:xfrm>
+              <a:prstGeom prst="rect">
+                <a:avLst/>
+              </a:prstGeom>
+            </p:spPr>
+          </p:pic>
+        </mc:Fallback>
+      </mc:AlternateContent>
+      <mc:AlternateContent xmlns:mc="http://schemas.openxmlformats.org/markup-compatibility/2006">
+        <mc:Choice xmlns:p14="http://schemas.microsoft.com/office/powerpoint/2010/main" Requires="p14">
+          <p:contentPart p14:bwMode="auto" r:id="rId5">
+            <p14:nvContentPartPr>
+              <p14:cNvPr id="8" name="Ink 7">
+                <a:extLst>
+                  <a:ext uri="{FF2B5EF4-FFF2-40B4-BE49-F238E27FC236}">
+                    <a16:creationId xmlns:a16="http://schemas.microsoft.com/office/drawing/2014/main" id="{17C31F12-4642-0EAE-AFA8-60450374609B}"/>
+                  </a:ext>
+                </a:extLst>
+              </p14:cNvPr>
+              <p14:cNvContentPartPr/>
+              <p14:nvPr/>
+            </p14:nvContentPartPr>
+            <p14:xfrm>
+              <a:off x="1113483" y="5352121"/>
+              <a:ext cx="82982" cy="122721"/>
+            </p14:xfrm>
+          </p:contentPart>
+        </mc:Choice>
+        <mc:Fallback>
+          <p:pic>
+            <p:nvPicPr>
+              <p:cNvPr id="8" name="Ink 7">
+                <a:extLst>
+                  <a:ext uri="{FF2B5EF4-FFF2-40B4-BE49-F238E27FC236}">
+                    <a16:creationId xmlns:a16="http://schemas.microsoft.com/office/drawing/2014/main" id="{17C31F12-4642-0EAE-AFA8-60450374609B}"/>
+                  </a:ext>
+                </a:extLst>
+              </p:cNvPr>
+              <p:cNvPicPr/>
+              <p:nvPr/>
+            </p:nvPicPr>
+            <p:blipFill>
+              <a:blip r:embed="rId6"/>
+              <a:stretch>
+                <a:fillRect/>
+              </a:stretch>
+            </p:blipFill>
+            <p:spPr>
+              <a:xfrm>
+                <a:off x="1095599" y="5334179"/>
+                <a:ext cx="118392" cy="158246"/>
+              </a:xfrm>
+              <a:prstGeom prst="rect">
+                <a:avLst/>
+              </a:prstGeom>
+            </p:spPr>
+          </p:pic>
+        </mc:Fallback>
+      </mc:AlternateContent>
+      <mc:AlternateContent xmlns:mc="http://schemas.openxmlformats.org/markup-compatibility/2006">
+        <mc:Choice xmlns:p14="http://schemas.microsoft.com/office/powerpoint/2010/main" Requires="p14">
+          <p:contentPart p14:bwMode="auto" r:id="rId7">
+            <p14:nvContentPartPr>
+              <p14:cNvPr id="9" name="Ink 8">
+                <a:extLst>
+                  <a:ext uri="{FF2B5EF4-FFF2-40B4-BE49-F238E27FC236}">
+                    <a16:creationId xmlns:a16="http://schemas.microsoft.com/office/drawing/2014/main" id="{41E0F5C2-C844-DBF6-E2A5-65D22B8F2EED}"/>
+                  </a:ext>
+                </a:extLst>
+              </p14:cNvPr>
+              <p14:cNvContentPartPr/>
+              <p14:nvPr/>
+            </p14:nvContentPartPr>
+            <p14:xfrm>
+              <a:off x="1522460" y="5233460"/>
+              <a:ext cx="99167" cy="97093"/>
+            </p14:xfrm>
+          </p:contentPart>
+        </mc:Choice>
+        <mc:Fallback>
+          <p:pic>
+            <p:nvPicPr>
+              <p:cNvPr id="9" name="Ink 8">
+                <a:extLst>
+                  <a:ext uri="{FF2B5EF4-FFF2-40B4-BE49-F238E27FC236}">
+                    <a16:creationId xmlns:a16="http://schemas.microsoft.com/office/drawing/2014/main" id="{41E0F5C2-C844-DBF6-E2A5-65D22B8F2EED}"/>
+                  </a:ext>
+                </a:extLst>
+              </p:cNvPr>
+              <p:cNvPicPr/>
+              <p:nvPr/>
+            </p:nvPicPr>
+            <p:blipFill>
+              <a:blip r:embed="rId8"/>
+              <a:stretch>
+                <a:fillRect/>
+              </a:stretch>
+            </p:blipFill>
+            <p:spPr>
+              <a:xfrm>
+                <a:off x="1504560" y="5215546"/>
+                <a:ext cx="134609" cy="132562"/>
+              </a:xfrm>
+              <a:prstGeom prst="rect">
+                <a:avLst/>
+              </a:prstGeom>
+            </p:spPr>
+          </p:pic>
+        </mc:Fallback>
+      </mc:AlternateContent>
+      <mc:AlternateContent xmlns:mc="http://schemas.openxmlformats.org/markup-compatibility/2006">
+        <mc:Choice xmlns:p14="http://schemas.microsoft.com/office/powerpoint/2010/main" Requires="p14">
+          <p:contentPart p14:bwMode="auto" r:id="rId9">
+            <p14:nvContentPartPr>
+              <p14:cNvPr id="10" name="Ink 9">
+                <a:extLst>
+                  <a:ext uri="{FF2B5EF4-FFF2-40B4-BE49-F238E27FC236}">
+                    <a16:creationId xmlns:a16="http://schemas.microsoft.com/office/drawing/2014/main" id="{A93EDBE8-AFA5-BF0E-BD4B-41CF51756760}"/>
+                  </a:ext>
+                </a:extLst>
+              </p14:cNvPr>
+              <p14:cNvContentPartPr/>
+              <p14:nvPr/>
+            </p14:nvContentPartPr>
+            <p14:xfrm>
+              <a:off x="1098923" y="5058915"/>
+              <a:ext cx="150686" cy="236502"/>
+            </p14:xfrm>
+          </p:contentPart>
+        </mc:Choice>
+        <mc:Fallback>
+          <p:pic>
+            <p:nvPicPr>
+              <p:cNvPr id="10" name="Ink 9">
+                <a:extLst>
+                  <a:ext uri="{FF2B5EF4-FFF2-40B4-BE49-F238E27FC236}">
+                    <a16:creationId xmlns:a16="http://schemas.microsoft.com/office/drawing/2014/main" id="{A93EDBE8-AFA5-BF0E-BD4B-41CF51756760}"/>
+                  </a:ext>
+                </a:extLst>
+              </p:cNvPr>
+              <p:cNvPicPr/>
+              <p:nvPr/>
+            </p:nvPicPr>
+            <p:blipFill>
+              <a:blip r:embed="rId10"/>
+              <a:stretch>
+                <a:fillRect/>
+              </a:stretch>
+            </p:blipFill>
+            <p:spPr>
+              <a:xfrm>
+                <a:off x="1080941" y="5040944"/>
+                <a:ext cx="186290" cy="272085"/>
+              </a:xfrm>
+              <a:prstGeom prst="rect">
+                <a:avLst/>
+              </a:prstGeom>
+            </p:spPr>
+          </p:pic>
+        </mc:Fallback>
+      </mc:AlternateContent>
+      <mc:AlternateContent xmlns:mc="http://schemas.openxmlformats.org/markup-compatibility/2006">
+        <mc:Choice xmlns:p14="http://schemas.microsoft.com/office/powerpoint/2010/main" Requires="p14">
+          <p:contentPart p14:bwMode="auto" r:id="rId11">
+            <p14:nvContentPartPr>
+              <p14:cNvPr id="11" name="Ink 10">
+                <a:extLst>
+                  <a:ext uri="{FF2B5EF4-FFF2-40B4-BE49-F238E27FC236}">
+                    <a16:creationId xmlns:a16="http://schemas.microsoft.com/office/drawing/2014/main" id="{67815F45-3C81-CDF9-F5C2-9F119495D6C8}"/>
+                  </a:ext>
+                </a:extLst>
+              </p14:cNvPr>
+              <p14:cNvContentPartPr/>
+              <p14:nvPr/>
+            </p14:nvContentPartPr>
+            <p14:xfrm>
+              <a:off x="1437189" y="5023952"/>
+              <a:ext cx="159291" cy="190932"/>
+            </p14:xfrm>
+          </p:contentPart>
+        </mc:Choice>
+        <mc:Fallback>
+          <p:pic>
+            <p:nvPicPr>
+              <p:cNvPr id="11" name="Ink 10">
+                <a:extLst>
+                  <a:ext uri="{FF2B5EF4-FFF2-40B4-BE49-F238E27FC236}">
+                    <a16:creationId xmlns:a16="http://schemas.microsoft.com/office/drawing/2014/main" id="{67815F45-3C81-CDF9-F5C2-9F119495D6C8}"/>
+                  </a:ext>
+                </a:extLst>
+              </p:cNvPr>
+              <p:cNvPicPr/>
+              <p:nvPr/>
+            </p:nvPicPr>
+            <p:blipFill>
+              <a:blip r:embed="rId12"/>
+              <a:stretch>
+                <a:fillRect/>
+              </a:stretch>
+            </p:blipFill>
+            <p:spPr>
+              <a:xfrm>
+                <a:off x="1419251" y="5006007"/>
+                <a:ext cx="194809" cy="226463"/>
+              </a:xfrm>
+              <a:prstGeom prst="rect">
+                <a:avLst/>
+              </a:prstGeom>
+            </p:spPr>
+          </p:pic>
+        </mc:Fallback>
+      </mc:AlternateContent>
+      <mc:AlternateContent xmlns:mc="http://schemas.openxmlformats.org/markup-compatibility/2006">
+        <mc:Choice xmlns:p14="http://schemas.microsoft.com/office/powerpoint/2010/main" Requires="p14">
+          <p:contentPart p14:bwMode="auto" r:id="rId13">
+            <p14:nvContentPartPr>
+              <p14:cNvPr id="14" name="Ink 13">
+                <a:extLst>
+                  <a:ext uri="{FF2B5EF4-FFF2-40B4-BE49-F238E27FC236}">
+                    <a16:creationId xmlns:a16="http://schemas.microsoft.com/office/drawing/2014/main" id="{6372F040-46A4-8E92-5915-180878C6314D}"/>
+                  </a:ext>
+                </a:extLst>
+              </p14:cNvPr>
+              <p14:cNvContentPartPr/>
+              <p14:nvPr/>
+            </p14:nvContentPartPr>
+            <p14:xfrm>
+              <a:off x="896372" y="5009140"/>
+              <a:ext cx="963560" cy="1055545"/>
+            </p14:xfrm>
+          </p:contentPart>
+        </mc:Choice>
+        <mc:Fallback>
+          <p:pic>
+            <p:nvPicPr>
+              <p:cNvPr id="14" name="Ink 13">
+                <a:extLst>
+                  <a:ext uri="{FF2B5EF4-FFF2-40B4-BE49-F238E27FC236}">
+                    <a16:creationId xmlns:a16="http://schemas.microsoft.com/office/drawing/2014/main" id="{6372F040-46A4-8E92-5915-180878C6314D}"/>
+                  </a:ext>
+                </a:extLst>
+              </p:cNvPr>
+              <p:cNvPicPr/>
+              <p:nvPr/>
+            </p:nvPicPr>
+            <p:blipFill>
+              <a:blip r:embed="rId14"/>
+              <a:stretch>
+                <a:fillRect/>
+              </a:stretch>
+            </p:blipFill>
+            <p:spPr>
+              <a:xfrm>
+                <a:off x="878375" y="4991146"/>
+                <a:ext cx="999194" cy="1091174"/>
+              </a:xfrm>
+              <a:prstGeom prst="rect">
+                <a:avLst/>
+              </a:prstGeom>
+            </p:spPr>
+          </p:pic>
+        </mc:Fallback>
+      </mc:AlternateContent>
+      <mc:AlternateContent xmlns:mc="http://schemas.openxmlformats.org/markup-compatibility/2006">
+        <mc:Choice xmlns:p14="http://schemas.microsoft.com/office/powerpoint/2010/main" Requires="p14">
+          <p:contentPart p14:bwMode="auto" r:id="rId15">
+            <p14:nvContentPartPr>
+              <p14:cNvPr id="16" name="Ink 15">
+                <a:extLst>
+                  <a:ext uri="{FF2B5EF4-FFF2-40B4-BE49-F238E27FC236}">
+                    <a16:creationId xmlns:a16="http://schemas.microsoft.com/office/drawing/2014/main" id="{F3AEAA8B-E5C7-AA52-85A6-1DC79E95D83B}"/>
+                  </a:ext>
+                </a:extLst>
+              </p14:cNvPr>
+              <p14:cNvContentPartPr/>
+              <p14:nvPr/>
+            </p14:nvContentPartPr>
+            <p14:xfrm>
+              <a:off x="1678329" y="5720453"/>
+              <a:ext cx="480336" cy="153698"/>
+            </p14:xfrm>
+          </p:contentPart>
+        </mc:Choice>
+        <mc:Fallback>
+          <p:pic>
+            <p:nvPicPr>
+              <p:cNvPr id="16" name="Ink 15">
+                <a:extLst>
+                  <a:ext uri="{FF2B5EF4-FFF2-40B4-BE49-F238E27FC236}">
+                    <a16:creationId xmlns:a16="http://schemas.microsoft.com/office/drawing/2014/main" id="{F3AEAA8B-E5C7-AA52-85A6-1DC79E95D83B}"/>
+                  </a:ext>
+                </a:extLst>
+              </p:cNvPr>
+              <p:cNvPicPr/>
+              <p:nvPr/>
+            </p:nvPicPr>
+            <p:blipFill>
+              <a:blip r:embed="rId16"/>
+              <a:stretch>
+                <a:fillRect/>
+              </a:stretch>
+            </p:blipFill>
+            <p:spPr>
+              <a:xfrm>
+                <a:off x="1660339" y="5702498"/>
+                <a:ext cx="515956" cy="189250"/>
+              </a:xfrm>
+              <a:prstGeom prst="rect">
+                <a:avLst/>
+              </a:prstGeom>
+            </p:spPr>
+          </p:pic>
+        </mc:Fallback>
+      </mc:AlternateContent>
+      <mc:AlternateContent xmlns:mc="http://schemas.openxmlformats.org/markup-compatibility/2006">
+        <mc:Choice xmlns:p14="http://schemas.microsoft.com/office/powerpoint/2010/main" Requires="p14">
+          <p:contentPart p14:bwMode="auto" r:id="rId17">
+            <p14:nvContentPartPr>
+              <p14:cNvPr id="17" name="Ink 16">
+                <a:extLst>
+                  <a:ext uri="{FF2B5EF4-FFF2-40B4-BE49-F238E27FC236}">
+                    <a16:creationId xmlns:a16="http://schemas.microsoft.com/office/drawing/2014/main" id="{2C8F9C6B-8C15-5B4B-B82E-54982F902D27}"/>
+                  </a:ext>
+                </a:extLst>
+              </p14:cNvPr>
+              <p14:cNvContentPartPr/>
+              <p14:nvPr/>
+            </p14:nvContentPartPr>
+            <p14:xfrm>
+              <a:off x="2150962" y="5408638"/>
+              <a:ext cx="814844" cy="349766"/>
+            </p14:xfrm>
+          </p:contentPart>
+        </mc:Choice>
+        <mc:Fallback>
+          <p:pic>
+            <p:nvPicPr>
+              <p:cNvPr id="17" name="Ink 16">
+                <a:extLst>
+                  <a:ext uri="{FF2B5EF4-FFF2-40B4-BE49-F238E27FC236}">
+                    <a16:creationId xmlns:a16="http://schemas.microsoft.com/office/drawing/2014/main" id="{2C8F9C6B-8C15-5B4B-B82E-54982F902D27}"/>
+                  </a:ext>
+                </a:extLst>
+              </p:cNvPr>
+              <p:cNvPicPr/>
+              <p:nvPr/>
+            </p:nvPicPr>
+            <p:blipFill>
+              <a:blip r:embed="rId18"/>
+              <a:stretch>
+                <a:fillRect/>
+              </a:stretch>
+            </p:blipFill>
+            <p:spPr>
+              <a:xfrm>
+                <a:off x="2132974" y="5390664"/>
+                <a:ext cx="850460" cy="385354"/>
+              </a:xfrm>
+              <a:prstGeom prst="rect">
+                <a:avLst/>
+              </a:prstGeom>
+            </p:spPr>
+          </p:pic>
+        </mc:Fallback>
+      </mc:AlternateContent>
+      <mc:AlternateContent xmlns:mc="http://schemas.openxmlformats.org/markup-compatibility/2006">
+        <mc:Choice xmlns:p14="http://schemas.microsoft.com/office/powerpoint/2010/main" Requires="p14">
+          <p:contentPart p14:bwMode="auto" r:id="rId19">
+            <p14:nvContentPartPr>
+              <p14:cNvPr id="18" name="Ink 17">
+                <a:extLst>
+                  <a:ext uri="{FF2B5EF4-FFF2-40B4-BE49-F238E27FC236}">
+                    <a16:creationId xmlns:a16="http://schemas.microsoft.com/office/drawing/2014/main" id="{90D55D5B-14F6-CAB4-5603-C0F69D161840}"/>
+                  </a:ext>
+                </a:extLst>
+              </p14:cNvPr>
+              <p14:cNvContentPartPr/>
+              <p14:nvPr/>
+            </p14:nvContentPartPr>
+            <p14:xfrm>
+              <a:off x="2740375" y="5517265"/>
+              <a:ext cx="154136" cy="95857"/>
+            </p14:xfrm>
+          </p:contentPart>
+        </mc:Choice>
+        <mc:Fallback>
+          <p:pic>
+            <p:nvPicPr>
+              <p:cNvPr id="18" name="Ink 17">
+                <a:extLst>
+                  <a:ext uri="{FF2B5EF4-FFF2-40B4-BE49-F238E27FC236}">
+                    <a16:creationId xmlns:a16="http://schemas.microsoft.com/office/drawing/2014/main" id="{90D55D5B-14F6-CAB4-5603-C0F69D161840}"/>
+                  </a:ext>
+                </a:extLst>
+              </p:cNvPr>
+              <p:cNvPicPr/>
+              <p:nvPr/>
+            </p:nvPicPr>
+            <p:blipFill>
+              <a:blip r:embed="rId20"/>
+              <a:stretch>
+                <a:fillRect/>
+              </a:stretch>
+            </p:blipFill>
+            <p:spPr>
+              <a:xfrm>
+                <a:off x="2722410" y="5499381"/>
+                <a:ext cx="189706" cy="131267"/>
+              </a:xfrm>
+              <a:prstGeom prst="rect">
+                <a:avLst/>
+              </a:prstGeom>
+            </p:spPr>
+          </p:pic>
+        </mc:Fallback>
+      </mc:AlternateContent>
+      <mc:AlternateContent xmlns:mc="http://schemas.openxmlformats.org/markup-compatibility/2006">
+        <mc:Choice xmlns:p14="http://schemas.microsoft.com/office/powerpoint/2010/main" Requires="p14">
+          <p:contentPart p14:bwMode="auto" r:id="rId21">
+            <p14:nvContentPartPr>
+              <p14:cNvPr id="20" name="Ink 19">
+                <a:extLst>
+                  <a:ext uri="{FF2B5EF4-FFF2-40B4-BE49-F238E27FC236}">
+                    <a16:creationId xmlns:a16="http://schemas.microsoft.com/office/drawing/2014/main" id="{552FA346-3960-7D25-3979-3AA84BDD9F1E}"/>
+                  </a:ext>
+                </a:extLst>
+              </p14:cNvPr>
+              <p14:cNvContentPartPr/>
+              <p14:nvPr/>
+            </p14:nvContentPartPr>
+            <p14:xfrm>
+              <a:off x="2122902" y="5651391"/>
+              <a:ext cx="471095" cy="463899"/>
+            </p14:xfrm>
+          </p:contentPart>
+        </mc:Choice>
+        <mc:Fallback>
+          <p:pic>
+            <p:nvPicPr>
+              <p:cNvPr id="20" name="Ink 19">
+                <a:extLst>
+                  <a:ext uri="{FF2B5EF4-FFF2-40B4-BE49-F238E27FC236}">
+                    <a16:creationId xmlns:a16="http://schemas.microsoft.com/office/drawing/2014/main" id="{552FA346-3960-7D25-3979-3AA84BDD9F1E}"/>
+                  </a:ext>
+                </a:extLst>
+              </p:cNvPr>
+              <p:cNvPicPr/>
+              <p:nvPr/>
+            </p:nvPicPr>
+            <p:blipFill>
+              <a:blip r:embed="rId22"/>
+              <a:stretch>
+                <a:fillRect/>
+              </a:stretch>
+            </p:blipFill>
+            <p:spPr>
+              <a:xfrm>
+                <a:off x="2104921" y="5633410"/>
+                <a:ext cx="506697" cy="499501"/>
+              </a:xfrm>
+              <a:prstGeom prst="rect">
+                <a:avLst/>
+              </a:prstGeom>
+            </p:spPr>
+          </p:pic>
+        </mc:Fallback>
+      </mc:AlternateContent>
+      <mc:AlternateContent xmlns:mc="http://schemas.openxmlformats.org/markup-compatibility/2006">
+        <mc:Choice xmlns:p14="http://schemas.microsoft.com/office/powerpoint/2010/main" Requires="p14">
+          <p:contentPart p14:bwMode="auto" r:id="rId23">
+            <p14:nvContentPartPr>
+              <p14:cNvPr id="21" name="Ink 20">
+                <a:extLst>
+                  <a:ext uri="{FF2B5EF4-FFF2-40B4-BE49-F238E27FC236}">
+                    <a16:creationId xmlns:a16="http://schemas.microsoft.com/office/drawing/2014/main" id="{B2C0A138-752B-7DC8-1547-03BFD5733C2D}"/>
+                  </a:ext>
+                </a:extLst>
+              </p14:cNvPr>
+              <p14:cNvContentPartPr/>
+              <p14:nvPr/>
+            </p14:nvContentPartPr>
+            <p14:xfrm>
+              <a:off x="1108983" y="5337249"/>
+              <a:ext cx="66699" cy="122142"/>
+            </p14:xfrm>
+          </p:contentPart>
+        </mc:Choice>
+        <mc:Fallback>
+          <p:pic>
+            <p:nvPicPr>
+              <p:cNvPr id="21" name="Ink 20">
+                <a:extLst>
+                  <a:ext uri="{FF2B5EF4-FFF2-40B4-BE49-F238E27FC236}">
+                    <a16:creationId xmlns:a16="http://schemas.microsoft.com/office/drawing/2014/main" id="{B2C0A138-752B-7DC8-1547-03BFD5733C2D}"/>
+                  </a:ext>
+                </a:extLst>
+              </p:cNvPr>
+              <p:cNvPicPr/>
+              <p:nvPr/>
+            </p:nvPicPr>
+            <p:blipFill>
+              <a:blip r:embed="rId24"/>
+              <a:stretch>
+                <a:fillRect/>
+              </a:stretch>
+            </p:blipFill>
+            <p:spPr>
+              <a:xfrm>
+                <a:off x="1091053" y="5319287"/>
+                <a:ext cx="102200" cy="157707"/>
+              </a:xfrm>
+              <a:prstGeom prst="rect">
+                <a:avLst/>
+              </a:prstGeom>
+            </p:spPr>
+          </p:pic>
+        </mc:Fallback>
+      </mc:AlternateContent>
+      <mc:AlternateContent xmlns:mc="http://schemas.openxmlformats.org/markup-compatibility/2006">
+        <mc:Choice xmlns:p14="http://schemas.microsoft.com/office/powerpoint/2010/main" Requires="p14">
+          <p:contentPart p14:bwMode="auto" r:id="rId25">
+            <p14:nvContentPartPr>
+              <p14:cNvPr id="22" name="Ink 21">
+                <a:extLst>
+                  <a:ext uri="{FF2B5EF4-FFF2-40B4-BE49-F238E27FC236}">
+                    <a16:creationId xmlns:a16="http://schemas.microsoft.com/office/drawing/2014/main" id="{E611C550-EA3F-9BAD-F9E5-873007153A83}"/>
+                  </a:ext>
+                </a:extLst>
+              </p14:cNvPr>
+              <p14:cNvContentPartPr/>
+              <p14:nvPr/>
+            </p14:nvContentPartPr>
+            <p14:xfrm>
+              <a:off x="1516915" y="5211197"/>
+              <a:ext cx="83703" cy="114554"/>
+            </p14:xfrm>
+          </p:contentPart>
+        </mc:Choice>
+        <mc:Fallback>
+          <p:pic>
+            <p:nvPicPr>
+              <p:cNvPr id="22" name="Ink 21">
+                <a:extLst>
+                  <a:ext uri="{FF2B5EF4-FFF2-40B4-BE49-F238E27FC236}">
+                    <a16:creationId xmlns:a16="http://schemas.microsoft.com/office/drawing/2014/main" id="{E611C550-EA3F-9BAD-F9E5-873007153A83}"/>
+                  </a:ext>
+                </a:extLst>
+              </p:cNvPr>
+              <p:cNvPicPr/>
+              <p:nvPr/>
+            </p:nvPicPr>
+            <p:blipFill>
+              <a:blip r:embed="rId26"/>
+              <a:stretch>
+                <a:fillRect/>
+              </a:stretch>
+            </p:blipFill>
+            <p:spPr>
+              <a:xfrm>
+                <a:off x="1499030" y="5193242"/>
+                <a:ext cx="119116" cy="150105"/>
+              </a:xfrm>
+              <a:prstGeom prst="rect">
+                <a:avLst/>
+              </a:prstGeom>
+            </p:spPr>
+          </p:pic>
+        </mc:Fallback>
+      </mc:AlternateContent>
     </p:spTree>
     <p:extLst>
       <p:ext uri="{BB962C8B-B14F-4D97-AF65-F5344CB8AC3E}">
-        <p14:creationId xmlns:p14="http://schemas.microsoft.com/office/powerpoint/2010/main" val="1366860525"/>
+        <p14:creationId xmlns:p14="http://schemas.microsoft.com/office/powerpoint/2010/main" val="4147191571"/>
       </p:ext>
     </p:extLst>
   </p:cSld>

--- a/PowerPoint/SWQSPowerpoint.pptx
+++ b/PowerPoint/SWQSPowerpoint.pptx
@@ -14,11 +14,14 @@
     <p:sldId id="262" r:id="rId8"/>
     <p:sldId id="263" r:id="rId9"/>
     <p:sldId id="269" r:id="rId10"/>
-    <p:sldId id="264" r:id="rId11"/>
-    <p:sldId id="265" r:id="rId12"/>
-    <p:sldId id="266" r:id="rId13"/>
-    <p:sldId id="267" r:id="rId14"/>
-    <p:sldId id="268" r:id="rId15"/>
+    <p:sldId id="272" r:id="rId11"/>
+    <p:sldId id="264" r:id="rId12"/>
+    <p:sldId id="265" r:id="rId13"/>
+    <p:sldId id="271" r:id="rId14"/>
+    <p:sldId id="266" r:id="rId15"/>
+    <p:sldId id="267" r:id="rId16"/>
+    <p:sldId id="268" r:id="rId17"/>
+    <p:sldId id="270" r:id="rId18"/>
   </p:sldIdLst>
   <p:sldSz cx="12192000" cy="6858000"/>
   <p:notesSz cx="6858000" cy="9144000"/>
@@ -123,14 +126,357 @@
 <file path=ppt/revisionInfo.xml><?xml version="1.0" encoding="utf-8"?>
 <p1510:revInfo xmlns:a="http://schemas.openxmlformats.org/drawingml/2006/main" xmlns:r="http://schemas.openxmlformats.org/officeDocument/2006/relationships" xmlns:p1510="http://schemas.microsoft.com/office/powerpoint/2015/10/main">
   <p1510:revLst>
-    <p1510:client id="{99C1DE80-53CF-4A72-884A-7A8152EF750D}" v="3" dt="2026-08-11T02:48:55.040"/>
-    <p1510:client id="{DD54F4F6-CB6F-99C7-4943-F812185C5B62}" v="36" dt="2026-08-11T02:53:39.626"/>
+    <p1510:client id="{00000000-0000-0000-0000-000000000000}" v="153" dt="2026-08-13T23:24:58.025"/>
+    <p1510:client id="{99C1DE80-53CF-4A72-884A-7A8152EF750D}" v="36" dt="2026-08-13T22:54:53.508"/>
+    <p1510:client id="{F06FBC25-D5A1-B4B9-830D-DD9FA3322021}" v="614" dt="2026-08-13T23:16:32.548"/>
   </p1510:revLst>
 </p1510:revInfo>
 </file>
 
 <file path=ppt/changesInfos/changesInfo1.xml><?xml version="1.0" encoding="utf-8"?>
 <pc:chgInfo xmlns:a="http://schemas.openxmlformats.org/drawingml/2006/main" xmlns:r="http://schemas.openxmlformats.org/officeDocument/2006/relationships" xmlns:ac="http://schemas.microsoft.com/office/drawing/2013/main/command" xmlns:pc="http://schemas.microsoft.com/office/powerpoint/2013/main/command">
+  <pc:docChgLst>
+    <pc:chgData name="Taliah Kassaby" userId="S::kas0005@wantirnacollege.vic.edu.au::23d269d0-e02c-425d-bfba-881a989e0172" providerId="AD" clId="Web-{00000000-0000-0000-0000-000000000000}"/>
+    <pc:docChg chg="addSld modSld">
+      <pc:chgData name="Taliah Kassaby" userId="S::kas0005@wantirnacollege.vic.edu.au::23d269d0-e02c-425d-bfba-881a989e0172" providerId="AD" clId="Web-{00000000-0000-0000-0000-000000000000}" dt="2026-08-13T23:24:58.025" v="129" actId="20577"/>
+      <pc:docMkLst>
+        <pc:docMk/>
+      </pc:docMkLst>
+      <pc:sldChg chg="modSp">
+        <pc:chgData name="Taliah Kassaby" userId="S::kas0005@wantirnacollege.vic.edu.au::23d269d0-e02c-425d-bfba-881a989e0172" providerId="AD" clId="Web-{00000000-0000-0000-0000-000000000000}" dt="2026-08-13T22:58:50.429" v="35" actId="1076"/>
+        <pc:sldMkLst>
+          <pc:docMk/>
+          <pc:sldMk cId="1318932797" sldId="268"/>
+        </pc:sldMkLst>
+        <pc:picChg chg="mod">
+          <ac:chgData name="Taliah Kassaby" userId="S::kas0005@wantirnacollege.vic.edu.au::23d269d0-e02c-425d-bfba-881a989e0172" providerId="AD" clId="Web-{00000000-0000-0000-0000-000000000000}" dt="2026-08-13T22:58:50.429" v="35" actId="1076"/>
+          <ac:picMkLst>
+            <pc:docMk/>
+            <pc:sldMk cId="1318932797" sldId="268"/>
+            <ac:picMk id="5" creationId="{E5450514-D7F2-2BB6-89C5-113A6524D56D}"/>
+          </ac:picMkLst>
+        </pc:picChg>
+      </pc:sldChg>
+      <pc:sldChg chg="addSp delSp modSp new">
+        <pc:chgData name="Taliah Kassaby" userId="S::kas0005@wantirnacollege.vic.edu.au::23d269d0-e02c-425d-bfba-881a989e0172" providerId="AD" clId="Web-{00000000-0000-0000-0000-000000000000}" dt="2026-08-13T23:12:41.526" v="98"/>
+        <pc:sldMkLst>
+          <pc:docMk/>
+          <pc:sldMk cId="2149723290" sldId="271"/>
+        </pc:sldMkLst>
+        <pc:spChg chg="mod">
+          <ac:chgData name="Taliah Kassaby" userId="S::kas0005@wantirnacollege.vic.edu.au::23d269d0-e02c-425d-bfba-881a989e0172" providerId="AD" clId="Web-{00000000-0000-0000-0000-000000000000}" dt="2026-08-13T22:58:31.459" v="32" actId="14100"/>
+          <ac:spMkLst>
+            <pc:docMk/>
+            <pc:sldMk cId="2149723290" sldId="271"/>
+            <ac:spMk id="2" creationId="{9E00B712-F478-3D2F-6FB3-DFD07B0CE486}"/>
+          </ac:spMkLst>
+        </pc:spChg>
+        <pc:spChg chg="del mod">
+          <ac:chgData name="Taliah Kassaby" userId="S::kas0005@wantirnacollege.vic.edu.au::23d269d0-e02c-425d-bfba-881a989e0172" providerId="AD" clId="Web-{00000000-0000-0000-0000-000000000000}" dt="2026-08-13T22:57:58.863" v="22"/>
+          <ac:spMkLst>
+            <pc:docMk/>
+            <pc:sldMk cId="2149723290" sldId="271"/>
+            <ac:spMk id="3" creationId="{47FA518E-B491-DD91-6346-283F34B1CFDF}"/>
+          </ac:spMkLst>
+        </pc:spChg>
+        <pc:spChg chg="add del mod">
+          <ac:chgData name="Taliah Kassaby" userId="S::kas0005@wantirnacollege.vic.edu.au::23d269d0-e02c-425d-bfba-881a989e0172" providerId="AD" clId="Web-{00000000-0000-0000-0000-000000000000}" dt="2026-08-13T23:12:26.979" v="89"/>
+          <ac:spMkLst>
+            <pc:docMk/>
+            <pc:sldMk cId="2149723290" sldId="271"/>
+            <ac:spMk id="14" creationId="{C82DFA16-6D59-839B-214A-56E1EAB1EE48}"/>
+          </ac:spMkLst>
+        </pc:spChg>
+        <pc:spChg chg="add del mod">
+          <ac:chgData name="Taliah Kassaby" userId="S::kas0005@wantirnacollege.vic.edu.au::23d269d0-e02c-425d-bfba-881a989e0172" providerId="AD" clId="Web-{00000000-0000-0000-0000-000000000000}" dt="2026-08-13T23:12:41.526" v="97"/>
+          <ac:spMkLst>
+            <pc:docMk/>
+            <pc:sldMk cId="2149723290" sldId="271"/>
+            <ac:spMk id="21" creationId="{1233737B-6477-D0B8-28ED-86136C922596}"/>
+          </ac:spMkLst>
+        </pc:spChg>
+        <pc:picChg chg="add del mod ord">
+          <ac:chgData name="Taliah Kassaby" userId="S::kas0005@wantirnacollege.vic.edu.au::23d269d0-e02c-425d-bfba-881a989e0172" providerId="AD" clId="Web-{00000000-0000-0000-0000-000000000000}" dt="2026-08-13T23:12:27.104" v="96"/>
+          <ac:picMkLst>
+            <pc:docMk/>
+            <pc:sldMk cId="2149723290" sldId="271"/>
+            <ac:picMk id="4" creationId="{59130259-D938-6075-4E29-BA20C36A30B9}"/>
+          </ac:picMkLst>
+        </pc:picChg>
+        <pc:inkChg chg="add del">
+          <ac:chgData name="Taliah Kassaby" userId="S::kas0005@wantirnacollege.vic.edu.au::23d269d0-e02c-425d-bfba-881a989e0172" providerId="AD" clId="Web-{00000000-0000-0000-0000-000000000000}" dt="2026-08-13T23:09:44.312" v="54"/>
+          <ac:inkMkLst>
+            <pc:docMk/>
+            <pc:sldMk cId="2149723290" sldId="271"/>
+            <ac:inkMk id="5" creationId="{B0A9AA42-8207-FD95-1B3F-90D470866E11}"/>
+          </ac:inkMkLst>
+        </pc:inkChg>
+        <pc:inkChg chg="add del">
+          <ac:chgData name="Taliah Kassaby" userId="S::kas0005@wantirnacollege.vic.edu.au::23d269d0-e02c-425d-bfba-881a989e0172" providerId="AD" clId="Web-{00000000-0000-0000-0000-000000000000}" dt="2026-08-13T23:09:43.906" v="53"/>
+          <ac:inkMkLst>
+            <pc:docMk/>
+            <pc:sldMk cId="2149723290" sldId="271"/>
+            <ac:inkMk id="6" creationId="{F22C6F7F-B241-C647-4300-813D4DF2C062}"/>
+          </ac:inkMkLst>
+        </pc:inkChg>
+        <pc:inkChg chg="add del">
+          <ac:chgData name="Taliah Kassaby" userId="S::kas0005@wantirnacollege.vic.edu.au::23d269d0-e02c-425d-bfba-881a989e0172" providerId="AD" clId="Web-{00000000-0000-0000-0000-000000000000}" dt="2026-08-13T23:12:26.979" v="95"/>
+          <ac:inkMkLst>
+            <pc:docMk/>
+            <pc:sldMk cId="2149723290" sldId="271"/>
+            <ac:inkMk id="7" creationId="{11F76EE9-3BFE-34F7-5633-EBE6FD7D23AD}"/>
+          </ac:inkMkLst>
+        </pc:inkChg>
+        <pc:inkChg chg="add del">
+          <ac:chgData name="Taliah Kassaby" userId="S::kas0005@wantirnacollege.vic.edu.au::23d269d0-e02c-425d-bfba-881a989e0172" providerId="AD" clId="Web-{00000000-0000-0000-0000-000000000000}" dt="2026-08-13T23:12:26.979" v="94"/>
+          <ac:inkMkLst>
+            <pc:docMk/>
+            <pc:sldMk cId="2149723290" sldId="271"/>
+            <ac:inkMk id="8" creationId="{C447016D-9AA6-C113-2883-DD1B7A954B45}"/>
+          </ac:inkMkLst>
+        </pc:inkChg>
+        <pc:inkChg chg="add del">
+          <ac:chgData name="Taliah Kassaby" userId="S::kas0005@wantirnacollege.vic.edu.au::23d269d0-e02c-425d-bfba-881a989e0172" providerId="AD" clId="Web-{00000000-0000-0000-0000-000000000000}" dt="2026-08-13T23:12:26.979" v="93"/>
+          <ac:inkMkLst>
+            <pc:docMk/>
+            <pc:sldMk cId="2149723290" sldId="271"/>
+            <ac:inkMk id="9" creationId="{B214E9DC-791B-44BA-8E97-6EAE95065A72}"/>
+          </ac:inkMkLst>
+        </pc:inkChg>
+        <pc:inkChg chg="add del">
+          <ac:chgData name="Taliah Kassaby" userId="S::kas0005@wantirnacollege.vic.edu.au::23d269d0-e02c-425d-bfba-881a989e0172" providerId="AD" clId="Web-{00000000-0000-0000-0000-000000000000}" dt="2026-08-13T23:12:26.979" v="92"/>
+          <ac:inkMkLst>
+            <pc:docMk/>
+            <pc:sldMk cId="2149723290" sldId="271"/>
+            <ac:inkMk id="10" creationId="{1F81570E-204E-B3C9-E272-BE4A3D9FDE34}"/>
+          </ac:inkMkLst>
+        </pc:inkChg>
+        <pc:inkChg chg="add del">
+          <ac:chgData name="Taliah Kassaby" userId="S::kas0005@wantirnacollege.vic.edu.au::23d269d0-e02c-425d-bfba-881a989e0172" providerId="AD" clId="Web-{00000000-0000-0000-0000-000000000000}" dt="2026-08-13T23:12:26.979" v="91"/>
+          <ac:inkMkLst>
+            <pc:docMk/>
+            <pc:sldMk cId="2149723290" sldId="271"/>
+            <ac:inkMk id="11" creationId="{D7465578-B992-9C07-7BC9-3B9CF3419FCF}"/>
+          </ac:inkMkLst>
+        </pc:inkChg>
+        <pc:inkChg chg="add del">
+          <ac:chgData name="Taliah Kassaby" userId="S::kas0005@wantirnacollege.vic.edu.au::23d269d0-e02c-425d-bfba-881a989e0172" providerId="AD" clId="Web-{00000000-0000-0000-0000-000000000000}" dt="2026-08-13T23:12:41.526" v="98"/>
+          <ac:inkMkLst>
+            <pc:docMk/>
+            <pc:sldMk cId="2149723290" sldId="271"/>
+            <ac:inkMk id="12" creationId="{3CE0E098-0DE0-C075-1412-AAEAF69E06A3}"/>
+          </ac:inkMkLst>
+        </pc:inkChg>
+        <pc:inkChg chg="add del">
+          <ac:chgData name="Taliah Kassaby" userId="S::kas0005@wantirnacollege.vic.edu.au::23d269d0-e02c-425d-bfba-881a989e0172" providerId="AD" clId="Web-{00000000-0000-0000-0000-000000000000}" dt="2026-08-13T23:12:26.979" v="90"/>
+          <ac:inkMkLst>
+            <pc:docMk/>
+            <pc:sldMk cId="2149723290" sldId="271"/>
+            <ac:inkMk id="13" creationId="{749EE8FF-67C7-3C4C-5B1C-A258AB7F3E97}"/>
+          </ac:inkMkLst>
+        </pc:inkChg>
+        <pc:inkChg chg="add">
+          <ac:chgData name="Taliah Kassaby" userId="S::kas0005@wantirnacollege.vic.edu.au::23d269d0-e02c-425d-bfba-881a989e0172" providerId="AD" clId="Web-{00000000-0000-0000-0000-000000000000}" dt="2026-08-13T23:10:45.894" v="82"/>
+          <ac:inkMkLst>
+            <pc:docMk/>
+            <pc:sldMk cId="2149723290" sldId="271"/>
+            <ac:inkMk id="15" creationId="{909F68AC-4533-5933-236C-3E8C64B7139B}"/>
+          </ac:inkMkLst>
+        </pc:inkChg>
+        <pc:inkChg chg="add del">
+          <ac:chgData name="Taliah Kassaby" userId="S::kas0005@wantirnacollege.vic.edu.au::23d269d0-e02c-425d-bfba-881a989e0172" providerId="AD" clId="Web-{00000000-0000-0000-0000-000000000000}" dt="2026-08-13T23:12:26.979" v="88"/>
+          <ac:inkMkLst>
+            <pc:docMk/>
+            <pc:sldMk cId="2149723290" sldId="271"/>
+            <ac:inkMk id="16" creationId="{3C3BB21F-3684-A0D0-E2AA-CB2504BBD1ED}"/>
+          </ac:inkMkLst>
+        </pc:inkChg>
+        <pc:inkChg chg="add">
+          <ac:chgData name="Taliah Kassaby" userId="S::kas0005@wantirnacollege.vic.edu.au::23d269d0-e02c-425d-bfba-881a989e0172" providerId="AD" clId="Web-{00000000-0000-0000-0000-000000000000}" dt="2026-08-13T23:12:10.056" v="84"/>
+          <ac:inkMkLst>
+            <pc:docMk/>
+            <pc:sldMk cId="2149723290" sldId="271"/>
+            <ac:inkMk id="17" creationId="{9D4E803E-C957-72AB-1BA1-FB3A08757C8F}"/>
+          </ac:inkMkLst>
+        </pc:inkChg>
+        <pc:inkChg chg="add">
+          <ac:chgData name="Taliah Kassaby" userId="S::kas0005@wantirnacollege.vic.edu.au::23d269d0-e02c-425d-bfba-881a989e0172" providerId="AD" clId="Web-{00000000-0000-0000-0000-000000000000}" dt="2026-08-13T23:12:10.759" v="85"/>
+          <ac:inkMkLst>
+            <pc:docMk/>
+            <pc:sldMk cId="2149723290" sldId="271"/>
+            <ac:inkMk id="18" creationId="{D845F142-7145-4B13-0DF0-D0D519116F4C}"/>
+          </ac:inkMkLst>
+        </pc:inkChg>
+        <pc:inkChg chg="add del">
+          <ac:chgData name="Taliah Kassaby" userId="S::kas0005@wantirnacollege.vic.edu.au::23d269d0-e02c-425d-bfba-881a989e0172" providerId="AD" clId="Web-{00000000-0000-0000-0000-000000000000}" dt="2026-08-13T23:12:26.979" v="87"/>
+          <ac:inkMkLst>
+            <pc:docMk/>
+            <pc:sldMk cId="2149723290" sldId="271"/>
+            <ac:inkMk id="19" creationId="{75C8A32D-F5F6-AD52-4B49-A978FB463138}"/>
+          </ac:inkMkLst>
+        </pc:inkChg>
+      </pc:sldChg>
+      <pc:sldChg chg="addSp delSp modSp new">
+        <pc:chgData name="Taliah Kassaby" userId="S::kas0005@wantirnacollege.vic.edu.au::23d269d0-e02c-425d-bfba-881a989e0172" providerId="AD" clId="Web-{00000000-0000-0000-0000-000000000000}" dt="2026-08-13T23:24:58.025" v="129" actId="20577"/>
+        <pc:sldMkLst>
+          <pc:docMk/>
+          <pc:sldMk cId="4196453157" sldId="272"/>
+        </pc:sldMkLst>
+        <pc:spChg chg="mod">
+          <ac:chgData name="Taliah Kassaby" userId="S::kas0005@wantirnacollege.vic.edu.au::23d269d0-e02c-425d-bfba-881a989e0172" providerId="AD" clId="Web-{00000000-0000-0000-0000-000000000000}" dt="2026-08-13T22:59:12.289" v="50" actId="20577"/>
+          <ac:spMkLst>
+            <pc:docMk/>
+            <pc:sldMk cId="4196453157" sldId="272"/>
+            <ac:spMk id="2" creationId="{DECC06B4-3A01-A656-443F-0A54FBECDA36}"/>
+          </ac:spMkLst>
+        </pc:spChg>
+        <pc:spChg chg="del">
+          <ac:chgData name="Taliah Kassaby" userId="S::kas0005@wantirnacollege.vic.edu.au::23d269d0-e02c-425d-bfba-881a989e0172" providerId="AD" clId="Web-{00000000-0000-0000-0000-000000000000}" dt="2026-08-13T23:23:13.471" v="99"/>
+          <ac:spMkLst>
+            <pc:docMk/>
+            <pc:sldMk cId="4196453157" sldId="272"/>
+            <ac:spMk id="3" creationId="{EA5F4118-6B41-479F-27D0-A501D382EB59}"/>
+          </ac:spMkLst>
+        </pc:spChg>
+        <pc:spChg chg="add mod">
+          <ac:chgData name="Taliah Kassaby" userId="S::kas0005@wantirnacollege.vic.edu.au::23d269d0-e02c-425d-bfba-881a989e0172" providerId="AD" clId="Web-{00000000-0000-0000-0000-000000000000}" dt="2026-08-13T23:24:58.025" v="129" actId="20577"/>
+          <ac:spMkLst>
+            <pc:docMk/>
+            <pc:sldMk cId="4196453157" sldId="272"/>
+            <ac:spMk id="16" creationId="{24FEF3ED-F281-D4E7-22C3-88CFF0405EB0}"/>
+          </ac:spMkLst>
+        </pc:spChg>
+        <pc:picChg chg="add mod ord">
+          <ac:chgData name="Taliah Kassaby" userId="S::kas0005@wantirnacollege.vic.edu.au::23d269d0-e02c-425d-bfba-881a989e0172" providerId="AD" clId="Web-{00000000-0000-0000-0000-000000000000}" dt="2026-08-13T23:23:57.771" v="106" actId="1076"/>
+          <ac:picMkLst>
+            <pc:docMk/>
+            <pc:sldMk cId="4196453157" sldId="272"/>
+            <ac:picMk id="4" creationId="{6EB7D4B0-5233-EF46-C5FB-4067893490FB}"/>
+          </ac:picMkLst>
+        </pc:picChg>
+        <pc:inkChg chg="add">
+          <ac:chgData name="Taliah Kassaby" userId="S::kas0005@wantirnacollege.vic.edu.au::23d269d0-e02c-425d-bfba-881a989e0172" providerId="AD" clId="Web-{00000000-0000-0000-0000-000000000000}" dt="2026-08-13T23:24:05.927" v="107"/>
+          <ac:inkMkLst>
+            <pc:docMk/>
+            <pc:sldMk cId="4196453157" sldId="272"/>
+            <ac:inkMk id="5" creationId="{291E65B1-4420-81D5-05F8-C0FF12741F77}"/>
+          </ac:inkMkLst>
+        </pc:inkChg>
+        <pc:inkChg chg="add del">
+          <ac:chgData name="Taliah Kassaby" userId="S::kas0005@wantirnacollege.vic.edu.au::23d269d0-e02c-425d-bfba-881a989e0172" providerId="AD" clId="Web-{00000000-0000-0000-0000-000000000000}" dt="2026-08-13T23:24:12.006" v="109"/>
+          <ac:inkMkLst>
+            <pc:docMk/>
+            <pc:sldMk cId="4196453157" sldId="272"/>
+            <ac:inkMk id="6" creationId="{4E71EA53-A3FC-3B87-31D7-DDBD6A54F270}"/>
+          </ac:inkMkLst>
+        </pc:inkChg>
+        <pc:inkChg chg="add del">
+          <ac:chgData name="Taliah Kassaby" userId="S::kas0005@wantirnacollege.vic.edu.au::23d269d0-e02c-425d-bfba-881a989e0172" providerId="AD" clId="Web-{00000000-0000-0000-0000-000000000000}" dt="2026-08-13T23:24:27.319" v="117"/>
+          <ac:inkMkLst>
+            <pc:docMk/>
+            <pc:sldMk cId="4196453157" sldId="272"/>
+            <ac:inkMk id="7" creationId="{97F6AB6B-52BE-AEDE-7749-8089954F1645}"/>
+          </ac:inkMkLst>
+        </pc:inkChg>
+        <pc:inkChg chg="add del">
+          <ac:chgData name="Taliah Kassaby" userId="S::kas0005@wantirnacollege.vic.edu.au::23d269d0-e02c-425d-bfba-881a989e0172" providerId="AD" clId="Web-{00000000-0000-0000-0000-000000000000}" dt="2026-08-13T23:24:26.991" v="116"/>
+          <ac:inkMkLst>
+            <pc:docMk/>
+            <pc:sldMk cId="4196453157" sldId="272"/>
+            <ac:inkMk id="8" creationId="{FA528D55-F199-2CFD-9D2D-04F3EDC3C379}"/>
+          </ac:inkMkLst>
+        </pc:inkChg>
+        <pc:inkChg chg="add del">
+          <ac:chgData name="Taliah Kassaby" userId="S::kas0005@wantirnacollege.vic.edu.au::23d269d0-e02c-425d-bfba-881a989e0172" providerId="AD" clId="Web-{00000000-0000-0000-0000-000000000000}" dt="2026-08-13T23:24:26.616" v="115"/>
+          <ac:inkMkLst>
+            <pc:docMk/>
+            <pc:sldMk cId="4196453157" sldId="272"/>
+            <ac:inkMk id="9" creationId="{EFC37512-E7D3-81B6-727B-9C39C1C8027C}"/>
+          </ac:inkMkLst>
+        </pc:inkChg>
+        <pc:inkChg chg="add del">
+          <ac:chgData name="Taliah Kassaby" userId="S::kas0005@wantirnacollege.vic.edu.au::23d269d0-e02c-425d-bfba-881a989e0172" providerId="AD" clId="Web-{00000000-0000-0000-0000-000000000000}" dt="2026-08-13T23:24:26.179" v="114"/>
+          <ac:inkMkLst>
+            <pc:docMk/>
+            <pc:sldMk cId="4196453157" sldId="272"/>
+            <ac:inkMk id="10" creationId="{33AFACD1-4C03-4F0F-465F-E8A7BF7ED75F}"/>
+          </ac:inkMkLst>
+        </pc:inkChg>
+        <pc:inkChg chg="add">
+          <ac:chgData name="Taliah Kassaby" userId="S::kas0005@wantirnacollege.vic.edu.au::23d269d0-e02c-425d-bfba-881a989e0172" providerId="AD" clId="Web-{00000000-0000-0000-0000-000000000000}" dt="2026-08-13T23:24:31.242" v="118"/>
+          <ac:inkMkLst>
+            <pc:docMk/>
+            <pc:sldMk cId="4196453157" sldId="272"/>
+            <ac:inkMk id="11" creationId="{53A11908-C8F3-228A-2A42-64DCE78996A9}"/>
+          </ac:inkMkLst>
+        </pc:inkChg>
+        <pc:inkChg chg="add">
+          <ac:chgData name="Taliah Kassaby" userId="S::kas0005@wantirnacollege.vic.edu.au::23d269d0-e02c-425d-bfba-881a989e0172" providerId="AD" clId="Web-{00000000-0000-0000-0000-000000000000}" dt="2026-08-13T23:24:35.804" v="119"/>
+          <ac:inkMkLst>
+            <pc:docMk/>
+            <pc:sldMk cId="4196453157" sldId="272"/>
+            <ac:inkMk id="12" creationId="{AB26A816-7054-250C-2DD5-14C1B01A714F}"/>
+          </ac:inkMkLst>
+        </pc:inkChg>
+        <pc:inkChg chg="add">
+          <ac:chgData name="Taliah Kassaby" userId="S::kas0005@wantirnacollege.vic.edu.au::23d269d0-e02c-425d-bfba-881a989e0172" providerId="AD" clId="Web-{00000000-0000-0000-0000-000000000000}" dt="2026-08-13T23:24:37.992" v="120"/>
+          <ac:inkMkLst>
+            <pc:docMk/>
+            <pc:sldMk cId="4196453157" sldId="272"/>
+            <ac:inkMk id="13" creationId="{0D5BF425-7455-5047-8B5B-95729688C396}"/>
+          </ac:inkMkLst>
+        </pc:inkChg>
+        <pc:inkChg chg="add">
+          <ac:chgData name="Taliah Kassaby" userId="S::kas0005@wantirnacollege.vic.edu.au::23d269d0-e02c-425d-bfba-881a989e0172" providerId="AD" clId="Web-{00000000-0000-0000-0000-000000000000}" dt="2026-08-13T23:24:41.648" v="121"/>
+          <ac:inkMkLst>
+            <pc:docMk/>
+            <pc:sldMk cId="4196453157" sldId="272"/>
+            <ac:inkMk id="14" creationId="{2221E05B-8385-4427-59AE-C55D3918076B}"/>
+          </ac:inkMkLst>
+        </pc:inkChg>
+        <pc:inkChg chg="add">
+          <ac:chgData name="Taliah Kassaby" userId="S::kas0005@wantirnacollege.vic.edu.au::23d269d0-e02c-425d-bfba-881a989e0172" providerId="AD" clId="Web-{00000000-0000-0000-0000-000000000000}" dt="2026-08-13T23:24:46.602" v="122"/>
+          <ac:inkMkLst>
+            <pc:docMk/>
+            <pc:sldMk cId="4196453157" sldId="272"/>
+            <ac:inkMk id="15" creationId="{E139891A-B456-ABC2-8311-60B3B4D12537}"/>
+          </ac:inkMkLst>
+        </pc:inkChg>
+      </pc:sldChg>
+    </pc:docChg>
+  </pc:docChgLst>
+  <pc:docChgLst>
+    <pc:chgData name="Zef Ewart" userId="S::ewa0005@wantirnacollege.vic.edu.au::d55df615-e487-427e-b122-1eec8308b830" providerId="AD" clId="Web-{F06FBC25-D5A1-B4B9-830D-DD9FA3322021}"/>
+    <pc:docChg chg="addSld modSld">
+      <pc:chgData name="Zef Ewart" userId="S::ewa0005@wantirnacollege.vic.edu.au::d55df615-e487-427e-b122-1eec8308b830" providerId="AD" clId="Web-{F06FBC25-D5A1-B4B9-830D-DD9FA3322021}" dt="2026-08-13T23:16:32.548" v="614" actId="20577"/>
+      <pc:docMkLst>
+        <pc:docMk/>
+      </pc:docMkLst>
+      <pc:sldChg chg="modSp new">
+        <pc:chgData name="Zef Ewart" userId="S::ewa0005@wantirnacollege.vic.edu.au::d55df615-e487-427e-b122-1eec8308b830" providerId="AD" clId="Web-{F06FBC25-D5A1-B4B9-830D-DD9FA3322021}" dt="2026-08-13T23:16:32.548" v="614" actId="20577"/>
+        <pc:sldMkLst>
+          <pc:docMk/>
+          <pc:sldMk cId="3457692963" sldId="270"/>
+        </pc:sldMkLst>
+        <pc:spChg chg="mod">
+          <ac:chgData name="Zef Ewart" userId="S::ewa0005@wantirnacollege.vic.edu.au::d55df615-e487-427e-b122-1eec8308b830" providerId="AD" clId="Web-{F06FBC25-D5A1-B4B9-830D-DD9FA3322021}" dt="2026-08-13T22:54:38.886" v="23" actId="20577"/>
+          <ac:spMkLst>
+            <pc:docMk/>
+            <pc:sldMk cId="3457692963" sldId="270"/>
+            <ac:spMk id="2" creationId="{9A6D4E23-7F5E-FFF1-E437-7D524E9B201B}"/>
+          </ac:spMkLst>
+        </pc:spChg>
+        <pc:spChg chg="mod">
+          <ac:chgData name="Zef Ewart" userId="S::ewa0005@wantirnacollege.vic.edu.au::d55df615-e487-427e-b122-1eec8308b830" providerId="AD" clId="Web-{F06FBC25-D5A1-B4B9-830D-DD9FA3322021}" dt="2026-08-13T23:16:32.548" v="614" actId="20577"/>
+          <ac:spMkLst>
+            <pc:docMk/>
+            <pc:sldMk cId="3457692963" sldId="270"/>
+            <ac:spMk id="3" creationId="{C999C599-B8CA-EE81-4840-2B23F0BFE06D}"/>
+          </ac:spMkLst>
+        </pc:spChg>
+      </pc:sldChg>
+    </pc:docChg>
+  </pc:docChgLst>
   <pc:docChgLst>
     <pc:chgData name="Zef Ewart" userId="S::ewa0005@wantirnacollege.vic.edu.au::d55df615-e487-427e-b122-1eec8308b830" providerId="AD" clId="Web-{DD54F4F6-CB6F-99C7-4943-F812185C5B62}"/>
     <pc:docChg chg="addSld modSld">
@@ -317,13 +663,13 @@
   </pc:docChgLst>
   <pc:docChgLst>
     <pc:chgData name="Oscar Glaister" userId="e6f16566-ea0c-4df4-8ebb-5765e438d351" providerId="ADAL" clId="{252C8254-46BD-4598-B285-E6EC582ADBF0}"/>
-    <pc:docChg chg="addSld modSld">
-      <pc:chgData name="Oscar Glaister" userId="e6f16566-ea0c-4df4-8ebb-5765e438d351" providerId="ADAL" clId="{252C8254-46BD-4598-B285-E6EC582ADBF0}" dt="2026-08-11T02:48:55.025" v="2"/>
+    <pc:docChg chg="custSel addSld modSld">
+      <pc:chgData name="Oscar Glaister" userId="e6f16566-ea0c-4df4-8ebb-5765e438d351" providerId="ADAL" clId="{252C8254-46BD-4598-B285-E6EC582ADBF0}" dt="2026-08-13T22:54:53.507" v="35" actId="207"/>
       <pc:docMkLst>
         <pc:docMk/>
       </pc:docMkLst>
-      <pc:sldChg chg="modSp">
-        <pc:chgData name="Oscar Glaister" userId="e6f16566-ea0c-4df4-8ebb-5765e438d351" providerId="ADAL" clId="{252C8254-46BD-4598-B285-E6EC582ADBF0}" dt="2026-08-11T02:48:30.023" v="1"/>
+      <pc:sldChg chg="modSp mod">
+        <pc:chgData name="Oscar Glaister" userId="e6f16566-ea0c-4df4-8ebb-5765e438d351" providerId="ADAL" clId="{252C8254-46BD-4598-B285-E6EC582ADBF0}" dt="2026-08-13T22:53:44.218" v="33" actId="20577"/>
         <pc:sldMkLst>
           <pc:docMk/>
           <pc:sldMk cId="1388250180" sldId="256"/>
@@ -337,7 +683,7 @@
           </ac:spMkLst>
         </pc:spChg>
         <pc:spChg chg="mod">
-          <ac:chgData name="Oscar Glaister" userId="e6f16566-ea0c-4df4-8ebb-5765e438d351" providerId="ADAL" clId="{252C8254-46BD-4598-B285-E6EC582ADBF0}" dt="2026-08-11T02:48:30.023" v="1"/>
+          <ac:chgData name="Oscar Glaister" userId="e6f16566-ea0c-4df4-8ebb-5765e438d351" providerId="ADAL" clId="{252C8254-46BD-4598-B285-E6EC582ADBF0}" dt="2026-08-13T22:53:44.218" v="33" actId="20577"/>
           <ac:spMkLst>
             <pc:docMk/>
             <pc:sldMk cId="1388250180" sldId="256"/>
@@ -380,83 +726,19 @@
           <pc:docMk/>
           <pc:sldMk cId="2897359550" sldId="260"/>
         </pc:sldMkLst>
-        <pc:spChg chg="del">
-          <ac:chgData name="Oscar Glaister" userId="e6f16566-ea0c-4df4-8ebb-5765e438d351" providerId="ADAL" clId="{252C8254-46BD-4598-B285-E6EC582ADBF0}" dt="2026-08-11T02:47:52.888" v="0"/>
-          <ac:spMkLst>
-            <pc:docMk/>
-            <pc:sldMk cId="2897359550" sldId="260"/>
-            <ac:spMk id="13" creationId="{B8144315-1C5A-4185-A952-25D98D303D46}"/>
-          </ac:spMkLst>
-        </pc:spChg>
-        <pc:spChg chg="del">
-          <ac:chgData name="Oscar Glaister" userId="e6f16566-ea0c-4df4-8ebb-5765e438d351" providerId="ADAL" clId="{252C8254-46BD-4598-B285-E6EC582ADBF0}" dt="2026-08-11T02:47:52.888" v="0"/>
-          <ac:spMkLst>
-            <pc:docMk/>
-            <pc:sldMk cId="2897359550" sldId="260"/>
-            <ac:spMk id="15" creationId="{31D248D0-90D8-4EAF-84EE-DA3868518829}"/>
-          </ac:spMkLst>
-        </pc:spChg>
-        <pc:spChg chg="del">
-          <ac:chgData name="Oscar Glaister" userId="e6f16566-ea0c-4df4-8ebb-5765e438d351" providerId="ADAL" clId="{252C8254-46BD-4598-B285-E6EC582ADBF0}" dt="2026-08-11T02:47:52.888" v="0"/>
-          <ac:spMkLst>
-            <pc:docMk/>
-            <pc:sldMk cId="2897359550" sldId="260"/>
-            <ac:spMk id="17" creationId="{0775805F-9E56-4330-9EA3-04D38DCEC3F1}"/>
-          </ac:spMkLst>
-        </pc:spChg>
-        <pc:grpChg chg="del">
-          <ac:chgData name="Oscar Glaister" userId="e6f16566-ea0c-4df4-8ebb-5765e438d351" providerId="ADAL" clId="{252C8254-46BD-4598-B285-E6EC582ADBF0}" dt="2026-08-11T02:47:52.888" v="0"/>
-          <ac:grpSpMkLst>
-            <pc:docMk/>
-            <pc:sldMk cId="2897359550" sldId="260"/>
-            <ac:grpSpMk id="9" creationId="{4091D54B-59AB-4A5E-8E9E-0421BD66D4FB}"/>
-          </ac:grpSpMkLst>
-        </pc:grpChg>
       </pc:sldChg>
-      <pc:sldChg chg="delSp add setBg">
-        <pc:chgData name="Oscar Glaister" userId="e6f16566-ea0c-4df4-8ebb-5765e438d351" providerId="ADAL" clId="{252C8254-46BD-4598-B285-E6EC582ADBF0}" dt="2026-08-11T02:47:52.888" v="0"/>
+      <pc:sldChg chg="delSp modSp add mod setBg">
+        <pc:chgData name="Oscar Glaister" userId="e6f16566-ea0c-4df4-8ebb-5765e438d351" providerId="ADAL" clId="{252C8254-46BD-4598-B285-E6EC582ADBF0}" dt="2026-08-13T22:54:53.507" v="35" actId="207"/>
         <pc:sldMkLst>
           <pc:docMk/>
           <pc:sldMk cId="4094592511" sldId="261"/>
         </pc:sldMkLst>
-        <pc:spChg chg="del">
-          <ac:chgData name="Oscar Glaister" userId="e6f16566-ea0c-4df4-8ebb-5765e438d351" providerId="ADAL" clId="{252C8254-46BD-4598-B285-E6EC582ADBF0}" dt="2026-08-11T02:47:52.888" v="0"/>
+        <pc:spChg chg="mod">
+          <ac:chgData name="Oscar Glaister" userId="e6f16566-ea0c-4df4-8ebb-5765e438d351" providerId="ADAL" clId="{252C8254-46BD-4598-B285-E6EC582ADBF0}" dt="2026-08-13T22:54:53.507" v="35" actId="207"/>
           <ac:spMkLst>
             <pc:docMk/>
             <pc:sldMk cId="4094592511" sldId="261"/>
-            <ac:spMk id="80" creationId="{F70C2B8F-6B1B-46D5-86E6-40F36C695FC2}"/>
-          </ac:spMkLst>
-        </pc:spChg>
-        <pc:spChg chg="del">
-          <ac:chgData name="Oscar Glaister" userId="e6f16566-ea0c-4df4-8ebb-5765e438d351" providerId="ADAL" clId="{252C8254-46BD-4598-B285-E6EC582ADBF0}" dt="2026-08-11T02:47:52.888" v="0"/>
-          <ac:spMkLst>
-            <pc:docMk/>
-            <pc:sldMk cId="4094592511" sldId="261"/>
-            <ac:spMk id="81" creationId="{DB521824-592C-476A-AB0A-CA0C6D1F3407}"/>
-          </ac:spMkLst>
-        </pc:spChg>
-        <pc:spChg chg="del">
-          <ac:chgData name="Oscar Glaister" userId="e6f16566-ea0c-4df4-8ebb-5765e438d351" providerId="ADAL" clId="{252C8254-46BD-4598-B285-E6EC582ADBF0}" dt="2026-08-11T02:47:52.888" v="0"/>
-          <ac:spMkLst>
-            <pc:docMk/>
-            <pc:sldMk cId="4094592511" sldId="261"/>
-            <ac:spMk id="82" creationId="{A2749EFA-8EE4-4EB8-9424-8E593B9320AD}"/>
-          </ac:spMkLst>
-        </pc:spChg>
-        <pc:spChg chg="del">
-          <ac:chgData name="Oscar Glaister" userId="e6f16566-ea0c-4df4-8ebb-5765e438d351" providerId="ADAL" clId="{252C8254-46BD-4598-B285-E6EC582ADBF0}" dt="2026-08-11T02:47:52.888" v="0"/>
-          <ac:spMkLst>
-            <pc:docMk/>
-            <pc:sldMk cId="4094592511" sldId="261"/>
-            <ac:spMk id="83" creationId="{B5C860C9-D4F9-4350-80DA-0D1CD36C7741}"/>
-          </ac:spMkLst>
-        </pc:spChg>
-        <pc:spChg chg="del">
-          <ac:chgData name="Oscar Glaister" userId="e6f16566-ea0c-4df4-8ebb-5765e438d351" providerId="ADAL" clId="{252C8254-46BD-4598-B285-E6EC582ADBF0}" dt="2026-08-11T02:47:52.888" v="0"/>
-          <ac:spMkLst>
-            <pc:docMk/>
-            <pc:sldMk cId="4094592511" sldId="261"/>
-            <ac:spMk id="84" creationId="{538A90C8-AE0E-4EBA-9AF8-EEDB206020E0}"/>
+            <ac:spMk id="8" creationId="{E5BE8265-4C5F-67BB-6A15-D068CDB22A3C}"/>
           </ac:spMkLst>
         </pc:spChg>
       </pc:sldChg>
@@ -596,7 +878,7 @@
           <inkml:channelProperty channel="OE" name="resolution" value="1000" units="1/deg"/>
         </inkml:channelProperties>
       </inkml:inkSource>
-      <inkml:timestamp xml:id="ts0" timeString="2026-08-11T02:53:51.274"/>
+      <inkml:timestamp xml:id="ts0" timeString="2026-08-11T02:54:01.806"/>
     </inkml:context>
     <inkml:brush xml:id="br0">
       <inkml:brushProperty name="width" value="0.1" units="cm"/>
@@ -627,7 +909,7 @@
           <inkml:channelProperty channel="OE" name="resolution" value="1000" units="1/deg"/>
         </inkml:channelProperties>
       </inkml:inkSource>
-      <inkml:timestamp xml:id="ts0" timeString="2026-08-11T02:53:51.275"/>
+      <inkml:timestamp xml:id="ts0" timeString="2026-08-11T02:54:01.807"/>
     </inkml:context>
     <inkml:brush xml:id="br0">
       <inkml:brushProperty name="width" value="0.1" units="cm"/>
@@ -658,7 +940,7 @@
           <inkml:channelProperty channel="OE" name="resolution" value="1000" units="1/deg"/>
         </inkml:channelProperties>
       </inkml:inkSource>
-      <inkml:timestamp xml:id="ts0" timeString="2026-08-11T02:53:51.276"/>
+      <inkml:timestamp xml:id="ts0" timeString="2026-08-11T02:54:01.808"/>
     </inkml:context>
     <inkml:brush xml:id="br0">
       <inkml:brushProperty name="width" value="0.1" units="cm"/>
@@ -689,7 +971,7 @@
           <inkml:channelProperty channel="OE" name="resolution" value="1000" units="1/deg"/>
         </inkml:channelProperties>
       </inkml:inkSource>
-      <inkml:timestamp xml:id="ts0" timeString="2026-08-11T02:53:51.277"/>
+      <inkml:timestamp xml:id="ts0" timeString="2026-08-11T02:54:01.809"/>
     </inkml:context>
     <inkml:brush xml:id="br0">
       <inkml:brushProperty name="width" value="0.1" units="cm"/>
@@ -720,7 +1002,7 @@
           <inkml:channelProperty channel="OE" name="resolution" value="1000" units="1/deg"/>
         </inkml:channelProperties>
       </inkml:inkSource>
-      <inkml:timestamp xml:id="ts0" timeString="2026-08-11T02:53:51.278"/>
+      <inkml:timestamp xml:id="ts0" timeString="2026-08-11T02:54:01.810"/>
     </inkml:context>
     <inkml:brush xml:id="br0">
       <inkml:brushProperty name="width" value="0.1" units="cm"/>
@@ -751,7 +1033,7 @@
           <inkml:channelProperty channel="OE" name="resolution" value="1000" units="1/deg"/>
         </inkml:channelProperties>
       </inkml:inkSource>
-      <inkml:timestamp xml:id="ts0" timeString="2026-08-11T02:53:51.279"/>
+      <inkml:timestamp xml:id="ts0" timeString="2026-08-11T02:54:01.811"/>
     </inkml:context>
     <inkml:brush xml:id="br0">
       <inkml:brushProperty name="width" value="0.1" units="cm"/>
@@ -782,7 +1064,7 @@
           <inkml:channelProperty channel="OE" name="resolution" value="1000" units="1/deg"/>
         </inkml:channelProperties>
       </inkml:inkSource>
-      <inkml:timestamp xml:id="ts0" timeString="2026-08-11T02:53:51.280"/>
+      <inkml:timestamp xml:id="ts0" timeString="2026-08-11T02:54:01.812"/>
     </inkml:context>
     <inkml:brush xml:id="br0">
       <inkml:brushProperty name="width" value="0.1" units="cm"/>
@@ -813,7 +1095,7 @@
           <inkml:channelProperty channel="OE" name="resolution" value="1000" units="1/deg"/>
         </inkml:channelProperties>
       </inkml:inkSource>
-      <inkml:timestamp xml:id="ts0" timeString="2026-08-11T02:53:51.281"/>
+      <inkml:timestamp xml:id="ts0" timeString="2026-08-11T02:54:01.813"/>
     </inkml:context>
     <inkml:brush xml:id="br0">
       <inkml:brushProperty name="width" value="0.1" units="cm"/>
@@ -844,7 +1126,7 @@
           <inkml:channelProperty channel="OE" name="resolution" value="1000" units="1/deg"/>
         </inkml:channelProperties>
       </inkml:inkSource>
-      <inkml:timestamp xml:id="ts0" timeString="2026-08-11T02:53:51.282"/>
+      <inkml:timestamp xml:id="ts0" timeString="2026-08-11T02:54:01.814"/>
     </inkml:context>
     <inkml:brush xml:id="br0">
       <inkml:brushProperty name="width" value="0.1" units="cm"/>
@@ -875,7 +1157,7 @@
           <inkml:channelProperty channel="OE" name="resolution" value="1000" units="1/deg"/>
         </inkml:channelProperties>
       </inkml:inkSource>
-      <inkml:timestamp xml:id="ts0" timeString="2026-08-11T02:53:51.283"/>
+      <inkml:timestamp xml:id="ts0" timeString="2026-08-11T02:54:01.815"/>
     </inkml:context>
     <inkml:brush xml:id="br0">
       <inkml:brushProperty name="width" value="0.1" units="cm"/>
@@ -914,6 +1196,285 @@
     </inkml:brush>
   </inkml:definitions>
   <inkml:trace contextRef="#ctx0" brushRef="#br0">25209 7340 2431 0 0,'13'-4'13728'0'0,"10"-7"-13728"0"0,5 0 32 0 0,1-4-32 0 0,2-4 0 0 0,-1-2 32 0 0,0-3-32 0 0,-2 3 64 0 0,-5 0-32 0 0,-6 0 0 0 0,-2 3 32 0 0,-4 0-32 0 0,-3-1 32 0 0,-3-2 160 0 0,-7 2 64 0 0,-8 5-160 0 0,-6 5-32 0 0,-5 3-64 0 0,-4 4 0 0 0,2 6 0 0 0,2 2 32 0 0,3 5-32 0 0,1 0 0 0 0,3 4 0 0 0,-1 2 0 0 0,-2 4 0 0 0,2 3 0 0 0,-1 1-32 0 0,-2 1 32 0 0,1 6 0 0 0,0 1 0 0 0,2 0 0 0 0,0-2-32 0 0,2 0 0 0 0,3-3-32 0 0,4 0 32 0 0,7-1-32 0 0,3-1-32 0 0,6-4 64 0 0,5-6 0 0 0,5-6 0 0 0,4-5 0 0 0,1-3-160 0 0,7-1-160 0 0,1-2-192 0 0,1 0-224 0 0,-2 0-384 0 0,-2 0-736 0 0,-1 0-2208 0 0,-1-4 4064 0 0,-1-1 0 0 0,-5 0 0 0 0</inkml:trace>
+</inkml:ink>
+</file>
+
+<file path=ppt/ink/ink110.xml><?xml version="1.0" encoding="utf-8"?>
+<inkml:ink xmlns:inkml="http://www.w3.org/2003/InkML">
+  <inkml:definitions>
+    <inkml:context xml:id="ctx0">
+      <inkml:inkSource xml:id="inkSrc0">
+        <inkml:traceFormat>
+          <inkml:channel name="X" type="integer" min="-2.14748E9" max="2.14748E9" units="cm"/>
+          <inkml:channel name="Y" type="integer" min="-2.14748E9" max="2.14748E9" units="cm"/>
+          <inkml:channel name="F" type="integer" max="32767" units="dev"/>
+          <inkml:channel name="OA" type="integer" max="360" units="deg"/>
+          <inkml:channel name="OE" type="integer" max="90" units="deg"/>
+        </inkml:traceFormat>
+        <inkml:channelProperties>
+          <inkml:channelProperty channel="X" name="resolution" value="1000" units="1/cm"/>
+          <inkml:channelProperty channel="Y" name="resolution" value="1000" units="1/cm"/>
+          <inkml:channelProperty channel="F" name="resolution" value="0" units="1/dev"/>
+          <inkml:channelProperty channel="OA" name="resolution" value="1000" units="1/deg"/>
+          <inkml:channelProperty channel="OE" name="resolution" value="1000" units="1/deg"/>
+        </inkml:channelProperties>
+      </inkml:inkSource>
+      <inkml:timestamp xml:id="ts0" timeString="2026-08-13T23:25:20.529"/>
+    </inkml:context>
+    <inkml:brush xml:id="br0">
+      <inkml:brushProperty name="width" value="0.1" units="cm"/>
+      <inkml:brushProperty name="height" value="0.1" units="cm"/>
+    </inkml:brush>
+  </inkml:definitions>
+  <inkml:trace contextRef="#ctx0" brushRef="#br0">17517 7862 16383 0 0,'-2'0'0'0'0,"-13"0"0"0"0,-70-17 0 0 0,-149-30 0 0 0,-224-33 0 0 0,-269-34 0 0 0,-245-25 0 0 0,-175-15 0 0 0,-84-4 0 0 0,20 6 0 0 0,96 13 0 0 0,115 11 0 0 0,120 5 0 0 0,111 2 0 0 0,105-4 0 0 0,98-3 0 0 0,99 2 0 0 0,92 9 0 0 0,79 10 0 0 0,66 12 0 0 0,53 13 0 0 0,39 13 0 0 0,28 9 0 0 0,21 10 0 0 0,16 10 0 0 0,14 9 0 0 0,13 9 0 0 0,11 8 0 0 0,10 7 0 0 0,9 4 0 0 0,12 4 0 0 0,14 4 0 0 0,11 5-16383 0 0,3 0 16383 0 0</inkml:trace>
+</inkml:ink>
+</file>
+
+<file path=ppt/ink/ink111.xml><?xml version="1.0" encoding="utf-8"?>
+<inkml:ink xmlns:inkml="http://www.w3.org/2003/InkML">
+  <inkml:definitions>
+    <inkml:context xml:id="ctx0">
+      <inkml:inkSource xml:id="inkSrc0">
+        <inkml:traceFormat>
+          <inkml:channel name="X" type="integer" min="-2.14748E9" max="2.14748E9" units="cm"/>
+          <inkml:channel name="Y" type="integer" min="-2.14748E9" max="2.14748E9" units="cm"/>
+          <inkml:channel name="F" type="integer" max="32767" units="dev"/>
+          <inkml:channel name="OA" type="integer" max="360" units="deg"/>
+          <inkml:channel name="OE" type="integer" max="90" units="deg"/>
+        </inkml:traceFormat>
+        <inkml:channelProperties>
+          <inkml:channelProperty channel="X" name="resolution" value="1000" units="1/cm"/>
+          <inkml:channelProperty channel="Y" name="resolution" value="1000" units="1/cm"/>
+          <inkml:channelProperty channel="F" name="resolution" value="0" units="1/dev"/>
+          <inkml:channelProperty channel="OA" name="resolution" value="1000" units="1/deg"/>
+          <inkml:channelProperty channel="OE" name="resolution" value="1000" units="1/deg"/>
+        </inkml:channelProperties>
+      </inkml:inkSource>
+      <inkml:timestamp xml:id="ts0" timeString="2026-08-13T23:25:20.531"/>
+    </inkml:context>
+    <inkml:brush xml:id="br0">
+      <inkml:brushProperty name="width" value="0.1" units="cm"/>
+      <inkml:brushProperty name="height" value="0.1" units="cm"/>
+    </inkml:brush>
+  </inkml:definitions>
+  <inkml:trace contextRef="#ctx0" brushRef="#br0">18207 9719 16383 0 0,'-1'0'0'0'0,"-5"0"0"0"0,-16-2 0 0 0,-22-6 0 0 0,-21-10 0 0 0,-15-7 0 0 0,-6-1 0 0 0,2 4 0 0 0,7 5 0 0 0,5 5 0 0 0,2 5 0 0 0,-1 4 0 0 0,-1 2 0 0 0,-5 4 0 0 0,-5 4 0 0 0,-11 3 0 0 0,-14-1 0 0 0,-15-1 0 0 0,-15-3 0 0 0,-11-2 0 0 0,-5-1 0 0 0,-3-6 0 0 0,0-7 0 0 0,2-9 0 0 0,4-8 0 0 0,8-6 0 0 0,11-4 0 0 0,16-1 0 0 0,17 1 0 0 0,13 0 0 0 0,11 1 0 0 0,8 2 0 0 0,7 1 0 0 0,7 0 0 0 0,6 2 0 0 0,4 0 0 0 0,3-1 0 0 0,3 0 0 0 0,2 1 0 0 0,2 1 0 0 0,2 2 0 0 0,1 3 0 0 0,1 4 0 0 0,2 3 0 0 0,2 3 0 0 0,0 3 0 0 0,-1 0 0 0 0,0 2 0 0 0,1 0 0 0 0,-1 2 0 0 0,-1 0 0 0 0,0 2 0 0 0,-2 1 0 0 0,-1 0 0 0 0,-3 0 0 0 0,-6 1 0 0 0,-8 0 0 0 0,-10-1 0 0 0,-10-1 0 0 0,-9-2 0 0 0,-4-2 0 0 0,-1 0 0 0 0,-1-2 0 0 0,1-1 0 0 0,0-2 0 0 0,1 0 0 0 0,3 1 0 0 0,4 2 0 0 0,2 1 0 0 0,4 3 0 0 0,2 0 0 0 0,2 1 0 0 0,0 1 0 0 0,-1-1 0 0 0,-4-1 0 0 0,-3-2 0 0 0,-3 0 0 0 0,-1-1 0 0 0,-3 1 0 0 0,-5 0 0 0 0,-6 1 0 0 0,-7-1 0 0 0,-7 2 0 0 0,-9 0 0 0 0,-10 1 0 0 0,-12 1 0 0 0,-10 2 0 0 0,-8 2 0 0 0,-12-1 0 0 0,-10 0 0 0 0,-13 0 0 0 0,-17 0 0 0 0,-15-4 0 0 0,-19-1 0 0 0,-24-1 0 0 0,-26 0 0 0 0,-14 2 0 0 0,3 0 0 0 0,14 1 0 0 0,21 0 0 0 0,27 0 0 0 0,32 1 0 0 0,30 1 0 0 0,31 2 0 0 0,26-1 0 0 0,20 0 0 0 0,15-2 0 0 0,14 1 0 0 0,9 1 0 0 0,11 1 0 0 0,7 2 0 0 0,9 0 0 0 0,4 1 0 0 0,5 0 0 0 0,1 0 0 0 0,2 0 0 0 0,-1 0 0 0 0,-3 0 0 0 0,-3 1 0 0 0,-4-1 0 0 0,-4 0 0 0 0,-2 0 0 0 0,0 0 0 0 0,3 0 0 0 0,4 0 0 0 0,6-2 0 0 0,6-5 0 0 0,7-3 0 0 0</inkml:trace>
+</inkml:ink>
+</file>
+
+<file path=ppt/ink/ink112.xml><?xml version="1.0" encoding="utf-8"?>
+<inkml:ink xmlns:inkml="http://www.w3.org/2003/InkML">
+  <inkml:definitions>
+    <inkml:context xml:id="ctx0">
+      <inkml:inkSource xml:id="inkSrc0">
+        <inkml:traceFormat>
+          <inkml:channel name="X" type="integer" min="-2.14748E9" max="2.14748E9" units="cm"/>
+          <inkml:channel name="Y" type="integer" min="-2.14748E9" max="2.14748E9" units="cm"/>
+          <inkml:channel name="F" type="integer" max="32767" units="dev"/>
+          <inkml:channel name="OA" type="integer" max="360" units="deg"/>
+          <inkml:channel name="OE" type="integer" max="90" units="deg"/>
+        </inkml:traceFormat>
+        <inkml:channelProperties>
+          <inkml:channelProperty channel="X" name="resolution" value="1000" units="1/cm"/>
+          <inkml:channelProperty channel="Y" name="resolution" value="1000" units="1/cm"/>
+          <inkml:channelProperty channel="F" name="resolution" value="0" units="1/dev"/>
+          <inkml:channelProperty channel="OA" name="resolution" value="1000" units="1/deg"/>
+          <inkml:channelProperty channel="OE" name="resolution" value="1000" units="1/deg"/>
+        </inkml:channelProperties>
+      </inkml:inkSource>
+      <inkml:timestamp xml:id="ts0" timeString="2026-08-13T23:25:20.533"/>
+    </inkml:context>
+    <inkml:brush xml:id="br0">
+      <inkml:brushProperty name="width" value="0.1" units="cm"/>
+      <inkml:brushProperty name="height" value="0.1" units="cm"/>
+    </inkml:brush>
+  </inkml:definitions>
+  <inkml:trace contextRef="#ctx0" brushRef="#br0">18075 10471 16383 0 0,'-2'0'0'0'0,"-8"0"0"0"0,-15 1 0 0 0,-31 6 0 0 0,-45 13 0 0 0,-41 14 0 0 0,-41 14 0 0 0,-36 16 0 0 0,-21 11 0 0 0,-2 5 0 0 0,9-1 0 0 0,9-6 0 0 0,12-7 0 0 0,15-8 0 0 0,18-10 0 0 0,18-13 0 0 0,18-9 0 0 0,16-7 0 0 0,14-6 0 0 0,10 0 0 0 0,7 0 0 0 0,3 0 0 0 0,-4-1 0 0 0,-9-1 0 0 0,-12-3 0 0 0,-12-2 0 0 0,-14-3 0 0 0,-15-1 0 0 0,-15-3 0 0 0,-11-5 0 0 0,-11-11 0 0 0,-8-11 0 0 0,-2-9 0 0 0,4-7 0 0 0,8-3 0 0 0,14-1 0 0 0,18 1 0 0 0,16 3 0 0 0,15 5 0 0 0,16 5 0 0 0,12 5 0 0 0,8 5 0 0 0,3 5 0 0 0,0 3 0 0 0,-3-2 0 0 0,-3-2 0 0 0,0-2 0 0 0,-1-3 0 0 0,2-1 0 0 0,-1-1 0 0 0,-3 0 0 0 0,-7 1 0 0 0,-9-2 0 0 0,-9-2 0 0 0,-5-2 0 0 0,-1-1 0 0 0,-2-4 0 0 0,0-4 0 0 0,-2-5 0 0 0,-3-8 0 0 0,-6-7 0 0 0,-7-7 0 0 0,-2-5 0 0 0,1-1 0 0 0,2 1 0 0 0,4 2 0 0 0,7-1 0 0 0,8-2 0 0 0,7-3 0 0 0,10-4 0 0 0,8-3 0 0 0,11 0 0 0 0,8 3 0 0 0,9 5 0 0 0,8 7 0 0 0,4 11 0 0 0,5 9 0 0 0,5 10 0 0 0,5 7 0 0 0,5 8 0 0 0,5 2 0 0 0,4 3 0 0 0,4 2 0 0 0,5 0 0 0 0,2 1 0 0 0,3 0 0 0 0,1 0 0 0 0,2 0 0 0 0,-1 0 0 0 0,2-2 0 0 0,-1 0 0 0 0,-1 1 0 0 0,2 0 0 0 0,0 1 0 0 0,-3-3 0 0 0,-3-3 0 0 0,-2-2 0 0 0,-1 0 0 0 0,1-1 0 0 0,2 1 0 0 0,0 1 0 0 0,3 1 0 0 0,1 2 0 0 0,2 0 0 0 0,4 2 0 0 0,2 1 0 0 0,2 4 0 0 0,3 2 0 0 0,3 3 0 0 0,1 0 0 0 0,0 2 0 0 0,2-1 0 0 0,1 0 0 0 0,0-1 0 0 0,2 0 0 0 0,0 1 0 0 0,0 1 0 0 0</inkml:trace>
+</inkml:ink>
+</file>
+
+<file path=ppt/ink/ink113.xml><?xml version="1.0" encoding="utf-8"?>
+<inkml:ink xmlns:inkml="http://www.w3.org/2003/InkML">
+  <inkml:definitions>
+    <inkml:context xml:id="ctx0">
+      <inkml:inkSource xml:id="inkSrc0">
+        <inkml:traceFormat>
+          <inkml:channel name="X" type="integer" min="-2.14748E9" max="2.14748E9" units="cm"/>
+          <inkml:channel name="Y" type="integer" min="-2.14748E9" max="2.14748E9" units="cm"/>
+          <inkml:channel name="F" type="integer" max="32767" units="dev"/>
+          <inkml:channel name="OA" type="integer" max="360" units="deg"/>
+          <inkml:channel name="OE" type="integer" max="90" units="deg"/>
+        </inkml:traceFormat>
+        <inkml:channelProperties>
+          <inkml:channelProperty channel="X" name="resolution" value="1000" units="1/cm"/>
+          <inkml:channelProperty channel="Y" name="resolution" value="1000" units="1/cm"/>
+          <inkml:channelProperty channel="F" name="resolution" value="0" units="1/dev"/>
+          <inkml:channelProperty channel="OA" name="resolution" value="1000" units="1/deg"/>
+          <inkml:channelProperty channel="OE" name="resolution" value="1000" units="1/deg"/>
+        </inkml:channelProperties>
+      </inkml:inkSource>
+      <inkml:timestamp xml:id="ts0" timeString="2026-08-13T23:25:20.534"/>
+    </inkml:context>
+    <inkml:brush xml:id="br0">
+      <inkml:brushProperty name="width" value="0.1" units="cm"/>
+      <inkml:brushProperty name="height" value="0.1" units="cm"/>
+    </inkml:brush>
+  </inkml:definitions>
+  <inkml:trace contextRef="#ctx0" brushRef="#br0">12197 9597 16383 0 0,'0'0'0'0'0,"-1"2"0"0"0,-9 1 0 0 0,-26-1 0 0 0,-45-1 0 0 0,-54-1 0 0 0,-51-4 0 0 0,-39-10 0 0 0,-24-10 0 0 0,-14-12 0 0 0,-5-8 0 0 0,3-3 0 0 0,7 0 0 0 0,5 2 0 0 0,12 4 0 0 0,16 6 0 0 0,14 2 0 0 0,15 3 0 0 0,15 3 0 0 0,16 1 0 0 0,13 1 0 0 0,11 2 0 0 0,10 0 0 0 0,7 1 0 0 0,7-2 0 0 0,6-1 0 0 0,6-1 0 0 0,5-2 0 0 0,8-2 0 0 0,8-4 0 0 0,10-1 0 0 0,9-2 0 0 0,10 1 0 0 0,9 2 0 0 0,7 2 0 0 0,4 1 0 0 0,5 4 0 0 0,2 1 0 0 0,3 3 0 0 0,2 2 0 0 0,2 3 0 0 0,3 4 0 0 0,2 2 0 0 0,3 2 0 0 0,0 3 0 0 0,1 0 0 0 0,0 1 0 0 0,1 0 0 0 0,1 1 0 0 0,3-2 0 0 0,2 0 0 0 0,1-2 0 0 0,1-1 0 0 0,0 2 0 0 0,0 0 0 0 0,0 1 0 0 0,-1 0 0 0 0,-2-3 0 0 0,0-4 0 0 0,-1-3 0 0 0,0-2 0 0 0,2 0 0 0 0,1 3 0 0 0</inkml:trace>
+</inkml:ink>
+</file>
+
+<file path=ppt/ink/ink114.xml><?xml version="1.0" encoding="utf-8"?>
+<inkml:ink xmlns:inkml="http://www.w3.org/2003/InkML">
+  <inkml:definitions>
+    <inkml:context xml:id="ctx0">
+      <inkml:inkSource xml:id="inkSrc0">
+        <inkml:traceFormat>
+          <inkml:channel name="X" type="integer" min="-2.14748E9" max="2.14748E9" units="cm"/>
+          <inkml:channel name="Y" type="integer" min="-2.14748E9" max="2.14748E9" units="cm"/>
+          <inkml:channel name="F" type="integer" max="32767" units="dev"/>
+          <inkml:channel name="OA" type="integer" max="360" units="deg"/>
+          <inkml:channel name="OE" type="integer" max="90" units="deg"/>
+        </inkml:traceFormat>
+        <inkml:channelProperties>
+          <inkml:channelProperty channel="X" name="resolution" value="1000" units="1/cm"/>
+          <inkml:channelProperty channel="Y" name="resolution" value="1000" units="1/cm"/>
+          <inkml:channelProperty channel="F" name="resolution" value="0" units="1/dev"/>
+          <inkml:channelProperty channel="OA" name="resolution" value="1000" units="1/deg"/>
+          <inkml:channelProperty channel="OE" name="resolution" value="1000" units="1/deg"/>
+        </inkml:channelProperties>
+      </inkml:inkSource>
+      <inkml:timestamp xml:id="ts0" timeString="2026-08-13T23:25:20.535"/>
+    </inkml:context>
+    <inkml:brush xml:id="br0">
+      <inkml:brushProperty name="width" value="0.1" units="cm"/>
+      <inkml:brushProperty name="height" value="0.1" units="cm"/>
+    </inkml:brush>
+  </inkml:definitions>
+  <inkml:trace contextRef="#ctx0" brushRef="#br0">12021 10588 16383 0 0,'0'0'0'0'0,"-2"2"0"0"0,-13-7 0 0 0,-22-13 0 0 0,-28-19 0 0 0,-28-22 0 0 0,-24-19 0 0 0,-15-12 0 0 0,-4-6 0 0 0,4 3 0 0 0,11 9 0 0 0,14 12 0 0 0,15 13 0 0 0,14 13 0 0 0,12 9 0 0 0,9 8 0 0 0,6 4 0 0 0,5 3 0 0 0,5 3 0 0 0,3 1 0 0 0,3 1 0 0 0,2-1 0 0 0,2 1 0 0 0,0-1 0 0 0,-1-1 0 0 0,-1 0 0 0 0,-3 1 0 0 0,-1 1 0 0 0,-1 0 0 0 0,0 2 0 0 0,-2 3 0 0 0,0 1 0 0 0,-3-1 0 0 0,-2-1 0 0 0,-1 0 0 0 0,-2-3 0 0 0,0 0 0 0 0,-1 0 0 0 0,1 0 0 0 0,3 1 0 0 0,2 2 0 0 0,4-1 0 0 0,2-1 0 0 0,5 1 0 0 0,4 1 0 0 0,2 0 0 0 0,3 0 0 0 0,3 2 0 0 0,1 1 0 0 0,0 1 0 0 0,0-1 0 0 0,-1-1 0 0 0,1 0 0 0 0,-1 0 0 0 0,-2-3 0 0 0,-1-1 0 0 0,-1-2 0 0 0,-3-1 0 0 0,-1-2 0 0 0,-2 0 0 0 0,-3 0 0 0 0,-1 1 0 0 0,-5 1 0 0 0,-2 0 0 0 0,-3 0 0 0 0,-3 1 0 0 0,0-1 0 0 0,-1 0 0 0 0,1 0 0 0 0,0-2 0 0 0,1-1 0 0 0,0-2 0 0 0,1 0 0 0 0,1 1 0 0 0,2 2 0 0 0,1 2 0 0 0,-1 1 0 0 0,-1 2 0 0 0,-3 1 0 0 0,-2 2 0 0 0,-2 1 0 0 0,3 1 0 0 0,-7 1 0 0 0,-18-1 0 0 0,-17-3 0 0 0,-16-3 0 0 0,-10-3 0 0 0,-3-3 0 0 0,6 1 0 0 0,12 3 0 0 0,15 2 0 0 0,17 4 0 0 0,14 1 0 0 0,12 2 0 0 0,10 1 0 0 0,6 0 0 0 0,7 0 0 0 0,4 0 0 0 0,3-1 0 0 0,1-4 0 0 0,1-2 0 0 0,0-2 0 0 0,0-1 0 0 0,0 1 0 0 0,-1 0 0 0 0,2 3 0 0 0,0 2 0 0 0,2 2 0 0 0,0 3 0 0 0,0 2 0 0 0,0 1 0 0 0</inkml:trace>
+</inkml:ink>
+</file>
+
+<file path=ppt/ink/ink115.xml><?xml version="1.0" encoding="utf-8"?>
+<inkml:ink xmlns:inkml="http://www.w3.org/2003/InkML">
+  <inkml:definitions>
+    <inkml:context xml:id="ctx0">
+      <inkml:inkSource xml:id="inkSrc0">
+        <inkml:traceFormat>
+          <inkml:channel name="X" type="integer" min="-2.14748E9" max="2.14748E9" units="cm"/>
+          <inkml:channel name="Y" type="integer" min="-2.14748E9" max="2.14748E9" units="cm"/>
+          <inkml:channel name="F" type="integer" max="32767" units="dev"/>
+          <inkml:channel name="OA" type="integer" max="360" units="deg"/>
+          <inkml:channel name="OE" type="integer" max="90" units="deg"/>
+        </inkml:traceFormat>
+        <inkml:channelProperties>
+          <inkml:channelProperty channel="X" name="resolution" value="1000" units="1/cm"/>
+          <inkml:channelProperty channel="Y" name="resolution" value="1000" units="1/cm"/>
+          <inkml:channelProperty channel="F" name="resolution" value="0" units="1/dev"/>
+          <inkml:channelProperty channel="OA" name="resolution" value="1000" units="1/deg"/>
+          <inkml:channelProperty channel="OE" name="resolution" value="1000" units="1/deg"/>
+        </inkml:channelProperties>
+      </inkml:inkSource>
+      <inkml:timestamp xml:id="ts0" timeString="2026-08-13T23:25:20.536"/>
+    </inkml:context>
+    <inkml:brush xml:id="br0">
+      <inkml:brushProperty name="width" value="0.1" units="cm"/>
+      <inkml:brushProperty name="height" value="0.1" units="cm"/>
+    </inkml:brush>
+  </inkml:definitions>
+  <inkml:trace contextRef="#ctx0" brushRef="#br0">16027 11774 16383 0 0,'-4'0'0'0'0,"-18"0"0"0"0,-50 0 0 0 0,-94 0 0 0 0,-136 0 0 0 0,-174 0 0 0 0,-185 0 0 0 0,-167 0 0 0 0,-99 0 0 0 0,-26 0 0 0 0,17-2 0 0 0,47-13 0 0 0,67-23 0 0 0,88-23 0 0 0,93-20 0 0 0,95-11 0 0 0,93 0 0 0 0,81 9 0 0 0,66 9 0 0 0,51 11 0 0 0,39 12 0 0 0,26 10 0 0 0,19 7 0 0 0,15 5 0 0 0,15 4 0 0 0,18 3 0 0 0,22 4 0 0 0,22 5 0 0 0,19 3 0 0 0,18 4 0 0 0,15 2 0 0 0,13 2 0 0 0,13 1 0 0 0,6 1 0 0 0</inkml:trace>
+</inkml:ink>
+</file>
+
+<file path=ppt/ink/ink116.xml><?xml version="1.0" encoding="utf-8"?>
+<inkml:ink xmlns:inkml="http://www.w3.org/2003/InkML">
+  <inkml:definitions>
+    <inkml:context xml:id="ctx0">
+      <inkml:inkSource xml:id="inkSrc0">
+        <inkml:traceFormat>
+          <inkml:channel name="X" type="integer" min="-2.14748E9" max="2.14748E9" units="cm"/>
+          <inkml:channel name="Y" type="integer" min="-2.14748E9" max="2.14748E9" units="cm"/>
+          <inkml:channel name="F" type="integer" max="32767" units="dev"/>
+          <inkml:channel name="OA" type="integer" max="360" units="deg"/>
+          <inkml:channel name="OE" type="integer" max="90" units="deg"/>
+        </inkml:traceFormat>
+        <inkml:channelProperties>
+          <inkml:channelProperty channel="X" name="resolution" value="1000" units="1/cm"/>
+          <inkml:channelProperty channel="Y" name="resolution" value="1000" units="1/cm"/>
+          <inkml:channelProperty channel="F" name="resolution" value="0" units="1/dev"/>
+          <inkml:channelProperty channel="OA" name="resolution" value="1000" units="1/deg"/>
+          <inkml:channelProperty channel="OE" name="resolution" value="1000" units="1/deg"/>
+        </inkml:channelProperties>
+      </inkml:inkSource>
+      <inkml:timestamp xml:id="ts0" timeString="2026-08-13T23:25:20.563"/>
+    </inkml:context>
+    <inkml:brush xml:id="br0">
+      <inkml:brushProperty name="width" value="0.1" units="cm"/>
+      <inkml:brushProperty name="height" value="0.1" units="cm"/>
+    </inkml:brush>
+  </inkml:definitions>
+  <inkml:trace contextRef="#ctx0" brushRef="#br0">12673 4912 16383 0 0,'0'0'0'0'0</inkml:trace>
+</inkml:ink>
+</file>
+
+<file path=ppt/ink/ink117.xml><?xml version="1.0" encoding="utf-8"?>
+<inkml:ink xmlns:inkml="http://www.w3.org/2003/InkML">
+  <inkml:definitions>
+    <inkml:context xml:id="ctx0">
+      <inkml:inkSource xml:id="inkSrc0">
+        <inkml:traceFormat>
+          <inkml:channel name="X" type="integer" min="-2.14748E9" max="2.14748E9" units="cm"/>
+          <inkml:channel name="Y" type="integer" min="-2.14748E9" max="2.14748E9" units="cm"/>
+          <inkml:channel name="F" type="integer" max="32767" units="dev"/>
+          <inkml:channel name="OA" type="integer" max="360" units="deg"/>
+          <inkml:channel name="OE" type="integer" max="90" units="deg"/>
+        </inkml:traceFormat>
+        <inkml:channelProperties>
+          <inkml:channelProperty channel="X" name="resolution" value="1000" units="1/cm"/>
+          <inkml:channelProperty channel="Y" name="resolution" value="1000" units="1/cm"/>
+          <inkml:channelProperty channel="F" name="resolution" value="0" units="1/dev"/>
+          <inkml:channelProperty channel="OA" name="resolution" value="1000" units="1/deg"/>
+          <inkml:channelProperty channel="OE" name="resolution" value="1000" units="1/deg"/>
+        </inkml:channelProperties>
+      </inkml:inkSource>
+      <inkml:timestamp xml:id="ts0" timeString="2026-08-13T23:25:20.564"/>
+    </inkml:context>
+    <inkml:brush xml:id="br0">
+      <inkml:brushProperty name="width" value="0.1" units="cm"/>
+      <inkml:brushProperty name="height" value="0.1" units="cm"/>
+    </inkml:brush>
+  </inkml:definitions>
+  <inkml:trace contextRef="#ctx0" brushRef="#br0">16651 5074 16383 0 0,'0'0'0'0'0</inkml:trace>
+</inkml:ink>
+</file>
+
+<file path=ppt/ink/ink118.xml><?xml version="1.0" encoding="utf-8"?>
+<inkml:ink xmlns:inkml="http://www.w3.org/2003/InkML">
+  <inkml:definitions>
+    <inkml:context xml:id="ctx0">
+      <inkml:inkSource xml:id="inkSrc0">
+        <inkml:traceFormat>
+          <inkml:channel name="X" type="integer" min="-2.14748E9" max="2.14748E9" units="cm"/>
+          <inkml:channel name="Y" type="integer" min="-2.14748E9" max="2.14748E9" units="cm"/>
+          <inkml:channel name="F" type="integer" max="32767" units="dev"/>
+          <inkml:channel name="OA" type="integer" max="360" units="deg"/>
+          <inkml:channel name="OE" type="integer" max="90" units="deg"/>
+        </inkml:traceFormat>
+        <inkml:channelProperties>
+          <inkml:channelProperty channel="X" name="resolution" value="1000" units="1/cm"/>
+          <inkml:channelProperty channel="Y" name="resolution" value="1000" units="1/cm"/>
+          <inkml:channelProperty channel="F" name="resolution" value="0" units="1/dev"/>
+          <inkml:channelProperty channel="OA" name="resolution" value="1000" units="1/deg"/>
+          <inkml:channelProperty channel="OE" name="resolution" value="1000" units="1/deg"/>
+        </inkml:channelProperties>
+      </inkml:inkSource>
+      <inkml:timestamp xml:id="ts0" timeString="2026-08-13T23:25:20.566"/>
+    </inkml:context>
+    <inkml:brush xml:id="br0">
+      <inkml:brushProperty name="width" value="0.1" units="cm"/>
+      <inkml:brushProperty name="height" value="0.1" units="cm"/>
+    </inkml:brush>
+  </inkml:definitions>
+  <inkml:trace contextRef="#ctx0" brushRef="#br0">16986 4495 16383 0 0,'2'4'0'0'0,"1"1"0"0"0</inkml:trace>
 </inkml:ink>
 </file>
 
@@ -3851,7 +4412,7 @@
           <inkml:channelProperty channel="OE" name="resolution" value="1000" units="1/deg"/>
         </inkml:channelProperties>
       </inkml:inkSource>
-      <inkml:timestamp xml:id="ts0" timeString="2026-08-11T02:53:51.272"/>
+      <inkml:timestamp xml:id="ts0" timeString="2026-08-11T02:54:01.804"/>
     </inkml:context>
     <inkml:brush xml:id="br0">
       <inkml:brushProperty name="width" value="0.1" units="cm"/>
@@ -3882,7 +4443,7 @@
           <inkml:channelProperty channel="OE" name="resolution" value="1000" units="1/deg"/>
         </inkml:channelProperties>
       </inkml:inkSource>
-      <inkml:timestamp xml:id="ts0" timeString="2026-08-11T02:53:51.273"/>
+      <inkml:timestamp xml:id="ts0" timeString="2026-08-11T02:54:01.805"/>
     </inkml:context>
     <inkml:brush xml:id="br0">
       <inkml:brushProperty name="width" value="0.1" units="cm"/>
@@ -4042,7 +4603,7 @@
           <a:p>
             <a:fld id="{585BAAA6-0493-4262-AD30-4183B33F0543}" type="datetimeFigureOut">
               <a:rPr lang="en-AU" smtClean="0"/>
-              <a:t>11/08/2026</a:t>
+              <a:t>14/08/2026</a:t>
             </a:fld>
             <a:endParaRPr lang="en-AU"/>
           </a:p>
@@ -4242,7 +4803,7 @@
           <a:p>
             <a:fld id="{585BAAA6-0493-4262-AD30-4183B33F0543}" type="datetimeFigureOut">
               <a:rPr lang="en-AU" smtClean="0"/>
-              <a:t>11/08/2026</a:t>
+              <a:t>14/08/2026</a:t>
             </a:fld>
             <a:endParaRPr lang="en-AU"/>
           </a:p>
@@ -4452,7 +5013,7 @@
           <a:p>
             <a:fld id="{585BAAA6-0493-4262-AD30-4183B33F0543}" type="datetimeFigureOut">
               <a:rPr lang="en-AU" smtClean="0"/>
-              <a:t>11/08/2026</a:t>
+              <a:t>14/08/2026</a:t>
             </a:fld>
             <a:endParaRPr lang="en-AU"/>
           </a:p>
@@ -4652,7 +5213,7 @@
           <a:p>
             <a:fld id="{585BAAA6-0493-4262-AD30-4183B33F0543}" type="datetimeFigureOut">
               <a:rPr lang="en-AU" smtClean="0"/>
-              <a:t>11/08/2026</a:t>
+              <a:t>14/08/2026</a:t>
             </a:fld>
             <a:endParaRPr lang="en-AU"/>
           </a:p>
@@ -4928,7 +5489,7 @@
           <a:p>
             <a:fld id="{585BAAA6-0493-4262-AD30-4183B33F0543}" type="datetimeFigureOut">
               <a:rPr lang="en-AU" smtClean="0"/>
-              <a:t>11/08/2026</a:t>
+              <a:t>14/08/2026</a:t>
             </a:fld>
             <a:endParaRPr lang="en-AU"/>
           </a:p>
@@ -5196,7 +5757,7 @@
           <a:p>
             <a:fld id="{585BAAA6-0493-4262-AD30-4183B33F0543}" type="datetimeFigureOut">
               <a:rPr lang="en-AU" smtClean="0"/>
-              <a:t>11/08/2026</a:t>
+              <a:t>14/08/2026</a:t>
             </a:fld>
             <a:endParaRPr lang="en-AU"/>
           </a:p>
@@ -5611,7 +6172,7 @@
           <a:p>
             <a:fld id="{585BAAA6-0493-4262-AD30-4183B33F0543}" type="datetimeFigureOut">
               <a:rPr lang="en-AU" smtClean="0"/>
-              <a:t>11/08/2026</a:t>
+              <a:t>14/08/2026</a:t>
             </a:fld>
             <a:endParaRPr lang="en-AU"/>
           </a:p>
@@ -5753,7 +6314,7 @@
           <a:p>
             <a:fld id="{585BAAA6-0493-4262-AD30-4183B33F0543}" type="datetimeFigureOut">
               <a:rPr lang="en-AU" smtClean="0"/>
-              <a:t>11/08/2026</a:t>
+              <a:t>14/08/2026</a:t>
             </a:fld>
             <a:endParaRPr lang="en-AU"/>
           </a:p>
@@ -5866,7 +6427,7 @@
           <a:p>
             <a:fld id="{585BAAA6-0493-4262-AD30-4183B33F0543}" type="datetimeFigureOut">
               <a:rPr lang="en-AU" smtClean="0"/>
-              <a:t>11/08/2026</a:t>
+              <a:t>14/08/2026</a:t>
             </a:fld>
             <a:endParaRPr lang="en-AU"/>
           </a:p>
@@ -6179,7 +6740,7 @@
           <a:p>
             <a:fld id="{585BAAA6-0493-4262-AD30-4183B33F0543}" type="datetimeFigureOut">
               <a:rPr lang="en-AU" smtClean="0"/>
-              <a:t>11/08/2026</a:t>
+              <a:t>14/08/2026</a:t>
             </a:fld>
             <a:endParaRPr lang="en-AU"/>
           </a:p>
@@ -6468,7 +7029,7 @@
           <a:p>
             <a:fld id="{585BAAA6-0493-4262-AD30-4183B33F0543}" type="datetimeFigureOut">
               <a:rPr lang="en-AU" smtClean="0"/>
-              <a:t>11/08/2026</a:t>
+              <a:t>14/08/2026</a:t>
             </a:fld>
             <a:endParaRPr lang="en-AU"/>
           </a:p>
@@ -6711,7 +7272,7 @@
           <a:p>
             <a:fld id="{585BAAA6-0493-4262-AD30-4183B33F0543}" type="datetimeFigureOut">
               <a:rPr lang="en-AU" smtClean="0"/>
-              <a:t>11/08/2026</a:t>
+              <a:t>14/08/2026</a:t>
             </a:fld>
             <a:endParaRPr lang="en-AU"/>
           </a:p>
@@ -7177,7 +7738,10 @@
           <a:bodyPr/>
           <a:lstStyle/>
           <a:p>
-            <a:endParaRPr lang="en-AU"/>
+            <a:r>
+              <a:rPr lang="en-AU"/>
+              <a:t>Zef, Taliah, and Oscar</a:t>
+            </a:r>
           </a:p>
         </p:txBody>
       </p:sp>
@@ -7195,6 +7759,438 @@
 </file>
 
 <file path=ppt/slides/slide10.xml><?xml version="1.0" encoding="utf-8"?>
+<p:sld xmlns:a="http://schemas.openxmlformats.org/drawingml/2006/main" xmlns:r="http://schemas.openxmlformats.org/officeDocument/2006/relationships" xmlns:p="http://schemas.openxmlformats.org/presentationml/2006/main">
+  <p:cSld>
+    <p:spTree>
+      <p:nvGrpSpPr>
+        <p:cNvPr id="1" name=""/>
+        <p:cNvGrpSpPr/>
+        <p:nvPr/>
+      </p:nvGrpSpPr>
+      <p:grpSpPr>
+        <a:xfrm>
+          <a:off x="0" y="0"/>
+          <a:ext cx="0" cy="0"/>
+          <a:chOff x="0" y="0"/>
+          <a:chExt cx="0" cy="0"/>
+        </a:xfrm>
+      </p:grpSpPr>
+      <p:sp>
+        <p:nvSpPr>
+          <p:cNvPr id="2" name="Title 1">
+            <a:extLst>
+              <a:ext uri="{FF2B5EF4-FFF2-40B4-BE49-F238E27FC236}">
+                <a16:creationId xmlns:a16="http://schemas.microsoft.com/office/drawing/2014/main" id="{DECC06B4-3A01-A656-443F-0A54FBECDA36}"/>
+              </a:ext>
+            </a:extLst>
+          </p:cNvPr>
+          <p:cNvSpPr>
+            <a:spLocks noGrp="1"/>
+          </p:cNvSpPr>
+          <p:nvPr>
+            <p:ph type="title"/>
+          </p:nvPr>
+        </p:nvSpPr>
+        <p:spPr/>
+        <p:txBody>
+          <a:bodyPr/>
+          <a:lstStyle/>
+          <a:p>
+            <a:r>
+              <a:rPr lang="en-US"/>
+              <a:t>Taliahs 3d Mockup</a:t>
+            </a:r>
+          </a:p>
+        </p:txBody>
+      </p:sp>
+      <p:pic>
+        <p:nvPicPr>
+          <p:cNvPr id="4" name="Content Placeholder 3">
+            <a:extLst>
+              <a:ext uri="{FF2B5EF4-FFF2-40B4-BE49-F238E27FC236}">
+                <a16:creationId xmlns:a16="http://schemas.microsoft.com/office/drawing/2014/main" id="{6EB7D4B0-5233-EF46-C5FB-4067893490FB}"/>
+              </a:ext>
+            </a:extLst>
+          </p:cNvPr>
+          <p:cNvPicPr>
+            <a:picLocks noGrp="1" noChangeAspect="1"/>
+          </p:cNvPicPr>
+          <p:nvPr>
+            <p:ph idx="1"/>
+          </p:nvPr>
+        </p:nvPicPr>
+        <p:blipFill>
+          <a:blip r:embed="rId2"/>
+          <a:stretch>
+            <a:fillRect/>
+          </a:stretch>
+        </p:blipFill>
+        <p:spPr>
+          <a:xfrm>
+            <a:off x="4024544" y="1716831"/>
+            <a:ext cx="6917185" cy="3880905"/>
+          </a:xfrm>
+          <a:prstGeom prst="rect">
+            <a:avLst/>
+          </a:prstGeom>
+        </p:spPr>
+      </p:pic>
+      <mc:AlternateContent xmlns:mc="http://schemas.openxmlformats.org/markup-compatibility/2006">
+        <mc:Choice xmlns:p14="http://schemas.microsoft.com/office/powerpoint/2010/main" Requires="p14">
+          <p:contentPart p14:bwMode="auto" r:id="rId3">
+            <p14:nvContentPartPr>
+              <p14:cNvPr id="5" name="Ink 4">
+                <a:extLst>
+                  <a:ext uri="{FF2B5EF4-FFF2-40B4-BE49-F238E27FC236}">
+                    <a16:creationId xmlns:a16="http://schemas.microsoft.com/office/drawing/2014/main" id="{291E65B1-4420-81D5-05F8-C0FF12741F77}"/>
+                  </a:ext>
+                </a:extLst>
+              </p14:cNvPr>
+              <p14:cNvContentPartPr/>
+              <p14:nvPr/>
+            </p14:nvContentPartPr>
+            <p14:xfrm>
+              <a:off x="1931699" y="1681121"/>
+              <a:ext cx="4757763" cy="881265"/>
+            </p14:xfrm>
+          </p:contentPart>
+        </mc:Choice>
+        <mc:Fallback>
+          <p:pic>
+            <p:nvPicPr>
+              <p:cNvPr id="5" name="Ink 4">
+                <a:extLst>
+                  <a:ext uri="{FF2B5EF4-FFF2-40B4-BE49-F238E27FC236}">
+                    <a16:creationId xmlns:a16="http://schemas.microsoft.com/office/drawing/2014/main" id="{291E65B1-4420-81D5-05F8-C0FF12741F77}"/>
+                  </a:ext>
+                </a:extLst>
+              </p:cNvPr>
+              <p:cNvPicPr/>
+              <p:nvPr/>
+            </p:nvPicPr>
+            <p:blipFill>
+              <a:blip r:embed="rId4"/>
+              <a:stretch>
+                <a:fillRect/>
+              </a:stretch>
+            </p:blipFill>
+            <p:spPr>
+              <a:xfrm>
+                <a:off x="1913700" y="1663129"/>
+                <a:ext cx="4793400" cy="916890"/>
+              </a:xfrm>
+              <a:prstGeom prst="rect">
+                <a:avLst/>
+              </a:prstGeom>
+            </p:spPr>
+          </p:pic>
+        </mc:Fallback>
+      </mc:AlternateContent>
+      <mc:AlternateContent xmlns:mc="http://schemas.openxmlformats.org/markup-compatibility/2006">
+        <mc:Choice xmlns:p14="http://schemas.microsoft.com/office/powerpoint/2010/main" Requires="p14">
+          <p:contentPart p14:bwMode="auto" r:id="rId5">
+            <p14:nvContentPartPr>
+              <p14:cNvPr id="11" name="Ink 10">
+                <a:extLst>
+                  <a:ext uri="{FF2B5EF4-FFF2-40B4-BE49-F238E27FC236}">
+                    <a16:creationId xmlns:a16="http://schemas.microsoft.com/office/drawing/2014/main" id="{53A11908-C8F3-228A-2A42-64DCE78996A9}"/>
+                  </a:ext>
+                </a:extLst>
+              </p14:cNvPr>
+              <p14:cNvContentPartPr/>
+              <p14:nvPr/>
+            </p14:nvContentPartPr>
+            <p14:xfrm>
+              <a:off x="3547641" y="3333181"/>
+              <a:ext cx="3965780" cy="486181"/>
+            </p14:xfrm>
+          </p:contentPart>
+        </mc:Choice>
+        <mc:Fallback>
+          <p:pic>
+            <p:nvPicPr>
+              <p:cNvPr id="11" name="Ink 10">
+                <a:extLst>
+                  <a:ext uri="{FF2B5EF4-FFF2-40B4-BE49-F238E27FC236}">
+                    <a16:creationId xmlns:a16="http://schemas.microsoft.com/office/drawing/2014/main" id="{53A11908-C8F3-228A-2A42-64DCE78996A9}"/>
+                  </a:ext>
+                </a:extLst>
+              </p:cNvPr>
+              <p:cNvPicPr/>
+              <p:nvPr/>
+            </p:nvPicPr>
+            <p:blipFill>
+              <a:blip r:embed="rId6"/>
+              <a:stretch>
+                <a:fillRect/>
+              </a:stretch>
+            </p:blipFill>
+            <p:spPr>
+              <a:xfrm>
+                <a:off x="3529643" y="3315201"/>
+                <a:ext cx="4001417" cy="521782"/>
+              </a:xfrm>
+              <a:prstGeom prst="rect">
+                <a:avLst/>
+              </a:prstGeom>
+            </p:spPr>
+          </p:pic>
+        </mc:Fallback>
+      </mc:AlternateContent>
+      <mc:AlternateContent xmlns:mc="http://schemas.openxmlformats.org/markup-compatibility/2006">
+        <mc:Choice xmlns:p14="http://schemas.microsoft.com/office/powerpoint/2010/main" Requires="p14">
+          <p:contentPart p14:bwMode="auto" r:id="rId7">
+            <p14:nvContentPartPr>
+              <p14:cNvPr id="12" name="Ink 11">
+                <a:extLst>
+                  <a:ext uri="{FF2B5EF4-FFF2-40B4-BE49-F238E27FC236}">
+                    <a16:creationId xmlns:a16="http://schemas.microsoft.com/office/drawing/2014/main" id="{AB26A816-7054-250C-2DD5-14C1B01A714F}"/>
+                  </a:ext>
+                </a:extLst>
+              </p14:cNvPr>
+              <p14:cNvContentPartPr/>
+              <p14:nvPr/>
+            </p14:nvContentPartPr>
+            <p14:xfrm>
+              <a:off x="3481088" y="3361042"/>
+              <a:ext cx="3961299" cy="1036743"/>
+            </p14:xfrm>
+          </p:contentPart>
+        </mc:Choice>
+        <mc:Fallback>
+          <p:pic>
+            <p:nvPicPr>
+              <p:cNvPr id="12" name="Ink 11">
+                <a:extLst>
+                  <a:ext uri="{FF2B5EF4-FFF2-40B4-BE49-F238E27FC236}">
+                    <a16:creationId xmlns:a16="http://schemas.microsoft.com/office/drawing/2014/main" id="{AB26A816-7054-250C-2DD5-14C1B01A714F}"/>
+                  </a:ext>
+                </a:extLst>
+              </p:cNvPr>
+              <p:cNvPicPr/>
+              <p:nvPr/>
+            </p:nvPicPr>
+            <p:blipFill>
+              <a:blip r:embed="rId8"/>
+              <a:stretch>
+                <a:fillRect/>
+              </a:stretch>
+            </p:blipFill>
+            <p:spPr>
+              <a:xfrm>
+                <a:off x="3463089" y="3343049"/>
+                <a:ext cx="3996938" cy="1072369"/>
+              </a:xfrm>
+              <a:prstGeom prst="rect">
+                <a:avLst/>
+              </a:prstGeom>
+            </p:spPr>
+          </p:pic>
+        </mc:Fallback>
+      </mc:AlternateContent>
+      <mc:AlternateContent xmlns:mc="http://schemas.openxmlformats.org/markup-compatibility/2006">
+        <mc:Choice xmlns:p14="http://schemas.microsoft.com/office/powerpoint/2010/main" Requires="p14">
+          <p:contentPart p14:bwMode="auto" r:id="rId9">
+            <p14:nvContentPartPr>
+              <p14:cNvPr id="13" name="Ink 12">
+                <a:extLst>
+                  <a:ext uri="{FF2B5EF4-FFF2-40B4-BE49-F238E27FC236}">
+                    <a16:creationId xmlns:a16="http://schemas.microsoft.com/office/drawing/2014/main" id="{0D5BF425-7455-5047-8B5B-95729688C396}"/>
+                  </a:ext>
+                </a:extLst>
+              </p14:cNvPr>
+              <p14:cNvContentPartPr/>
+              <p14:nvPr/>
+            </p14:nvContentPartPr>
+            <p14:xfrm>
+              <a:off x="3428844" y="3321265"/>
+              <a:ext cx="1878915" cy="453033"/>
+            </p14:xfrm>
+          </p:contentPart>
+        </mc:Choice>
+        <mc:Fallback>
+          <p:pic>
+            <p:nvPicPr>
+              <p:cNvPr id="13" name="Ink 12">
+                <a:extLst>
+                  <a:ext uri="{FF2B5EF4-FFF2-40B4-BE49-F238E27FC236}">
+                    <a16:creationId xmlns:a16="http://schemas.microsoft.com/office/drawing/2014/main" id="{0D5BF425-7455-5047-8B5B-95729688C396}"/>
+                  </a:ext>
+                </a:extLst>
+              </p:cNvPr>
+              <p:cNvPicPr/>
+              <p:nvPr/>
+            </p:nvPicPr>
+            <p:blipFill>
+              <a:blip r:embed="rId10"/>
+              <a:stretch>
+                <a:fillRect/>
+              </a:stretch>
+            </p:blipFill>
+            <p:spPr>
+              <a:xfrm>
+                <a:off x="3410847" y="3303273"/>
+                <a:ext cx="1914550" cy="488657"/>
+              </a:xfrm>
+              <a:prstGeom prst="rect">
+                <a:avLst/>
+              </a:prstGeom>
+            </p:spPr>
+          </p:pic>
+        </mc:Fallback>
+      </mc:AlternateContent>
+      <mc:AlternateContent xmlns:mc="http://schemas.openxmlformats.org/markup-compatibility/2006">
+        <mc:Choice xmlns:p14="http://schemas.microsoft.com/office/powerpoint/2010/main" Requires="p14">
+          <p:contentPart p14:bwMode="auto" r:id="rId11">
+            <p14:nvContentPartPr>
+              <p14:cNvPr id="14" name="Ink 13">
+                <a:extLst>
+                  <a:ext uri="{FF2B5EF4-FFF2-40B4-BE49-F238E27FC236}">
+                    <a16:creationId xmlns:a16="http://schemas.microsoft.com/office/drawing/2014/main" id="{2221E05B-8385-4427-59AE-C55D3918076B}"/>
+                  </a:ext>
+                </a:extLst>
+              </p14:cNvPr>
+              <p14:cNvContentPartPr/>
+              <p14:nvPr/>
+            </p14:nvContentPartPr>
+            <p14:xfrm>
+              <a:off x="3490378" y="3328758"/>
+              <a:ext cx="1775883" cy="802648"/>
+            </p14:xfrm>
+          </p:contentPart>
+        </mc:Choice>
+        <mc:Fallback>
+          <p:pic>
+            <p:nvPicPr>
+              <p:cNvPr id="14" name="Ink 13">
+                <a:extLst>
+                  <a:ext uri="{FF2B5EF4-FFF2-40B4-BE49-F238E27FC236}">
+                    <a16:creationId xmlns:a16="http://schemas.microsoft.com/office/drawing/2014/main" id="{2221E05B-8385-4427-59AE-C55D3918076B}"/>
+                  </a:ext>
+                </a:extLst>
+              </p:cNvPr>
+              <p:cNvPicPr/>
+              <p:nvPr/>
+            </p:nvPicPr>
+            <p:blipFill>
+              <a:blip r:embed="rId12"/>
+              <a:stretch>
+                <a:fillRect/>
+              </a:stretch>
+            </p:blipFill>
+            <p:spPr>
+              <a:xfrm>
+                <a:off x="3472382" y="3310769"/>
+                <a:ext cx="1811516" cy="838265"/>
+              </a:xfrm>
+              <a:prstGeom prst="rect">
+                <a:avLst/>
+              </a:prstGeom>
+            </p:spPr>
+          </p:pic>
+        </mc:Fallback>
+      </mc:AlternateContent>
+      <mc:AlternateContent xmlns:mc="http://schemas.openxmlformats.org/markup-compatibility/2006">
+        <mc:Choice xmlns:p14="http://schemas.microsoft.com/office/powerpoint/2010/main" Requires="p14">
+          <p:contentPart p14:bwMode="auto" r:id="rId13">
+            <p14:nvContentPartPr>
+              <p14:cNvPr id="15" name="Ink 14">
+                <a:extLst>
+                  <a:ext uri="{FF2B5EF4-FFF2-40B4-BE49-F238E27FC236}">
+                    <a16:creationId xmlns:a16="http://schemas.microsoft.com/office/drawing/2014/main" id="{E139891A-B456-ABC2-8311-60B3B4D12537}"/>
+                  </a:ext>
+                </a:extLst>
+              </p14:cNvPr>
+              <p14:cNvContentPartPr/>
+              <p14:nvPr/>
+            </p14:nvContentPartPr>
+            <p14:xfrm>
+              <a:off x="1954048" y="4758481"/>
+              <a:ext cx="4206857" cy="308726"/>
+            </p14:xfrm>
+          </p:contentPart>
+        </mc:Choice>
+        <mc:Fallback>
+          <p:pic>
+            <p:nvPicPr>
+              <p:cNvPr id="15" name="Ink 14">
+                <a:extLst>
+                  <a:ext uri="{FF2B5EF4-FFF2-40B4-BE49-F238E27FC236}">
+                    <a16:creationId xmlns:a16="http://schemas.microsoft.com/office/drawing/2014/main" id="{E139891A-B456-ABC2-8311-60B3B4D12537}"/>
+                  </a:ext>
+                </a:extLst>
+              </p:cNvPr>
+              <p:cNvPicPr/>
+              <p:nvPr/>
+            </p:nvPicPr>
+            <p:blipFill>
+              <a:blip r:embed="rId14"/>
+              <a:stretch>
+                <a:fillRect/>
+              </a:stretch>
+            </p:blipFill>
+            <p:spPr>
+              <a:xfrm>
+                <a:off x="1936050" y="4740490"/>
+                <a:ext cx="4242493" cy="344348"/>
+              </a:xfrm>
+              <a:prstGeom prst="rect">
+                <a:avLst/>
+              </a:prstGeom>
+            </p:spPr>
+          </p:pic>
+        </mc:Fallback>
+      </mc:AlternateContent>
+      <p:sp>
+        <p:nvSpPr>
+          <p:cNvPr id="16" name="TextBox 15">
+            <a:extLst>
+              <a:ext uri="{FF2B5EF4-FFF2-40B4-BE49-F238E27FC236}">
+                <a16:creationId xmlns:a16="http://schemas.microsoft.com/office/drawing/2014/main" id="{24FEF3ED-F281-D4E7-22C3-88CFF0405EB0}"/>
+              </a:ext>
+            </a:extLst>
+          </p:cNvPr>
+          <p:cNvSpPr txBox="1"/>
+          <p:nvPr/>
+        </p:nvSpPr>
+        <p:spPr>
+          <a:xfrm>
+            <a:off x="695417" y="1612776"/>
+            <a:ext cx="1257669" cy="369332"/>
+          </a:xfrm>
+          <a:prstGeom prst="rect">
+            <a:avLst/>
+          </a:prstGeom>
+          <a:noFill/>
+        </p:spPr>
+        <p:txBody>
+          <a:bodyPr rot="0" spcFirstLastPara="0" vertOverflow="overflow" horzOverflow="overflow" vert="horz" wrap="square" lIns="91440" tIns="45720" rIns="91440" bIns="45720" numCol="1" spcCol="0" rtlCol="0" fromWordArt="0" anchor="t" anchorCtr="0" forceAA="0" compatLnSpc="1">
+            <a:prstTxWarp prst="textNoShape">
+              <a:avLst/>
+            </a:prstTxWarp>
+            <a:spAutoFit/>
+          </a:bodyPr>
+          <a:lstStyle/>
+          <a:p>
+            <a:pPr algn="l"/>
+            <a:endParaRPr lang="en-US"/>
+          </a:p>
+        </p:txBody>
+      </p:sp>
+    </p:spTree>
+    <p:extLst>
+      <p:ext uri="{BB962C8B-B14F-4D97-AF65-F5344CB8AC3E}">
+        <p14:creationId xmlns:p14="http://schemas.microsoft.com/office/powerpoint/2010/main" val="4196453157"/>
+      </p:ext>
+    </p:extLst>
+  </p:cSld>
+  <p:clrMapOvr>
+    <a:masterClrMapping/>
+  </p:clrMapOvr>
+</p:sld>
+</file>
+
+<file path=ppt/slides/slide11.xml><?xml version="1.0" encoding="utf-8"?>
 <p:sld xmlns:a="http://schemas.openxmlformats.org/drawingml/2006/main" xmlns:r="http://schemas.openxmlformats.org/officeDocument/2006/relationships" xmlns:p="http://schemas.openxmlformats.org/presentationml/2006/main">
   <p:cSld>
     <p:spTree>
@@ -7284,7 +8280,7 @@
 </p:sld>
 </file>
 
-<file path=ppt/slides/slide11.xml><?xml version="1.0" encoding="utf-8"?>
+<file path=ppt/slides/slide12.xml><?xml version="1.0" encoding="utf-8"?>
 <p:sld xmlns:a="http://schemas.openxmlformats.org/drawingml/2006/main" xmlns:r="http://schemas.openxmlformats.org/officeDocument/2006/relationships" xmlns:p="http://schemas.openxmlformats.org/presentationml/2006/main">
   <p:cSld>
     <p:spTree>
@@ -7374,7 +8370,223 @@
 </p:sld>
 </file>
 
-<file path=ppt/slides/slide12.xml><?xml version="1.0" encoding="utf-8"?>
+<file path=ppt/slides/slide13.xml><?xml version="1.0" encoding="utf-8"?>
+<p:sld xmlns:a="http://schemas.openxmlformats.org/drawingml/2006/main" xmlns:r="http://schemas.openxmlformats.org/officeDocument/2006/relationships" xmlns:p="http://schemas.openxmlformats.org/presentationml/2006/main">
+  <p:cSld>
+    <p:spTree>
+      <p:nvGrpSpPr>
+        <p:cNvPr id="1" name=""/>
+        <p:cNvGrpSpPr/>
+        <p:nvPr/>
+      </p:nvGrpSpPr>
+      <p:grpSpPr>
+        <a:xfrm>
+          <a:off x="0" y="0"/>
+          <a:ext cx="0" cy="0"/>
+          <a:chOff x="0" y="0"/>
+          <a:chExt cx="0" cy="0"/>
+        </a:xfrm>
+      </p:grpSpPr>
+      <p:sp>
+        <p:nvSpPr>
+          <p:cNvPr id="2" name="Title 1">
+            <a:extLst>
+              <a:ext uri="{FF2B5EF4-FFF2-40B4-BE49-F238E27FC236}">
+                <a16:creationId xmlns:a16="http://schemas.microsoft.com/office/drawing/2014/main" id="{9E00B712-F478-3D2F-6FB3-DFD07B0CE486}"/>
+              </a:ext>
+            </a:extLst>
+          </p:cNvPr>
+          <p:cNvSpPr>
+            <a:spLocks noGrp="1"/>
+          </p:cNvSpPr>
+          <p:nvPr>
+            <p:ph type="title"/>
+          </p:nvPr>
+        </p:nvSpPr>
+        <p:spPr>
+          <a:xfrm>
+            <a:off x="838200" y="365125"/>
+            <a:ext cx="5869620" cy="1332961"/>
+          </a:xfrm>
+        </p:spPr>
+        <p:txBody>
+          <a:bodyPr/>
+          <a:lstStyle/>
+          <a:p>
+            <a:r>
+              <a:rPr lang="en-US"/>
+              <a:t>Taliahs Website Mockup</a:t>
+            </a:r>
+          </a:p>
+        </p:txBody>
+      </p:sp>
+      <mc:AlternateContent xmlns:mc="http://schemas.openxmlformats.org/markup-compatibility/2006">
+        <mc:Choice xmlns:p14="http://schemas.microsoft.com/office/powerpoint/2010/main" Requires="p14">
+          <p:contentPart p14:bwMode="auto" r:id="rId2">
+            <p14:nvContentPartPr>
+              <p14:cNvPr id="15" name="Ink 14">
+                <a:extLst>
+                  <a:ext uri="{FF2B5EF4-FFF2-40B4-BE49-F238E27FC236}">
+                    <a16:creationId xmlns:a16="http://schemas.microsoft.com/office/drawing/2014/main" id="{909F68AC-4533-5933-236C-3E8C64B7139B}"/>
+                  </a:ext>
+                </a:extLst>
+              </p14:cNvPr>
+              <p14:cNvContentPartPr/>
+              <p14:nvPr/>
+            </p14:nvContentPartPr>
+            <p14:xfrm>
+              <a:off x="6613401" y="1400487"/>
+              <a:ext cx="14796" cy="14796"/>
+            </p14:xfrm>
+          </p:contentPart>
+        </mc:Choice>
+        <mc:Fallback>
+          <p:pic>
+            <p:nvPicPr>
+              <p:cNvPr id="15" name="Ink 14">
+                <a:extLst>
+                  <a:ext uri="{FF2B5EF4-FFF2-40B4-BE49-F238E27FC236}">
+                    <a16:creationId xmlns:a16="http://schemas.microsoft.com/office/drawing/2014/main" id="{909F68AC-4533-5933-236C-3E8C64B7139B}"/>
+                  </a:ext>
+                </a:extLst>
+              </p:cNvPr>
+              <p:cNvPicPr/>
+              <p:nvPr/>
+            </p:nvPicPr>
+            <p:blipFill>
+              <a:blip r:embed="rId3"/>
+              <a:stretch>
+                <a:fillRect/>
+              </a:stretch>
+            </p:blipFill>
+            <p:spPr>
+              <a:xfrm>
+                <a:off x="5873601" y="660687"/>
+                <a:ext cx="1479600" cy="1479600"/>
+              </a:xfrm>
+              <a:prstGeom prst="rect">
+                <a:avLst/>
+              </a:prstGeom>
+            </p:spPr>
+          </p:pic>
+        </mc:Fallback>
+      </mc:AlternateContent>
+      <mc:AlternateContent xmlns:mc="http://schemas.openxmlformats.org/markup-compatibility/2006">
+        <mc:Choice xmlns:p14="http://schemas.microsoft.com/office/powerpoint/2010/main" Requires="p14">
+          <p:contentPart p14:bwMode="auto" r:id="rId4">
+            <p14:nvContentPartPr>
+              <p14:cNvPr id="17" name="Ink 16">
+                <a:extLst>
+                  <a:ext uri="{FF2B5EF4-FFF2-40B4-BE49-F238E27FC236}">
+                    <a16:creationId xmlns:a16="http://schemas.microsoft.com/office/drawing/2014/main" id="{9D4E803E-C957-72AB-1BA1-FB3A08757C8F}"/>
+                  </a:ext>
+                </a:extLst>
+              </p14:cNvPr>
+              <p14:cNvContentPartPr/>
+              <p14:nvPr/>
+            </p14:nvContentPartPr>
+            <p14:xfrm>
+              <a:off x="8838194" y="1491171"/>
+              <a:ext cx="14796" cy="14796"/>
+            </p14:xfrm>
+          </p:contentPart>
+        </mc:Choice>
+        <mc:Fallback>
+          <p:pic>
+            <p:nvPicPr>
+              <p:cNvPr id="17" name="Ink 16">
+                <a:extLst>
+                  <a:ext uri="{FF2B5EF4-FFF2-40B4-BE49-F238E27FC236}">
+                    <a16:creationId xmlns:a16="http://schemas.microsoft.com/office/drawing/2014/main" id="{9D4E803E-C957-72AB-1BA1-FB3A08757C8F}"/>
+                  </a:ext>
+                </a:extLst>
+              </p:cNvPr>
+              <p:cNvPicPr/>
+              <p:nvPr/>
+            </p:nvPicPr>
+            <p:blipFill>
+              <a:blip r:embed="rId3"/>
+              <a:stretch>
+                <a:fillRect/>
+              </a:stretch>
+            </p:blipFill>
+            <p:spPr>
+              <a:xfrm>
+                <a:off x="8098394" y="751371"/>
+                <a:ext cx="1479600" cy="1479600"/>
+              </a:xfrm>
+              <a:prstGeom prst="rect">
+                <a:avLst/>
+              </a:prstGeom>
+            </p:spPr>
+          </p:pic>
+        </mc:Fallback>
+      </mc:AlternateContent>
+      <mc:AlternateContent xmlns:mc="http://schemas.openxmlformats.org/markup-compatibility/2006">
+        <mc:Choice xmlns:p14="http://schemas.microsoft.com/office/powerpoint/2010/main" Requires="p14">
+          <p:contentPart p14:bwMode="auto" r:id="rId5">
+            <p14:nvContentPartPr>
+              <p14:cNvPr id="18" name="Ink 17">
+                <a:extLst>
+                  <a:ext uri="{FF2B5EF4-FFF2-40B4-BE49-F238E27FC236}">
+                    <a16:creationId xmlns:a16="http://schemas.microsoft.com/office/drawing/2014/main" id="{D845F142-7145-4B13-0DF0-D0D519116F4C}"/>
+                  </a:ext>
+                </a:extLst>
+              </p14:cNvPr>
+              <p14:cNvContentPartPr/>
+              <p14:nvPr/>
+            </p14:nvContentPartPr>
+            <p14:xfrm>
+              <a:off x="9025631" y="1167043"/>
+              <a:ext cx="14796" cy="14796"/>
+            </p14:xfrm>
+          </p:contentPart>
+        </mc:Choice>
+        <mc:Fallback>
+          <p:pic>
+            <p:nvPicPr>
+              <p:cNvPr id="18" name="Ink 17">
+                <a:extLst>
+                  <a:ext uri="{FF2B5EF4-FFF2-40B4-BE49-F238E27FC236}">
+                    <a16:creationId xmlns:a16="http://schemas.microsoft.com/office/drawing/2014/main" id="{D845F142-7145-4B13-0DF0-D0D519116F4C}"/>
+                  </a:ext>
+                </a:extLst>
+              </p:cNvPr>
+              <p:cNvPicPr/>
+              <p:nvPr/>
+            </p:nvPicPr>
+            <p:blipFill>
+              <a:blip r:embed="rId6"/>
+              <a:stretch>
+                <a:fillRect/>
+              </a:stretch>
+            </p:blipFill>
+            <p:spPr>
+              <a:xfrm>
+                <a:off x="8902331" y="1093063"/>
+                <a:ext cx="258930" cy="161276"/>
+              </a:xfrm>
+              <a:prstGeom prst="rect">
+                <a:avLst/>
+              </a:prstGeom>
+            </p:spPr>
+          </p:pic>
+        </mc:Fallback>
+      </mc:AlternateContent>
+    </p:spTree>
+    <p:extLst>
+      <p:ext uri="{BB962C8B-B14F-4D97-AF65-F5344CB8AC3E}">
+        <p14:creationId xmlns:p14="http://schemas.microsoft.com/office/powerpoint/2010/main" val="2149723290"/>
+      </p:ext>
+    </p:extLst>
+  </p:cSld>
+  <p:clrMapOvr>
+    <a:masterClrMapping/>
+  </p:clrMapOvr>
+</p:sld>
+</file>
+
+<file path=ppt/slides/slide14.xml><?xml version="1.0" encoding="utf-8"?>
 <p:sld xmlns:a="http://schemas.openxmlformats.org/drawingml/2006/main" xmlns:r="http://schemas.openxmlformats.org/officeDocument/2006/relationships" xmlns:p="http://schemas.openxmlformats.org/presentationml/2006/main">
   <p:cSld>
     <p:spTree>
@@ -7462,7 +8674,7 @@
 </p:sld>
 </file>
 
-<file path=ppt/slides/slide13.xml><?xml version="1.0" encoding="utf-8"?>
+<file path=ppt/slides/slide15.xml><?xml version="1.0" encoding="utf-8"?>
 <p:sld xmlns:a="http://schemas.openxmlformats.org/drawingml/2006/main" xmlns:r="http://schemas.openxmlformats.org/officeDocument/2006/relationships" xmlns:p="http://schemas.openxmlformats.org/presentationml/2006/main">
   <p:cSld>
     <p:spTree>
@@ -7590,7 +8802,7 @@
 </p:sld>
 </file>
 
-<file path=ppt/slides/slide14.xml><?xml version="1.0" encoding="utf-8"?>
+<file path=ppt/slides/slide16.xml><?xml version="1.0" encoding="utf-8"?>
 <p:sld xmlns:a="http://schemas.openxmlformats.org/drawingml/2006/main" xmlns:r="http://schemas.openxmlformats.org/officeDocument/2006/relationships" xmlns:p="http://schemas.openxmlformats.org/presentationml/2006/main">
   <p:cSld>
     <p:spTree>
@@ -7659,7 +8871,7 @@
         </p:blipFill>
         <p:spPr>
           <a:xfrm>
-            <a:off x="3333170" y="2272908"/>
+            <a:off x="3273986" y="1695860"/>
             <a:ext cx="5244027" cy="4585092"/>
           </a:xfrm>
           <a:prstGeom prst="rect">
@@ -7671,6 +8883,157 @@
     <p:extLst>
       <p:ext uri="{BB962C8B-B14F-4D97-AF65-F5344CB8AC3E}">
         <p14:creationId xmlns:p14="http://schemas.microsoft.com/office/powerpoint/2010/main" val="1318932797"/>
+      </p:ext>
+    </p:extLst>
+  </p:cSld>
+  <p:clrMapOvr>
+    <a:masterClrMapping/>
+  </p:clrMapOvr>
+</p:sld>
+</file>
+
+<file path=ppt/slides/slide17.xml><?xml version="1.0" encoding="utf-8"?>
+<p:sld xmlns:a="http://schemas.openxmlformats.org/drawingml/2006/main" xmlns:r="http://schemas.openxmlformats.org/officeDocument/2006/relationships" xmlns:p="http://schemas.openxmlformats.org/presentationml/2006/main">
+  <p:cSld>
+    <p:spTree>
+      <p:nvGrpSpPr>
+        <p:cNvPr id="1" name=""/>
+        <p:cNvGrpSpPr/>
+        <p:nvPr/>
+      </p:nvGrpSpPr>
+      <p:grpSpPr>
+        <a:xfrm>
+          <a:off x="0" y="0"/>
+          <a:ext cx="0" cy="0"/>
+          <a:chOff x="0" y="0"/>
+          <a:chExt cx="0" cy="0"/>
+        </a:xfrm>
+      </p:grpSpPr>
+      <p:sp>
+        <p:nvSpPr>
+          <p:cNvPr id="2" name="Title 1">
+            <a:extLst>
+              <a:ext uri="{FF2B5EF4-FFF2-40B4-BE49-F238E27FC236}">
+                <a16:creationId xmlns:a16="http://schemas.microsoft.com/office/drawing/2014/main" id="{9A6D4E23-7F5E-FFF1-E437-7D524E9B201B}"/>
+              </a:ext>
+            </a:extLst>
+          </p:cNvPr>
+          <p:cNvSpPr>
+            <a:spLocks noGrp="1"/>
+          </p:cNvSpPr>
+          <p:nvPr>
+            <p:ph type="title"/>
+          </p:nvPr>
+        </p:nvSpPr>
+        <p:spPr/>
+        <p:txBody>
+          <a:bodyPr/>
+          <a:lstStyle/>
+          <a:p>
+            <a:r>
+              <a:rPr lang="en-US"/>
+              <a:t>Evaluation Criteria</a:t>
+            </a:r>
+          </a:p>
+        </p:txBody>
+      </p:sp>
+      <p:sp>
+        <p:nvSpPr>
+          <p:cNvPr id="3" name="Content Placeholder 2">
+            <a:extLst>
+              <a:ext uri="{FF2B5EF4-FFF2-40B4-BE49-F238E27FC236}">
+                <a16:creationId xmlns:a16="http://schemas.microsoft.com/office/drawing/2014/main" id="{C999C599-B8CA-EE81-4840-2B23F0BFE06D}"/>
+              </a:ext>
+            </a:extLst>
+          </p:cNvPr>
+          <p:cNvSpPr>
+            <a:spLocks noGrp="1"/>
+          </p:cNvSpPr>
+          <p:nvPr>
+            <p:ph idx="1"/>
+          </p:nvPr>
+        </p:nvSpPr>
+        <p:spPr/>
+        <p:txBody>
+          <a:bodyPr vert="horz" lIns="91440" tIns="45720" rIns="91440" bIns="45720" rtlCol="0" anchor="t">
+            <a:normAutofit/>
+          </a:bodyPr>
+          <a:lstStyle/>
+          <a:p>
+            <a:r>
+              <a:rPr lang="en-US" sz="2000"/>
+              <a:t>The device is able to record water turbidity</a:t>
+            </a:r>
+          </a:p>
+          <a:p>
+            <a:pPr marL="0" indent="0">
+              <a:buNone/>
+            </a:pPr>
+            <a:r>
+              <a:rPr lang="en-US" sz="1400"/>
+              <a:t>This is the main function of the product</a:t>
+            </a:r>
+          </a:p>
+          <a:p>
+            <a:r>
+              <a:rPr lang="en-US" sz="2000"/>
+              <a:t>Users are shown water turbidity</a:t>
+            </a:r>
+          </a:p>
+          <a:p>
+            <a:pPr marL="0" indent="0">
+              <a:buNone/>
+            </a:pPr>
+            <a:r>
+              <a:rPr lang="en-US" sz="1400"/>
+              <a:t>The water turbidity provides the user with information that will signify how, and how much the water needs to be treated</a:t>
+            </a:r>
+          </a:p>
+          <a:p>
+            <a:r>
+              <a:rPr lang="en-US" sz="2000"/>
+              <a:t>The website has an interpretable dashboard and summary</a:t>
+            </a:r>
+          </a:p>
+          <a:p>
+            <a:pPr marL="0" indent="0">
+              <a:buNone/>
+            </a:pPr>
+            <a:r>
+              <a:rPr lang="en-US" sz="1400"/>
+              <a:t>Most users would not have the education necessary to interpret raw data from a reading</a:t>
+            </a:r>
+          </a:p>
+          <a:p>
+            <a:r>
+              <a:rPr lang="en-US" sz="2000"/>
+              <a:t>Users can determine whether water is safe or not for consumption</a:t>
+            </a:r>
+          </a:p>
+          <a:p>
+            <a:pPr marL="0" indent="0">
+              <a:buNone/>
+            </a:pPr>
+            <a:endParaRPr lang="en-US" sz="1400"/>
+          </a:p>
+          <a:p>
+            <a:r>
+              <a:rPr lang="en-US" sz="2000"/>
+              <a:t>Records of readings and locations are saved and are reviewable</a:t>
+            </a:r>
+          </a:p>
+          <a:p>
+            <a:pPr marL="0" indent="0">
+              <a:buNone/>
+            </a:pPr>
+            <a:endParaRPr lang="en-US" sz="1400"/>
+          </a:p>
+        </p:txBody>
+      </p:sp>
+    </p:spTree>
+    <p:extLst>
+      <p:ext uri="{BB962C8B-B14F-4D97-AF65-F5344CB8AC3E}">
+        <p14:creationId xmlns:p14="http://schemas.microsoft.com/office/powerpoint/2010/main" val="3457692963"/>
       </p:ext>
     </p:extLst>
   </p:cSld>
@@ -9095,11 +10458,7 @@
               <a:buSzPct val="80000"/>
             </a:pPr>
             <a:r>
-              <a:rPr lang="en-US" sz="1000">
-                <a:solidFill>
-                  <a:srgbClr val="FFFFFF"/>
-                </a:solidFill>
-              </a:rPr>
+              <a:rPr lang="en-US" sz="1000"/>
               <a:t>We chose to create a portable submersible water quality surveillance probe because many people are unsure whether the water around them is safe to drink or use. Travelers, campers, hikers, and people in remote areas often worry about getting sick from contaminated water and cannot always trust what they are told or judge the water by its appearance.</a:t>
             </a:r>
           </a:p>
@@ -9117,11 +10476,7 @@
               <a:buSzPct val="80000"/>
             </a:pPr>
             <a:r>
-              <a:rPr lang="en-US" sz="1000">
-                <a:solidFill>
-                  <a:srgbClr val="FFFFFF"/>
-                </a:solidFill>
-              </a:rPr>
+              <a:rPr lang="en-US" sz="1000"/>
               <a:t>Our probe provides a quick and reliable way to test water quality on the spot. It helps users make informed decisions, reduces the risk of waterborne illness, and can save money by avoiding unnecessary purchases of bottled water. We believe this solution will improve health and safety while giving people confidence and peace of mind wherever they are.</a:t>
             </a:r>
           </a:p>
@@ -9139,11 +10494,7 @@
               <a:buSzPct val="80000"/>
             </a:pPr>
             <a:r>
-              <a:rPr lang="en-US" sz="1000" b="1">
-                <a:solidFill>
-                  <a:srgbClr val="FFFFFF"/>
-                </a:solidFill>
-              </a:rPr>
+              <a:rPr lang="en-US" sz="1000" b="1"/>
               <a:t>Functional Requirements:</a:t>
             </a:r>
           </a:p>
@@ -9163,11 +10514,7 @@
               <a:buChar char=""/>
             </a:pPr>
             <a:r>
-              <a:rPr lang="en-US" sz="1000">
-                <a:solidFill>
-                  <a:srgbClr val="FFFFFF"/>
-                </a:solidFill>
-              </a:rPr>
+              <a:rPr lang="en-US" sz="1000"/>
               <a:t>Detect Water Purity </a:t>
             </a:r>
           </a:p>
@@ -9187,11 +10534,7 @@
               <a:buChar char=""/>
             </a:pPr>
             <a:r>
-              <a:rPr lang="en-US" sz="1000">
-                <a:solidFill>
-                  <a:srgbClr val="FFFFFF"/>
-                </a:solidFill>
-              </a:rPr>
+              <a:rPr lang="en-US" sz="1000"/>
               <a:t>Detect Water Temperature</a:t>
             </a:r>
           </a:p>
@@ -9211,11 +10554,7 @@
               <a:buChar char=""/>
             </a:pPr>
             <a:r>
-              <a:rPr lang="en-US" sz="1000">
-                <a:solidFill>
-                  <a:srgbClr val="FFFFFF"/>
-                </a:solidFill>
-              </a:rPr>
+              <a:rPr lang="en-US" sz="1000"/>
               <a:t>Dashboard</a:t>
             </a:r>
           </a:p>
@@ -9235,11 +10574,7 @@
               <a:buChar char=""/>
             </a:pPr>
             <a:r>
-              <a:rPr lang="en-US" sz="1000">
-                <a:solidFill>
-                  <a:srgbClr val="FFFFFF"/>
-                </a:solidFill>
-              </a:rPr>
+              <a:rPr lang="en-US" sz="1000"/>
               <a:t>Be able to function in remote communities</a:t>
             </a:r>
           </a:p>
@@ -9259,11 +10594,7 @@
               <a:buChar char=""/>
             </a:pPr>
             <a:r>
-              <a:rPr lang="en-US" sz="1000">
-                <a:solidFill>
-                  <a:srgbClr val="FFFFFF"/>
-                </a:solidFill>
-              </a:rPr>
+              <a:rPr lang="en-US" sz="1000"/>
               <a:t>Waterproof</a:t>
             </a:r>
           </a:p>
@@ -9283,27 +10614,15 @@
               <a:buChar char=""/>
             </a:pPr>
             <a:r>
-              <a:rPr lang="en-US" sz="1000">
-                <a:solidFill>
-                  <a:srgbClr val="FFFFFF"/>
-                </a:solidFill>
-              </a:rPr>
+              <a:rPr lang="en-US" sz="1000"/>
               <a:t>Must record all data to a </a:t>
             </a:r>
             <a:r>
-              <a:rPr lang="en-US" sz="1000" err="1">
-                <a:solidFill>
-                  <a:srgbClr val="FFFFFF"/>
-                </a:solidFill>
-              </a:rPr>
+              <a:rPr lang="en-US" sz="1000" err="1"/>
               <a:t>sd</a:t>
             </a:r>
             <a:r>
-              <a:rPr lang="en-US" sz="1000">
-                <a:solidFill>
-                  <a:srgbClr val="FFFFFF"/>
-                </a:solidFill>
-              </a:rPr>
+              <a:rPr lang="en-US" sz="1000"/>
               <a:t> card</a:t>
             </a:r>
           </a:p>
@@ -9323,11 +10642,7 @@
               <a:buChar char=""/>
             </a:pPr>
             <a:r>
-              <a:rPr lang="en-US" sz="1000">
-                <a:solidFill>
-                  <a:srgbClr val="FFFFFF"/>
-                </a:solidFill>
-              </a:rPr>
+              <a:rPr lang="en-US" sz="1000"/>
               <a:t>Water safety ranking system</a:t>
             </a:r>
           </a:p>
@@ -9345,11 +10660,7 @@
               <a:buSzPct val="80000"/>
             </a:pPr>
             <a:r>
-              <a:rPr lang="en-US" sz="1000" b="1">
-                <a:solidFill>
-                  <a:srgbClr val="FFFFFF"/>
-                </a:solidFill>
-              </a:rPr>
+              <a:rPr lang="en-US" sz="1000" b="1"/>
               <a:t>Non-Functional Requirements:</a:t>
             </a:r>
           </a:p>
@@ -9369,11 +10680,7 @@
               <a:buChar char=""/>
             </a:pPr>
             <a:r>
-              <a:rPr lang="en-US" sz="1000">
-                <a:solidFill>
-                  <a:srgbClr val="FFFFFF"/>
-                </a:solidFill>
-              </a:rPr>
+              <a:rPr lang="en-US" sz="1000"/>
               <a:t>Work Online and Offline</a:t>
             </a:r>
           </a:p>
@@ -9393,11 +10700,7 @@
               <a:buChar char=""/>
             </a:pPr>
             <a:r>
-              <a:rPr lang="en-US" sz="1000">
-                <a:solidFill>
-                  <a:srgbClr val="FFFFFF"/>
-                </a:solidFill>
-              </a:rPr>
+              <a:rPr lang="en-US" sz="1000"/>
               <a:t>Wireless Communication</a:t>
             </a:r>
           </a:p>
@@ -9417,11 +10720,7 @@
               <a:buChar char=""/>
             </a:pPr>
             <a:r>
-              <a:rPr lang="en-US" sz="1000">
-                <a:solidFill>
-                  <a:srgbClr val="FFFFFF"/>
-                </a:solidFill>
-              </a:rPr>
+              <a:rPr lang="en-US" sz="1000"/>
               <a:t>Long battery life</a:t>
             </a:r>
           </a:p>
@@ -9440,11 +10739,7 @@
               <a:buFont typeface="Wingdings 3" charset="2"/>
               <a:buChar char=""/>
             </a:pPr>
-            <a:endParaRPr lang="en-US" sz="900">
-              <a:solidFill>
-                <a:srgbClr val="FFFFFF"/>
-              </a:solidFill>
-            </a:endParaRPr>
+            <a:endParaRPr lang="en-US" sz="900"/>
           </a:p>
         </p:txBody>
       </p:sp>

--- a/PowerPoint/SWQSPowerpoint.pptx
+++ b/PowerPoint/SWQSPowerpoint.pptx
@@ -14,10 +14,10 @@
     <p:sldId id="262" r:id="rId8"/>
     <p:sldId id="263" r:id="rId9"/>
     <p:sldId id="269" r:id="rId10"/>
-    <p:sldId id="272" r:id="rId11"/>
+    <p:sldId id="271" r:id="rId11"/>
     <p:sldId id="264" r:id="rId12"/>
     <p:sldId id="265" r:id="rId13"/>
-    <p:sldId id="271" r:id="rId14"/>
+    <p:sldId id="272" r:id="rId14"/>
     <p:sldId id="266" r:id="rId15"/>
     <p:sldId id="267" r:id="rId16"/>
     <p:sldId id="268" r:id="rId17"/>
@@ -126,7 +126,7 @@
 <file path=ppt/revisionInfo.xml><?xml version="1.0" encoding="utf-8"?>
 <p1510:revInfo xmlns:a="http://schemas.openxmlformats.org/drawingml/2006/main" xmlns:r="http://schemas.openxmlformats.org/officeDocument/2006/relationships" xmlns:p1510="http://schemas.microsoft.com/office/powerpoint/2015/10/main">
   <p1510:revLst>
-    <p1510:client id="{00000000-0000-0000-0000-000000000000}" v="153" dt="2026-08-13T23:24:58.025"/>
+    <p1510:client id="{00000000-0000-0000-0000-000000000000}" v="509" dt="2026-08-13T23:29:06.399"/>
     <p1510:client id="{99C1DE80-53CF-4A72-884A-7A8152EF750D}" v="36" dt="2026-08-13T22:54:53.508"/>
     <p1510:client id="{F06FBC25-D5A1-B4B9-830D-DD9FA3322021}" v="614" dt="2026-08-13T23:16:32.548"/>
   </p1510:revLst>
@@ -137,8 +137,8 @@
 <pc:chgInfo xmlns:a="http://schemas.openxmlformats.org/drawingml/2006/main" xmlns:r="http://schemas.openxmlformats.org/officeDocument/2006/relationships" xmlns:ac="http://schemas.microsoft.com/office/drawing/2013/main/command" xmlns:pc="http://schemas.microsoft.com/office/powerpoint/2013/main/command">
   <pc:docChgLst>
     <pc:chgData name="Taliah Kassaby" userId="S::kas0005@wantirnacollege.vic.edu.au::23d269d0-e02c-425d-bfba-881a989e0172" providerId="AD" clId="Web-{00000000-0000-0000-0000-000000000000}"/>
-    <pc:docChg chg="addSld modSld">
-      <pc:chgData name="Taliah Kassaby" userId="S::kas0005@wantirnacollege.vic.edu.au::23d269d0-e02c-425d-bfba-881a989e0172" providerId="AD" clId="Web-{00000000-0000-0000-0000-000000000000}" dt="2026-08-13T23:24:58.025" v="129" actId="20577"/>
+    <pc:docChg chg="addSld modSld sldOrd">
+      <pc:chgData name="Taliah Kassaby" userId="S::kas0005@wantirnacollege.vic.edu.au::23d269d0-e02c-425d-bfba-881a989e0172" providerId="AD" clId="Web-{00000000-0000-0000-0000-000000000000}" dt="2026-08-13T23:29:06.399" v="351" actId="20577"/>
       <pc:docMkLst>
         <pc:docMk/>
       </pc:docMkLst>
@@ -157,14 +157,14 @@
           </ac:picMkLst>
         </pc:picChg>
       </pc:sldChg>
-      <pc:sldChg chg="addSp delSp modSp new">
-        <pc:chgData name="Taliah Kassaby" userId="S::kas0005@wantirnacollege.vic.edu.au::23d269d0-e02c-425d-bfba-881a989e0172" providerId="AD" clId="Web-{00000000-0000-0000-0000-000000000000}" dt="2026-08-13T23:12:41.526" v="98"/>
+      <pc:sldChg chg="addSp delSp modSp new ord">
+        <pc:chgData name="Taliah Kassaby" userId="S::kas0005@wantirnacollege.vic.edu.au::23d269d0-e02c-425d-bfba-881a989e0172" providerId="AD" clId="Web-{00000000-0000-0000-0000-000000000000}" dt="2026-08-13T23:29:06.399" v="351" actId="20577"/>
         <pc:sldMkLst>
           <pc:docMk/>
           <pc:sldMk cId="2149723290" sldId="271"/>
         </pc:sldMkLst>
         <pc:spChg chg="mod">
-          <ac:chgData name="Taliah Kassaby" userId="S::kas0005@wantirnacollege.vic.edu.au::23d269d0-e02c-425d-bfba-881a989e0172" providerId="AD" clId="Web-{00000000-0000-0000-0000-000000000000}" dt="2026-08-13T22:58:31.459" v="32" actId="14100"/>
+          <ac:chgData name="Taliah Kassaby" userId="S::kas0005@wantirnacollege.vic.edu.au::23d269d0-e02c-425d-bfba-881a989e0172" providerId="AD" clId="Web-{00000000-0000-0000-0000-000000000000}" dt="2026-08-13T23:29:06.399" v="351" actId="20577"/>
           <ac:spMkLst>
             <pc:docMk/>
             <pc:sldMk cId="2149723290" sldId="271"/>
@@ -316,14 +316,14 @@
           </ac:inkMkLst>
         </pc:inkChg>
       </pc:sldChg>
-      <pc:sldChg chg="addSp delSp modSp new">
-        <pc:chgData name="Taliah Kassaby" userId="S::kas0005@wantirnacollege.vic.edu.au::23d269d0-e02c-425d-bfba-881a989e0172" providerId="AD" clId="Web-{00000000-0000-0000-0000-000000000000}" dt="2026-08-13T23:24:58.025" v="129" actId="20577"/>
+      <pc:sldChg chg="addSp delSp modSp new ord">
+        <pc:chgData name="Taliah Kassaby" userId="S::kas0005@wantirnacollege.vic.edu.au::23d269d0-e02c-425d-bfba-881a989e0172" providerId="AD" clId="Web-{00000000-0000-0000-0000-000000000000}" dt="2026-08-13T23:28:58.243" v="345"/>
         <pc:sldMkLst>
           <pc:docMk/>
           <pc:sldMk cId="4196453157" sldId="272"/>
         </pc:sldMkLst>
         <pc:spChg chg="mod">
-          <ac:chgData name="Taliah Kassaby" userId="S::kas0005@wantirnacollege.vic.edu.au::23d269d0-e02c-425d-bfba-881a989e0172" providerId="AD" clId="Web-{00000000-0000-0000-0000-000000000000}" dt="2026-08-13T22:59:12.289" v="50" actId="20577"/>
+          <ac:chgData name="Taliah Kassaby" userId="S::kas0005@wantirnacollege.vic.edu.au::23d269d0-e02c-425d-bfba-881a989e0172" providerId="AD" clId="Web-{00000000-0000-0000-0000-000000000000}" dt="2026-08-13T23:28:55.477" v="344" actId="20577"/>
           <ac:spMkLst>
             <pc:docMk/>
             <pc:sldMk cId="4196453157" sldId="272"/>
@@ -339,23 +339,39 @@
           </ac:spMkLst>
         </pc:spChg>
         <pc:spChg chg="add mod">
-          <ac:chgData name="Taliah Kassaby" userId="S::kas0005@wantirnacollege.vic.edu.au::23d269d0-e02c-425d-bfba-881a989e0172" providerId="AD" clId="Web-{00000000-0000-0000-0000-000000000000}" dt="2026-08-13T23:24:58.025" v="129" actId="20577"/>
+          <ac:chgData name="Taliah Kassaby" userId="S::kas0005@wantirnacollege.vic.edu.au::23d269d0-e02c-425d-bfba-881a989e0172" providerId="AD" clId="Web-{00000000-0000-0000-0000-000000000000}" dt="2026-08-13T23:27:10.736" v="196" actId="1076"/>
           <ac:spMkLst>
             <pc:docMk/>
             <pc:sldMk cId="4196453157" sldId="272"/>
             <ac:spMk id="16" creationId="{24FEF3ED-F281-D4E7-22C3-88CFF0405EB0}"/>
           </ac:spMkLst>
         </pc:spChg>
+        <pc:spChg chg="add mod">
+          <ac:chgData name="Taliah Kassaby" userId="S::kas0005@wantirnacollege.vic.edu.au::23d269d0-e02c-425d-bfba-881a989e0172" providerId="AD" clId="Web-{00000000-0000-0000-0000-000000000000}" dt="2026-08-13T23:27:44.426" v="237" actId="1076"/>
+          <ac:spMkLst>
+            <pc:docMk/>
+            <pc:sldMk cId="4196453157" sldId="272"/>
+            <ac:spMk id="22" creationId="{50409287-EF5B-CF5B-A14E-2C5D39440B15}"/>
+          </ac:spMkLst>
+        </pc:spChg>
+        <pc:spChg chg="add mod">
+          <ac:chgData name="Taliah Kassaby" userId="S::kas0005@wantirnacollege.vic.edu.au::23d269d0-e02c-425d-bfba-881a989e0172" providerId="AD" clId="Web-{00000000-0000-0000-0000-000000000000}" dt="2026-08-13T23:28:28.116" v="315" actId="1076"/>
+          <ac:spMkLst>
+            <pc:docMk/>
+            <pc:sldMk cId="4196453157" sldId="272"/>
+            <ac:spMk id="23" creationId="{4FF51D3C-6667-07BD-0EBF-46440DDD405A}"/>
+          </ac:spMkLst>
+        </pc:spChg>
         <pc:picChg chg="add mod ord">
-          <ac:chgData name="Taliah Kassaby" userId="S::kas0005@wantirnacollege.vic.edu.au::23d269d0-e02c-425d-bfba-881a989e0172" providerId="AD" clId="Web-{00000000-0000-0000-0000-000000000000}" dt="2026-08-13T23:23:57.771" v="106" actId="1076"/>
+          <ac:chgData name="Taliah Kassaby" userId="S::kas0005@wantirnacollege.vic.edu.au::23d269d0-e02c-425d-bfba-881a989e0172" providerId="AD" clId="Web-{00000000-0000-0000-0000-000000000000}" dt="2026-08-13T23:26:42.703" v="189" actId="1076"/>
           <ac:picMkLst>
             <pc:docMk/>
             <pc:sldMk cId="4196453157" sldId="272"/>
             <ac:picMk id="4" creationId="{6EB7D4B0-5233-EF46-C5FB-4067893490FB}"/>
           </ac:picMkLst>
         </pc:picChg>
-        <pc:inkChg chg="add">
-          <ac:chgData name="Taliah Kassaby" userId="S::kas0005@wantirnacollege.vic.edu.au::23d269d0-e02c-425d-bfba-881a989e0172" providerId="AD" clId="Web-{00000000-0000-0000-0000-000000000000}" dt="2026-08-13T23:24:05.927" v="107"/>
+        <pc:inkChg chg="add mod">
+          <ac:chgData name="Taliah Kassaby" userId="S::kas0005@wantirnacollege.vic.edu.au::23d269d0-e02c-425d-bfba-881a989e0172" providerId="AD" clId="Web-{00000000-0000-0000-0000-000000000000}" dt="2026-08-13T23:26:50.750" v="192" actId="14100"/>
           <ac:inkMkLst>
             <pc:docMk/>
             <pc:sldMk cId="4196453157" sldId="272"/>
@@ -442,6 +458,46 @@
             <ac:inkMk id="15" creationId="{E139891A-B456-ABC2-8311-60B3B4D12537}"/>
           </ac:inkMkLst>
         </pc:inkChg>
+        <pc:inkChg chg="add del">
+          <ac:chgData name="Taliah Kassaby" userId="S::kas0005@wantirnacollege.vic.edu.au::23d269d0-e02c-425d-bfba-881a989e0172" providerId="AD" clId="Web-{00000000-0000-0000-0000-000000000000}" dt="2026-08-13T23:26:10.342" v="183"/>
+          <ac:inkMkLst>
+            <pc:docMk/>
+            <pc:sldMk cId="4196453157" sldId="272"/>
+            <ac:inkMk id="17" creationId="{33C66D39-2BE1-0816-0604-1813BFAD32C7}"/>
+          </ac:inkMkLst>
+        </pc:inkChg>
+        <pc:inkChg chg="add del">
+          <ac:chgData name="Taliah Kassaby" userId="S::kas0005@wantirnacollege.vic.edu.au::23d269d0-e02c-425d-bfba-881a989e0172" providerId="AD" clId="Web-{00000000-0000-0000-0000-000000000000}" dt="2026-08-13T23:26:07.966" v="182"/>
+          <ac:inkMkLst>
+            <pc:docMk/>
+            <pc:sldMk cId="4196453157" sldId="272"/>
+            <ac:inkMk id="18" creationId="{E46ED185-0E24-95C3-6CEF-A3F26B602A12}"/>
+          </ac:inkMkLst>
+        </pc:inkChg>
+        <pc:inkChg chg="add del">
+          <ac:chgData name="Taliah Kassaby" userId="S::kas0005@wantirnacollege.vic.edu.au::23d269d0-e02c-425d-bfba-881a989e0172" providerId="AD" clId="Web-{00000000-0000-0000-0000-000000000000}" dt="2026-08-13T23:26:07.357" v="181"/>
+          <ac:inkMkLst>
+            <pc:docMk/>
+            <pc:sldMk cId="4196453157" sldId="272"/>
+            <ac:inkMk id="19" creationId="{A3460038-638F-5DA2-6EA3-2C81FEB5A0C1}"/>
+          </ac:inkMkLst>
+        </pc:inkChg>
+        <pc:inkChg chg="add del">
+          <ac:chgData name="Taliah Kassaby" userId="S::kas0005@wantirnacollege.vic.edu.au::23d269d0-e02c-425d-bfba-881a989e0172" providerId="AD" clId="Web-{00000000-0000-0000-0000-000000000000}" dt="2026-08-13T23:26:06.935" v="180"/>
+          <ac:inkMkLst>
+            <pc:docMk/>
+            <pc:sldMk cId="4196453157" sldId="272"/>
+            <ac:inkMk id="20" creationId="{5909321D-20A3-0948-5DC3-B6379F8765A0}"/>
+          </ac:inkMkLst>
+        </pc:inkChg>
+        <pc:inkChg chg="add del">
+          <ac:chgData name="Taliah Kassaby" userId="S::kas0005@wantirnacollege.vic.edu.au::23d269d0-e02c-425d-bfba-881a989e0172" providerId="AD" clId="Web-{00000000-0000-0000-0000-000000000000}" dt="2026-08-13T23:26:05.138" v="179"/>
+          <ac:inkMkLst>
+            <pc:docMk/>
+            <pc:sldMk cId="4196453157" sldId="272"/>
+            <ac:inkMk id="21" creationId="{672C2550-9A59-01B5-2FFC-D613B873EB44}"/>
+          </ac:inkMkLst>
+        </pc:inkChg>
       </pc:sldChg>
     </pc:docChg>
   </pc:docChgLst>
@@ -474,6 +530,138 @@
             <ac:spMk id="3" creationId="{C999C599-B8CA-EE81-4840-2B23F0BFE06D}"/>
           </ac:spMkLst>
         </pc:spChg>
+      </pc:sldChg>
+    </pc:docChg>
+  </pc:docChgLst>
+  <pc:docChgLst>
+    <pc:chgData name="Oscar Glaister" userId="e6f16566-ea0c-4df4-8ebb-5765e438d351" providerId="ADAL" clId="{252C8254-46BD-4598-B285-E6EC582ADBF0}"/>
+    <pc:docChg chg="custSel addSld modSld">
+      <pc:chgData name="Oscar Glaister" userId="e6f16566-ea0c-4df4-8ebb-5765e438d351" providerId="ADAL" clId="{252C8254-46BD-4598-B285-E6EC582ADBF0}" dt="2026-08-13T22:54:53.507" v="35" actId="207"/>
+      <pc:docMkLst>
+        <pc:docMk/>
+      </pc:docMkLst>
+      <pc:sldChg chg="modSp mod">
+        <pc:chgData name="Oscar Glaister" userId="e6f16566-ea0c-4df4-8ebb-5765e438d351" providerId="ADAL" clId="{252C8254-46BD-4598-B285-E6EC582ADBF0}" dt="2026-08-13T22:53:44.218" v="33" actId="20577"/>
+        <pc:sldMkLst>
+          <pc:docMk/>
+          <pc:sldMk cId="1388250180" sldId="256"/>
+        </pc:sldMkLst>
+        <pc:spChg chg="mod">
+          <ac:chgData name="Oscar Glaister" userId="e6f16566-ea0c-4df4-8ebb-5765e438d351" providerId="ADAL" clId="{252C8254-46BD-4598-B285-E6EC582ADBF0}" dt="2026-08-11T02:48:30.023" v="1"/>
+          <ac:spMkLst>
+            <pc:docMk/>
+            <pc:sldMk cId="1388250180" sldId="256"/>
+            <ac:spMk id="2" creationId="{6DB75583-8F97-757A-3D9C-B459F698BB0E}"/>
+          </ac:spMkLst>
+        </pc:spChg>
+        <pc:spChg chg="mod">
+          <ac:chgData name="Oscar Glaister" userId="e6f16566-ea0c-4df4-8ebb-5765e438d351" providerId="ADAL" clId="{252C8254-46BD-4598-B285-E6EC582ADBF0}" dt="2026-08-13T22:53:44.218" v="33" actId="20577"/>
+          <ac:spMkLst>
+            <pc:docMk/>
+            <pc:sldMk cId="1388250180" sldId="256"/>
+            <ac:spMk id="3" creationId="{D6761061-F77B-C890-18C0-41105821CB02}"/>
+          </ac:spMkLst>
+        </pc:spChg>
+      </pc:sldChg>
+      <pc:sldChg chg="add setBg">
+        <pc:chgData name="Oscar Glaister" userId="e6f16566-ea0c-4df4-8ebb-5765e438d351" providerId="ADAL" clId="{252C8254-46BD-4598-B285-E6EC582ADBF0}" dt="2026-08-11T02:47:52.888" v="0"/>
+        <pc:sldMkLst>
+          <pc:docMk/>
+          <pc:sldMk cId="2121627959" sldId="257"/>
+        </pc:sldMkLst>
+      </pc:sldChg>
+      <pc:sldChg chg="modSp add">
+        <pc:chgData name="Oscar Glaister" userId="e6f16566-ea0c-4df4-8ebb-5765e438d351" providerId="ADAL" clId="{252C8254-46BD-4598-B285-E6EC582ADBF0}" dt="2026-08-11T02:48:30.023" v="1"/>
+        <pc:sldMkLst>
+          <pc:docMk/>
+          <pc:sldMk cId="2596983293" sldId="258"/>
+        </pc:sldMkLst>
+        <pc:spChg chg="mod">
+          <ac:chgData name="Oscar Glaister" userId="e6f16566-ea0c-4df4-8ebb-5765e438d351" providerId="ADAL" clId="{252C8254-46BD-4598-B285-E6EC582ADBF0}" dt="2026-08-11T02:48:30.023" v="1"/>
+          <ac:spMkLst>
+            <pc:docMk/>
+            <pc:sldMk cId="2596983293" sldId="258"/>
+            <ac:spMk id="2" creationId="{2AA11678-84F7-92FE-126E-23DE7FB8F1F9}"/>
+          </ac:spMkLst>
+        </pc:spChg>
+      </pc:sldChg>
+      <pc:sldChg chg="add">
+        <pc:chgData name="Oscar Glaister" userId="e6f16566-ea0c-4df4-8ebb-5765e438d351" providerId="ADAL" clId="{252C8254-46BD-4598-B285-E6EC582ADBF0}" dt="2026-08-11T02:47:52.888" v="0"/>
+        <pc:sldMkLst>
+          <pc:docMk/>
+          <pc:sldMk cId="3022893737" sldId="259"/>
+        </pc:sldMkLst>
+      </pc:sldChg>
+      <pc:sldChg chg="delSp add setBg">
+        <pc:chgData name="Oscar Glaister" userId="e6f16566-ea0c-4df4-8ebb-5765e438d351" providerId="ADAL" clId="{252C8254-46BD-4598-B285-E6EC582ADBF0}" dt="2026-08-11T02:47:52.888" v="0"/>
+        <pc:sldMkLst>
+          <pc:docMk/>
+          <pc:sldMk cId="2897359550" sldId="260"/>
+        </pc:sldMkLst>
+      </pc:sldChg>
+      <pc:sldChg chg="delSp modSp add mod setBg">
+        <pc:chgData name="Oscar Glaister" userId="e6f16566-ea0c-4df4-8ebb-5765e438d351" providerId="ADAL" clId="{252C8254-46BD-4598-B285-E6EC582ADBF0}" dt="2026-08-13T22:54:53.507" v="35" actId="207"/>
+        <pc:sldMkLst>
+          <pc:docMk/>
+          <pc:sldMk cId="4094592511" sldId="261"/>
+        </pc:sldMkLst>
+        <pc:spChg chg="mod">
+          <ac:chgData name="Oscar Glaister" userId="e6f16566-ea0c-4df4-8ebb-5765e438d351" providerId="ADAL" clId="{252C8254-46BD-4598-B285-E6EC582ADBF0}" dt="2026-08-13T22:54:53.507" v="35" actId="207"/>
+          <ac:spMkLst>
+            <pc:docMk/>
+            <pc:sldMk cId="4094592511" sldId="261"/>
+            <ac:spMk id="8" creationId="{E5BE8265-4C5F-67BB-6A15-D068CDB22A3C}"/>
+          </ac:spMkLst>
+        </pc:spChg>
+      </pc:sldChg>
+      <pc:sldChg chg="add">
+        <pc:chgData name="Oscar Glaister" userId="e6f16566-ea0c-4df4-8ebb-5765e438d351" providerId="ADAL" clId="{252C8254-46BD-4598-B285-E6EC582ADBF0}" dt="2026-08-11T02:48:55.025" v="2"/>
+        <pc:sldMkLst>
+          <pc:docMk/>
+          <pc:sldMk cId="591232533" sldId="262"/>
+        </pc:sldMkLst>
+      </pc:sldChg>
+      <pc:sldChg chg="add">
+        <pc:chgData name="Oscar Glaister" userId="e6f16566-ea0c-4df4-8ebb-5765e438d351" providerId="ADAL" clId="{252C8254-46BD-4598-B285-E6EC582ADBF0}" dt="2026-08-11T02:48:55.025" v="2"/>
+        <pc:sldMkLst>
+          <pc:docMk/>
+          <pc:sldMk cId="1378381461" sldId="263"/>
+        </pc:sldMkLst>
+      </pc:sldChg>
+      <pc:sldChg chg="add">
+        <pc:chgData name="Oscar Glaister" userId="e6f16566-ea0c-4df4-8ebb-5765e438d351" providerId="ADAL" clId="{252C8254-46BD-4598-B285-E6EC582ADBF0}" dt="2026-08-11T02:48:55.025" v="2"/>
+        <pc:sldMkLst>
+          <pc:docMk/>
+          <pc:sldMk cId="1366860525" sldId="264"/>
+        </pc:sldMkLst>
+      </pc:sldChg>
+      <pc:sldChg chg="add">
+        <pc:chgData name="Oscar Glaister" userId="e6f16566-ea0c-4df4-8ebb-5765e438d351" providerId="ADAL" clId="{252C8254-46BD-4598-B285-E6EC582ADBF0}" dt="2026-08-11T02:48:55.025" v="2"/>
+        <pc:sldMkLst>
+          <pc:docMk/>
+          <pc:sldMk cId="3107933604" sldId="265"/>
+        </pc:sldMkLst>
+      </pc:sldChg>
+      <pc:sldChg chg="add">
+        <pc:chgData name="Oscar Glaister" userId="e6f16566-ea0c-4df4-8ebb-5765e438d351" providerId="ADAL" clId="{252C8254-46BD-4598-B285-E6EC582ADBF0}" dt="2026-08-11T02:48:55.025" v="2"/>
+        <pc:sldMkLst>
+          <pc:docMk/>
+          <pc:sldMk cId="2853855006" sldId="266"/>
+        </pc:sldMkLst>
+      </pc:sldChg>
+      <pc:sldChg chg="add">
+        <pc:chgData name="Oscar Glaister" userId="e6f16566-ea0c-4df4-8ebb-5765e438d351" providerId="ADAL" clId="{252C8254-46BD-4598-B285-E6EC582ADBF0}" dt="2026-08-11T02:48:55.025" v="2"/>
+        <pc:sldMkLst>
+          <pc:docMk/>
+          <pc:sldMk cId="1380321696" sldId="267"/>
+        </pc:sldMkLst>
+      </pc:sldChg>
+      <pc:sldChg chg="add">
+        <pc:chgData name="Oscar Glaister" userId="e6f16566-ea0c-4df4-8ebb-5765e438d351" providerId="ADAL" clId="{252C8254-46BD-4598-B285-E6EC582ADBF0}" dt="2026-08-11T02:48:55.025" v="2"/>
+        <pc:sldMkLst>
+          <pc:docMk/>
+          <pc:sldMk cId="1318932797" sldId="268"/>
+        </pc:sldMkLst>
       </pc:sldChg>
     </pc:docChg>
   </pc:docChgLst>
@@ -658,138 +846,6 @@
             <ac:inkMk id="22" creationId="{E611C550-EA3F-9BAD-F9E5-873007153A83}"/>
           </ac:inkMkLst>
         </pc:inkChg>
-      </pc:sldChg>
-    </pc:docChg>
-  </pc:docChgLst>
-  <pc:docChgLst>
-    <pc:chgData name="Oscar Glaister" userId="e6f16566-ea0c-4df4-8ebb-5765e438d351" providerId="ADAL" clId="{252C8254-46BD-4598-B285-E6EC582ADBF0}"/>
-    <pc:docChg chg="custSel addSld modSld">
-      <pc:chgData name="Oscar Glaister" userId="e6f16566-ea0c-4df4-8ebb-5765e438d351" providerId="ADAL" clId="{252C8254-46BD-4598-B285-E6EC582ADBF0}" dt="2026-08-13T22:54:53.507" v="35" actId="207"/>
-      <pc:docMkLst>
-        <pc:docMk/>
-      </pc:docMkLst>
-      <pc:sldChg chg="modSp mod">
-        <pc:chgData name="Oscar Glaister" userId="e6f16566-ea0c-4df4-8ebb-5765e438d351" providerId="ADAL" clId="{252C8254-46BD-4598-B285-E6EC582ADBF0}" dt="2026-08-13T22:53:44.218" v="33" actId="20577"/>
-        <pc:sldMkLst>
-          <pc:docMk/>
-          <pc:sldMk cId="1388250180" sldId="256"/>
-        </pc:sldMkLst>
-        <pc:spChg chg="mod">
-          <ac:chgData name="Oscar Glaister" userId="e6f16566-ea0c-4df4-8ebb-5765e438d351" providerId="ADAL" clId="{252C8254-46BD-4598-B285-E6EC582ADBF0}" dt="2026-08-11T02:48:30.023" v="1"/>
-          <ac:spMkLst>
-            <pc:docMk/>
-            <pc:sldMk cId="1388250180" sldId="256"/>
-            <ac:spMk id="2" creationId="{6DB75583-8F97-757A-3D9C-B459F698BB0E}"/>
-          </ac:spMkLst>
-        </pc:spChg>
-        <pc:spChg chg="mod">
-          <ac:chgData name="Oscar Glaister" userId="e6f16566-ea0c-4df4-8ebb-5765e438d351" providerId="ADAL" clId="{252C8254-46BD-4598-B285-E6EC582ADBF0}" dt="2026-08-13T22:53:44.218" v="33" actId="20577"/>
-          <ac:spMkLst>
-            <pc:docMk/>
-            <pc:sldMk cId="1388250180" sldId="256"/>
-            <ac:spMk id="3" creationId="{D6761061-F77B-C890-18C0-41105821CB02}"/>
-          </ac:spMkLst>
-        </pc:spChg>
-      </pc:sldChg>
-      <pc:sldChg chg="add setBg">
-        <pc:chgData name="Oscar Glaister" userId="e6f16566-ea0c-4df4-8ebb-5765e438d351" providerId="ADAL" clId="{252C8254-46BD-4598-B285-E6EC582ADBF0}" dt="2026-08-11T02:47:52.888" v="0"/>
-        <pc:sldMkLst>
-          <pc:docMk/>
-          <pc:sldMk cId="2121627959" sldId="257"/>
-        </pc:sldMkLst>
-      </pc:sldChg>
-      <pc:sldChg chg="modSp add">
-        <pc:chgData name="Oscar Glaister" userId="e6f16566-ea0c-4df4-8ebb-5765e438d351" providerId="ADAL" clId="{252C8254-46BD-4598-B285-E6EC582ADBF0}" dt="2026-08-11T02:48:30.023" v="1"/>
-        <pc:sldMkLst>
-          <pc:docMk/>
-          <pc:sldMk cId="2596983293" sldId="258"/>
-        </pc:sldMkLst>
-        <pc:spChg chg="mod">
-          <ac:chgData name="Oscar Glaister" userId="e6f16566-ea0c-4df4-8ebb-5765e438d351" providerId="ADAL" clId="{252C8254-46BD-4598-B285-E6EC582ADBF0}" dt="2026-08-11T02:48:30.023" v="1"/>
-          <ac:spMkLst>
-            <pc:docMk/>
-            <pc:sldMk cId="2596983293" sldId="258"/>
-            <ac:spMk id="2" creationId="{2AA11678-84F7-92FE-126E-23DE7FB8F1F9}"/>
-          </ac:spMkLst>
-        </pc:spChg>
-      </pc:sldChg>
-      <pc:sldChg chg="add">
-        <pc:chgData name="Oscar Glaister" userId="e6f16566-ea0c-4df4-8ebb-5765e438d351" providerId="ADAL" clId="{252C8254-46BD-4598-B285-E6EC582ADBF0}" dt="2026-08-11T02:47:52.888" v="0"/>
-        <pc:sldMkLst>
-          <pc:docMk/>
-          <pc:sldMk cId="3022893737" sldId="259"/>
-        </pc:sldMkLst>
-      </pc:sldChg>
-      <pc:sldChg chg="delSp add setBg">
-        <pc:chgData name="Oscar Glaister" userId="e6f16566-ea0c-4df4-8ebb-5765e438d351" providerId="ADAL" clId="{252C8254-46BD-4598-B285-E6EC582ADBF0}" dt="2026-08-11T02:47:52.888" v="0"/>
-        <pc:sldMkLst>
-          <pc:docMk/>
-          <pc:sldMk cId="2897359550" sldId="260"/>
-        </pc:sldMkLst>
-      </pc:sldChg>
-      <pc:sldChg chg="delSp modSp add mod setBg">
-        <pc:chgData name="Oscar Glaister" userId="e6f16566-ea0c-4df4-8ebb-5765e438d351" providerId="ADAL" clId="{252C8254-46BD-4598-B285-E6EC582ADBF0}" dt="2026-08-13T22:54:53.507" v="35" actId="207"/>
-        <pc:sldMkLst>
-          <pc:docMk/>
-          <pc:sldMk cId="4094592511" sldId="261"/>
-        </pc:sldMkLst>
-        <pc:spChg chg="mod">
-          <ac:chgData name="Oscar Glaister" userId="e6f16566-ea0c-4df4-8ebb-5765e438d351" providerId="ADAL" clId="{252C8254-46BD-4598-B285-E6EC582ADBF0}" dt="2026-08-13T22:54:53.507" v="35" actId="207"/>
-          <ac:spMkLst>
-            <pc:docMk/>
-            <pc:sldMk cId="4094592511" sldId="261"/>
-            <ac:spMk id="8" creationId="{E5BE8265-4C5F-67BB-6A15-D068CDB22A3C}"/>
-          </ac:spMkLst>
-        </pc:spChg>
-      </pc:sldChg>
-      <pc:sldChg chg="add">
-        <pc:chgData name="Oscar Glaister" userId="e6f16566-ea0c-4df4-8ebb-5765e438d351" providerId="ADAL" clId="{252C8254-46BD-4598-B285-E6EC582ADBF0}" dt="2026-08-11T02:48:55.025" v="2"/>
-        <pc:sldMkLst>
-          <pc:docMk/>
-          <pc:sldMk cId="591232533" sldId="262"/>
-        </pc:sldMkLst>
-      </pc:sldChg>
-      <pc:sldChg chg="add">
-        <pc:chgData name="Oscar Glaister" userId="e6f16566-ea0c-4df4-8ebb-5765e438d351" providerId="ADAL" clId="{252C8254-46BD-4598-B285-E6EC582ADBF0}" dt="2026-08-11T02:48:55.025" v="2"/>
-        <pc:sldMkLst>
-          <pc:docMk/>
-          <pc:sldMk cId="1378381461" sldId="263"/>
-        </pc:sldMkLst>
-      </pc:sldChg>
-      <pc:sldChg chg="add">
-        <pc:chgData name="Oscar Glaister" userId="e6f16566-ea0c-4df4-8ebb-5765e438d351" providerId="ADAL" clId="{252C8254-46BD-4598-B285-E6EC582ADBF0}" dt="2026-08-11T02:48:55.025" v="2"/>
-        <pc:sldMkLst>
-          <pc:docMk/>
-          <pc:sldMk cId="1366860525" sldId="264"/>
-        </pc:sldMkLst>
-      </pc:sldChg>
-      <pc:sldChg chg="add">
-        <pc:chgData name="Oscar Glaister" userId="e6f16566-ea0c-4df4-8ebb-5765e438d351" providerId="ADAL" clId="{252C8254-46BD-4598-B285-E6EC582ADBF0}" dt="2026-08-11T02:48:55.025" v="2"/>
-        <pc:sldMkLst>
-          <pc:docMk/>
-          <pc:sldMk cId="3107933604" sldId="265"/>
-        </pc:sldMkLst>
-      </pc:sldChg>
-      <pc:sldChg chg="add">
-        <pc:chgData name="Oscar Glaister" userId="e6f16566-ea0c-4df4-8ebb-5765e438d351" providerId="ADAL" clId="{252C8254-46BD-4598-B285-E6EC582ADBF0}" dt="2026-08-11T02:48:55.025" v="2"/>
-        <pc:sldMkLst>
-          <pc:docMk/>
-          <pc:sldMk cId="2853855006" sldId="266"/>
-        </pc:sldMkLst>
-      </pc:sldChg>
-      <pc:sldChg chg="add">
-        <pc:chgData name="Oscar Glaister" userId="e6f16566-ea0c-4df4-8ebb-5765e438d351" providerId="ADAL" clId="{252C8254-46BD-4598-B285-E6EC582ADBF0}" dt="2026-08-11T02:48:55.025" v="2"/>
-        <pc:sldMkLst>
-          <pc:docMk/>
-          <pc:sldMk cId="1380321696" sldId="267"/>
-        </pc:sldMkLst>
-      </pc:sldChg>
-      <pc:sldChg chg="add">
-        <pc:chgData name="Oscar Glaister" userId="e6f16566-ea0c-4df4-8ebb-5765e438d351" providerId="ADAL" clId="{252C8254-46BD-4598-B285-E6EC582ADBF0}" dt="2026-08-11T02:48:55.025" v="2"/>
-        <pc:sldMkLst>
-          <pc:docMk/>
-          <pc:sldMk cId="1318932797" sldId="268"/>
-        </pc:sldMkLst>
       </pc:sldChg>
     </pc:docChg>
   </pc:docChgLst>
@@ -1219,14 +1275,14 @@
           <inkml:channelProperty channel="OE" name="resolution" value="1000" units="1/deg"/>
         </inkml:channelProperties>
       </inkml:inkSource>
-      <inkml:timestamp xml:id="ts0" timeString="2026-08-13T23:25:20.529"/>
+      <inkml:timestamp xml:id="ts0" timeString="2026-08-13T23:29:35.699"/>
     </inkml:context>
     <inkml:brush xml:id="br0">
       <inkml:brushProperty name="width" value="0.1" units="cm"/>
       <inkml:brushProperty name="height" value="0.1" units="cm"/>
     </inkml:brush>
   </inkml:definitions>
-  <inkml:trace contextRef="#ctx0" brushRef="#br0">17517 7862 16383 0 0,'-2'0'0'0'0,"-13"0"0"0"0,-70-17 0 0 0,-149-30 0 0 0,-224-33 0 0 0,-269-34 0 0 0,-245-25 0 0 0,-175-15 0 0 0,-84-4 0 0 0,20 6 0 0 0,96 13 0 0 0,115 11 0 0 0,120 5 0 0 0,111 2 0 0 0,105-4 0 0 0,98-3 0 0 0,99 2 0 0 0,92 9 0 0 0,79 10 0 0 0,66 12 0 0 0,53 13 0 0 0,39 13 0 0 0,28 9 0 0 0,21 10 0 0 0,16 10 0 0 0,14 9 0 0 0,13 9 0 0 0,11 8 0 0 0,10 7 0 0 0,9 4 0 0 0,12 4 0 0 0,14 4 0 0 0,11 5-16383 0 0,3 0 16383 0 0</inkml:trace>
+  <inkml:trace contextRef="#ctx0" brushRef="#br0">12673 4912 16383 0 0,'0'0'0'0'0</inkml:trace>
 </inkml:ink>
 </file>
 
@@ -1250,14 +1306,14 @@
           <inkml:channelProperty channel="OE" name="resolution" value="1000" units="1/deg"/>
         </inkml:channelProperties>
       </inkml:inkSource>
-      <inkml:timestamp xml:id="ts0" timeString="2026-08-13T23:25:20.531"/>
+      <inkml:timestamp xml:id="ts0" timeString="2026-08-13T23:29:35.700"/>
     </inkml:context>
     <inkml:brush xml:id="br0">
       <inkml:brushProperty name="width" value="0.1" units="cm"/>
       <inkml:brushProperty name="height" value="0.1" units="cm"/>
     </inkml:brush>
   </inkml:definitions>
-  <inkml:trace contextRef="#ctx0" brushRef="#br0">18207 9719 16383 0 0,'-1'0'0'0'0,"-5"0"0"0"0,-16-2 0 0 0,-22-6 0 0 0,-21-10 0 0 0,-15-7 0 0 0,-6-1 0 0 0,2 4 0 0 0,7 5 0 0 0,5 5 0 0 0,2 5 0 0 0,-1 4 0 0 0,-1 2 0 0 0,-5 4 0 0 0,-5 4 0 0 0,-11 3 0 0 0,-14-1 0 0 0,-15-1 0 0 0,-15-3 0 0 0,-11-2 0 0 0,-5-1 0 0 0,-3-6 0 0 0,0-7 0 0 0,2-9 0 0 0,4-8 0 0 0,8-6 0 0 0,11-4 0 0 0,16-1 0 0 0,17 1 0 0 0,13 0 0 0 0,11 1 0 0 0,8 2 0 0 0,7 1 0 0 0,7 0 0 0 0,6 2 0 0 0,4 0 0 0 0,3-1 0 0 0,3 0 0 0 0,2 1 0 0 0,2 1 0 0 0,2 2 0 0 0,1 3 0 0 0,1 4 0 0 0,2 3 0 0 0,2 3 0 0 0,0 3 0 0 0,-1 0 0 0 0,0 2 0 0 0,1 0 0 0 0,-1 2 0 0 0,-1 0 0 0 0,0 2 0 0 0,-2 1 0 0 0,-1 0 0 0 0,-3 0 0 0 0,-6 1 0 0 0,-8 0 0 0 0,-10-1 0 0 0,-10-1 0 0 0,-9-2 0 0 0,-4-2 0 0 0,-1 0 0 0 0,-1-2 0 0 0,1-1 0 0 0,0-2 0 0 0,1 0 0 0 0,3 1 0 0 0,4 2 0 0 0,2 1 0 0 0,4 3 0 0 0,2 0 0 0 0,2 1 0 0 0,0 1 0 0 0,-1-1 0 0 0,-4-1 0 0 0,-3-2 0 0 0,-3 0 0 0 0,-1-1 0 0 0,-3 1 0 0 0,-5 0 0 0 0,-6 1 0 0 0,-7-1 0 0 0,-7 2 0 0 0,-9 0 0 0 0,-10 1 0 0 0,-12 1 0 0 0,-10 2 0 0 0,-8 2 0 0 0,-12-1 0 0 0,-10 0 0 0 0,-13 0 0 0 0,-17 0 0 0 0,-15-4 0 0 0,-19-1 0 0 0,-24-1 0 0 0,-26 0 0 0 0,-14 2 0 0 0,3 0 0 0 0,14 1 0 0 0,21 0 0 0 0,27 0 0 0 0,32 1 0 0 0,30 1 0 0 0,31 2 0 0 0,26-1 0 0 0,20 0 0 0 0,15-2 0 0 0,14 1 0 0 0,9 1 0 0 0,11 1 0 0 0,7 2 0 0 0,9 0 0 0 0,4 1 0 0 0,5 0 0 0 0,1 0 0 0 0,2 0 0 0 0,-1 0 0 0 0,-3 0 0 0 0,-3 1 0 0 0,-4-1 0 0 0,-4 0 0 0 0,-2 0 0 0 0,0 0 0 0 0,3 0 0 0 0,4 0 0 0 0,6-2 0 0 0,6-5 0 0 0,7-3 0 0 0</inkml:trace>
+  <inkml:trace contextRef="#ctx0" brushRef="#br0">16651 5074 16383 0 0,'0'0'0'0'0</inkml:trace>
 </inkml:ink>
 </file>
 
@@ -1281,14 +1337,14 @@
           <inkml:channelProperty channel="OE" name="resolution" value="1000" units="1/deg"/>
         </inkml:channelProperties>
       </inkml:inkSource>
-      <inkml:timestamp xml:id="ts0" timeString="2026-08-13T23:25:20.533"/>
+      <inkml:timestamp xml:id="ts0" timeString="2026-08-13T23:29:35.701"/>
     </inkml:context>
     <inkml:brush xml:id="br0">
       <inkml:brushProperty name="width" value="0.1" units="cm"/>
       <inkml:brushProperty name="height" value="0.1" units="cm"/>
     </inkml:brush>
   </inkml:definitions>
-  <inkml:trace contextRef="#ctx0" brushRef="#br0">18075 10471 16383 0 0,'-2'0'0'0'0,"-8"0"0"0"0,-15 1 0 0 0,-31 6 0 0 0,-45 13 0 0 0,-41 14 0 0 0,-41 14 0 0 0,-36 16 0 0 0,-21 11 0 0 0,-2 5 0 0 0,9-1 0 0 0,9-6 0 0 0,12-7 0 0 0,15-8 0 0 0,18-10 0 0 0,18-13 0 0 0,18-9 0 0 0,16-7 0 0 0,14-6 0 0 0,10 0 0 0 0,7 0 0 0 0,3 0 0 0 0,-4-1 0 0 0,-9-1 0 0 0,-12-3 0 0 0,-12-2 0 0 0,-14-3 0 0 0,-15-1 0 0 0,-15-3 0 0 0,-11-5 0 0 0,-11-11 0 0 0,-8-11 0 0 0,-2-9 0 0 0,4-7 0 0 0,8-3 0 0 0,14-1 0 0 0,18 1 0 0 0,16 3 0 0 0,15 5 0 0 0,16 5 0 0 0,12 5 0 0 0,8 5 0 0 0,3 5 0 0 0,0 3 0 0 0,-3-2 0 0 0,-3-2 0 0 0,0-2 0 0 0,-1-3 0 0 0,2-1 0 0 0,-1-1 0 0 0,-3 0 0 0 0,-7 1 0 0 0,-9-2 0 0 0,-9-2 0 0 0,-5-2 0 0 0,-1-1 0 0 0,-2-4 0 0 0,0-4 0 0 0,-2-5 0 0 0,-3-8 0 0 0,-6-7 0 0 0,-7-7 0 0 0,-2-5 0 0 0,1-1 0 0 0,2 1 0 0 0,4 2 0 0 0,7-1 0 0 0,8-2 0 0 0,7-3 0 0 0,10-4 0 0 0,8-3 0 0 0,11 0 0 0 0,8 3 0 0 0,9 5 0 0 0,8 7 0 0 0,4 11 0 0 0,5 9 0 0 0,5 10 0 0 0,5 7 0 0 0,5 8 0 0 0,5 2 0 0 0,4 3 0 0 0,4 2 0 0 0,5 0 0 0 0,2 1 0 0 0,3 0 0 0 0,1 0 0 0 0,2 0 0 0 0,-1 0 0 0 0,2-2 0 0 0,-1 0 0 0 0,-1 1 0 0 0,2 0 0 0 0,0 1 0 0 0,-3-3 0 0 0,-3-3 0 0 0,-2-2 0 0 0,-1 0 0 0 0,1-1 0 0 0,2 1 0 0 0,0 1 0 0 0,3 1 0 0 0,1 2 0 0 0,2 0 0 0 0,4 2 0 0 0,2 1 0 0 0,2 4 0 0 0,3 2 0 0 0,3 3 0 0 0,1 0 0 0 0,0 2 0 0 0,2-1 0 0 0,1 0 0 0 0,0-1 0 0 0,2 0 0 0 0,0 1 0 0 0,0 1 0 0 0</inkml:trace>
+  <inkml:trace contextRef="#ctx0" brushRef="#br0">16986 4495 16383 0 0,'2'4'0'0'0,"1"1"0"0"0</inkml:trace>
 </inkml:ink>
 </file>
 
@@ -1312,14 +1368,14 @@
           <inkml:channelProperty channel="OE" name="resolution" value="1000" units="1/deg"/>
         </inkml:channelProperties>
       </inkml:inkSource>
-      <inkml:timestamp xml:id="ts0" timeString="2026-08-13T23:25:20.534"/>
+      <inkml:timestamp xml:id="ts0" timeString="2026-08-13T23:29:35.720"/>
     </inkml:context>
     <inkml:brush xml:id="br0">
       <inkml:brushProperty name="width" value="0.1" units="cm"/>
       <inkml:brushProperty name="height" value="0.1" units="cm"/>
     </inkml:brush>
   </inkml:definitions>
-  <inkml:trace contextRef="#ctx0" brushRef="#br0">12197 9597 16383 0 0,'0'0'0'0'0,"-1"2"0"0"0,-9 1 0 0 0,-26-1 0 0 0,-45-1 0 0 0,-54-1 0 0 0,-51-4 0 0 0,-39-10 0 0 0,-24-10 0 0 0,-14-12 0 0 0,-5-8 0 0 0,3-3 0 0 0,7 0 0 0 0,5 2 0 0 0,12 4 0 0 0,16 6 0 0 0,14 2 0 0 0,15 3 0 0 0,15 3 0 0 0,16 1 0 0 0,13 1 0 0 0,11 2 0 0 0,10 0 0 0 0,7 1 0 0 0,7-2 0 0 0,6-1 0 0 0,6-1 0 0 0,5-2 0 0 0,8-2 0 0 0,8-4 0 0 0,10-1 0 0 0,9-2 0 0 0,10 1 0 0 0,9 2 0 0 0,7 2 0 0 0,4 1 0 0 0,5 4 0 0 0,2 1 0 0 0,3 3 0 0 0,2 2 0 0 0,2 3 0 0 0,3 4 0 0 0,2 2 0 0 0,3 2 0 0 0,0 3 0 0 0,1 0 0 0 0,0 1 0 0 0,1 0 0 0 0,1 1 0 0 0,3-2 0 0 0,2 0 0 0 0,1-2 0 0 0,1-1 0 0 0,0 2 0 0 0,0 0 0 0 0,0 1 0 0 0,-1 0 0 0 0,-2-3 0 0 0,0-4 0 0 0,-1-3 0 0 0,0-2 0 0 0,2 0 0 0 0,1 3 0 0 0</inkml:trace>
+  <inkml:trace contextRef="#ctx0" brushRef="#br0">13735 7800 16383 0 0,'-1'0'0'0'0,"-10"0"0"0"0,-49-16 0 0 0,-107-30 0 0 0,-160-32 0 0 0,-192-33 0 0 0,-175-24 0 0 0,-125-15 0 0 0,-60-5 0 0 0,15 7 0 0 0,67 13 0 0 0,84 10 0 0 0,84 5 0 0 0,81 2 0 0 0,73-4 0 0 0,71-3 0 0 0,71 3 0 0 0,66 7 0 0 0,55 11 0 0 0,48 11 0 0 0,37 14 0 0 0,29 11 0 0 0,20 10 0 0 0,14 9 0 0 0,12 10 0 0 0,10 9 0 0 0,9 8 0 0 0,8 9 0 0 0,7 6 0 0 0,7 4 0 0 0,8 4 0 0 0,10 4 0 0 0,8 4-16383 0 0,2 1 16383 0 0</inkml:trace>
 </inkml:ink>
 </file>
 
@@ -1343,14 +1399,14 @@
           <inkml:channelProperty channel="OE" name="resolution" value="1000" units="1/deg"/>
         </inkml:channelProperties>
       </inkml:inkSource>
-      <inkml:timestamp xml:id="ts0" timeString="2026-08-13T23:25:20.535"/>
+      <inkml:timestamp xml:id="ts0" timeString="2026-08-13T23:29:35.721"/>
     </inkml:context>
     <inkml:brush xml:id="br0">
       <inkml:brushProperty name="width" value="0.1" units="cm"/>
       <inkml:brushProperty name="height" value="0.1" units="cm"/>
     </inkml:brush>
   </inkml:definitions>
-  <inkml:trace contextRef="#ctx0" brushRef="#br0">12021 10588 16383 0 0,'0'0'0'0'0,"-2"2"0"0"0,-13-7 0 0 0,-22-13 0 0 0,-28-19 0 0 0,-28-22 0 0 0,-24-19 0 0 0,-15-12 0 0 0,-4-6 0 0 0,4 3 0 0 0,11 9 0 0 0,14 12 0 0 0,15 13 0 0 0,14 13 0 0 0,12 9 0 0 0,9 8 0 0 0,6 4 0 0 0,5 3 0 0 0,5 3 0 0 0,3 1 0 0 0,3 1 0 0 0,2-1 0 0 0,2 1 0 0 0,0-1 0 0 0,-1-1 0 0 0,-1 0 0 0 0,-3 1 0 0 0,-1 1 0 0 0,-1 0 0 0 0,0 2 0 0 0,-2 3 0 0 0,0 1 0 0 0,-3-1 0 0 0,-2-1 0 0 0,-1 0 0 0 0,-2-3 0 0 0,0 0 0 0 0,-1 0 0 0 0,1 0 0 0 0,3 1 0 0 0,2 2 0 0 0,4-1 0 0 0,2-1 0 0 0,5 1 0 0 0,4 1 0 0 0,2 0 0 0 0,3 0 0 0 0,3 2 0 0 0,1 1 0 0 0,0 1 0 0 0,0-1 0 0 0,-1-1 0 0 0,1 0 0 0 0,-1 0 0 0 0,-2-3 0 0 0,-1-1 0 0 0,-1-2 0 0 0,-3-1 0 0 0,-1-2 0 0 0,-2 0 0 0 0,-3 0 0 0 0,-1 1 0 0 0,-5 1 0 0 0,-2 0 0 0 0,-3 0 0 0 0,-3 1 0 0 0,0-1 0 0 0,-1 0 0 0 0,1 0 0 0 0,0-2 0 0 0,1-1 0 0 0,0-2 0 0 0,1 0 0 0 0,1 1 0 0 0,2 2 0 0 0,1 2 0 0 0,-1 1 0 0 0,-1 2 0 0 0,-3 1 0 0 0,-2 2 0 0 0,-2 1 0 0 0,3 1 0 0 0,-7 1 0 0 0,-18-1 0 0 0,-17-3 0 0 0,-16-3 0 0 0,-10-3 0 0 0,-3-3 0 0 0,6 1 0 0 0,12 3 0 0 0,15 2 0 0 0,17 4 0 0 0,14 1 0 0 0,12 2 0 0 0,10 1 0 0 0,6 0 0 0 0,7 0 0 0 0,4 0 0 0 0,3-1 0 0 0,1-4 0 0 0,1-2 0 0 0,0-2 0 0 0,0-1 0 0 0,0 1 0 0 0,-1 0 0 0 0,2 3 0 0 0,0 2 0 0 0,2 2 0 0 0,0 3 0 0 0,0 2 0 0 0,0 1 0 0 0</inkml:trace>
+  <inkml:trace contextRef="#ctx0" brushRef="#br0">18207 9719 16383 0 0,'-1'0'0'0'0,"-5"0"0"0"0,-16-2 0 0 0,-22-6 0 0 0,-21-10 0 0 0,-15-7 0 0 0,-6-1 0 0 0,2 4 0 0 0,7 5 0 0 0,5 5 0 0 0,2 5 0 0 0,-1 4 0 0 0,-1 2 0 0 0,-5 4 0 0 0,-5 4 0 0 0,-11 3 0 0 0,-14-1 0 0 0,-15-1 0 0 0,-15-3 0 0 0,-11-2 0 0 0,-5-1 0 0 0,-3-6 0 0 0,0-7 0 0 0,2-9 0 0 0,4-8 0 0 0,8-6 0 0 0,11-4 0 0 0,16-1 0 0 0,17 1 0 0 0,13 0 0 0 0,11 1 0 0 0,8 2 0 0 0,7 1 0 0 0,7 0 0 0 0,6 2 0 0 0,4 0 0 0 0,3-1 0 0 0,3 0 0 0 0,2 1 0 0 0,2 1 0 0 0,2 2 0 0 0,1 3 0 0 0,1 4 0 0 0,2 3 0 0 0,2 3 0 0 0,0 3 0 0 0,-1 0 0 0 0,0 2 0 0 0,1 0 0 0 0,-1 2 0 0 0,-1 0 0 0 0,0 2 0 0 0,-2 1 0 0 0,-1 0 0 0 0,-3 0 0 0 0,-6 1 0 0 0,-8 0 0 0 0,-10-1 0 0 0,-10-1 0 0 0,-9-2 0 0 0,-4-2 0 0 0,-1 0 0 0 0,-1-2 0 0 0,1-1 0 0 0,0-2 0 0 0,1 0 0 0 0,3 1 0 0 0,4 2 0 0 0,2 1 0 0 0,4 3 0 0 0,2 0 0 0 0,2 1 0 0 0,0 1 0 0 0,-1-1 0 0 0,-4-1 0 0 0,-3-2 0 0 0,-3 0 0 0 0,-1-1 0 0 0,-3 1 0 0 0,-5 0 0 0 0,-6 1 0 0 0,-7-1 0 0 0,-7 2 0 0 0,-9 0 0 0 0,-10 1 0 0 0,-12 1 0 0 0,-10 2 0 0 0,-8 2 0 0 0,-12-1 0 0 0,-10 0 0 0 0,-13 0 0 0 0,-17 0 0 0 0,-15-4 0 0 0,-19-1 0 0 0,-24-1 0 0 0,-26 0 0 0 0,-14 2 0 0 0,3 0 0 0 0,14 1 0 0 0,21 0 0 0 0,27 0 0 0 0,32 1 0 0 0,30 1 0 0 0,31 2 0 0 0,26-1 0 0 0,20 0 0 0 0,15-2 0 0 0,14 1 0 0 0,9 1 0 0 0,11 1 0 0 0,7 2 0 0 0,9 0 0 0 0,4 1 0 0 0,5 0 0 0 0,1 0 0 0 0,2 0 0 0 0,-1 0 0 0 0,-3 0 0 0 0,-3 1 0 0 0,-4-1 0 0 0,-4 0 0 0 0,-2 0 0 0 0,0 0 0 0 0,3 0 0 0 0,4 0 0 0 0,6-2 0 0 0,6-5 0 0 0,7-3 0 0 0</inkml:trace>
 </inkml:ink>
 </file>
 
@@ -1374,14 +1430,14 @@
           <inkml:channelProperty channel="OE" name="resolution" value="1000" units="1/deg"/>
         </inkml:channelProperties>
       </inkml:inkSource>
-      <inkml:timestamp xml:id="ts0" timeString="2026-08-13T23:25:20.536"/>
+      <inkml:timestamp xml:id="ts0" timeString="2026-08-13T23:29:35.722"/>
     </inkml:context>
     <inkml:brush xml:id="br0">
       <inkml:brushProperty name="width" value="0.1" units="cm"/>
       <inkml:brushProperty name="height" value="0.1" units="cm"/>
     </inkml:brush>
   </inkml:definitions>
-  <inkml:trace contextRef="#ctx0" brushRef="#br0">16027 11774 16383 0 0,'-4'0'0'0'0,"-18"0"0"0"0,-50 0 0 0 0,-94 0 0 0 0,-136 0 0 0 0,-174 0 0 0 0,-185 0 0 0 0,-167 0 0 0 0,-99 0 0 0 0,-26 0 0 0 0,17-2 0 0 0,47-13 0 0 0,67-23 0 0 0,88-23 0 0 0,93-20 0 0 0,95-11 0 0 0,93 0 0 0 0,81 9 0 0 0,66 9 0 0 0,51 11 0 0 0,39 12 0 0 0,26 10 0 0 0,19 7 0 0 0,15 5 0 0 0,15 4 0 0 0,18 3 0 0 0,22 4 0 0 0,22 5 0 0 0,19 3 0 0 0,18 4 0 0 0,15 2 0 0 0,13 2 0 0 0,13 1 0 0 0,6 1 0 0 0</inkml:trace>
+  <inkml:trace contextRef="#ctx0" brushRef="#br0">18075 10471 16383 0 0,'-2'0'0'0'0,"-8"0"0"0"0,-15 1 0 0 0,-31 6 0 0 0,-45 13 0 0 0,-41 14 0 0 0,-41 14 0 0 0,-36 16 0 0 0,-21 11 0 0 0,-2 5 0 0 0,9-1 0 0 0,9-6 0 0 0,12-7 0 0 0,15-8 0 0 0,18-10 0 0 0,18-13 0 0 0,18-9 0 0 0,16-7 0 0 0,14-6 0 0 0,10 0 0 0 0,7 0 0 0 0,3 0 0 0 0,-4-1 0 0 0,-9-1 0 0 0,-12-3 0 0 0,-12-2 0 0 0,-14-3 0 0 0,-15-1 0 0 0,-15-3 0 0 0,-11-5 0 0 0,-11-11 0 0 0,-8-11 0 0 0,-2-9 0 0 0,4-7 0 0 0,8-3 0 0 0,14-1 0 0 0,18 1 0 0 0,16 3 0 0 0,15 5 0 0 0,16 5 0 0 0,12 5 0 0 0,8 5 0 0 0,3 5 0 0 0,0 3 0 0 0,-3-2 0 0 0,-3-2 0 0 0,0-2 0 0 0,-1-3 0 0 0,2-1 0 0 0,-1-1 0 0 0,-3 0 0 0 0,-7 1 0 0 0,-9-2 0 0 0,-9-2 0 0 0,-5-2 0 0 0,-1-1 0 0 0,-2-4 0 0 0,0-4 0 0 0,-2-5 0 0 0,-3-8 0 0 0,-6-7 0 0 0,-7-7 0 0 0,-2-5 0 0 0,1-1 0 0 0,2 1 0 0 0,4 2 0 0 0,7-1 0 0 0,8-2 0 0 0,7-3 0 0 0,10-4 0 0 0,8-3 0 0 0,11 0 0 0 0,8 3 0 0 0,9 5 0 0 0,8 7 0 0 0,4 11 0 0 0,5 9 0 0 0,5 10 0 0 0,5 7 0 0 0,5 8 0 0 0,5 2 0 0 0,4 3 0 0 0,4 2 0 0 0,5 0 0 0 0,2 1 0 0 0,3 0 0 0 0,1 0 0 0 0,2 0 0 0 0,-1 0 0 0 0,2-2 0 0 0,-1 0 0 0 0,-1 1 0 0 0,2 0 0 0 0,0 1 0 0 0,-3-3 0 0 0,-3-3 0 0 0,-2-2 0 0 0,-1 0 0 0 0,1-1 0 0 0,2 1 0 0 0,0 1 0 0 0,3 1 0 0 0,1 2 0 0 0,2 0 0 0 0,4 2 0 0 0,2 1 0 0 0,2 4 0 0 0,3 2 0 0 0,3 3 0 0 0,1 0 0 0 0,0 2 0 0 0,2-1 0 0 0,1 0 0 0 0,0-1 0 0 0,2 0 0 0 0,0 1 0 0 0,0 1 0 0 0</inkml:trace>
 </inkml:ink>
 </file>
 
@@ -1405,14 +1461,14 @@
           <inkml:channelProperty channel="OE" name="resolution" value="1000" units="1/deg"/>
         </inkml:channelProperties>
       </inkml:inkSource>
-      <inkml:timestamp xml:id="ts0" timeString="2026-08-13T23:25:20.563"/>
+      <inkml:timestamp xml:id="ts0" timeString="2026-08-13T23:29:35.722"/>
     </inkml:context>
     <inkml:brush xml:id="br0">
       <inkml:brushProperty name="width" value="0.1" units="cm"/>
       <inkml:brushProperty name="height" value="0.1" units="cm"/>
     </inkml:brush>
   </inkml:definitions>
-  <inkml:trace contextRef="#ctx0" brushRef="#br0">12673 4912 16383 0 0,'0'0'0'0'0</inkml:trace>
+  <inkml:trace contextRef="#ctx0" brushRef="#br0">12197 9597 16383 0 0,'0'0'0'0'0,"-1"2"0"0"0,-9 1 0 0 0,-26-1 0 0 0,-45-1 0 0 0,-54-1 0 0 0,-51-4 0 0 0,-39-10 0 0 0,-24-10 0 0 0,-14-12 0 0 0,-5-8 0 0 0,3-3 0 0 0,7 0 0 0 0,5 2 0 0 0,12 4 0 0 0,16 6 0 0 0,14 2 0 0 0,15 3 0 0 0,15 3 0 0 0,16 1 0 0 0,13 1 0 0 0,11 2 0 0 0,10 0 0 0 0,7 1 0 0 0,7-2 0 0 0,6-1 0 0 0,6-1 0 0 0,5-2 0 0 0,8-2 0 0 0,8-4 0 0 0,10-1 0 0 0,9-2 0 0 0,10 1 0 0 0,9 2 0 0 0,7 2 0 0 0,4 1 0 0 0,5 4 0 0 0,2 1 0 0 0,3 3 0 0 0,2 2 0 0 0,2 3 0 0 0,3 4 0 0 0,2 2 0 0 0,3 2 0 0 0,0 3 0 0 0,1 0 0 0 0,0 1 0 0 0,1 0 0 0 0,1 1 0 0 0,3-2 0 0 0,2 0 0 0 0,1-2 0 0 0,1-1 0 0 0,0 2 0 0 0,0 0 0 0 0,0 1 0 0 0,-1 0 0 0 0,-2-3 0 0 0,0-4 0 0 0,-1-3 0 0 0,0-2 0 0 0,2 0 0 0 0,1 3 0 0 0</inkml:trace>
 </inkml:ink>
 </file>
 
@@ -1436,14 +1492,14 @@
           <inkml:channelProperty channel="OE" name="resolution" value="1000" units="1/deg"/>
         </inkml:channelProperties>
       </inkml:inkSource>
-      <inkml:timestamp xml:id="ts0" timeString="2026-08-13T23:25:20.564"/>
+      <inkml:timestamp xml:id="ts0" timeString="2026-08-13T23:29:35.723"/>
     </inkml:context>
     <inkml:brush xml:id="br0">
       <inkml:brushProperty name="width" value="0.1" units="cm"/>
       <inkml:brushProperty name="height" value="0.1" units="cm"/>
     </inkml:brush>
   </inkml:definitions>
-  <inkml:trace contextRef="#ctx0" brushRef="#br0">16651 5074 16383 0 0,'0'0'0'0'0</inkml:trace>
+  <inkml:trace contextRef="#ctx0" brushRef="#br0">12021 10588 16383 0 0,'0'0'0'0'0,"-2"2"0"0"0,-13-7 0 0 0,-22-13 0 0 0,-28-19 0 0 0,-28-22 0 0 0,-24-19 0 0 0,-15-12 0 0 0,-4-6 0 0 0,4 3 0 0 0,11 9 0 0 0,14 12 0 0 0,15 13 0 0 0,14 13 0 0 0,12 9 0 0 0,9 8 0 0 0,6 4 0 0 0,5 3 0 0 0,5 3 0 0 0,3 1 0 0 0,3 1 0 0 0,2-1 0 0 0,2 1 0 0 0,0-1 0 0 0,-1-1 0 0 0,-1 0 0 0 0,-3 1 0 0 0,-1 1 0 0 0,-1 0 0 0 0,0 2 0 0 0,-2 3 0 0 0,0 1 0 0 0,-3-1 0 0 0,-2-1 0 0 0,-1 0 0 0 0,-2-3 0 0 0,0 0 0 0 0,-1 0 0 0 0,1 0 0 0 0,3 1 0 0 0,2 2 0 0 0,4-1 0 0 0,2-1 0 0 0,5 1 0 0 0,4 1 0 0 0,2 0 0 0 0,3 0 0 0 0,3 2 0 0 0,1 1 0 0 0,0 1 0 0 0,0-1 0 0 0,-1-1 0 0 0,1 0 0 0 0,-1 0 0 0 0,-2-3 0 0 0,-1-1 0 0 0,-1-2 0 0 0,-3-1 0 0 0,-1-2 0 0 0,-2 0 0 0 0,-3 0 0 0 0,-1 1 0 0 0,-5 1 0 0 0,-2 0 0 0 0,-3 0 0 0 0,-3 1 0 0 0,0-1 0 0 0,-1 0 0 0 0,1 0 0 0 0,0-2 0 0 0,1-1 0 0 0,0-2 0 0 0,1 0 0 0 0,1 1 0 0 0,2 2 0 0 0,1 2 0 0 0,-1 1 0 0 0,-1 2 0 0 0,-3 1 0 0 0,-2 2 0 0 0,-2 1 0 0 0,3 1 0 0 0,-7 1 0 0 0,-18-1 0 0 0,-17-3 0 0 0,-16-3 0 0 0,-10-3 0 0 0,-3-3 0 0 0,6 1 0 0 0,12 3 0 0 0,15 2 0 0 0,17 4 0 0 0,14 1 0 0 0,12 2 0 0 0,10 1 0 0 0,6 0 0 0 0,7 0 0 0 0,4 0 0 0 0,3-1 0 0 0,1-4 0 0 0,1-2 0 0 0,0-2 0 0 0,0-1 0 0 0,0 1 0 0 0,-1 0 0 0 0,2 3 0 0 0,0 2 0 0 0,2 2 0 0 0,0 3 0 0 0,0 2 0 0 0,0 1 0 0 0</inkml:trace>
 </inkml:ink>
 </file>
 
@@ -1467,14 +1523,14 @@
           <inkml:channelProperty channel="OE" name="resolution" value="1000" units="1/deg"/>
         </inkml:channelProperties>
       </inkml:inkSource>
-      <inkml:timestamp xml:id="ts0" timeString="2026-08-13T23:25:20.566"/>
+      <inkml:timestamp xml:id="ts0" timeString="2026-08-13T23:29:35.724"/>
     </inkml:context>
     <inkml:brush xml:id="br0">
       <inkml:brushProperty name="width" value="0.1" units="cm"/>
       <inkml:brushProperty name="height" value="0.1" units="cm"/>
     </inkml:brush>
   </inkml:definitions>
-  <inkml:trace contextRef="#ctx0" brushRef="#br0">16986 4495 16383 0 0,'2'4'0'0'0,"1"1"0"0"0</inkml:trace>
+  <inkml:trace contextRef="#ctx0" brushRef="#br0">16027 11774 16383 0 0,'-4'0'0'0'0,"-18"0"0"0"0,-50 0 0 0 0,-94 0 0 0 0,-136 0 0 0 0,-174 0 0 0 0,-185 0 0 0 0,-167 0 0 0 0,-99 0 0 0 0,-26 0 0 0 0,17-2 0 0 0,47-13 0 0 0,67-23 0 0 0,88-23 0 0 0,93-20 0 0 0,95-11 0 0 0,93 0 0 0 0,81 9 0 0 0,66 9 0 0 0,51 11 0 0 0,39 12 0 0 0,26 10 0 0 0,19 7 0 0 0,15 5 0 0 0,15 4 0 0 0,18 3 0 0 0,22 4 0 0 0,22 5 0 0 0,19 3 0 0 0,18 4 0 0 0,15 2 0 0 0,13 2 0 0 0,13 1 0 0 0,6 1 0 0 0</inkml:trace>
 </inkml:ink>
 </file>
 
@@ -7780,7 +7836,7 @@
           <p:cNvPr id="2" name="Title 1">
             <a:extLst>
               <a:ext uri="{FF2B5EF4-FFF2-40B4-BE49-F238E27FC236}">
-                <a16:creationId xmlns:a16="http://schemas.microsoft.com/office/drawing/2014/main" id="{DECC06B4-3A01-A656-443F-0A54FBECDA36}"/>
+                <a16:creationId xmlns:a16="http://schemas.microsoft.com/office/drawing/2014/main" id="{9E00B712-F478-3D2F-6FB3-DFD07B0CE486}"/>
               </a:ext>
             </a:extLst>
           </p:cNvPr>
@@ -7791,7 +7847,12 @@
             <p:ph type="title"/>
           </p:nvPr>
         </p:nvSpPr>
-        <p:spPr/>
+        <p:spPr>
+          <a:xfrm>
+            <a:off x="838200" y="365125"/>
+            <a:ext cx="5869620" cy="1332961"/>
+          </a:xfrm>
+        </p:spPr>
         <p:txBody>
           <a:bodyPr/>
           <a:lstStyle/>
@@ -7803,46 +7864,14 @@
           </a:p>
         </p:txBody>
       </p:sp>
-      <p:pic>
-        <p:nvPicPr>
-          <p:cNvPr id="4" name="Content Placeholder 3">
-            <a:extLst>
-              <a:ext uri="{FF2B5EF4-FFF2-40B4-BE49-F238E27FC236}">
-                <a16:creationId xmlns:a16="http://schemas.microsoft.com/office/drawing/2014/main" id="{6EB7D4B0-5233-EF46-C5FB-4067893490FB}"/>
-              </a:ext>
-            </a:extLst>
-          </p:cNvPr>
-          <p:cNvPicPr>
-            <a:picLocks noGrp="1" noChangeAspect="1"/>
-          </p:cNvPicPr>
-          <p:nvPr>
-            <p:ph idx="1"/>
-          </p:nvPr>
-        </p:nvPicPr>
-        <p:blipFill>
-          <a:blip r:embed="rId2"/>
-          <a:stretch>
-            <a:fillRect/>
-          </a:stretch>
-        </p:blipFill>
-        <p:spPr>
-          <a:xfrm>
-            <a:off x="4024544" y="1716831"/>
-            <a:ext cx="6917185" cy="3880905"/>
-          </a:xfrm>
-          <a:prstGeom prst="rect">
-            <a:avLst/>
-          </a:prstGeom>
-        </p:spPr>
-      </p:pic>
       <mc:AlternateContent xmlns:mc="http://schemas.openxmlformats.org/markup-compatibility/2006">
         <mc:Choice xmlns:p14="http://schemas.microsoft.com/office/powerpoint/2010/main" Requires="p14">
-          <p:contentPart p14:bwMode="auto" r:id="rId3">
+          <p:contentPart p14:bwMode="auto" r:id="rId2">
             <p14:nvContentPartPr>
-              <p14:cNvPr id="5" name="Ink 4">
-                <a:extLst>
-                  <a:ext uri="{FF2B5EF4-FFF2-40B4-BE49-F238E27FC236}">
-                    <a16:creationId xmlns:a16="http://schemas.microsoft.com/office/drawing/2014/main" id="{291E65B1-4420-81D5-05F8-C0FF12741F77}"/>
+              <p14:cNvPr id="15" name="Ink 14">
+                <a:extLst>
+                  <a:ext uri="{FF2B5EF4-FFF2-40B4-BE49-F238E27FC236}">
+                    <a16:creationId xmlns:a16="http://schemas.microsoft.com/office/drawing/2014/main" id="{909F68AC-4533-5933-236C-3E8C64B7139B}"/>
                   </a:ext>
                 </a:extLst>
               </p14:cNvPr>
@@ -7850,18 +7879,18 @@
               <p14:nvPr/>
             </p14:nvContentPartPr>
             <p14:xfrm>
-              <a:off x="1931699" y="1681121"/>
-              <a:ext cx="4757763" cy="881265"/>
+              <a:off x="6613401" y="1400487"/>
+              <a:ext cx="14796" cy="14796"/>
             </p14:xfrm>
           </p:contentPart>
         </mc:Choice>
         <mc:Fallback>
           <p:pic>
             <p:nvPicPr>
-              <p:cNvPr id="5" name="Ink 4">
-                <a:extLst>
-                  <a:ext uri="{FF2B5EF4-FFF2-40B4-BE49-F238E27FC236}">
-                    <a16:creationId xmlns:a16="http://schemas.microsoft.com/office/drawing/2014/main" id="{291E65B1-4420-81D5-05F8-C0FF12741F77}"/>
+              <p:cNvPr id="15" name="Ink 14">
+                <a:extLst>
+                  <a:ext uri="{FF2B5EF4-FFF2-40B4-BE49-F238E27FC236}">
+                    <a16:creationId xmlns:a16="http://schemas.microsoft.com/office/drawing/2014/main" id="{909F68AC-4533-5933-236C-3E8C64B7139B}"/>
                   </a:ext>
                 </a:extLst>
               </p:cNvPr>
@@ -7869,15 +7898,66 @@
               <p:nvPr/>
             </p:nvPicPr>
             <p:blipFill>
-              <a:blip r:embed="rId4"/>
+              <a:blip r:embed="rId3"/>
               <a:stretch>
                 <a:fillRect/>
               </a:stretch>
             </p:blipFill>
             <p:spPr>
               <a:xfrm>
-                <a:off x="1913700" y="1663129"/>
-                <a:ext cx="4793400" cy="916890"/>
+                <a:off x="5873601" y="660687"/>
+                <a:ext cx="1479600" cy="1479600"/>
+              </a:xfrm>
+              <a:prstGeom prst="rect">
+                <a:avLst/>
+              </a:prstGeom>
+            </p:spPr>
+          </p:pic>
+        </mc:Fallback>
+      </mc:AlternateContent>
+      <mc:AlternateContent xmlns:mc="http://schemas.openxmlformats.org/markup-compatibility/2006">
+        <mc:Choice xmlns:p14="http://schemas.microsoft.com/office/powerpoint/2010/main" Requires="p14">
+          <p:contentPart p14:bwMode="auto" r:id="rId4">
+            <p14:nvContentPartPr>
+              <p14:cNvPr id="17" name="Ink 16">
+                <a:extLst>
+                  <a:ext uri="{FF2B5EF4-FFF2-40B4-BE49-F238E27FC236}">
+                    <a16:creationId xmlns:a16="http://schemas.microsoft.com/office/drawing/2014/main" id="{9D4E803E-C957-72AB-1BA1-FB3A08757C8F}"/>
+                  </a:ext>
+                </a:extLst>
+              </p14:cNvPr>
+              <p14:cNvContentPartPr/>
+              <p14:nvPr/>
+            </p14:nvContentPartPr>
+            <p14:xfrm>
+              <a:off x="8838194" y="1491171"/>
+              <a:ext cx="14796" cy="14796"/>
+            </p14:xfrm>
+          </p:contentPart>
+        </mc:Choice>
+        <mc:Fallback>
+          <p:pic>
+            <p:nvPicPr>
+              <p:cNvPr id="17" name="Ink 16">
+                <a:extLst>
+                  <a:ext uri="{FF2B5EF4-FFF2-40B4-BE49-F238E27FC236}">
+                    <a16:creationId xmlns:a16="http://schemas.microsoft.com/office/drawing/2014/main" id="{9D4E803E-C957-72AB-1BA1-FB3A08757C8F}"/>
+                  </a:ext>
+                </a:extLst>
+              </p:cNvPr>
+              <p:cNvPicPr/>
+              <p:nvPr/>
+            </p:nvPicPr>
+            <p:blipFill>
+              <a:blip r:embed="rId3"/>
+              <a:stretch>
+                <a:fillRect/>
+              </a:stretch>
+            </p:blipFill>
+            <p:spPr>
+              <a:xfrm>
+                <a:off x="8098394" y="751371"/>
+                <a:ext cx="1479600" cy="1479600"/>
               </a:xfrm>
               <a:prstGeom prst="rect">
                 <a:avLst/>
@@ -7890,10 +7970,10 @@
         <mc:Choice xmlns:p14="http://schemas.microsoft.com/office/powerpoint/2010/main" Requires="p14">
           <p:contentPart p14:bwMode="auto" r:id="rId5">
             <p14:nvContentPartPr>
-              <p14:cNvPr id="11" name="Ink 10">
-                <a:extLst>
-                  <a:ext uri="{FF2B5EF4-FFF2-40B4-BE49-F238E27FC236}">
-                    <a16:creationId xmlns:a16="http://schemas.microsoft.com/office/drawing/2014/main" id="{53A11908-C8F3-228A-2A42-64DCE78996A9}"/>
+              <p14:cNvPr id="18" name="Ink 17">
+                <a:extLst>
+                  <a:ext uri="{FF2B5EF4-FFF2-40B4-BE49-F238E27FC236}">
+                    <a16:creationId xmlns:a16="http://schemas.microsoft.com/office/drawing/2014/main" id="{D845F142-7145-4B13-0DF0-D0D519116F4C}"/>
                   </a:ext>
                 </a:extLst>
               </p14:cNvPr>
@@ -7901,18 +7981,18 @@
               <p14:nvPr/>
             </p14:nvContentPartPr>
             <p14:xfrm>
-              <a:off x="3547641" y="3333181"/>
-              <a:ext cx="3965780" cy="486181"/>
+              <a:off x="9025631" y="1167043"/>
+              <a:ext cx="14796" cy="14796"/>
             </p14:xfrm>
           </p:contentPart>
         </mc:Choice>
         <mc:Fallback>
           <p:pic>
             <p:nvPicPr>
-              <p:cNvPr id="11" name="Ink 10">
-                <a:extLst>
-                  <a:ext uri="{FF2B5EF4-FFF2-40B4-BE49-F238E27FC236}">
-                    <a16:creationId xmlns:a16="http://schemas.microsoft.com/office/drawing/2014/main" id="{53A11908-C8F3-228A-2A42-64DCE78996A9}"/>
+              <p:cNvPr id="18" name="Ink 17">
+                <a:extLst>
+                  <a:ext uri="{FF2B5EF4-FFF2-40B4-BE49-F238E27FC236}">
+                    <a16:creationId xmlns:a16="http://schemas.microsoft.com/office/drawing/2014/main" id="{D845F142-7145-4B13-0DF0-D0D519116F4C}"/>
                   </a:ext>
                 </a:extLst>
               </p:cNvPr>
@@ -7927,8 +8007,8 @@
             </p:blipFill>
             <p:spPr>
               <a:xfrm>
-                <a:off x="3529643" y="3315201"/>
-                <a:ext cx="4001417" cy="521782"/>
+                <a:off x="8902331" y="1093063"/>
+                <a:ext cx="258930" cy="161276"/>
               </a:xfrm>
               <a:prstGeom prst="rect">
                 <a:avLst/>
@@ -7937,250 +8017,10 @@
           </p:pic>
         </mc:Fallback>
       </mc:AlternateContent>
-      <mc:AlternateContent xmlns:mc="http://schemas.openxmlformats.org/markup-compatibility/2006">
-        <mc:Choice xmlns:p14="http://schemas.microsoft.com/office/powerpoint/2010/main" Requires="p14">
-          <p:contentPart p14:bwMode="auto" r:id="rId7">
-            <p14:nvContentPartPr>
-              <p14:cNvPr id="12" name="Ink 11">
-                <a:extLst>
-                  <a:ext uri="{FF2B5EF4-FFF2-40B4-BE49-F238E27FC236}">
-                    <a16:creationId xmlns:a16="http://schemas.microsoft.com/office/drawing/2014/main" id="{AB26A816-7054-250C-2DD5-14C1B01A714F}"/>
-                  </a:ext>
-                </a:extLst>
-              </p14:cNvPr>
-              <p14:cNvContentPartPr/>
-              <p14:nvPr/>
-            </p14:nvContentPartPr>
-            <p14:xfrm>
-              <a:off x="3481088" y="3361042"/>
-              <a:ext cx="3961299" cy="1036743"/>
-            </p14:xfrm>
-          </p:contentPart>
-        </mc:Choice>
-        <mc:Fallback>
-          <p:pic>
-            <p:nvPicPr>
-              <p:cNvPr id="12" name="Ink 11">
-                <a:extLst>
-                  <a:ext uri="{FF2B5EF4-FFF2-40B4-BE49-F238E27FC236}">
-                    <a16:creationId xmlns:a16="http://schemas.microsoft.com/office/drawing/2014/main" id="{AB26A816-7054-250C-2DD5-14C1B01A714F}"/>
-                  </a:ext>
-                </a:extLst>
-              </p:cNvPr>
-              <p:cNvPicPr/>
-              <p:nvPr/>
-            </p:nvPicPr>
-            <p:blipFill>
-              <a:blip r:embed="rId8"/>
-              <a:stretch>
-                <a:fillRect/>
-              </a:stretch>
-            </p:blipFill>
-            <p:spPr>
-              <a:xfrm>
-                <a:off x="3463089" y="3343049"/>
-                <a:ext cx="3996938" cy="1072369"/>
-              </a:xfrm>
-              <a:prstGeom prst="rect">
-                <a:avLst/>
-              </a:prstGeom>
-            </p:spPr>
-          </p:pic>
-        </mc:Fallback>
-      </mc:AlternateContent>
-      <mc:AlternateContent xmlns:mc="http://schemas.openxmlformats.org/markup-compatibility/2006">
-        <mc:Choice xmlns:p14="http://schemas.microsoft.com/office/powerpoint/2010/main" Requires="p14">
-          <p:contentPart p14:bwMode="auto" r:id="rId9">
-            <p14:nvContentPartPr>
-              <p14:cNvPr id="13" name="Ink 12">
-                <a:extLst>
-                  <a:ext uri="{FF2B5EF4-FFF2-40B4-BE49-F238E27FC236}">
-                    <a16:creationId xmlns:a16="http://schemas.microsoft.com/office/drawing/2014/main" id="{0D5BF425-7455-5047-8B5B-95729688C396}"/>
-                  </a:ext>
-                </a:extLst>
-              </p14:cNvPr>
-              <p14:cNvContentPartPr/>
-              <p14:nvPr/>
-            </p14:nvContentPartPr>
-            <p14:xfrm>
-              <a:off x="3428844" y="3321265"/>
-              <a:ext cx="1878915" cy="453033"/>
-            </p14:xfrm>
-          </p:contentPart>
-        </mc:Choice>
-        <mc:Fallback>
-          <p:pic>
-            <p:nvPicPr>
-              <p:cNvPr id="13" name="Ink 12">
-                <a:extLst>
-                  <a:ext uri="{FF2B5EF4-FFF2-40B4-BE49-F238E27FC236}">
-                    <a16:creationId xmlns:a16="http://schemas.microsoft.com/office/drawing/2014/main" id="{0D5BF425-7455-5047-8B5B-95729688C396}"/>
-                  </a:ext>
-                </a:extLst>
-              </p:cNvPr>
-              <p:cNvPicPr/>
-              <p:nvPr/>
-            </p:nvPicPr>
-            <p:blipFill>
-              <a:blip r:embed="rId10"/>
-              <a:stretch>
-                <a:fillRect/>
-              </a:stretch>
-            </p:blipFill>
-            <p:spPr>
-              <a:xfrm>
-                <a:off x="3410847" y="3303273"/>
-                <a:ext cx="1914550" cy="488657"/>
-              </a:xfrm>
-              <a:prstGeom prst="rect">
-                <a:avLst/>
-              </a:prstGeom>
-            </p:spPr>
-          </p:pic>
-        </mc:Fallback>
-      </mc:AlternateContent>
-      <mc:AlternateContent xmlns:mc="http://schemas.openxmlformats.org/markup-compatibility/2006">
-        <mc:Choice xmlns:p14="http://schemas.microsoft.com/office/powerpoint/2010/main" Requires="p14">
-          <p:contentPart p14:bwMode="auto" r:id="rId11">
-            <p14:nvContentPartPr>
-              <p14:cNvPr id="14" name="Ink 13">
-                <a:extLst>
-                  <a:ext uri="{FF2B5EF4-FFF2-40B4-BE49-F238E27FC236}">
-                    <a16:creationId xmlns:a16="http://schemas.microsoft.com/office/drawing/2014/main" id="{2221E05B-8385-4427-59AE-C55D3918076B}"/>
-                  </a:ext>
-                </a:extLst>
-              </p14:cNvPr>
-              <p14:cNvContentPartPr/>
-              <p14:nvPr/>
-            </p14:nvContentPartPr>
-            <p14:xfrm>
-              <a:off x="3490378" y="3328758"/>
-              <a:ext cx="1775883" cy="802648"/>
-            </p14:xfrm>
-          </p:contentPart>
-        </mc:Choice>
-        <mc:Fallback>
-          <p:pic>
-            <p:nvPicPr>
-              <p:cNvPr id="14" name="Ink 13">
-                <a:extLst>
-                  <a:ext uri="{FF2B5EF4-FFF2-40B4-BE49-F238E27FC236}">
-                    <a16:creationId xmlns:a16="http://schemas.microsoft.com/office/drawing/2014/main" id="{2221E05B-8385-4427-59AE-C55D3918076B}"/>
-                  </a:ext>
-                </a:extLst>
-              </p:cNvPr>
-              <p:cNvPicPr/>
-              <p:nvPr/>
-            </p:nvPicPr>
-            <p:blipFill>
-              <a:blip r:embed="rId12"/>
-              <a:stretch>
-                <a:fillRect/>
-              </a:stretch>
-            </p:blipFill>
-            <p:spPr>
-              <a:xfrm>
-                <a:off x="3472382" y="3310769"/>
-                <a:ext cx="1811516" cy="838265"/>
-              </a:xfrm>
-              <a:prstGeom prst="rect">
-                <a:avLst/>
-              </a:prstGeom>
-            </p:spPr>
-          </p:pic>
-        </mc:Fallback>
-      </mc:AlternateContent>
-      <mc:AlternateContent xmlns:mc="http://schemas.openxmlformats.org/markup-compatibility/2006">
-        <mc:Choice xmlns:p14="http://schemas.microsoft.com/office/powerpoint/2010/main" Requires="p14">
-          <p:contentPart p14:bwMode="auto" r:id="rId13">
-            <p14:nvContentPartPr>
-              <p14:cNvPr id="15" name="Ink 14">
-                <a:extLst>
-                  <a:ext uri="{FF2B5EF4-FFF2-40B4-BE49-F238E27FC236}">
-                    <a16:creationId xmlns:a16="http://schemas.microsoft.com/office/drawing/2014/main" id="{E139891A-B456-ABC2-8311-60B3B4D12537}"/>
-                  </a:ext>
-                </a:extLst>
-              </p14:cNvPr>
-              <p14:cNvContentPartPr/>
-              <p14:nvPr/>
-            </p14:nvContentPartPr>
-            <p14:xfrm>
-              <a:off x="1954048" y="4758481"/>
-              <a:ext cx="4206857" cy="308726"/>
-            </p14:xfrm>
-          </p:contentPart>
-        </mc:Choice>
-        <mc:Fallback>
-          <p:pic>
-            <p:nvPicPr>
-              <p:cNvPr id="15" name="Ink 14">
-                <a:extLst>
-                  <a:ext uri="{FF2B5EF4-FFF2-40B4-BE49-F238E27FC236}">
-                    <a16:creationId xmlns:a16="http://schemas.microsoft.com/office/drawing/2014/main" id="{E139891A-B456-ABC2-8311-60B3B4D12537}"/>
-                  </a:ext>
-                </a:extLst>
-              </p:cNvPr>
-              <p:cNvPicPr/>
-              <p:nvPr/>
-            </p:nvPicPr>
-            <p:blipFill>
-              <a:blip r:embed="rId14"/>
-              <a:stretch>
-                <a:fillRect/>
-              </a:stretch>
-            </p:blipFill>
-            <p:spPr>
-              <a:xfrm>
-                <a:off x="1936050" y="4740490"/>
-                <a:ext cx="4242493" cy="344348"/>
-              </a:xfrm>
-              <a:prstGeom prst="rect">
-                <a:avLst/>
-              </a:prstGeom>
-            </p:spPr>
-          </p:pic>
-        </mc:Fallback>
-      </mc:AlternateContent>
-      <p:sp>
-        <p:nvSpPr>
-          <p:cNvPr id="16" name="TextBox 15">
-            <a:extLst>
-              <a:ext uri="{FF2B5EF4-FFF2-40B4-BE49-F238E27FC236}">
-                <a16:creationId xmlns:a16="http://schemas.microsoft.com/office/drawing/2014/main" id="{24FEF3ED-F281-D4E7-22C3-88CFF0405EB0}"/>
-              </a:ext>
-            </a:extLst>
-          </p:cNvPr>
-          <p:cNvSpPr txBox="1"/>
-          <p:nvPr/>
-        </p:nvSpPr>
-        <p:spPr>
-          <a:xfrm>
-            <a:off x="695417" y="1612776"/>
-            <a:ext cx="1257669" cy="369332"/>
-          </a:xfrm>
-          <a:prstGeom prst="rect">
-            <a:avLst/>
-          </a:prstGeom>
-          <a:noFill/>
-        </p:spPr>
-        <p:txBody>
-          <a:bodyPr rot="0" spcFirstLastPara="0" vertOverflow="overflow" horzOverflow="overflow" vert="horz" wrap="square" lIns="91440" tIns="45720" rIns="91440" bIns="45720" numCol="1" spcCol="0" rtlCol="0" fromWordArt="0" anchor="t" anchorCtr="0" forceAA="0" compatLnSpc="1">
-            <a:prstTxWarp prst="textNoShape">
-              <a:avLst/>
-            </a:prstTxWarp>
-            <a:spAutoFit/>
-          </a:bodyPr>
-          <a:lstStyle/>
-          <a:p>
-            <a:pPr algn="l"/>
-            <a:endParaRPr lang="en-US"/>
-          </a:p>
-        </p:txBody>
-      </p:sp>
     </p:spTree>
     <p:extLst>
       <p:ext uri="{BB962C8B-B14F-4D97-AF65-F5344CB8AC3E}">
-        <p14:creationId xmlns:p14="http://schemas.microsoft.com/office/powerpoint/2010/main" val="4196453157"/>
+        <p14:creationId xmlns:p14="http://schemas.microsoft.com/office/powerpoint/2010/main" val="2149723290"/>
       </p:ext>
     </p:extLst>
   </p:cSld>
@@ -8392,7 +8232,7 @@
           <p:cNvPr id="2" name="Title 1">
             <a:extLst>
               <a:ext uri="{FF2B5EF4-FFF2-40B4-BE49-F238E27FC236}">
-                <a16:creationId xmlns:a16="http://schemas.microsoft.com/office/drawing/2014/main" id="{9E00B712-F478-3D2F-6FB3-DFD07B0CE486}"/>
+                <a16:creationId xmlns:a16="http://schemas.microsoft.com/office/drawing/2014/main" id="{DECC06B4-3A01-A656-443F-0A54FBECDA36}"/>
               </a:ext>
             </a:extLst>
           </p:cNvPr>
@@ -8403,31 +8243,58 @@
             <p:ph type="title"/>
           </p:nvPr>
         </p:nvSpPr>
-        <p:spPr>
-          <a:xfrm>
-            <a:off x="838200" y="365125"/>
-            <a:ext cx="5869620" cy="1332961"/>
-          </a:xfrm>
-        </p:spPr>
+        <p:spPr/>
         <p:txBody>
           <a:bodyPr/>
           <a:lstStyle/>
           <a:p>
             <a:r>
               <a:rPr lang="en-US"/>
-              <a:t>Taliahs Website Mockup</a:t>
+              <a:t>Taliahs Website Mockup</a:t>
             </a:r>
           </a:p>
         </p:txBody>
       </p:sp>
+      <p:pic>
+        <p:nvPicPr>
+          <p:cNvPr id="4" name="Content Placeholder 3">
+            <a:extLst>
+              <a:ext uri="{FF2B5EF4-FFF2-40B4-BE49-F238E27FC236}">
+                <a16:creationId xmlns:a16="http://schemas.microsoft.com/office/drawing/2014/main" id="{6EB7D4B0-5233-EF46-C5FB-4067893490FB}"/>
+              </a:ext>
+            </a:extLst>
+          </p:cNvPr>
+          <p:cNvPicPr>
+            <a:picLocks noGrp="1" noChangeAspect="1"/>
+          </p:cNvPicPr>
+          <p:nvPr>
+            <p:ph idx="1"/>
+          </p:nvPr>
+        </p:nvPicPr>
+        <p:blipFill>
+          <a:blip r:embed="rId2"/>
+          <a:stretch>
+            <a:fillRect/>
+          </a:stretch>
+        </p:blipFill>
+        <p:spPr>
+          <a:xfrm>
+            <a:off x="4061534" y="1716831"/>
+            <a:ext cx="6917185" cy="3880905"/>
+          </a:xfrm>
+          <a:prstGeom prst="rect">
+            <a:avLst/>
+          </a:prstGeom>
+        </p:spPr>
+      </p:pic>
       <mc:AlternateContent xmlns:mc="http://schemas.openxmlformats.org/markup-compatibility/2006">
         <mc:Choice xmlns:p14="http://schemas.microsoft.com/office/powerpoint/2010/main" Requires="p14">
-          <p:contentPart p14:bwMode="auto" r:id="rId2">
+          <p:contentPart p14:bwMode="auto" r:id="rId3">
             <p14:nvContentPartPr>
-              <p14:cNvPr id="15" name="Ink 14">
-                <a:extLst>
-                  <a:ext uri="{FF2B5EF4-FFF2-40B4-BE49-F238E27FC236}">
-                    <a16:creationId xmlns:a16="http://schemas.microsoft.com/office/drawing/2014/main" id="{909F68AC-4533-5933-236C-3E8C64B7139B}"/>
+              <p14:cNvPr id="5" name="Ink 4">
+                <a:extLst>
+                  <a:ext uri="{FF2B5EF4-FFF2-40B4-BE49-F238E27FC236}">
+                    <a16:creationId xmlns:a16="http://schemas.microsoft.com/office/drawing/2014/main" id="{291E65B1-4420-81D5-05F8-C0FF12741F77}"/>
                   </a:ext>
                 </a:extLst>
               </p14:cNvPr>
@@ -8435,18 +8302,18 @@
               <p14:nvPr/>
             </p14:nvContentPartPr>
             <p14:xfrm>
-              <a:off x="6613401" y="1400487"/>
-              <a:ext cx="14796" cy="14796"/>
+              <a:off x="2412572" y="1703315"/>
+              <a:ext cx="3396522" cy="859071"/>
             </p14:xfrm>
           </p:contentPart>
         </mc:Choice>
         <mc:Fallback>
           <p:pic>
             <p:nvPicPr>
-              <p:cNvPr id="15" name="Ink 14">
-                <a:extLst>
-                  <a:ext uri="{FF2B5EF4-FFF2-40B4-BE49-F238E27FC236}">
-                    <a16:creationId xmlns:a16="http://schemas.microsoft.com/office/drawing/2014/main" id="{909F68AC-4533-5933-236C-3E8C64B7139B}"/>
+              <p:cNvPr id="5" name="Ink 4">
+                <a:extLst>
+                  <a:ext uri="{FF2B5EF4-FFF2-40B4-BE49-F238E27FC236}">
+                    <a16:creationId xmlns:a16="http://schemas.microsoft.com/office/drawing/2014/main" id="{291E65B1-4420-81D5-05F8-C0FF12741F77}"/>
                   </a:ext>
                 </a:extLst>
               </p:cNvPr>
@@ -8454,66 +8321,15 @@
               <p:nvPr/>
             </p:nvPicPr>
             <p:blipFill>
-              <a:blip r:embed="rId3"/>
+              <a:blip r:embed="rId4"/>
               <a:stretch>
                 <a:fillRect/>
               </a:stretch>
             </p:blipFill>
             <p:spPr>
               <a:xfrm>
-                <a:off x="5873601" y="660687"/>
-                <a:ext cx="1479600" cy="1479600"/>
-              </a:xfrm>
-              <a:prstGeom prst="rect">
-                <a:avLst/>
-              </a:prstGeom>
-            </p:spPr>
-          </p:pic>
-        </mc:Fallback>
-      </mc:AlternateContent>
-      <mc:AlternateContent xmlns:mc="http://schemas.openxmlformats.org/markup-compatibility/2006">
-        <mc:Choice xmlns:p14="http://schemas.microsoft.com/office/powerpoint/2010/main" Requires="p14">
-          <p:contentPart p14:bwMode="auto" r:id="rId4">
-            <p14:nvContentPartPr>
-              <p14:cNvPr id="17" name="Ink 16">
-                <a:extLst>
-                  <a:ext uri="{FF2B5EF4-FFF2-40B4-BE49-F238E27FC236}">
-                    <a16:creationId xmlns:a16="http://schemas.microsoft.com/office/drawing/2014/main" id="{9D4E803E-C957-72AB-1BA1-FB3A08757C8F}"/>
-                  </a:ext>
-                </a:extLst>
-              </p14:cNvPr>
-              <p14:cNvContentPartPr/>
-              <p14:nvPr/>
-            </p14:nvContentPartPr>
-            <p14:xfrm>
-              <a:off x="8838194" y="1491171"/>
-              <a:ext cx="14796" cy="14796"/>
-            </p14:xfrm>
-          </p:contentPart>
-        </mc:Choice>
-        <mc:Fallback>
-          <p:pic>
-            <p:nvPicPr>
-              <p:cNvPr id="17" name="Ink 16">
-                <a:extLst>
-                  <a:ext uri="{FF2B5EF4-FFF2-40B4-BE49-F238E27FC236}">
-                    <a16:creationId xmlns:a16="http://schemas.microsoft.com/office/drawing/2014/main" id="{9D4E803E-C957-72AB-1BA1-FB3A08757C8F}"/>
-                  </a:ext>
-                </a:extLst>
-              </p:cNvPr>
-              <p:cNvPicPr/>
-              <p:nvPr/>
-            </p:nvPicPr>
-            <p:blipFill>
-              <a:blip r:embed="rId3"/>
-              <a:stretch>
-                <a:fillRect/>
-              </a:stretch>
-            </p:blipFill>
-            <p:spPr>
-              <a:xfrm>
-                <a:off x="8098394" y="751371"/>
-                <a:ext cx="1479600" cy="1479600"/>
+                <a:off x="2394572" y="1685320"/>
+                <a:ext cx="3432161" cy="894701"/>
               </a:xfrm>
               <a:prstGeom prst="rect">
                 <a:avLst/>
@@ -8526,10 +8342,10 @@
         <mc:Choice xmlns:p14="http://schemas.microsoft.com/office/powerpoint/2010/main" Requires="p14">
           <p:contentPart p14:bwMode="auto" r:id="rId5">
             <p14:nvContentPartPr>
-              <p14:cNvPr id="18" name="Ink 17">
-                <a:extLst>
-                  <a:ext uri="{FF2B5EF4-FFF2-40B4-BE49-F238E27FC236}">
-                    <a16:creationId xmlns:a16="http://schemas.microsoft.com/office/drawing/2014/main" id="{D845F142-7145-4B13-0DF0-D0D519116F4C}"/>
+              <p14:cNvPr id="11" name="Ink 10">
+                <a:extLst>
+                  <a:ext uri="{FF2B5EF4-FFF2-40B4-BE49-F238E27FC236}">
+                    <a16:creationId xmlns:a16="http://schemas.microsoft.com/office/drawing/2014/main" id="{53A11908-C8F3-228A-2A42-64DCE78996A9}"/>
                   </a:ext>
                 </a:extLst>
               </p14:cNvPr>
@@ -8537,18 +8353,18 @@
               <p14:nvPr/>
             </p14:nvContentPartPr>
             <p14:xfrm>
-              <a:off x="9025631" y="1167043"/>
-              <a:ext cx="14796" cy="14796"/>
+              <a:off x="3547641" y="3333181"/>
+              <a:ext cx="3965780" cy="486181"/>
             </p14:xfrm>
           </p:contentPart>
         </mc:Choice>
         <mc:Fallback>
           <p:pic>
             <p:nvPicPr>
-              <p:cNvPr id="18" name="Ink 17">
-                <a:extLst>
-                  <a:ext uri="{FF2B5EF4-FFF2-40B4-BE49-F238E27FC236}">
-                    <a16:creationId xmlns:a16="http://schemas.microsoft.com/office/drawing/2014/main" id="{D845F142-7145-4B13-0DF0-D0D519116F4C}"/>
+              <p:cNvPr id="11" name="Ink 10">
+                <a:extLst>
+                  <a:ext uri="{FF2B5EF4-FFF2-40B4-BE49-F238E27FC236}">
+                    <a16:creationId xmlns:a16="http://schemas.microsoft.com/office/drawing/2014/main" id="{53A11908-C8F3-228A-2A42-64DCE78996A9}"/>
                   </a:ext>
                 </a:extLst>
               </p:cNvPr>
@@ -8563,8 +8379,8 @@
             </p:blipFill>
             <p:spPr>
               <a:xfrm>
-                <a:off x="8902331" y="1093063"/>
-                <a:ext cx="258930" cy="161276"/>
+                <a:off x="3529643" y="3315201"/>
+                <a:ext cx="4001417" cy="521782"/>
               </a:xfrm>
               <a:prstGeom prst="rect">
                 <a:avLst/>
@@ -8573,10 +8389,336 @@
           </p:pic>
         </mc:Fallback>
       </mc:AlternateContent>
+      <mc:AlternateContent xmlns:mc="http://schemas.openxmlformats.org/markup-compatibility/2006">
+        <mc:Choice xmlns:p14="http://schemas.microsoft.com/office/powerpoint/2010/main" Requires="p14">
+          <p:contentPart p14:bwMode="auto" r:id="rId7">
+            <p14:nvContentPartPr>
+              <p14:cNvPr id="12" name="Ink 11">
+                <a:extLst>
+                  <a:ext uri="{FF2B5EF4-FFF2-40B4-BE49-F238E27FC236}">
+                    <a16:creationId xmlns:a16="http://schemas.microsoft.com/office/drawing/2014/main" id="{AB26A816-7054-250C-2DD5-14C1B01A714F}"/>
+                  </a:ext>
+                </a:extLst>
+              </p14:cNvPr>
+              <p14:cNvContentPartPr/>
+              <p14:nvPr/>
+            </p14:nvContentPartPr>
+            <p14:xfrm>
+              <a:off x="3481088" y="3361042"/>
+              <a:ext cx="3961299" cy="1036743"/>
+            </p14:xfrm>
+          </p:contentPart>
+        </mc:Choice>
+        <mc:Fallback>
+          <p:pic>
+            <p:nvPicPr>
+              <p:cNvPr id="12" name="Ink 11">
+                <a:extLst>
+                  <a:ext uri="{FF2B5EF4-FFF2-40B4-BE49-F238E27FC236}">
+                    <a16:creationId xmlns:a16="http://schemas.microsoft.com/office/drawing/2014/main" id="{AB26A816-7054-250C-2DD5-14C1B01A714F}"/>
+                  </a:ext>
+                </a:extLst>
+              </p:cNvPr>
+              <p:cNvPicPr/>
+              <p:nvPr/>
+            </p:nvPicPr>
+            <p:blipFill>
+              <a:blip r:embed="rId8"/>
+              <a:stretch>
+                <a:fillRect/>
+              </a:stretch>
+            </p:blipFill>
+            <p:spPr>
+              <a:xfrm>
+                <a:off x="3463089" y="3343049"/>
+                <a:ext cx="3996938" cy="1072369"/>
+              </a:xfrm>
+              <a:prstGeom prst="rect">
+                <a:avLst/>
+              </a:prstGeom>
+            </p:spPr>
+          </p:pic>
+        </mc:Fallback>
+      </mc:AlternateContent>
+      <mc:AlternateContent xmlns:mc="http://schemas.openxmlformats.org/markup-compatibility/2006">
+        <mc:Choice xmlns:p14="http://schemas.microsoft.com/office/powerpoint/2010/main" Requires="p14">
+          <p:contentPart p14:bwMode="auto" r:id="rId9">
+            <p14:nvContentPartPr>
+              <p14:cNvPr id="13" name="Ink 12">
+                <a:extLst>
+                  <a:ext uri="{FF2B5EF4-FFF2-40B4-BE49-F238E27FC236}">
+                    <a16:creationId xmlns:a16="http://schemas.microsoft.com/office/drawing/2014/main" id="{0D5BF425-7455-5047-8B5B-95729688C396}"/>
+                  </a:ext>
+                </a:extLst>
+              </p14:cNvPr>
+              <p14:cNvContentPartPr/>
+              <p14:nvPr/>
+            </p14:nvContentPartPr>
+            <p14:xfrm>
+              <a:off x="3428844" y="3321265"/>
+              <a:ext cx="1878915" cy="453033"/>
+            </p14:xfrm>
+          </p:contentPart>
+        </mc:Choice>
+        <mc:Fallback>
+          <p:pic>
+            <p:nvPicPr>
+              <p:cNvPr id="13" name="Ink 12">
+                <a:extLst>
+                  <a:ext uri="{FF2B5EF4-FFF2-40B4-BE49-F238E27FC236}">
+                    <a16:creationId xmlns:a16="http://schemas.microsoft.com/office/drawing/2014/main" id="{0D5BF425-7455-5047-8B5B-95729688C396}"/>
+                  </a:ext>
+                </a:extLst>
+              </p:cNvPr>
+              <p:cNvPicPr/>
+              <p:nvPr/>
+            </p:nvPicPr>
+            <p:blipFill>
+              <a:blip r:embed="rId10"/>
+              <a:stretch>
+                <a:fillRect/>
+              </a:stretch>
+            </p:blipFill>
+            <p:spPr>
+              <a:xfrm>
+                <a:off x="3410847" y="3303273"/>
+                <a:ext cx="1914550" cy="488657"/>
+              </a:xfrm>
+              <a:prstGeom prst="rect">
+                <a:avLst/>
+              </a:prstGeom>
+            </p:spPr>
+          </p:pic>
+        </mc:Fallback>
+      </mc:AlternateContent>
+      <mc:AlternateContent xmlns:mc="http://schemas.openxmlformats.org/markup-compatibility/2006">
+        <mc:Choice xmlns:p14="http://schemas.microsoft.com/office/powerpoint/2010/main" Requires="p14">
+          <p:contentPart p14:bwMode="auto" r:id="rId11">
+            <p14:nvContentPartPr>
+              <p14:cNvPr id="14" name="Ink 13">
+                <a:extLst>
+                  <a:ext uri="{FF2B5EF4-FFF2-40B4-BE49-F238E27FC236}">
+                    <a16:creationId xmlns:a16="http://schemas.microsoft.com/office/drawing/2014/main" id="{2221E05B-8385-4427-59AE-C55D3918076B}"/>
+                  </a:ext>
+                </a:extLst>
+              </p14:cNvPr>
+              <p14:cNvContentPartPr/>
+              <p14:nvPr/>
+            </p14:nvContentPartPr>
+            <p14:xfrm>
+              <a:off x="3490378" y="3328758"/>
+              <a:ext cx="1775883" cy="802648"/>
+            </p14:xfrm>
+          </p:contentPart>
+        </mc:Choice>
+        <mc:Fallback>
+          <p:pic>
+            <p:nvPicPr>
+              <p:cNvPr id="14" name="Ink 13">
+                <a:extLst>
+                  <a:ext uri="{FF2B5EF4-FFF2-40B4-BE49-F238E27FC236}">
+                    <a16:creationId xmlns:a16="http://schemas.microsoft.com/office/drawing/2014/main" id="{2221E05B-8385-4427-59AE-C55D3918076B}"/>
+                  </a:ext>
+                </a:extLst>
+              </p:cNvPr>
+              <p:cNvPicPr/>
+              <p:nvPr/>
+            </p:nvPicPr>
+            <p:blipFill>
+              <a:blip r:embed="rId12"/>
+              <a:stretch>
+                <a:fillRect/>
+              </a:stretch>
+            </p:blipFill>
+            <p:spPr>
+              <a:xfrm>
+                <a:off x="3472382" y="3310769"/>
+                <a:ext cx="1811516" cy="838265"/>
+              </a:xfrm>
+              <a:prstGeom prst="rect">
+                <a:avLst/>
+              </a:prstGeom>
+            </p:spPr>
+          </p:pic>
+        </mc:Fallback>
+      </mc:AlternateContent>
+      <mc:AlternateContent xmlns:mc="http://schemas.openxmlformats.org/markup-compatibility/2006">
+        <mc:Choice xmlns:p14="http://schemas.microsoft.com/office/powerpoint/2010/main" Requires="p14">
+          <p:contentPart p14:bwMode="auto" r:id="rId13">
+            <p14:nvContentPartPr>
+              <p14:cNvPr id="15" name="Ink 14">
+                <a:extLst>
+                  <a:ext uri="{FF2B5EF4-FFF2-40B4-BE49-F238E27FC236}">
+                    <a16:creationId xmlns:a16="http://schemas.microsoft.com/office/drawing/2014/main" id="{E139891A-B456-ABC2-8311-60B3B4D12537}"/>
+                  </a:ext>
+                </a:extLst>
+              </p14:cNvPr>
+              <p14:cNvContentPartPr/>
+              <p14:nvPr/>
+            </p14:nvContentPartPr>
+            <p14:xfrm>
+              <a:off x="1954048" y="4758481"/>
+              <a:ext cx="4206857" cy="308726"/>
+            </p14:xfrm>
+          </p:contentPart>
+        </mc:Choice>
+        <mc:Fallback>
+          <p:pic>
+            <p:nvPicPr>
+              <p:cNvPr id="15" name="Ink 14">
+                <a:extLst>
+                  <a:ext uri="{FF2B5EF4-FFF2-40B4-BE49-F238E27FC236}">
+                    <a16:creationId xmlns:a16="http://schemas.microsoft.com/office/drawing/2014/main" id="{E139891A-B456-ABC2-8311-60B3B4D12537}"/>
+                  </a:ext>
+                </a:extLst>
+              </p:cNvPr>
+              <p:cNvPicPr/>
+              <p:nvPr/>
+            </p:nvPicPr>
+            <p:blipFill>
+              <a:blip r:embed="rId14"/>
+              <a:stretch>
+                <a:fillRect/>
+              </a:stretch>
+            </p:blipFill>
+            <p:spPr>
+              <a:xfrm>
+                <a:off x="1936050" y="4740490"/>
+                <a:ext cx="4242493" cy="344348"/>
+              </a:xfrm>
+              <a:prstGeom prst="rect">
+                <a:avLst/>
+              </a:prstGeom>
+            </p:spPr>
+          </p:pic>
+        </mc:Fallback>
+      </mc:AlternateContent>
+      <p:sp>
+        <p:nvSpPr>
+          <p:cNvPr id="16" name="TextBox 15">
+            <a:extLst>
+              <a:ext uri="{FF2B5EF4-FFF2-40B4-BE49-F238E27FC236}">
+                <a16:creationId xmlns:a16="http://schemas.microsoft.com/office/drawing/2014/main" id="{24FEF3ED-F281-D4E7-22C3-88CFF0405EB0}"/>
+              </a:ext>
+            </a:extLst>
+          </p:cNvPr>
+          <p:cNvSpPr txBox="1"/>
+          <p:nvPr/>
+        </p:nvSpPr>
+        <p:spPr>
+          <a:xfrm>
+            <a:off x="458680" y="1531397"/>
+            <a:ext cx="2071454" cy="1200329"/>
+          </a:xfrm>
+          <a:prstGeom prst="rect">
+            <a:avLst/>
+          </a:prstGeom>
+          <a:noFill/>
+        </p:spPr>
+        <p:txBody>
+          <a:bodyPr rot="0" spcFirstLastPara="0" vertOverflow="overflow" horzOverflow="overflow" vert="horz" wrap="square" lIns="91440" tIns="45720" rIns="91440" bIns="45720" numCol="1" spcCol="0" rtlCol="0" fromWordArt="0" anchor="t" anchorCtr="0" forceAA="0" compatLnSpc="1">
+            <a:prstTxWarp prst="textNoShape">
+              <a:avLst/>
+            </a:prstTxWarp>
+            <a:spAutoFit/>
+          </a:bodyPr>
+          <a:lstStyle/>
+          <a:p>
+            <a:r>
+              <a:rPr lang="en-US"/>
+              <a:t>Our name in a blue </a:t>
+            </a:r>
+            <a:r>
+              <a:rPr lang="en-US" err="1"/>
+              <a:t>colour</a:t>
+            </a:r>
+            <a:r>
+              <a:rPr lang="en-US"/>
+              <a:t> scheme to represent the water </a:t>
+            </a:r>
+          </a:p>
+        </p:txBody>
+      </p:sp>
+      <p:sp>
+        <p:nvSpPr>
+          <p:cNvPr id="22" name="TextBox 21">
+            <a:extLst>
+              <a:ext uri="{FF2B5EF4-FFF2-40B4-BE49-F238E27FC236}">
+                <a16:creationId xmlns:a16="http://schemas.microsoft.com/office/drawing/2014/main" id="{50409287-EF5B-CF5B-A14E-2C5D39440B15}"/>
+              </a:ext>
+            </a:extLst>
+          </p:cNvPr>
+          <p:cNvSpPr txBox="1"/>
+          <p:nvPr/>
+        </p:nvSpPr>
+        <p:spPr>
+          <a:xfrm>
+            <a:off x="2012272" y="3129378"/>
+            <a:ext cx="2101048" cy="646331"/>
+          </a:xfrm>
+          <a:prstGeom prst="rect">
+            <a:avLst/>
+          </a:prstGeom>
+          <a:noFill/>
+        </p:spPr>
+        <p:txBody>
+          <a:bodyPr rot="0" spcFirstLastPara="0" vertOverflow="overflow" horzOverflow="overflow" vert="horz" wrap="square" lIns="91440" tIns="45720" rIns="91440" bIns="45720" numCol="1" spcCol="0" rtlCol="0" fromWordArt="0" anchor="t" anchorCtr="0" forceAA="0" compatLnSpc="1">
+            <a:prstTxWarp prst="textNoShape">
+              <a:avLst/>
+            </a:prstTxWarp>
+            <a:spAutoFit/>
+          </a:bodyPr>
+          <a:lstStyle/>
+          <a:p>
+            <a:r>
+              <a:rPr lang="en-US"/>
+              <a:t>Clicks onto another page </a:t>
+            </a:r>
+          </a:p>
+        </p:txBody>
+      </p:sp>
+      <p:sp>
+        <p:nvSpPr>
+          <p:cNvPr id="23" name="TextBox 22">
+            <a:extLst>
+              <a:ext uri="{FF2B5EF4-FFF2-40B4-BE49-F238E27FC236}">
+                <a16:creationId xmlns:a16="http://schemas.microsoft.com/office/drawing/2014/main" id="{4FF51D3C-6667-07BD-0EBF-46440DDD405A}"/>
+              </a:ext>
+            </a:extLst>
+          </p:cNvPr>
+          <p:cNvSpPr txBox="1"/>
+          <p:nvPr/>
+        </p:nvSpPr>
+        <p:spPr>
+          <a:xfrm>
+            <a:off x="456995" y="4401002"/>
+            <a:ext cx="1583184" cy="1200329"/>
+          </a:xfrm>
+          <a:prstGeom prst="rect">
+            <a:avLst/>
+          </a:prstGeom>
+          <a:noFill/>
+        </p:spPr>
+        <p:txBody>
+          <a:bodyPr rot="0" spcFirstLastPara="0" vertOverflow="overflow" horzOverflow="overflow" vert="horz" wrap="square" lIns="91440" tIns="45720" rIns="91440" bIns="45720" numCol="1" spcCol="0" rtlCol="0" fromWordArt="0" anchor="t" anchorCtr="0" forceAA="0" compatLnSpc="1">
+            <a:prstTxWarp prst="textNoShape">
+              <a:avLst/>
+            </a:prstTxWarp>
+            <a:spAutoFit/>
+          </a:bodyPr>
+          <a:lstStyle/>
+          <a:p>
+            <a:r>
+              <a:rPr lang="en-US"/>
+              <a:t>Clicks onto a page were users can buy the probe</a:t>
+            </a:r>
+          </a:p>
+        </p:txBody>
+      </p:sp>
     </p:spTree>
     <p:extLst>
       <p:ext uri="{BB962C8B-B14F-4D97-AF65-F5344CB8AC3E}">
-        <p14:creationId xmlns:p14="http://schemas.microsoft.com/office/powerpoint/2010/main" val="2149723290"/>
+        <p14:creationId xmlns:p14="http://schemas.microsoft.com/office/powerpoint/2010/main" val="4196453157"/>
       </p:ext>
     </p:extLst>
   </p:cSld>
